--- a/tdot-lcca/TDOT_LCCA_Review_and_v1.2.0_Update.pptx
+++ b/tdot-lcca/TDOT_LCCA_Review_and_v1.2.0_Update.pptx
@@ -24,9 +24,10 @@
     <p:sldId id="272" r:id="rId18"/>
     <p:sldId id="273" r:id="rId19"/>
     <p:sldId id="274" r:id="rId20"/>
+    <p:sldId id="275" r:id="rId21"/>
   </p:sldIdLst>
   <p:notesMasterIdLst>
-    <p:notesMasterId r:id="rId21"/>
+    <p:notesMasterId r:id="rId22"/>
   </p:notesMasterIdLst>
   <p:sldSz cx="9144000" cy="5143500"/>
   <p:notesSz cx="5143500" cy="9144000"/>
@@ -608,7 +609,7 @@
           <a:p>
             <a:r>
               <a:rPr lang="en-US" dirty="0"/>
-              <a:t>The Summary is rebuilt every time the Alternative Setup form closes, as before.</a:t>
+              <a:t>The Summary formulas read the Database sheet the form writes, so they follow whatever alternatives exist.</a:t>
             </a:r>
             <a:endParaRPr lang="en-US" dirty="0"/>
           </a:p>
@@ -696,7 +697,7 @@
           <a:p>
             <a:r>
               <a:rPr lang="en-US" dirty="0"/>
-              <a:t>Everything is a formula. Change the discount rate cell and the sensitivity, tornado, map and charts all move.</a:t>
+              <a:t/>
             </a:r>
             <a:endParaRPr lang="en-US" dirty="0"/>
           </a:p>
@@ -784,7 +785,7 @@
           <a:p>
             <a:r>
               <a:rPr lang="en-US" dirty="0"/>
-              <a:t>This is the chart Aeronautics asked for when they commissioned the lost-revenue update.</a:t>
+              <a:t>Everything is a formula. Change the discount rate cell and the sensitivity, tornado, map and charts all move.</a:t>
             </a:r>
             <a:endParaRPr lang="en-US" dirty="0"/>
           </a:p>
@@ -872,7 +873,7 @@
           <a:p>
             <a:r>
               <a:rPr lang="en-US" dirty="0"/>
-              <a:t>Break-even table on the sheet gives the exact tie points: PCC bids +9.9% or salvage below 2.5% of initial cost flips MBT.</a:t>
+              <a:t>This is the chart Aeronautics asked for when they commissioned the lost-revenue update.</a:t>
             </a:r>
             <a:endParaRPr lang="en-US" dirty="0"/>
           </a:p>
@@ -960,7 +961,7 @@
           <a:p>
             <a:r>
               <a:rPr lang="en-US" dirty="0"/>
-              <a:t>Break-even values come from the BREAK-EVEN VALUES block on the sheet, computed in closed form, no goal seek.</a:t>
+              <a:t>Break-even table on the sheet gives the exact tie points: PCC bids +9.9% or salvage below 2.5% of initial cost flips MBT.</a:t>
             </a:r>
             <a:endParaRPr lang="en-US" dirty="0"/>
           </a:p>
@@ -1048,7 +1049,7 @@
           <a:p>
             <a:r>
               <a:rPr lang="en-US" dirty="0"/>
-              <a:t>SRB break-even daily revenue is about $23,000 per day against $4,344 actual.</a:t>
+              <a:t>Break-even values come from the BREAK-EVEN VALUES block on the sheet, computed in closed form, no goal seek.</a:t>
             </a:r>
             <a:endParaRPr lang="en-US" dirty="0"/>
           </a:p>
@@ -1136,7 +1137,7 @@
           <a:p>
             <a:r>
               <a:rPr lang="en-US" dirty="0"/>
-              <a:t>The first-open check: pick an airport, set Yes, add one HMA and one PCC alternative, confirm Summary and Alt sheet columns L:N.</a:t>
+              <a:t>SRB break-even daily revenue is about $23,000 per day against $4,344 actual.</a:t>
             </a:r>
             <a:endParaRPr lang="en-US" dirty="0"/>
           </a:p>
@@ -1224,7 +1225,7 @@
           <a:p>
             <a:r>
               <a:rPr lang="en-US" dirty="0"/>
-              <a:t>Two alternatives per sheet, HMA against PCC, is how the framework is used; policy years are editable if TDOT revises the maintenance tables.</a:t>
+              <a:t>The first-open check: pick an airport, set Yes, add one HMA and one PCC alternative, confirm Summary and Alt sheet columns L:N.</a:t>
             </a:r>
             <a:endParaRPr lang="en-US" dirty="0"/>
           </a:p>
@@ -1312,7 +1313,7 @@
           <a:p>
             <a:r>
               <a:rPr lang="en-US" dirty="0"/>
-              <a:t>Keep it Excel-first; the web option is noted only because IT blocking was the reviewer's first obstacle.</a:t>
+              <a:t>Two alternatives per sheet, HMA against PCC, is how the framework is used; policy years are editable if TDOT revises the maintenance tables.</a:t>
             </a:r>
             <a:endParaRPr lang="en-US" dirty="0"/>
           </a:p>
@@ -1400,7 +1401,7 @@
           <a:p>
             <a:r>
               <a:rPr lang="en-US" dirty="0"/>
-              <a:t/>
+              <a:t>Keep it Excel-first; the web option is noted only because IT blocking was the reviewer's first obstacle.</a:t>
             </a:r>
             <a:endParaRPr lang="en-US" dirty="0"/>
           </a:p>
@@ -1512,6 +1513,94 @@
             <a:fld id="{F7021451-1387-4CA6-816F-3879F97B5CBC}" type="slidenum">
               <a:rPr lang="en-US"/>
               <a:t>2</a:t>
+            </a:fld>
+            <a:endParaRPr lang="en-US"/>
+          </a:p>
+        </p:txBody>
+      </p:sp>
+    </p:spTree>
+    <p:extLst>
+      <p:ext uri="{BB962C8B-B14F-4D97-AF65-F5344CB8AC3E}">
+        <p14:creationId xmlns:p14="http://schemas.microsoft.com/office/powerpoint/2010/main" val="1024086991"/>
+      </p:ext>
+    </p:extLst>
+  </p:cSld>
+  <p:clrMapOvr>
+    <a:masterClrMapping/>
+  </p:clrMapOvr>
+</p:notes>
+</file>
+
+<file path=ppt/notesSlides/notesSlide20.xml><?xml version="1.0" encoding="utf-8"?>
+<p:notes xmlns:a="http://schemas.openxmlformats.org/drawingml/2006/main" xmlns:r="http://schemas.openxmlformats.org/officeDocument/2006/relationships" xmlns:p="http://schemas.openxmlformats.org/presentationml/2006/main">
+  <p:cSld>
+    <p:spTree>
+      <p:nvGrpSpPr>
+        <p:cNvPr id="1" name=""/>
+        <p:cNvGrpSpPr/>
+        <p:nvPr/>
+      </p:nvGrpSpPr>
+      <p:grpSpPr>
+        <a:xfrm>
+          <a:off x="0" y="0"/>
+          <a:ext cx="0" cy="0"/>
+          <a:chOff x="0" y="0"/>
+          <a:chExt cx="0" cy="0"/>
+        </a:xfrm>
+      </p:grpSpPr>
+      <p:sp>
+        <p:nvSpPr>
+          <p:cNvPr id="2" name="Slide Image Placeholder 1"/>
+          <p:cNvSpPr>
+            <a:spLocks noGrp="1" noRot="1" noChangeAspect="1"/>
+          </p:cNvSpPr>
+          <p:nvPr>
+            <p:ph type="sldImg"/>
+          </p:nvPr>
+        </p:nvSpPr>
+        <p:spPr/>
+      </p:sp>
+      <p:sp>
+        <p:nvSpPr>
+          <p:cNvPr id="3" name="Notes Placeholder 2"/>
+          <p:cNvSpPr>
+            <a:spLocks noGrp="1"/>
+          </p:cNvSpPr>
+          <p:nvPr>
+            <p:ph type="body" idx="1"/>
+          </p:nvPr>
+        </p:nvSpPr>
+        <p:spPr/>
+        <p:txBody>
+          <a:bodyPr/>
+          <a:lstStyle/>
+          <a:p>
+            <a:r>
+              <a:rPr lang="en-US" dirty="0"/>
+              <a:t/>
+            </a:r>
+            <a:endParaRPr lang="en-US" dirty="0"/>
+          </a:p>
+        </p:txBody>
+      </p:sp>
+      <p:sp>
+        <p:nvSpPr>
+          <p:cNvPr id="4" name="Slide Number Placeholder 3"/>
+          <p:cNvSpPr>
+            <a:spLocks noGrp="1"/>
+          </p:cNvSpPr>
+          <p:nvPr>
+            <p:ph type="sldNum" sz="quarter" idx="10"/>
+          </p:nvPr>
+        </p:nvSpPr>
+        <p:spPr/>
+        <p:txBody>
+          <a:bodyPr/>
+          <a:lstStyle/>
+          <a:p>
+            <a:fld id="{F7021451-1387-4CA6-816F-3879F97B5CBC}" type="slidenum">
+              <a:rPr lang="en-US"/>
+              <a:t>20</a:t>
             </a:fld>
             <a:endParaRPr lang="en-US"/>
           </a:p>
@@ -3162,7 +3251,7 @@
                           <a:ea typeface="Calibri" pitchFamily="34" charset="-122"/>
                           <a:cs typeface="Calibri" pitchFamily="34" charset="-120"/>
                         </a:rPr>
-                        <a:t>Summary sheet (VBA)</a:t>
+                        <a:t>Summary sheet</a:t>
                       </a:r>
                       <a:endParaRPr lang="en-US" sz="1050" dirty="0">
                         <a:latin typeface="Calibri" charset="0"/>
@@ -3230,7 +3319,7 @@
                           <a:ea typeface="Calibri" pitchFamily="34" charset="-122"/>
                           <a:cs typeface="Calibri" pitchFamily="34" charset="-120"/>
                         </a:rPr>
-                        <a:t>Results table with PW by category, delta to lowest and closure days; charts for PW by category, expenditure stream, cumulative cost and rate sensitivity 2 to 8% with a 7% flag</a:t>
+                        <a:t>Formula-driven, no macro: results table with PW by category, delta to lowest, closure days and runway availability; five charts (category, rate sensitivity 2 to 8%, expenditure stream, cumulative cost, closure days); navigation buttons that work with macros blocked</a:t>
                       </a:r>
                       <a:endParaRPr lang="en-US" sz="1050" dirty="0">
                         <a:latin typeface="Calibri" charset="0"/>
@@ -3622,7 +3711,7 @@
                 <a:ea typeface="Calibri" pitchFamily="34" charset="-122"/>
                 <a:cs typeface="Calibri" pitchFamily="34" charset="-120"/>
               </a:rPr>
-              <a:t>Install: replace the Output module in the VBA editor with Output.bas. No other code changes.</a:t>
+              <a:t>Nothing to install: the workbook is self-contained. The VBA project is untouched; Alternative Setup still writes columns A:E of the Summary as before.</a:t>
             </a:r>
             <a:endParaRPr lang="en-US" sz="1250" dirty="0"/>
           </a:p>
@@ -3693,7 +3782,7 @@
                 <a:ea typeface="Cambria" pitchFamily="34" charset="-122"/>
                 <a:cs typeface="Cambria" pitchFamily="34" charset="-120"/>
               </a:rPr>
-              <a:t>The decision workbook</a:t>
+              <a:t>The new Summary sheet</a:t>
             </a:r>
             <a:endParaRPr lang="en-US" sz="2800" dirty="0"/>
           </a:p>
@@ -3732,7 +3821,7 @@
                 <a:ea typeface="Calibri" pitchFamily="34" charset="-122"/>
                 <a:cs typeface="Calibri" pitchFamily="34" charset="-120"/>
               </a:rPr>
-              <a:t>MBT and SRB already loaded, plus a blank TEMPLATE sheet. Yellow cells drive every table and chart.</a:t>
+              <a:t>MBT data loaded. Table, verdict line, five charts and the original comparison chart, all live formulas.</a:t>
             </a:r>
             <a:endParaRPr lang="en-US" sz="1300" dirty="0"/>
           </a:p>
@@ -3740,7 +3829,7 @@
       </p:sp>
       <p:pic>
         <p:nvPicPr>
-          <p:cNvPr id="4" name="Image 0" descr="/tmp/claude-0/-home-user-lcca-dashboard/444ca227-15d7-51d4-a51e-a0ae3dbe81ed/scratchpad/deck/img/MBT_kpis.png">    </p:cNvPr>
+          <p:cNvPr id="4" name="Image 0" descr="/tmp/claude-0/-home-user-lcca-dashboard/444ca227-15d7-51d4-a51e-a0ae3dbe81ed/scratchpad/deck/img/summary_sheet.png">    </p:cNvPr>
           <p:cNvPicPr>
             <a:picLocks noChangeAspect="1"/>
           </p:cNvPicPr>
@@ -3754,8 +3843,8 @@
         </p:blipFill>
         <p:spPr>
           <a:xfrm>
-            <a:off x="457200" y="1371600"/>
-            <a:ext cx="8229600" cy="2072947"/>
+            <a:off x="1143000" y="1234440"/>
+            <a:ext cx="6858000" cy="3345366"/>
           </a:xfrm>
           <a:prstGeom prst="rect">
             <a:avLst/>
@@ -3770,7 +3859,7 @@
         </p:nvSpPr>
         <p:spPr>
           <a:xfrm>
-            <a:off x="457200" y="3535987"/>
+            <a:off x="457200" y="4625526"/>
             <a:ext cx="8229600" cy="411480"/>
           </a:xfrm>
           <a:prstGeom prst="rect">
@@ -3795,115 +3884,9 @@
                 <a:ea typeface="Calibri" pitchFamily="34" charset="-122"/>
                 <a:cs typeface="Calibri" pitchFamily="34" charset="-120"/>
               </a:rPr>
-              <a:t>The verdict line: which alternative is lower, by how much, and two robustness flags a reviewer can read in five seconds. Shown here for MBT at TDOT settings.</a:t>
+              <a:t>Buttons at top left return to General Information and Instructions; a "View Summary" button sits under Alternative Setup. Chart data lives in columns W onward, marked "do not edit".</a:t>
             </a:r>
             <a:endParaRPr lang="en-US" sz="1050" dirty="0"/>
-          </a:p>
-        </p:txBody>
-      </p:sp>
-      <p:sp>
-        <p:nvSpPr>
-          <p:cNvPr id="6" name="Text 3"/>
-          <p:cNvSpPr txBox="1"/>
-          <p:nvPr/>
-        </p:nvSpPr>
-        <p:spPr>
-          <a:xfrm>
-            <a:off x="457200" y="3931920"/>
-            <a:ext cx="8229600" cy="914400"/>
-          </a:xfrm>
-          <a:prstGeom prst="rect">
-            <a:avLst/>
-          </a:prstGeom>
-          <a:noFill/>
-          <a:ln/>
-        </p:spPr>
-        <p:txBody>
-          <a:bodyPr wrap="square" lIns="0" tIns="0" rIns="0" bIns="0" rtlCol="0" anchor="t"/>
-          <a:lstStyle/>
-          <a:p>
-            <a:pPr marL="342900" indent="-342900">
-              <a:spcAft>
-                <a:spcPts val="500"/>
-              </a:spcAft>
-              <a:buSzPct val="100000"/>
-              <a:buChar char="•"/>
-            </a:pPr>
-            <a:r>
-              <a:rPr lang="en-US" sz="1150" dirty="0">
-                <a:solidFill>
-                  <a:srgbClr val="1F1F1F"/>
-                </a:solidFill>
-                <a:latin typeface="Calibri" pitchFamily="34" charset="0"/>
-                <a:ea typeface="Calibri" pitchFamily="34" charset="-122"/>
-                <a:cs typeface="Calibri" pitchFamily="34" charset="-120"/>
-              </a:rPr>
-              <a:t>RESULTS: present worth by category, EUAC, cost per SY, closure days, runway availability</a:t>
-            </a:r>
-            <a:endParaRPr lang="en-US" sz="1150" dirty="0"/>
-          </a:p>
-          <a:p>
-            <a:pPr marL="342900" indent="-342900">
-              <a:spcAft>
-                <a:spcPts val="500"/>
-              </a:spcAft>
-              <a:buSzPct val="100000"/>
-              <a:buChar char="•"/>
-            </a:pPr>
-            <a:r>
-              <a:rPr lang="en-US" sz="1150" dirty="0">
-                <a:solidFill>
-                  <a:srgbClr val="1F1F1F"/>
-                </a:solidFill>
-                <a:latin typeface="Calibri" pitchFamily="34" charset="0"/>
-                <a:ea typeface="Calibri" pitchFamily="34" charset="-122"/>
-                <a:cs typeface="Calibri" pitchFamily="34" charset="-120"/>
-              </a:rPr>
-              <a:t>BREAK-EVEN VALUES: the daily revenue, bid level, salvage fraction and discount rate at which the two tie</a:t>
-            </a:r>
-            <a:endParaRPr lang="en-US" sz="1150" dirty="0"/>
-          </a:p>
-          <a:p>
-            <a:pPr marL="342900" indent="-342900">
-              <a:spcAft>
-                <a:spcPts val="500"/>
-              </a:spcAft>
-              <a:buSzPct val="100000"/>
-              <a:buChar char="•"/>
-            </a:pPr>
-            <a:r>
-              <a:rPr lang="en-US" sz="1150" dirty="0">
-                <a:solidFill>
-                  <a:srgbClr val="1F1F1F"/>
-                </a:solidFill>
-                <a:latin typeface="Calibri" pitchFamily="34" charset="0"/>
-                <a:ea typeface="Calibri" pitchFamily="34" charset="-122"/>
-                <a:cs typeface="Calibri" pitchFamily="34" charset="-120"/>
-              </a:rPr>
-              <a:t>Twelve pre-run scenarios, a rate-by-salvage decision map, a tornado, and a live 1,000-draw simulation</a:t>
-            </a:r>
-            <a:endParaRPr lang="en-US" sz="1150" dirty="0"/>
-          </a:p>
-          <a:p>
-            <a:pPr marL="342900" indent="-342900">
-              <a:spcAft>
-                <a:spcPts val="500"/>
-              </a:spcAft>
-              <a:buSzPct val="100000"/>
-              <a:buChar char="•"/>
-            </a:pPr>
-            <a:r>
-              <a:rPr lang="en-US" sz="1150" dirty="0">
-                <a:solidFill>
-                  <a:srgbClr val="1F1F1F"/>
-                </a:solidFill>
-                <a:latin typeface="Calibri" pitchFamily="34" charset="0"/>
-                <a:ea typeface="Calibri" pitchFamily="34" charset="-122"/>
-                <a:cs typeface="Calibri" pitchFamily="34" charset="-120"/>
-              </a:rPr>
-              <a:t>A TEMPLATE sheet: copy it, paste the next project's costs and closure days, done</a:t>
-            </a:r>
-            <a:endParaRPr lang="en-US" sz="1150" dirty="0"/>
           </a:p>
         </p:txBody>
       </p:sp>
@@ -3972,15 +3955,54 @@
                 <a:ea typeface="Cambria" pitchFamily="34" charset="-122"/>
                 <a:cs typeface="Cambria" pitchFamily="34" charset="-120"/>
               </a:rPr>
-              <a:t>Where the difference comes from</a:t>
+              <a:t>The decision workbook</a:t>
             </a:r>
             <a:endParaRPr lang="en-US" sz="2800" dirty="0"/>
+          </a:p>
+        </p:txBody>
+      </p:sp>
+      <p:sp>
+        <p:nvSpPr>
+          <p:cNvPr id="3" name="Text 1"/>
+          <p:cNvSpPr txBox="1"/>
+          <p:nvPr/>
+        </p:nvSpPr>
+        <p:spPr>
+          <a:xfrm>
+            <a:off x="457200" y="914400"/>
+            <a:ext cx="8229600" cy="365760"/>
+          </a:xfrm>
+          <a:prstGeom prst="rect">
+            <a:avLst/>
+          </a:prstGeom>
+          <a:noFill/>
+          <a:ln/>
+        </p:spPr>
+        <p:txBody>
+          <a:bodyPr wrap="square" lIns="0" tIns="0" rIns="0" bIns="0" rtlCol="0" anchor="ctr"/>
+          <a:lstStyle/>
+          <a:p>
+            <a:pPr indent="0" marL="0">
+              <a:buNone/>
+            </a:pPr>
+            <a:r>
+              <a:rPr lang="en-US" sz="1300" i="1" dirty="0">
+                <a:solidFill>
+                  <a:srgbClr val="5F5F5F"/>
+                </a:solidFill>
+                <a:latin typeface="Calibri" pitchFamily="34" charset="0"/>
+                <a:ea typeface="Calibri" pitchFamily="34" charset="-122"/>
+                <a:cs typeface="Calibri" pitchFamily="34" charset="-120"/>
+              </a:rPr>
+              <a:t>MBT and SRB already loaded, plus a blank TEMPLATE sheet. Yellow cells drive every table and chart.</a:t>
+            </a:r>
+            <a:endParaRPr lang="en-US" sz="1300" dirty="0"/>
           </a:p>
         </p:txBody>
       </p:sp>
       <p:pic>
         <p:nvPicPr>
-          <p:cNvPr id="3" name="Image 0" descr="/tmp/claude-0/-home-user-lcca-dashboard/444ca227-15d7-51d4-a51e-a0ae3dbe81ed/scratchpad/deck/img/MBT_bridge.png">    </p:cNvPr>
+          <p:cNvPr id="4" name="Image 0" descr="/tmp/claude-0/-home-user-lcca-dashboard/444ca227-15d7-51d4-a51e-a0ae3dbe81ed/scratchpad/deck/img/MBT_kpis.png">    </p:cNvPr>
           <p:cNvPicPr>
             <a:picLocks noChangeAspect="1"/>
           </p:cNvPicPr>
@@ -3994,8 +4016,8 @@
         </p:blipFill>
         <p:spPr>
           <a:xfrm>
-            <a:off x="457200" y="1097280"/>
-            <a:ext cx="8229600" cy="1987826"/>
+            <a:off x="457200" y="1371600"/>
+            <a:ext cx="8229600" cy="2072947"/>
           </a:xfrm>
           <a:prstGeom prst="rect">
             <a:avLst/>
@@ -4004,13 +4026,13 @@
       </p:pic>
       <p:sp>
         <p:nvSpPr>
-          <p:cNvPr id="4" name="Text 1"/>
+          <p:cNvPr id="5" name="Text 2"/>
           <p:cNvSpPr txBox="1"/>
           <p:nvPr/>
         </p:nvSpPr>
         <p:spPr>
           <a:xfrm>
-            <a:off x="457200" y="3130826"/>
+            <a:off x="457200" y="3535987"/>
             <a:ext cx="8229600" cy="411480"/>
           </a:xfrm>
           <a:prstGeom prst="rect">
@@ -4035,46 +4057,22 @@
                 <a:ea typeface="Calibri" pitchFamily="34" charset="-122"/>
                 <a:cs typeface="Calibri" pitchFamily="34" charset="-120"/>
               </a:rPr>
-              <a:t>MBT bridge from HMA to PCC present worth. PCC costs $3.1M more to build and earns it back through $1.9M less maintenance and $1.1M less rehabilitation; salvage and lost revenue are small here.</a:t>
+              <a:t>The verdict line: which alternative is lower, by how much, and two robustness flags a reviewer can read in five seconds. Shown here for MBT at TDOT settings.</a:t>
             </a:r>
             <a:endParaRPr lang="en-US" sz="1050" dirty="0"/>
           </a:p>
         </p:txBody>
       </p:sp>
-      <p:pic>
-        <p:nvPicPr>
-          <p:cNvPr id="5" name="Image 1" descr="/tmp/claude-0/-home-user-lcca-dashboard/444ca227-15d7-51d4-a51e-a0ae3dbe81ed/scratchpad/deck/img/MBT_closures.png">    </p:cNvPr>
-          <p:cNvPicPr>
-            <a:picLocks noChangeAspect="1"/>
-          </p:cNvPicPr>
-          <p:nvPr/>
-        </p:nvPicPr>
-        <p:blipFill>
-          <a:blip r:embed="rId2"/>
-          <a:stretch>
-            <a:fillRect/>
-          </a:stretch>
-        </p:blipFill>
-        <p:spPr>
-          <a:xfrm>
-            <a:off x="457200" y="3588026"/>
-            <a:ext cx="8229600" cy="1277888"/>
-          </a:xfrm>
-          <a:prstGeom prst="rect">
-            <a:avLst/>
-          </a:prstGeom>
-        </p:spPr>
-      </p:pic>
       <p:sp>
         <p:nvSpPr>
-          <p:cNvPr id="6" name="Text 2"/>
+          <p:cNvPr id="6" name="Text 3"/>
           <p:cNvSpPr txBox="1"/>
           <p:nvPr/>
         </p:nvSpPr>
         <p:spPr>
           <a:xfrm>
-            <a:off x="457200" y="4911634"/>
-            <a:ext cx="8229600" cy="411480"/>
+            <a:off x="457200" y="3931920"/>
+            <a:ext cx="8229600" cy="914400"/>
           </a:xfrm>
           <a:prstGeom prst="rect">
             <a:avLst/>
@@ -4086,21 +4084,88 @@
           <a:bodyPr wrap="square" lIns="0" tIns="0" rIns="0" bIns="0" rtlCol="0" anchor="t"/>
           <a:lstStyle/>
           <a:p>
-            <a:pPr indent="0" marL="0">
-              <a:buNone/>
+            <a:pPr marL="342900" indent="-342900">
+              <a:spcAft>
+                <a:spcPts val="500"/>
+              </a:spcAft>
+              <a:buSzPct val="100000"/>
+              <a:buChar char="•"/>
             </a:pPr>
             <a:r>
-              <a:rPr lang="en-US" sz="1050" dirty="0">
+              <a:rPr lang="en-US" sz="1150" dirty="0">
                 <a:solidFill>
-                  <a:srgbClr val="5F5F5F"/>
+                  <a:srgbClr val="1F1F1F"/>
                 </a:solidFill>
                 <a:latin typeface="Calibri" pitchFamily="34" charset="0"/>
                 <a:ea typeface="Calibri" pitchFamily="34" charset="-122"/>
                 <a:cs typeface="Calibri" pitchFamily="34" charset="-120"/>
               </a:rPr>
-              <a:t>Closure timeline, bubble size is days closed. HMA closes the runway seven times for 57 days; PCC twice for 27 days.</a:t>
+              <a:t>RESULTS: present worth by category, EUAC, cost per SY, closure days, runway availability</a:t>
             </a:r>
-            <a:endParaRPr lang="en-US" sz="1050" dirty="0"/>
+            <a:endParaRPr lang="en-US" sz="1150" dirty="0"/>
+          </a:p>
+          <a:p>
+            <a:pPr marL="342900" indent="-342900">
+              <a:spcAft>
+                <a:spcPts val="500"/>
+              </a:spcAft>
+              <a:buSzPct val="100000"/>
+              <a:buChar char="•"/>
+            </a:pPr>
+            <a:r>
+              <a:rPr lang="en-US" sz="1150" dirty="0">
+                <a:solidFill>
+                  <a:srgbClr val="1F1F1F"/>
+                </a:solidFill>
+                <a:latin typeface="Calibri" pitchFamily="34" charset="0"/>
+                <a:ea typeface="Calibri" pitchFamily="34" charset="-122"/>
+                <a:cs typeface="Calibri" pitchFamily="34" charset="-120"/>
+              </a:rPr>
+              <a:t>BREAK-EVEN VALUES: the daily revenue, bid level, salvage fraction and discount rate at which the two tie</a:t>
+            </a:r>
+            <a:endParaRPr lang="en-US" sz="1150" dirty="0"/>
+          </a:p>
+          <a:p>
+            <a:pPr marL="342900" indent="-342900">
+              <a:spcAft>
+                <a:spcPts val="500"/>
+              </a:spcAft>
+              <a:buSzPct val="100000"/>
+              <a:buChar char="•"/>
+            </a:pPr>
+            <a:r>
+              <a:rPr lang="en-US" sz="1150" dirty="0">
+                <a:solidFill>
+                  <a:srgbClr val="1F1F1F"/>
+                </a:solidFill>
+                <a:latin typeface="Calibri" pitchFamily="34" charset="0"/>
+                <a:ea typeface="Calibri" pitchFamily="34" charset="-122"/>
+                <a:cs typeface="Calibri" pitchFamily="34" charset="-120"/>
+              </a:rPr>
+              <a:t>Twelve pre-run scenarios, a rate-by-salvage decision map, a tornado, and a live 1,000-draw simulation</a:t>
+            </a:r>
+            <a:endParaRPr lang="en-US" sz="1150" dirty="0"/>
+          </a:p>
+          <a:p>
+            <a:pPr marL="342900" indent="-342900">
+              <a:spcAft>
+                <a:spcPts val="500"/>
+              </a:spcAft>
+              <a:buSzPct val="100000"/>
+              <a:buChar char="•"/>
+            </a:pPr>
+            <a:r>
+              <a:rPr lang="en-US" sz="1150" dirty="0">
+                <a:solidFill>
+                  <a:srgbClr val="1F1F1F"/>
+                </a:solidFill>
+                <a:latin typeface="Calibri" pitchFamily="34" charset="0"/>
+                <a:ea typeface="Calibri" pitchFamily="34" charset="-122"/>
+                <a:cs typeface="Calibri" pitchFamily="34" charset="-120"/>
+              </a:rPr>
+              <a:t>A TEMPLATE sheet: copy it, paste the next project's costs and closure days, done</a:t>
+            </a:r>
+            <a:endParaRPr lang="en-US" sz="1150" dirty="0"/>
           </a:p>
         </p:txBody>
       </p:sp>
@@ -4169,54 +4234,15 @@
                 <a:ea typeface="Cambria" pitchFamily="34" charset="-122"/>
                 <a:cs typeface="Cambria" pitchFamily="34" charset="-120"/>
               </a:rPr>
-              <a:t>Will the answer hold?</a:t>
+              <a:t>Where the difference comes from</a:t>
             </a:r>
             <a:endParaRPr lang="en-US" sz="2800" dirty="0"/>
-          </a:p>
-        </p:txBody>
-      </p:sp>
-      <p:sp>
-        <p:nvSpPr>
-          <p:cNvPr id="3" name="Text 1"/>
-          <p:cNvSpPr txBox="1"/>
-          <p:nvPr/>
-        </p:nvSpPr>
-        <p:spPr>
-          <a:xfrm>
-            <a:off x="457200" y="914400"/>
-            <a:ext cx="8229600" cy="365760"/>
-          </a:xfrm>
-          <a:prstGeom prst="rect">
-            <a:avLst/>
-          </a:prstGeom>
-          <a:noFill/>
-          <a:ln/>
-        </p:spPr>
-        <p:txBody>
-          <a:bodyPr wrap="square" lIns="0" tIns="0" rIns="0" bIns="0" rtlCol="0" anchor="ctr"/>
-          <a:lstStyle/>
-          <a:p>
-            <a:pPr indent="0" marL="0">
-              <a:buNone/>
-            </a:pPr>
-            <a:r>
-              <a:rPr lang="en-US" sz="1300" i="1" dirty="0">
-                <a:solidFill>
-                  <a:srgbClr val="5F5F5F"/>
-                </a:solidFill>
-                <a:latin typeface="Calibri" pitchFamily="34" charset="0"/>
-                <a:ea typeface="Calibri" pitchFamily="34" charset="-122"/>
-                <a:cs typeface="Calibri" pitchFamily="34" charset="-120"/>
-              </a:rPr>
-              <a:t>Net present worth against discount rate. Blue is HMA, orange is PCC. TDOT 3 percent and FAA AIP 7 percent are marked.</a:t>
-            </a:r>
-            <a:endParaRPr lang="en-US" sz="1300" dirty="0"/>
           </a:p>
         </p:txBody>
       </p:sp>
       <p:pic>
         <p:nvPicPr>
-          <p:cNvPr id="4" name="Image 0" descr="/tmp/claude-0/-home-user-lcca-dashboard/444ca227-15d7-51d4-a51e-a0ae3dbe81ed/scratchpad/deck/img/MBT_sens.png">    </p:cNvPr>
+          <p:cNvPr id="3" name="Image 0" descr="/tmp/claude-0/-home-user-lcca-dashboard/444ca227-15d7-51d4-a51e-a0ae3dbe81ed/scratchpad/deck/img/MBT_bridge.png">    </p:cNvPr>
           <p:cNvPicPr>
             <a:picLocks noChangeAspect="1"/>
           </p:cNvPicPr>
@@ -4230,8 +4256,8 @@
         </p:blipFill>
         <p:spPr>
           <a:xfrm>
-            <a:off x="457200" y="1371600"/>
-            <a:ext cx="3931920" cy="1899478"/>
+            <a:off x="457200" y="1097280"/>
+            <a:ext cx="8229600" cy="1987826"/>
           </a:xfrm>
           <a:prstGeom prst="rect">
             <a:avLst/>
@@ -4240,14 +4266,14 @@
       </p:pic>
       <p:sp>
         <p:nvSpPr>
-          <p:cNvPr id="5" name="Text 2"/>
+          <p:cNvPr id="4" name="Text 1"/>
           <p:cNvSpPr txBox="1"/>
           <p:nvPr/>
         </p:nvSpPr>
         <p:spPr>
           <a:xfrm>
-            <a:off x="457200" y="3316798"/>
-            <a:ext cx="3931920" cy="411480"/>
+            <a:off x="457200" y="3130826"/>
+            <a:ext cx="8229600" cy="411480"/>
           </a:xfrm>
           <a:prstGeom prst="rect">
             <a:avLst/>
@@ -4271,7 +4297,7 @@
                 <a:ea typeface="Calibri" pitchFamily="34" charset="-122"/>
                 <a:cs typeface="Calibri" pitchFamily="34" charset="-120"/>
               </a:rPr>
-              <a:t>MBT: PCC wins below 4.5 percent, HMA above. At the FAA AIP rate the answer reverses.</a:t>
+              <a:t>MBT bridge from HMA to PCC present worth. PCC costs $3.1M more to build and earns it back through $1.9M less maintenance and $1.1M less rehabilitation; salvage and lost revenue are small here.</a:t>
             </a:r>
             <a:endParaRPr lang="en-US" sz="1050" dirty="0"/>
           </a:p>
@@ -4279,7 +4305,7 @@
       </p:sp>
       <p:pic>
         <p:nvPicPr>
-          <p:cNvPr id="6" name="Image 1" descr="/tmp/claude-0/-home-user-lcca-dashboard/444ca227-15d7-51d4-a51e-a0ae3dbe81ed/scratchpad/deck/img/SRB_sens.png">    </p:cNvPr>
+          <p:cNvPr id="5" name="Image 1" descr="/tmp/claude-0/-home-user-lcca-dashboard/444ca227-15d7-51d4-a51e-a0ae3dbe81ed/scratchpad/deck/img/MBT_closures.png">    </p:cNvPr>
           <p:cNvPicPr>
             <a:picLocks noChangeAspect="1"/>
           </p:cNvPicPr>
@@ -4293,8 +4319,8 @@
         </p:blipFill>
         <p:spPr>
           <a:xfrm>
-            <a:off x="4754880" y="1371600"/>
-            <a:ext cx="3931920" cy="1899478"/>
+            <a:off x="457200" y="3588026"/>
+            <a:ext cx="8229600" cy="1277888"/>
           </a:xfrm>
           <a:prstGeom prst="rect">
             <a:avLst/>
@@ -4303,14 +4329,14 @@
       </p:pic>
       <p:sp>
         <p:nvSpPr>
-          <p:cNvPr id="7" name="Text 3"/>
+          <p:cNvPr id="6" name="Text 2"/>
           <p:cNvSpPr txBox="1"/>
           <p:nvPr/>
         </p:nvSpPr>
         <p:spPr>
           <a:xfrm>
-            <a:off x="4754880" y="3316798"/>
-            <a:ext cx="3931920" cy="411480"/>
+            <a:off x="457200" y="4911634"/>
+            <a:ext cx="8229600" cy="411480"/>
           </a:xfrm>
           <a:prstGeom prst="rect">
             <a:avLst/>
@@ -4334,89 +4360,9 @@
                 <a:ea typeface="Calibri" pitchFamily="34" charset="-122"/>
                 <a:cs typeface="Calibri" pitchFamily="34" charset="-120"/>
               </a:rPr>
-              <a:t>SRB: HMA wins at every rate above 2.5 percent. The gap widens as the rate rises.</a:t>
+              <a:t>Closure timeline, bubble size is days closed. HMA closes the runway seven times for 57 days; PCC twice for 27 days.</a:t>
             </a:r>
             <a:endParaRPr lang="en-US" sz="1050" dirty="0"/>
-          </a:p>
-        </p:txBody>
-      </p:sp>
-      <p:sp>
-        <p:nvSpPr>
-          <p:cNvPr id="8" name="Shape 4"/>
-          <p:cNvSpPr/>
-          <p:nvPr/>
-        </p:nvSpPr>
-        <p:spPr>
-          <a:xfrm>
-            <a:off x="457200" y="3794760"/>
-            <a:ext cx="8229600" cy="777240"/>
-          </a:xfrm>
-          <a:prstGeom prst="roundRect">
-            <a:avLst>
-              <a:gd name="adj" fmla="val 7059"/>
-            </a:avLst>
-          </a:prstGeom>
-          <a:solidFill>
-            <a:srgbClr val="F3F3F1"/>
-          </a:solidFill>
-          <a:ln w="12700">
-            <a:solidFill>
-              <a:srgbClr val="F3F3F1"/>
-            </a:solidFill>
-            <a:prstDash val="solid"/>
-          </a:ln>
-        </p:spPr>
-      </p:sp>
-      <p:sp>
-        <p:nvSpPr>
-          <p:cNvPr id="9" name="Text 5"/>
-          <p:cNvSpPr txBox="1"/>
-          <p:nvPr/>
-        </p:nvSpPr>
-        <p:spPr>
-          <a:xfrm>
-            <a:off x="640080" y="3840480"/>
-            <a:ext cx="7863840" cy="685800"/>
-          </a:xfrm>
-          <a:prstGeom prst="rect">
-            <a:avLst/>
-          </a:prstGeom>
-          <a:noFill/>
-          <a:ln/>
-        </p:spPr>
-        <p:txBody>
-          <a:bodyPr wrap="square" lIns="0" tIns="0" rIns="0" bIns="0" rtlCol="0" anchor="ctr"/>
-          <a:lstStyle/>
-          <a:p>
-            <a:pPr indent="0" marL="0">
-              <a:buNone/>
-            </a:pPr>
-            <a:r>
-              <a:rPr lang="en-US" sz="1200" b="1" dirty="0">
-                <a:solidFill>
-                  <a:srgbClr val="1F1F1F"/>
-                </a:solidFill>
-                <a:latin typeface="Calibri" pitchFamily="34" charset="0"/>
-                <a:ea typeface="Calibri" pitchFamily="34" charset="-122"/>
-                <a:cs typeface="Calibri" pitchFamily="34" charset="-120"/>
-              </a:rPr>
-              <a:t>Live simulation: </a:t>
-            </a:r>
-            <a:pPr indent="0" marL="0">
-              <a:buNone/>
-            </a:pPr>
-            <a:r>
-              <a:rPr lang="en-US" sz="1200" dirty="0">
-                <a:solidFill>
-                  <a:srgbClr val="1F1F1F"/>
-                </a:solidFill>
-                <a:latin typeface="Calibri" pitchFamily="34" charset="0"/>
-                <a:ea typeface="Calibri" pitchFamily="34" charset="-122"/>
-                <a:cs typeface="Calibri" pitchFamily="34" charset="-120"/>
-              </a:rPr>
-              <a:t>1,000 joint draws on rate, bids, closures, salvage and revenue share. Probability PCC is the cheaper alternative: 52 percent at MBT, 18 percent at SRB. Press F9 in the workbook to redraw.</a:t>
-            </a:r>
-            <a:endParaRPr lang="en-US" sz="1200" dirty="0"/>
           </a:p>
         </p:txBody>
       </p:sp>
@@ -4485,6 +4431,322 @@
                 <a:ea typeface="Cambria" pitchFamily="34" charset="-122"/>
                 <a:cs typeface="Cambria" pitchFamily="34" charset="-120"/>
               </a:rPr>
+              <a:t>Will the answer hold?</a:t>
+            </a:r>
+            <a:endParaRPr lang="en-US" sz="2800" dirty="0"/>
+          </a:p>
+        </p:txBody>
+      </p:sp>
+      <p:sp>
+        <p:nvSpPr>
+          <p:cNvPr id="3" name="Text 1"/>
+          <p:cNvSpPr txBox="1"/>
+          <p:nvPr/>
+        </p:nvSpPr>
+        <p:spPr>
+          <a:xfrm>
+            <a:off x="457200" y="914400"/>
+            <a:ext cx="8229600" cy="365760"/>
+          </a:xfrm>
+          <a:prstGeom prst="rect">
+            <a:avLst/>
+          </a:prstGeom>
+          <a:noFill/>
+          <a:ln/>
+        </p:spPr>
+        <p:txBody>
+          <a:bodyPr wrap="square" lIns="0" tIns="0" rIns="0" bIns="0" rtlCol="0" anchor="ctr"/>
+          <a:lstStyle/>
+          <a:p>
+            <a:pPr indent="0" marL="0">
+              <a:buNone/>
+            </a:pPr>
+            <a:r>
+              <a:rPr lang="en-US" sz="1300" i="1" dirty="0">
+                <a:solidFill>
+                  <a:srgbClr val="5F5F5F"/>
+                </a:solidFill>
+                <a:latin typeface="Calibri" pitchFamily="34" charset="0"/>
+                <a:ea typeface="Calibri" pitchFamily="34" charset="-122"/>
+                <a:cs typeface="Calibri" pitchFamily="34" charset="-120"/>
+              </a:rPr>
+              <a:t>Net present worth against discount rate. Blue is HMA, orange is PCC. TDOT 3 percent and FAA AIP 7 percent are marked.</a:t>
+            </a:r>
+            <a:endParaRPr lang="en-US" sz="1300" dirty="0"/>
+          </a:p>
+        </p:txBody>
+      </p:sp>
+      <p:pic>
+        <p:nvPicPr>
+          <p:cNvPr id="4" name="Image 0" descr="/tmp/claude-0/-home-user-lcca-dashboard/444ca227-15d7-51d4-a51e-a0ae3dbe81ed/scratchpad/deck/img/MBT_sens.png">    </p:cNvPr>
+          <p:cNvPicPr>
+            <a:picLocks noChangeAspect="1"/>
+          </p:cNvPicPr>
+          <p:nvPr/>
+        </p:nvPicPr>
+        <p:blipFill>
+          <a:blip r:embed="rId1"/>
+          <a:stretch>
+            <a:fillRect/>
+          </a:stretch>
+        </p:blipFill>
+        <p:spPr>
+          <a:xfrm>
+            <a:off x="457200" y="1371600"/>
+            <a:ext cx="3931920" cy="1899478"/>
+          </a:xfrm>
+          <a:prstGeom prst="rect">
+            <a:avLst/>
+          </a:prstGeom>
+        </p:spPr>
+      </p:pic>
+      <p:sp>
+        <p:nvSpPr>
+          <p:cNvPr id="5" name="Text 2"/>
+          <p:cNvSpPr txBox="1"/>
+          <p:nvPr/>
+        </p:nvSpPr>
+        <p:spPr>
+          <a:xfrm>
+            <a:off x="457200" y="3316798"/>
+            <a:ext cx="3931920" cy="411480"/>
+          </a:xfrm>
+          <a:prstGeom prst="rect">
+            <a:avLst/>
+          </a:prstGeom>
+          <a:noFill/>
+          <a:ln/>
+        </p:spPr>
+        <p:txBody>
+          <a:bodyPr wrap="square" lIns="0" tIns="0" rIns="0" bIns="0" rtlCol="0" anchor="t"/>
+          <a:lstStyle/>
+          <a:p>
+            <a:pPr indent="0" marL="0">
+              <a:buNone/>
+            </a:pPr>
+            <a:r>
+              <a:rPr lang="en-US" sz="1050" dirty="0">
+                <a:solidFill>
+                  <a:srgbClr val="5F5F5F"/>
+                </a:solidFill>
+                <a:latin typeface="Calibri" pitchFamily="34" charset="0"/>
+                <a:ea typeface="Calibri" pitchFamily="34" charset="-122"/>
+                <a:cs typeface="Calibri" pitchFamily="34" charset="-120"/>
+              </a:rPr>
+              <a:t>MBT: PCC wins below 4.5 percent, HMA above. At the FAA AIP rate the answer reverses.</a:t>
+            </a:r>
+            <a:endParaRPr lang="en-US" sz="1050" dirty="0"/>
+          </a:p>
+        </p:txBody>
+      </p:sp>
+      <p:pic>
+        <p:nvPicPr>
+          <p:cNvPr id="6" name="Image 1" descr="/tmp/claude-0/-home-user-lcca-dashboard/444ca227-15d7-51d4-a51e-a0ae3dbe81ed/scratchpad/deck/img/SRB_sens.png">    </p:cNvPr>
+          <p:cNvPicPr>
+            <a:picLocks noChangeAspect="1"/>
+          </p:cNvPicPr>
+          <p:nvPr/>
+        </p:nvPicPr>
+        <p:blipFill>
+          <a:blip r:embed="rId2"/>
+          <a:stretch>
+            <a:fillRect/>
+          </a:stretch>
+        </p:blipFill>
+        <p:spPr>
+          <a:xfrm>
+            <a:off x="4754880" y="1371600"/>
+            <a:ext cx="3931920" cy="1899478"/>
+          </a:xfrm>
+          <a:prstGeom prst="rect">
+            <a:avLst/>
+          </a:prstGeom>
+        </p:spPr>
+      </p:pic>
+      <p:sp>
+        <p:nvSpPr>
+          <p:cNvPr id="7" name="Text 3"/>
+          <p:cNvSpPr txBox="1"/>
+          <p:nvPr/>
+        </p:nvSpPr>
+        <p:spPr>
+          <a:xfrm>
+            <a:off x="4754880" y="3316798"/>
+            <a:ext cx="3931920" cy="411480"/>
+          </a:xfrm>
+          <a:prstGeom prst="rect">
+            <a:avLst/>
+          </a:prstGeom>
+          <a:noFill/>
+          <a:ln/>
+        </p:spPr>
+        <p:txBody>
+          <a:bodyPr wrap="square" lIns="0" tIns="0" rIns="0" bIns="0" rtlCol="0" anchor="t"/>
+          <a:lstStyle/>
+          <a:p>
+            <a:pPr indent="0" marL="0">
+              <a:buNone/>
+            </a:pPr>
+            <a:r>
+              <a:rPr lang="en-US" sz="1050" dirty="0">
+                <a:solidFill>
+                  <a:srgbClr val="5F5F5F"/>
+                </a:solidFill>
+                <a:latin typeface="Calibri" pitchFamily="34" charset="0"/>
+                <a:ea typeface="Calibri" pitchFamily="34" charset="-122"/>
+                <a:cs typeface="Calibri" pitchFamily="34" charset="-120"/>
+              </a:rPr>
+              <a:t>SRB: HMA wins at every rate above 2.5 percent. The gap widens as the rate rises.</a:t>
+            </a:r>
+            <a:endParaRPr lang="en-US" sz="1050" dirty="0"/>
+          </a:p>
+        </p:txBody>
+      </p:sp>
+      <p:sp>
+        <p:nvSpPr>
+          <p:cNvPr id="8" name="Shape 4"/>
+          <p:cNvSpPr/>
+          <p:nvPr/>
+        </p:nvSpPr>
+        <p:spPr>
+          <a:xfrm>
+            <a:off x="457200" y="3794760"/>
+            <a:ext cx="8229600" cy="777240"/>
+          </a:xfrm>
+          <a:prstGeom prst="roundRect">
+            <a:avLst>
+              <a:gd name="adj" fmla="val 7059"/>
+            </a:avLst>
+          </a:prstGeom>
+          <a:solidFill>
+            <a:srgbClr val="F3F3F1"/>
+          </a:solidFill>
+          <a:ln w="12700">
+            <a:solidFill>
+              <a:srgbClr val="F3F3F1"/>
+            </a:solidFill>
+            <a:prstDash val="solid"/>
+          </a:ln>
+        </p:spPr>
+      </p:sp>
+      <p:sp>
+        <p:nvSpPr>
+          <p:cNvPr id="9" name="Text 5"/>
+          <p:cNvSpPr txBox="1"/>
+          <p:nvPr/>
+        </p:nvSpPr>
+        <p:spPr>
+          <a:xfrm>
+            <a:off x="640080" y="3840480"/>
+            <a:ext cx="7863840" cy="685800"/>
+          </a:xfrm>
+          <a:prstGeom prst="rect">
+            <a:avLst/>
+          </a:prstGeom>
+          <a:noFill/>
+          <a:ln/>
+        </p:spPr>
+        <p:txBody>
+          <a:bodyPr wrap="square" lIns="0" tIns="0" rIns="0" bIns="0" rtlCol="0" anchor="ctr"/>
+          <a:lstStyle/>
+          <a:p>
+            <a:pPr indent="0" marL="0">
+              <a:buNone/>
+            </a:pPr>
+            <a:r>
+              <a:rPr lang="en-US" sz="1200" b="1" dirty="0">
+                <a:solidFill>
+                  <a:srgbClr val="1F1F1F"/>
+                </a:solidFill>
+                <a:latin typeface="Calibri" pitchFamily="34" charset="0"/>
+                <a:ea typeface="Calibri" pitchFamily="34" charset="-122"/>
+                <a:cs typeface="Calibri" pitchFamily="34" charset="-120"/>
+              </a:rPr>
+              <a:t>Live simulation: </a:t>
+            </a:r>
+            <a:pPr indent="0" marL="0">
+              <a:buNone/>
+            </a:pPr>
+            <a:r>
+              <a:rPr lang="en-US" sz="1200" dirty="0">
+                <a:solidFill>
+                  <a:srgbClr val="1F1F1F"/>
+                </a:solidFill>
+                <a:latin typeface="Calibri" pitchFamily="34" charset="0"/>
+                <a:ea typeface="Calibri" pitchFamily="34" charset="-122"/>
+                <a:cs typeface="Calibri" pitchFamily="34" charset="-120"/>
+              </a:rPr>
+              <a:t>1,000 joint draws on rate, bids, closures, salvage and revenue share. Probability PCC is the cheaper alternative: 52 percent at MBT, 18 percent at SRB. Press F9 in the workbook to redraw.</a:t>
+            </a:r>
+            <a:endParaRPr lang="en-US" sz="1200" dirty="0"/>
+          </a:p>
+        </p:txBody>
+      </p:sp>
+    </p:spTree>
+  </p:cSld>
+  <p:clrMapOvr>
+    <a:masterClrMapping/>
+  </p:clrMapOvr>
+</p:sld>
+</file>
+
+<file path=ppt/slides/slide15.xml><?xml version="1.0" encoding="utf-8"?>
+<p:sld xmlns:a="http://schemas.openxmlformats.org/drawingml/2006/main" xmlns:r="http://schemas.openxmlformats.org/officeDocument/2006/relationships" xmlns:p="http://schemas.openxmlformats.org/presentationml/2006/main">
+  <p:cSld name="Slide 15">
+    <p:bg>
+      <p:bgPr>
+        <a:solidFill>
+          <a:srgbClr val="FFFFFF"/>
+        </a:solidFill>
+      </p:bgPr>
+    </p:bg>
+    <p:spTree>
+      <p:nvGrpSpPr>
+        <p:cNvPr id="1" name=""/>
+        <p:cNvGrpSpPr/>
+        <p:nvPr/>
+      </p:nvGrpSpPr>
+      <p:grpSpPr>
+        <a:xfrm>
+          <a:off x="0" y="0"/>
+          <a:ext cx="0" cy="0"/>
+          <a:chOff x="0" y="0"/>
+          <a:chExt cx="0" cy="0"/>
+        </a:xfrm>
+      </p:grpSpPr>
+      <p:sp>
+        <p:nvSpPr>
+          <p:cNvPr id="2" name="Text 0"/>
+          <p:cNvSpPr txBox="1"/>
+          <p:nvPr/>
+        </p:nvSpPr>
+        <p:spPr>
+          <a:xfrm>
+            <a:off x="457200" y="320040"/>
+            <a:ext cx="8229600" cy="640080"/>
+          </a:xfrm>
+          <a:prstGeom prst="rect">
+            <a:avLst/>
+          </a:prstGeom>
+          <a:noFill/>
+          <a:ln/>
+        </p:spPr>
+        <p:txBody>
+          <a:bodyPr wrap="square" lIns="0" tIns="0" rIns="0" bIns="0" rtlCol="0" anchor="t"/>
+          <a:lstStyle/>
+          <a:p>
+            <a:pPr indent="0" marL="0">
+              <a:buNone/>
+            </a:pPr>
+            <a:r>
+              <a:rPr lang="en-US" sz="2800" b="1" dirty="0">
+                <a:solidFill>
+                  <a:srgbClr val="1F1F1F"/>
+                </a:solidFill>
+                <a:latin typeface="Cambria" pitchFamily="34" charset="0"/>
+                <a:ea typeface="Cambria" pitchFamily="34" charset="-122"/>
+                <a:cs typeface="Cambria" pitchFamily="34" charset="-120"/>
+              </a:rPr>
               <a:t>What could flip the answer</a:t>
             </a:r>
             <a:endParaRPr lang="en-US" sz="2800" dirty="0"/>
@@ -4595,7 +4857,7 @@
       </p:sp>
       <p:graphicFrame>
         <p:nvGraphicFramePr>
-          <p:cNvPr id="15" name="Table 0"/>
+          <p:cNvPr id="16" name="Table 0"/>
           <p:cNvGraphicFramePr>
             <a:graphicFrameLocks noGrp="1"/>
           </p:cNvGraphicFramePr>
@@ -5456,9 +5718,9 @@
 </p:sld>
 </file>
 
-<file path=ppt/slides/slide15.xml><?xml version="1.0" encoding="utf-8"?>
+<file path=ppt/slides/slide16.xml><?xml version="1.0" encoding="utf-8"?>
 <p:sld xmlns:a="http://schemas.openxmlformats.org/drawingml/2006/main" xmlns:r="http://schemas.openxmlformats.org/officeDocument/2006/relationships" xmlns:p="http://schemas.openxmlformats.org/presentationml/2006/main">
-  <p:cSld name="Slide 15">
+  <p:cSld name="Slide 16">
     <p:bg>
       <p:bgPr>
         <a:solidFill>
@@ -5560,7 +5822,7 @@
       </p:sp>
       <p:graphicFrame>
         <p:nvGraphicFramePr>
-          <p:cNvPr id="16" name="Table 0"/>
+          <p:cNvPr id="17" name="Table 0"/>
           <p:cNvGraphicFramePr>
             <a:graphicFrameLocks noGrp="1"/>
           </p:cNvGraphicFramePr>
@@ -7160,9 +7422,9 @@
 </p:sld>
 </file>
 
-<file path=ppt/slides/slide16.xml><?xml version="1.0" encoding="utf-8"?>
+<file path=ppt/slides/slide17.xml><?xml version="1.0" encoding="utf-8"?>
 <p:sld xmlns:a="http://schemas.openxmlformats.org/drawingml/2006/main" xmlns:r="http://schemas.openxmlformats.org/officeDocument/2006/relationships" xmlns:p="http://schemas.openxmlformats.org/presentationml/2006/main">
-  <p:cSld name="Slide 16">
+  <p:cSld name="Slide 17">
     <p:bg>
       <p:bgPr>
         <a:solidFill>
@@ -7225,7 +7487,7 @@
       </p:sp>
       <p:graphicFrame>
         <p:nvGraphicFramePr>
-          <p:cNvPr id="17" name="Table 0"/>
+          <p:cNvPr id="18" name="Table 0"/>
           <p:cNvGraphicFramePr>
             <a:graphicFrameLocks noGrp="1"/>
           </p:cNvGraphicFramePr>
@@ -7473,7 +7735,7 @@
                           <a:ea typeface="Calibri" pitchFamily="34" charset="-122"/>
                           <a:cs typeface="Calibri" pitchFamily="34" charset="-120"/>
                         </a:rPr>
-                        <a:t>1,644 formulas, 0 errors (v1.1.2 shows 99 error cells under the same recalc)</a:t>
+                        <a:t>2,240 formulas incl. the new Summary, 0 errors (v1.1.2 shows 99 error cells under the same recalc)</a:t>
                       </a:r>
                       <a:endParaRPr lang="en-US" sz="1050" dirty="0">
                         <a:latin typeface="Calibri" charset="0"/>
@@ -8371,7 +8633,7 @@
                           <a:ea typeface="Calibri" pitchFamily="34" charset="-122"/>
                           <a:cs typeface="Calibri" pitchFamily="34" charset="-120"/>
                         </a:rPr>
-                        <a:t>Not yet verified</a:t>
+                        <a:t>New Summary sheet on the MBT data</a:t>
                       </a:r>
                       <a:endParaRPr lang="en-US" sz="1050" dirty="0">
                         <a:latin typeface="Calibri" charset="0"/>
@@ -8439,7 +8701,145 @@
                           <a:ea typeface="Calibri" pitchFamily="34" charset="-122"/>
                           <a:cs typeface="Calibri" pitchFamily="34" charset="-120"/>
                         </a:rPr>
-                        <a:t>Output.bas in Excel (no Excel here) and the patched charts in Excel itself; a six-step first-open check is in the notes</a:t>
+                        <a:t>Table, verdict, categories and closure days match; six charts render; template reads "No alternatives yet" with no errors</a:t>
+                      </a:r>
+                      <a:endParaRPr lang="en-US" sz="1050" dirty="0">
+                        <a:latin typeface="Calibri" charset="0"/>
+                        <a:ea typeface="Calibri" charset="0"/>
+                        <a:cs typeface="Calibri" charset="0"/>
+                      </a:endParaRPr>
+                    </a:p>
+                  </a:txBody>
+                  <a:tcPr marL="45720" marR="45720" marT="45720" marB="45720" anchor="ctr">
+                    <a:lnL w="6350" cap="flat" cmpd="sng" algn="ctr">
+                      <a:solidFill>
+                        <a:srgbClr val="C9C9C4"/>
+                      </a:solidFill>
+                      <a:prstDash val="solid"/>
+                      <a:round/>
+                      <a:headEnd type="none" w="med" len="med"/>
+                      <a:tailEnd type="none" w="med" len="med"/>
+                    </a:lnL>
+                    <a:lnR w="6350" cap="flat" cmpd="sng" algn="ctr">
+                      <a:solidFill>
+                        <a:srgbClr val="C9C9C4"/>
+                      </a:solidFill>
+                      <a:prstDash val="solid"/>
+                      <a:round/>
+                      <a:headEnd type="none" w="med" len="med"/>
+                      <a:tailEnd type="none" w="med" len="med"/>
+                    </a:lnR>
+                    <a:lnT w="6350" cap="flat" cmpd="sng" algn="ctr">
+                      <a:solidFill>
+                        <a:srgbClr val="C9C9C4"/>
+                      </a:solidFill>
+                      <a:prstDash val="solid"/>
+                      <a:round/>
+                      <a:headEnd type="none" w="med" len="med"/>
+                      <a:tailEnd type="none" w="med" len="med"/>
+                    </a:lnT>
+                    <a:lnB w="6350" cap="flat" cmpd="sng" algn="ctr">
+                      <a:solidFill>
+                        <a:srgbClr val="C9C9C4"/>
+                      </a:solidFill>
+                      <a:prstDash val="solid"/>
+                      <a:round/>
+                      <a:headEnd type="none" w="med" len="med"/>
+                      <a:tailEnd type="none" w="med" len="med"/>
+                    </a:lnB>
+                    <a:solidFill>
+                      <a:srgbClr val="FFFFFF"/>
+                    </a:solidFill>
+                  </a:tcPr>
+                </a:tc>
+              </a:tr>
+              <a:tr h="274320">
+                <a:tc>
+                  <a:txBody>
+                    <a:bodyPr/>
+                    <a:lstStyle/>
+                    <a:p>
+                      <a:pPr indent="0" marL="0">
+                        <a:buNone/>
+                      </a:pPr>
+                      <a:r>
+                        <a:rPr lang="en-US" sz="1050" dirty="0">
+                          <a:solidFill>
+                            <a:srgbClr val="1F1F1F"/>
+                          </a:solidFill>
+                          <a:latin typeface="Calibri" pitchFamily="34" charset="0"/>
+                          <a:ea typeface="Calibri" pitchFamily="34" charset="-122"/>
+                          <a:cs typeface="Calibri" pitchFamily="34" charset="-120"/>
+                        </a:rPr>
+                        <a:t>Not yet verified</a:t>
+                      </a:r>
+                      <a:endParaRPr lang="en-US" sz="1050" dirty="0">
+                        <a:latin typeface="Calibri" charset="0"/>
+                        <a:ea typeface="Calibri" charset="0"/>
+                        <a:cs typeface="Calibri" charset="0"/>
+                      </a:endParaRPr>
+                    </a:p>
+                  </a:txBody>
+                  <a:tcPr marL="45720" marR="45720" marT="45720" marB="45720" anchor="ctr">
+                    <a:lnL w="6350" cap="flat" cmpd="sng" algn="ctr">
+                      <a:solidFill>
+                        <a:srgbClr val="C9C9C4"/>
+                      </a:solidFill>
+                      <a:prstDash val="solid"/>
+                      <a:round/>
+                      <a:headEnd type="none" w="med" len="med"/>
+                      <a:tailEnd type="none" w="med" len="med"/>
+                    </a:lnL>
+                    <a:lnR w="6350" cap="flat" cmpd="sng" algn="ctr">
+                      <a:solidFill>
+                        <a:srgbClr val="C9C9C4"/>
+                      </a:solidFill>
+                      <a:prstDash val="solid"/>
+                      <a:round/>
+                      <a:headEnd type="none" w="med" len="med"/>
+                      <a:tailEnd type="none" w="med" len="med"/>
+                    </a:lnR>
+                    <a:lnT w="6350" cap="flat" cmpd="sng" algn="ctr">
+                      <a:solidFill>
+                        <a:srgbClr val="C9C9C4"/>
+                      </a:solidFill>
+                      <a:prstDash val="solid"/>
+                      <a:round/>
+                      <a:headEnd type="none" w="med" len="med"/>
+                      <a:tailEnd type="none" w="med" len="med"/>
+                    </a:lnT>
+                    <a:lnB w="6350" cap="flat" cmpd="sng" algn="ctr">
+                      <a:solidFill>
+                        <a:srgbClr val="C9C9C4"/>
+                      </a:solidFill>
+                      <a:prstDash val="solid"/>
+                      <a:round/>
+                      <a:headEnd type="none" w="med" len="med"/>
+                      <a:tailEnd type="none" w="med" len="med"/>
+                    </a:lnB>
+                    <a:solidFill>
+                      <a:srgbClr val="FFFFFF"/>
+                    </a:solidFill>
+                  </a:tcPr>
+                </a:tc>
+                <a:tc>
+                  <a:txBody>
+                    <a:bodyPr/>
+                    <a:lstStyle/>
+                    <a:p>
+                      <a:pPr indent="0" marL="0">
+                        <a:buNone/>
+                      </a:pPr>
+                      <a:r>
+                        <a:rPr lang="en-US" sz="1050" dirty="0">
+                          <a:solidFill>
+                            <a:srgbClr val="1F1F1F"/>
+                          </a:solidFill>
+                          <a:latin typeface="Calibri" pitchFamily="34" charset="0"/>
+                          <a:ea typeface="Calibri" pitchFamily="34" charset="-122"/>
+                          <a:cs typeface="Calibri" pitchFamily="34" charset="-120"/>
+                        </a:rPr>
+                        <a:t>The alternative-sheet charts in Excel itself (no Excel here); a first-open check is in the notes</a:t>
                       </a:r>
                       <a:endParaRPr lang="en-US" sz="1050" dirty="0">
                         <a:latin typeface="Calibri" charset="0"/>
@@ -8495,542 +8895,6 @@
           </a:graphicData>
         </a:graphic>
       </p:graphicFrame>
-    </p:spTree>
-  </p:cSld>
-  <p:clrMapOvr>
-    <a:masterClrMapping/>
-  </p:clrMapOvr>
-</p:sld>
-</file>
-
-<file path=ppt/slides/slide17.xml><?xml version="1.0" encoding="utf-8"?>
-<p:sld xmlns:a="http://schemas.openxmlformats.org/drawingml/2006/main" xmlns:r="http://schemas.openxmlformats.org/officeDocument/2006/relationships" xmlns:p="http://schemas.openxmlformats.org/presentationml/2006/main">
-  <p:cSld name="Slide 17">
-    <p:bg>
-      <p:bgPr>
-        <a:solidFill>
-          <a:srgbClr val="FFFFFF"/>
-        </a:solidFill>
-      </p:bgPr>
-    </p:bg>
-    <p:spTree>
-      <p:nvGrpSpPr>
-        <p:cNvPr id="1" name=""/>
-        <p:cNvGrpSpPr/>
-        <p:nvPr/>
-      </p:nvGrpSpPr>
-      <p:grpSpPr>
-        <a:xfrm>
-          <a:off x="0" y="0"/>
-          <a:ext cx="0" cy="0"/>
-          <a:chOff x="0" y="0"/>
-          <a:chExt cx="0" cy="0"/>
-        </a:xfrm>
-      </p:grpSpPr>
-      <p:sp>
-        <p:nvSpPr>
-          <p:cNvPr id="2" name="Text 0"/>
-          <p:cNvSpPr txBox="1"/>
-          <p:nvPr/>
-        </p:nvSpPr>
-        <p:spPr>
-          <a:xfrm>
-            <a:off x="457200" y="320040"/>
-            <a:ext cx="8229600" cy="640080"/>
-          </a:xfrm>
-          <a:prstGeom prst="rect">
-            <a:avLst/>
-          </a:prstGeom>
-          <a:noFill/>
-          <a:ln/>
-        </p:spPr>
-        <p:txBody>
-          <a:bodyPr wrap="square" lIns="0" tIns="0" rIns="0" bIns="0" rtlCol="0" anchor="t"/>
-          <a:lstStyle/>
-          <a:p>
-            <a:pPr indent="0" marL="0">
-              <a:buNone/>
-            </a:pPr>
-            <a:r>
-              <a:rPr lang="en-US" sz="2800" b="1" dirty="0">
-                <a:solidFill>
-                  <a:srgbClr val="1F1F1F"/>
-                </a:solidFill>
-                <a:latin typeface="Cambria" pitchFamily="34" charset="0"/>
-                <a:ea typeface="Cambria" pitchFamily="34" charset="-122"/>
-                <a:cs typeface="Cambria" pitchFamily="34" charset="-120"/>
-              </a:rPr>
-              <a:t>How TDOT uses it</a:t>
-            </a:r>
-            <a:endParaRPr lang="en-US" sz="2800" dirty="0"/>
-          </a:p>
-        </p:txBody>
-      </p:sp>
-      <p:sp>
-        <p:nvSpPr>
-          <p:cNvPr id="3" name="Text 1"/>
-          <p:cNvSpPr txBox="1"/>
-          <p:nvPr/>
-        </p:nvSpPr>
-        <p:spPr>
-          <a:xfrm>
-            <a:off x="457200" y="914400"/>
-            <a:ext cx="8229600" cy="365760"/>
-          </a:xfrm>
-          <a:prstGeom prst="rect">
-            <a:avLst/>
-          </a:prstGeom>
-          <a:noFill/>
-          <a:ln/>
-        </p:spPr>
-        <p:txBody>
-          <a:bodyPr wrap="square" lIns="0" tIns="0" rIns="0" bIns="0" rtlCol="0" anchor="ctr"/>
-          <a:lstStyle/>
-          <a:p>
-            <a:pPr indent="0" marL="0">
-              <a:buNone/>
-            </a:pPr>
-            <a:r>
-              <a:rPr lang="en-US" sz="1300" i="1" dirty="0">
-                <a:solidFill>
-                  <a:srgbClr val="5F5F5F"/>
-                </a:solidFill>
-                <a:latin typeface="Calibri" pitchFamily="34" charset="0"/>
-                <a:ea typeface="Calibri" pitchFamily="34" charset="-122"/>
-                <a:cs typeface="Calibri" pitchFamily="34" charset="-120"/>
-              </a:rPr>
-              <a:t>Excel only. No add-ins. The decision workbook has no macros at all.</a:t>
-            </a:r>
-            <a:endParaRPr lang="en-US" sz="1300" dirty="0"/>
-          </a:p>
-        </p:txBody>
-      </p:sp>
-      <p:sp>
-        <p:nvSpPr>
-          <p:cNvPr id="4" name="Shape 2"/>
-          <p:cNvSpPr/>
-          <p:nvPr/>
-        </p:nvSpPr>
-        <p:spPr>
-          <a:xfrm>
-            <a:off x="457200" y="1463040"/>
-            <a:ext cx="502920" cy="502920"/>
-          </a:xfrm>
-          <a:prstGeom prst="ellipse">
-            <a:avLst/>
-          </a:prstGeom>
-          <a:solidFill>
-            <a:srgbClr val="1D2733"/>
-          </a:solidFill>
-          <a:ln w="12700">
-            <a:solidFill>
-              <a:srgbClr val="1D2733"/>
-            </a:solidFill>
-            <a:prstDash val="solid"/>
-          </a:ln>
-        </p:spPr>
-      </p:sp>
-      <p:sp>
-        <p:nvSpPr>
-          <p:cNvPr id="5" name="Text 3"/>
-          <p:cNvSpPr txBox="1"/>
-          <p:nvPr/>
-        </p:nvSpPr>
-        <p:spPr>
-          <a:xfrm>
-            <a:off x="457200" y="1463040"/>
-            <a:ext cx="502920" cy="502920"/>
-          </a:xfrm>
-          <a:prstGeom prst="rect">
-            <a:avLst/>
-          </a:prstGeom>
-          <a:noFill/>
-          <a:ln/>
-        </p:spPr>
-        <p:txBody>
-          <a:bodyPr wrap="square" lIns="0" tIns="0" rIns="0" bIns="0" rtlCol="0" anchor="ctr"/>
-          <a:lstStyle/>
-          <a:p>
-            <a:pPr algn="ctr" indent="0" marL="0">
-              <a:buNone/>
-            </a:pPr>
-            <a:r>
-              <a:rPr lang="en-US" sz="1800" b="1" dirty="0">
-                <a:solidFill>
-                  <a:srgbClr val="FFFFFF"/>
-                </a:solidFill>
-                <a:latin typeface="Cambria" pitchFamily="34" charset="0"/>
-                <a:ea typeface="Cambria" pitchFamily="34" charset="-122"/>
-                <a:cs typeface="Cambria" pitchFamily="34" charset="-120"/>
-              </a:rPr>
-              <a:t>1</a:t>
-            </a:r>
-            <a:endParaRPr lang="en-US" sz="1800" dirty="0"/>
-          </a:p>
-        </p:txBody>
-      </p:sp>
-      <p:sp>
-        <p:nvSpPr>
-          <p:cNvPr id="6" name="Text 4"/>
-          <p:cNvSpPr txBox="1"/>
-          <p:nvPr/>
-        </p:nvSpPr>
-        <p:spPr>
-          <a:xfrm>
-            <a:off x="457200" y="2103120"/>
-            <a:ext cx="2560320" cy="457200"/>
-          </a:xfrm>
-          <a:prstGeom prst="rect">
-            <a:avLst/>
-          </a:prstGeom>
-          <a:noFill/>
-          <a:ln/>
-        </p:spPr>
-        <p:txBody>
-          <a:bodyPr wrap="square" lIns="0" tIns="0" rIns="0" bIns="0" rtlCol="0" anchor="ctr"/>
-          <a:lstStyle/>
-          <a:p>
-            <a:pPr indent="0" marL="0">
-              <a:buNone/>
-            </a:pPr>
-            <a:r>
-              <a:rPr lang="en-US" sz="1500" b="1" dirty="0">
-                <a:solidFill>
-                  <a:srgbClr val="1F1F1F"/>
-                </a:solidFill>
-                <a:latin typeface="Cambria" pitchFamily="34" charset="0"/>
-                <a:ea typeface="Cambria" pitchFamily="34" charset="-122"/>
-                <a:cs typeface="Cambria" pitchFamily="34" charset="-120"/>
-              </a:rPr>
-              <a:t>Run the framework as before</a:t>
-            </a:r>
-            <a:endParaRPr lang="en-US" sz="1500" dirty="0"/>
-          </a:p>
-        </p:txBody>
-      </p:sp>
-      <p:sp>
-        <p:nvSpPr>
-          <p:cNvPr id="7" name="Text 5"/>
-          <p:cNvSpPr txBox="1"/>
-          <p:nvPr/>
-        </p:nvSpPr>
-        <p:spPr>
-          <a:xfrm>
-            <a:off x="457200" y="2606040"/>
-            <a:ext cx="2560320" cy="1645920"/>
-          </a:xfrm>
-          <a:prstGeom prst="rect">
-            <a:avLst/>
-          </a:prstGeom>
-          <a:noFill/>
-          <a:ln/>
-        </p:spPr>
-        <p:txBody>
-          <a:bodyPr wrap="square" lIns="0" tIns="0" rIns="0" bIns="0" rtlCol="0" anchor="t"/>
-          <a:lstStyle/>
-          <a:p>
-            <a:pPr indent="0" marL="0">
-              <a:buNone/>
-            </a:pPr>
-            <a:r>
-              <a:rPr lang="en-US" sz="1200" dirty="0">
-                <a:solidFill>
-                  <a:srgbClr val="1F1F1F"/>
-                </a:solidFill>
-                <a:latin typeface="Calibri" pitchFamily="34" charset="0"/>
-                <a:ea typeface="Calibri" pitchFamily="34" charset="-122"/>
-                <a:cs typeface="Calibri" pitchFamily="34" charset="-120"/>
-              </a:rPr>
-              <a:t>Open v1.2.0, enable content, fill General Information, build alternatives with Alternative Setup. The Summary now shows categories, closures and the 7 percent flag.</a:t>
-            </a:r>
-            <a:endParaRPr lang="en-US" sz="1200" dirty="0"/>
-          </a:p>
-        </p:txBody>
-      </p:sp>
-      <p:sp>
-        <p:nvSpPr>
-          <p:cNvPr id="8" name="Shape 6"/>
-          <p:cNvSpPr/>
-          <p:nvPr/>
-        </p:nvSpPr>
-        <p:spPr>
-          <a:xfrm>
-            <a:off x="3246120" y="1463040"/>
-            <a:ext cx="502920" cy="502920"/>
-          </a:xfrm>
-          <a:prstGeom prst="ellipse">
-            <a:avLst/>
-          </a:prstGeom>
-          <a:solidFill>
-            <a:srgbClr val="1D2733"/>
-          </a:solidFill>
-          <a:ln w="12700">
-            <a:solidFill>
-              <a:srgbClr val="1D2733"/>
-            </a:solidFill>
-            <a:prstDash val="solid"/>
-          </a:ln>
-        </p:spPr>
-      </p:sp>
-      <p:sp>
-        <p:nvSpPr>
-          <p:cNvPr id="9" name="Text 7"/>
-          <p:cNvSpPr txBox="1"/>
-          <p:nvPr/>
-        </p:nvSpPr>
-        <p:spPr>
-          <a:xfrm>
-            <a:off x="3246120" y="1463040"/>
-            <a:ext cx="502920" cy="502920"/>
-          </a:xfrm>
-          <a:prstGeom prst="rect">
-            <a:avLst/>
-          </a:prstGeom>
-          <a:noFill/>
-          <a:ln/>
-        </p:spPr>
-        <p:txBody>
-          <a:bodyPr wrap="square" lIns="0" tIns="0" rIns="0" bIns="0" rtlCol="0" anchor="ctr"/>
-          <a:lstStyle/>
-          <a:p>
-            <a:pPr algn="ctr" indent="0" marL="0">
-              <a:buNone/>
-            </a:pPr>
-            <a:r>
-              <a:rPr lang="en-US" sz="1800" b="1" dirty="0">
-                <a:solidFill>
-                  <a:srgbClr val="FFFFFF"/>
-                </a:solidFill>
-                <a:latin typeface="Cambria" pitchFamily="34" charset="0"/>
-                <a:ea typeface="Cambria" pitchFamily="34" charset="-122"/>
-                <a:cs typeface="Cambria" pitchFamily="34" charset="-120"/>
-              </a:rPr>
-              <a:t>2</a:t>
-            </a:r>
-            <a:endParaRPr lang="en-US" sz="1800" dirty="0"/>
-          </a:p>
-        </p:txBody>
-      </p:sp>
-      <p:sp>
-        <p:nvSpPr>
-          <p:cNvPr id="10" name="Text 8"/>
-          <p:cNvSpPr txBox="1"/>
-          <p:nvPr/>
-        </p:nvSpPr>
-        <p:spPr>
-          <a:xfrm>
-            <a:off x="3246120" y="2103120"/>
-            <a:ext cx="2560320" cy="457200"/>
-          </a:xfrm>
-          <a:prstGeom prst="rect">
-            <a:avLst/>
-          </a:prstGeom>
-          <a:noFill/>
-          <a:ln/>
-        </p:spPr>
-        <p:txBody>
-          <a:bodyPr wrap="square" lIns="0" tIns="0" rIns="0" bIns="0" rtlCol="0" anchor="ctr"/>
-          <a:lstStyle/>
-          <a:p>
-            <a:pPr indent="0" marL="0">
-              <a:buNone/>
-            </a:pPr>
-            <a:r>
-              <a:rPr lang="en-US" sz="1500" b="1" dirty="0">
-                <a:solidFill>
-                  <a:srgbClr val="1F1F1F"/>
-                </a:solidFill>
-                <a:latin typeface="Cambria" pitchFamily="34" charset="0"/>
-                <a:ea typeface="Cambria" pitchFamily="34" charset="-122"/>
-                <a:cs typeface="Cambria" pitchFamily="34" charset="-120"/>
-              </a:rPr>
-              <a:t>Copy the TEMPLATE sheet</a:t>
-            </a:r>
-            <a:endParaRPr lang="en-US" sz="1500" dirty="0"/>
-          </a:p>
-        </p:txBody>
-      </p:sp>
-      <p:sp>
-        <p:nvSpPr>
-          <p:cNvPr id="11" name="Text 9"/>
-          <p:cNvSpPr txBox="1"/>
-          <p:nvPr/>
-        </p:nvSpPr>
-        <p:spPr>
-          <a:xfrm>
-            <a:off x="3246120" y="2606040"/>
-            <a:ext cx="2560320" cy="1645920"/>
-          </a:xfrm>
-          <a:prstGeom prst="rect">
-            <a:avLst/>
-          </a:prstGeom>
-          <a:noFill/>
-          <a:ln/>
-        </p:spPr>
-        <p:txBody>
-          <a:bodyPr wrap="square" lIns="0" tIns="0" rIns="0" bIns="0" rtlCol="0" anchor="t"/>
-          <a:lstStyle/>
-          <a:p>
-            <a:pPr indent="0" marL="0">
-              <a:buNone/>
-            </a:pPr>
-            <a:r>
-              <a:rPr lang="en-US" sz="1200" dirty="0">
-                <a:solidFill>
-                  <a:srgbClr val="1F1F1F"/>
-                </a:solidFill>
-                <a:latin typeface="Calibri" pitchFamily="34" charset="0"/>
-                <a:ea typeface="Calibri" pitchFamily="34" charset="-122"/>
-                <a:cs typeface="Calibri" pitchFamily="34" charset="-120"/>
-              </a:rPr>
-              <a:t>In the decision workbook, right-click TEMPLATE, Move or Copy, rename. Paste the base costs and closure days from each Alt sheet into the yellow cells.</a:t>
-            </a:r>
-            <a:endParaRPr lang="en-US" sz="1200" dirty="0"/>
-          </a:p>
-        </p:txBody>
-      </p:sp>
-      <p:sp>
-        <p:nvSpPr>
-          <p:cNvPr id="12" name="Shape 10"/>
-          <p:cNvSpPr/>
-          <p:nvPr/>
-        </p:nvSpPr>
-        <p:spPr>
-          <a:xfrm>
-            <a:off x="6035040" y="1463040"/>
-            <a:ext cx="502920" cy="502920"/>
-          </a:xfrm>
-          <a:prstGeom prst="ellipse">
-            <a:avLst/>
-          </a:prstGeom>
-          <a:solidFill>
-            <a:srgbClr val="1D2733"/>
-          </a:solidFill>
-          <a:ln w="12700">
-            <a:solidFill>
-              <a:srgbClr val="1D2733"/>
-            </a:solidFill>
-            <a:prstDash val="solid"/>
-          </a:ln>
-        </p:spPr>
-      </p:sp>
-      <p:sp>
-        <p:nvSpPr>
-          <p:cNvPr id="13" name="Text 11"/>
-          <p:cNvSpPr txBox="1"/>
-          <p:nvPr/>
-        </p:nvSpPr>
-        <p:spPr>
-          <a:xfrm>
-            <a:off x="6035040" y="1463040"/>
-            <a:ext cx="502920" cy="502920"/>
-          </a:xfrm>
-          <a:prstGeom prst="rect">
-            <a:avLst/>
-          </a:prstGeom>
-          <a:noFill/>
-          <a:ln/>
-        </p:spPr>
-        <p:txBody>
-          <a:bodyPr wrap="square" lIns="0" tIns="0" rIns="0" bIns="0" rtlCol="0" anchor="ctr"/>
-          <a:lstStyle/>
-          <a:p>
-            <a:pPr algn="ctr" indent="0" marL="0">
-              <a:buNone/>
-            </a:pPr>
-            <a:r>
-              <a:rPr lang="en-US" sz="1800" b="1" dirty="0">
-                <a:solidFill>
-                  <a:srgbClr val="FFFFFF"/>
-                </a:solidFill>
-                <a:latin typeface="Cambria" pitchFamily="34" charset="0"/>
-                <a:ea typeface="Cambria" pitchFamily="34" charset="-122"/>
-                <a:cs typeface="Cambria" pitchFamily="34" charset="-120"/>
-              </a:rPr>
-              <a:t>3</a:t>
-            </a:r>
-            <a:endParaRPr lang="en-US" sz="1800" dirty="0"/>
-          </a:p>
-        </p:txBody>
-      </p:sp>
-      <p:sp>
-        <p:nvSpPr>
-          <p:cNvPr id="14" name="Text 12"/>
-          <p:cNvSpPr txBox="1"/>
-          <p:nvPr/>
-        </p:nvSpPr>
-        <p:spPr>
-          <a:xfrm>
-            <a:off x="6035040" y="2103120"/>
-            <a:ext cx="2560320" cy="457200"/>
-          </a:xfrm>
-          <a:prstGeom prst="rect">
-            <a:avLst/>
-          </a:prstGeom>
-          <a:noFill/>
-          <a:ln/>
-        </p:spPr>
-        <p:txBody>
-          <a:bodyPr wrap="square" lIns="0" tIns="0" rIns="0" bIns="0" rtlCol="0" anchor="ctr"/>
-          <a:lstStyle/>
-          <a:p>
-            <a:pPr indent="0" marL="0">
-              <a:buNone/>
-            </a:pPr>
-            <a:r>
-              <a:rPr lang="en-US" sz="1500" b="1" dirty="0">
-                <a:solidFill>
-                  <a:srgbClr val="1F1F1F"/>
-                </a:solidFill>
-                <a:latin typeface="Cambria" pitchFamily="34" charset="0"/>
-                <a:ea typeface="Cambria" pitchFamily="34" charset="-122"/>
-                <a:cs typeface="Cambria" pitchFamily="34" charset="-120"/>
-              </a:rPr>
-              <a:t>Read the decision blocks</a:t>
-            </a:r>
-            <a:endParaRPr lang="en-US" sz="1500" dirty="0"/>
-          </a:p>
-        </p:txBody>
-      </p:sp>
-      <p:sp>
-        <p:nvSpPr>
-          <p:cNvPr id="15" name="Text 13"/>
-          <p:cNvSpPr txBox="1"/>
-          <p:nvPr/>
-        </p:nvSpPr>
-        <p:spPr>
-          <a:xfrm>
-            <a:off x="6035040" y="2606040"/>
-            <a:ext cx="2560320" cy="1645920"/>
-          </a:xfrm>
-          <a:prstGeom prst="rect">
-            <a:avLst/>
-          </a:prstGeom>
-          <a:noFill/>
-          <a:ln/>
-        </p:spPr>
-        <p:txBody>
-          <a:bodyPr wrap="square" lIns="0" tIns="0" rIns="0" bIns="0" rtlCol="0" anchor="t"/>
-          <a:lstStyle/>
-          <a:p>
-            <a:pPr indent="0" marL="0">
-              <a:buNone/>
-            </a:pPr>
-            <a:r>
-              <a:rPr lang="en-US" sz="1200" dirty="0">
-                <a:solidFill>
-                  <a:srgbClr val="1F1F1F"/>
-                </a:solidFill>
-                <a:latin typeface="Calibri" pitchFamily="34" charset="0"/>
-                <a:ea typeface="Calibri" pitchFamily="34" charset="-122"/>
-                <a:cs typeface="Calibri" pitchFamily="34" charset="-120"/>
-              </a:rPr>
-              <a:t>RESULTS, BREAK-EVEN VALUES, the scenario scorecard and the decision map. Change any yellow cell and every chart follows. F9 redraws the simulation.</a:t>
-            </a:r>
-            <a:endParaRPr lang="en-US" sz="1200" dirty="0"/>
-          </a:p>
-        </p:txBody>
-      </p:sp>
     </p:spTree>
   </p:cSld>
   <p:clrMapOvr>
@@ -9096,6 +8960,542 @@
                 <a:ea typeface="Cambria" pitchFamily="34" charset="-122"/>
                 <a:cs typeface="Cambria" pitchFamily="34" charset="-120"/>
               </a:rPr>
+              <a:t>How TDOT uses it</a:t>
+            </a:r>
+            <a:endParaRPr lang="en-US" sz="2800" dirty="0"/>
+          </a:p>
+        </p:txBody>
+      </p:sp>
+      <p:sp>
+        <p:nvSpPr>
+          <p:cNvPr id="3" name="Text 1"/>
+          <p:cNvSpPr txBox="1"/>
+          <p:nvPr/>
+        </p:nvSpPr>
+        <p:spPr>
+          <a:xfrm>
+            <a:off x="457200" y="914400"/>
+            <a:ext cx="8229600" cy="365760"/>
+          </a:xfrm>
+          <a:prstGeom prst="rect">
+            <a:avLst/>
+          </a:prstGeom>
+          <a:noFill/>
+          <a:ln/>
+        </p:spPr>
+        <p:txBody>
+          <a:bodyPr wrap="square" lIns="0" tIns="0" rIns="0" bIns="0" rtlCol="0" anchor="ctr"/>
+          <a:lstStyle/>
+          <a:p>
+            <a:pPr indent="0" marL="0">
+              <a:buNone/>
+            </a:pPr>
+            <a:r>
+              <a:rPr lang="en-US" sz="1300" i="1" dirty="0">
+                <a:solidFill>
+                  <a:srgbClr val="5F5F5F"/>
+                </a:solidFill>
+                <a:latin typeface="Calibri" pitchFamily="34" charset="0"/>
+                <a:ea typeface="Calibri" pitchFamily="34" charset="-122"/>
+                <a:cs typeface="Calibri" pitchFamily="34" charset="-120"/>
+              </a:rPr>
+              <a:t>Excel only. No add-ins. The decision workbook has no macros at all.</a:t>
+            </a:r>
+            <a:endParaRPr lang="en-US" sz="1300" dirty="0"/>
+          </a:p>
+        </p:txBody>
+      </p:sp>
+      <p:sp>
+        <p:nvSpPr>
+          <p:cNvPr id="4" name="Shape 2"/>
+          <p:cNvSpPr/>
+          <p:nvPr/>
+        </p:nvSpPr>
+        <p:spPr>
+          <a:xfrm>
+            <a:off x="457200" y="1463040"/>
+            <a:ext cx="502920" cy="502920"/>
+          </a:xfrm>
+          <a:prstGeom prst="ellipse">
+            <a:avLst/>
+          </a:prstGeom>
+          <a:solidFill>
+            <a:srgbClr val="1D2733"/>
+          </a:solidFill>
+          <a:ln w="12700">
+            <a:solidFill>
+              <a:srgbClr val="1D2733"/>
+            </a:solidFill>
+            <a:prstDash val="solid"/>
+          </a:ln>
+        </p:spPr>
+      </p:sp>
+      <p:sp>
+        <p:nvSpPr>
+          <p:cNvPr id="5" name="Text 3"/>
+          <p:cNvSpPr txBox="1"/>
+          <p:nvPr/>
+        </p:nvSpPr>
+        <p:spPr>
+          <a:xfrm>
+            <a:off x="457200" y="1463040"/>
+            <a:ext cx="502920" cy="502920"/>
+          </a:xfrm>
+          <a:prstGeom prst="rect">
+            <a:avLst/>
+          </a:prstGeom>
+          <a:noFill/>
+          <a:ln/>
+        </p:spPr>
+        <p:txBody>
+          <a:bodyPr wrap="square" lIns="0" tIns="0" rIns="0" bIns="0" rtlCol="0" anchor="ctr"/>
+          <a:lstStyle/>
+          <a:p>
+            <a:pPr algn="ctr" indent="0" marL="0">
+              <a:buNone/>
+            </a:pPr>
+            <a:r>
+              <a:rPr lang="en-US" sz="1800" b="1" dirty="0">
+                <a:solidFill>
+                  <a:srgbClr val="FFFFFF"/>
+                </a:solidFill>
+                <a:latin typeface="Cambria" pitchFamily="34" charset="0"/>
+                <a:ea typeface="Cambria" pitchFamily="34" charset="-122"/>
+                <a:cs typeface="Cambria" pitchFamily="34" charset="-120"/>
+              </a:rPr>
+              <a:t>1</a:t>
+            </a:r>
+            <a:endParaRPr lang="en-US" sz="1800" dirty="0"/>
+          </a:p>
+        </p:txBody>
+      </p:sp>
+      <p:sp>
+        <p:nvSpPr>
+          <p:cNvPr id="6" name="Text 4"/>
+          <p:cNvSpPr txBox="1"/>
+          <p:nvPr/>
+        </p:nvSpPr>
+        <p:spPr>
+          <a:xfrm>
+            <a:off x="457200" y="2103120"/>
+            <a:ext cx="2560320" cy="457200"/>
+          </a:xfrm>
+          <a:prstGeom prst="rect">
+            <a:avLst/>
+          </a:prstGeom>
+          <a:noFill/>
+          <a:ln/>
+        </p:spPr>
+        <p:txBody>
+          <a:bodyPr wrap="square" lIns="0" tIns="0" rIns="0" bIns="0" rtlCol="0" anchor="ctr"/>
+          <a:lstStyle/>
+          <a:p>
+            <a:pPr indent="0" marL="0">
+              <a:buNone/>
+            </a:pPr>
+            <a:r>
+              <a:rPr lang="en-US" sz="1500" b="1" dirty="0">
+                <a:solidFill>
+                  <a:srgbClr val="1F1F1F"/>
+                </a:solidFill>
+                <a:latin typeface="Cambria" pitchFamily="34" charset="0"/>
+                <a:ea typeface="Cambria" pitchFamily="34" charset="-122"/>
+                <a:cs typeface="Cambria" pitchFamily="34" charset="-120"/>
+              </a:rPr>
+              <a:t>Run the framework as before</a:t>
+            </a:r>
+            <a:endParaRPr lang="en-US" sz="1500" dirty="0"/>
+          </a:p>
+        </p:txBody>
+      </p:sp>
+      <p:sp>
+        <p:nvSpPr>
+          <p:cNvPr id="7" name="Text 5"/>
+          <p:cNvSpPr txBox="1"/>
+          <p:nvPr/>
+        </p:nvSpPr>
+        <p:spPr>
+          <a:xfrm>
+            <a:off x="457200" y="2606040"/>
+            <a:ext cx="2560320" cy="1645920"/>
+          </a:xfrm>
+          <a:prstGeom prst="rect">
+            <a:avLst/>
+          </a:prstGeom>
+          <a:noFill/>
+          <a:ln/>
+        </p:spPr>
+        <p:txBody>
+          <a:bodyPr wrap="square" lIns="0" tIns="0" rIns="0" bIns="0" rtlCol="0" anchor="t"/>
+          <a:lstStyle/>
+          <a:p>
+            <a:pPr indent="0" marL="0">
+              <a:buNone/>
+            </a:pPr>
+            <a:r>
+              <a:rPr lang="en-US" sz="1200" dirty="0">
+                <a:solidFill>
+                  <a:srgbClr val="1F1F1F"/>
+                </a:solidFill>
+                <a:latin typeface="Calibri" pitchFamily="34" charset="0"/>
+                <a:ea typeface="Calibri" pitchFamily="34" charset="-122"/>
+                <a:cs typeface="Calibri" pitchFamily="34" charset="-120"/>
+              </a:rPr>
+              <a:t>Open v1.2.0, enable content, fill General Information, build alternatives with Alternative Setup. Click View Summary: categories, closures, the 7 percent flag and five charts, no import needed.</a:t>
+            </a:r>
+            <a:endParaRPr lang="en-US" sz="1200" dirty="0"/>
+          </a:p>
+        </p:txBody>
+      </p:sp>
+      <p:sp>
+        <p:nvSpPr>
+          <p:cNvPr id="8" name="Shape 6"/>
+          <p:cNvSpPr/>
+          <p:nvPr/>
+        </p:nvSpPr>
+        <p:spPr>
+          <a:xfrm>
+            <a:off x="3246120" y="1463040"/>
+            <a:ext cx="502920" cy="502920"/>
+          </a:xfrm>
+          <a:prstGeom prst="ellipse">
+            <a:avLst/>
+          </a:prstGeom>
+          <a:solidFill>
+            <a:srgbClr val="1D2733"/>
+          </a:solidFill>
+          <a:ln w="12700">
+            <a:solidFill>
+              <a:srgbClr val="1D2733"/>
+            </a:solidFill>
+            <a:prstDash val="solid"/>
+          </a:ln>
+        </p:spPr>
+      </p:sp>
+      <p:sp>
+        <p:nvSpPr>
+          <p:cNvPr id="9" name="Text 7"/>
+          <p:cNvSpPr txBox="1"/>
+          <p:nvPr/>
+        </p:nvSpPr>
+        <p:spPr>
+          <a:xfrm>
+            <a:off x="3246120" y="1463040"/>
+            <a:ext cx="502920" cy="502920"/>
+          </a:xfrm>
+          <a:prstGeom prst="rect">
+            <a:avLst/>
+          </a:prstGeom>
+          <a:noFill/>
+          <a:ln/>
+        </p:spPr>
+        <p:txBody>
+          <a:bodyPr wrap="square" lIns="0" tIns="0" rIns="0" bIns="0" rtlCol="0" anchor="ctr"/>
+          <a:lstStyle/>
+          <a:p>
+            <a:pPr algn="ctr" indent="0" marL="0">
+              <a:buNone/>
+            </a:pPr>
+            <a:r>
+              <a:rPr lang="en-US" sz="1800" b="1" dirty="0">
+                <a:solidFill>
+                  <a:srgbClr val="FFFFFF"/>
+                </a:solidFill>
+                <a:latin typeface="Cambria" pitchFamily="34" charset="0"/>
+                <a:ea typeface="Cambria" pitchFamily="34" charset="-122"/>
+                <a:cs typeface="Cambria" pitchFamily="34" charset="-120"/>
+              </a:rPr>
+              <a:t>2</a:t>
+            </a:r>
+            <a:endParaRPr lang="en-US" sz="1800" dirty="0"/>
+          </a:p>
+        </p:txBody>
+      </p:sp>
+      <p:sp>
+        <p:nvSpPr>
+          <p:cNvPr id="10" name="Text 8"/>
+          <p:cNvSpPr txBox="1"/>
+          <p:nvPr/>
+        </p:nvSpPr>
+        <p:spPr>
+          <a:xfrm>
+            <a:off x="3246120" y="2103120"/>
+            <a:ext cx="2560320" cy="457200"/>
+          </a:xfrm>
+          <a:prstGeom prst="rect">
+            <a:avLst/>
+          </a:prstGeom>
+          <a:noFill/>
+          <a:ln/>
+        </p:spPr>
+        <p:txBody>
+          <a:bodyPr wrap="square" lIns="0" tIns="0" rIns="0" bIns="0" rtlCol="0" anchor="ctr"/>
+          <a:lstStyle/>
+          <a:p>
+            <a:pPr indent="0" marL="0">
+              <a:buNone/>
+            </a:pPr>
+            <a:r>
+              <a:rPr lang="en-US" sz="1500" b="1" dirty="0">
+                <a:solidFill>
+                  <a:srgbClr val="1F1F1F"/>
+                </a:solidFill>
+                <a:latin typeface="Cambria" pitchFamily="34" charset="0"/>
+                <a:ea typeface="Cambria" pitchFamily="34" charset="-122"/>
+                <a:cs typeface="Cambria" pitchFamily="34" charset="-120"/>
+              </a:rPr>
+              <a:t>Copy the TEMPLATE sheet</a:t>
+            </a:r>
+            <a:endParaRPr lang="en-US" sz="1500" dirty="0"/>
+          </a:p>
+        </p:txBody>
+      </p:sp>
+      <p:sp>
+        <p:nvSpPr>
+          <p:cNvPr id="11" name="Text 9"/>
+          <p:cNvSpPr txBox="1"/>
+          <p:nvPr/>
+        </p:nvSpPr>
+        <p:spPr>
+          <a:xfrm>
+            <a:off x="3246120" y="2606040"/>
+            <a:ext cx="2560320" cy="1645920"/>
+          </a:xfrm>
+          <a:prstGeom prst="rect">
+            <a:avLst/>
+          </a:prstGeom>
+          <a:noFill/>
+          <a:ln/>
+        </p:spPr>
+        <p:txBody>
+          <a:bodyPr wrap="square" lIns="0" tIns="0" rIns="0" bIns="0" rtlCol="0" anchor="t"/>
+          <a:lstStyle/>
+          <a:p>
+            <a:pPr indent="0" marL="0">
+              <a:buNone/>
+            </a:pPr>
+            <a:r>
+              <a:rPr lang="en-US" sz="1200" dirty="0">
+                <a:solidFill>
+                  <a:srgbClr val="1F1F1F"/>
+                </a:solidFill>
+                <a:latin typeface="Calibri" pitchFamily="34" charset="0"/>
+                <a:ea typeface="Calibri" pitchFamily="34" charset="-122"/>
+                <a:cs typeface="Calibri" pitchFamily="34" charset="-120"/>
+              </a:rPr>
+              <a:t>In the decision workbook, right-click TEMPLATE, Move or Copy, rename. Paste the base costs and closure days from each Alt sheet into the yellow cells.</a:t>
+            </a:r>
+            <a:endParaRPr lang="en-US" sz="1200" dirty="0"/>
+          </a:p>
+        </p:txBody>
+      </p:sp>
+      <p:sp>
+        <p:nvSpPr>
+          <p:cNvPr id="12" name="Shape 10"/>
+          <p:cNvSpPr/>
+          <p:nvPr/>
+        </p:nvSpPr>
+        <p:spPr>
+          <a:xfrm>
+            <a:off x="6035040" y="1463040"/>
+            <a:ext cx="502920" cy="502920"/>
+          </a:xfrm>
+          <a:prstGeom prst="ellipse">
+            <a:avLst/>
+          </a:prstGeom>
+          <a:solidFill>
+            <a:srgbClr val="1D2733"/>
+          </a:solidFill>
+          <a:ln w="12700">
+            <a:solidFill>
+              <a:srgbClr val="1D2733"/>
+            </a:solidFill>
+            <a:prstDash val="solid"/>
+          </a:ln>
+        </p:spPr>
+      </p:sp>
+      <p:sp>
+        <p:nvSpPr>
+          <p:cNvPr id="13" name="Text 11"/>
+          <p:cNvSpPr txBox="1"/>
+          <p:nvPr/>
+        </p:nvSpPr>
+        <p:spPr>
+          <a:xfrm>
+            <a:off x="6035040" y="1463040"/>
+            <a:ext cx="502920" cy="502920"/>
+          </a:xfrm>
+          <a:prstGeom prst="rect">
+            <a:avLst/>
+          </a:prstGeom>
+          <a:noFill/>
+          <a:ln/>
+        </p:spPr>
+        <p:txBody>
+          <a:bodyPr wrap="square" lIns="0" tIns="0" rIns="0" bIns="0" rtlCol="0" anchor="ctr"/>
+          <a:lstStyle/>
+          <a:p>
+            <a:pPr algn="ctr" indent="0" marL="0">
+              <a:buNone/>
+            </a:pPr>
+            <a:r>
+              <a:rPr lang="en-US" sz="1800" b="1" dirty="0">
+                <a:solidFill>
+                  <a:srgbClr val="FFFFFF"/>
+                </a:solidFill>
+                <a:latin typeface="Cambria" pitchFamily="34" charset="0"/>
+                <a:ea typeface="Cambria" pitchFamily="34" charset="-122"/>
+                <a:cs typeface="Cambria" pitchFamily="34" charset="-120"/>
+              </a:rPr>
+              <a:t>3</a:t>
+            </a:r>
+            <a:endParaRPr lang="en-US" sz="1800" dirty="0"/>
+          </a:p>
+        </p:txBody>
+      </p:sp>
+      <p:sp>
+        <p:nvSpPr>
+          <p:cNvPr id="14" name="Text 12"/>
+          <p:cNvSpPr txBox="1"/>
+          <p:nvPr/>
+        </p:nvSpPr>
+        <p:spPr>
+          <a:xfrm>
+            <a:off x="6035040" y="2103120"/>
+            <a:ext cx="2560320" cy="457200"/>
+          </a:xfrm>
+          <a:prstGeom prst="rect">
+            <a:avLst/>
+          </a:prstGeom>
+          <a:noFill/>
+          <a:ln/>
+        </p:spPr>
+        <p:txBody>
+          <a:bodyPr wrap="square" lIns="0" tIns="0" rIns="0" bIns="0" rtlCol="0" anchor="ctr"/>
+          <a:lstStyle/>
+          <a:p>
+            <a:pPr indent="0" marL="0">
+              <a:buNone/>
+            </a:pPr>
+            <a:r>
+              <a:rPr lang="en-US" sz="1500" b="1" dirty="0">
+                <a:solidFill>
+                  <a:srgbClr val="1F1F1F"/>
+                </a:solidFill>
+                <a:latin typeface="Cambria" pitchFamily="34" charset="0"/>
+                <a:ea typeface="Cambria" pitchFamily="34" charset="-122"/>
+                <a:cs typeface="Cambria" pitchFamily="34" charset="-120"/>
+              </a:rPr>
+              <a:t>Read the decision blocks</a:t>
+            </a:r>
+            <a:endParaRPr lang="en-US" sz="1500" dirty="0"/>
+          </a:p>
+        </p:txBody>
+      </p:sp>
+      <p:sp>
+        <p:nvSpPr>
+          <p:cNvPr id="15" name="Text 13"/>
+          <p:cNvSpPr txBox="1"/>
+          <p:nvPr/>
+        </p:nvSpPr>
+        <p:spPr>
+          <a:xfrm>
+            <a:off x="6035040" y="2606040"/>
+            <a:ext cx="2560320" cy="1645920"/>
+          </a:xfrm>
+          <a:prstGeom prst="rect">
+            <a:avLst/>
+          </a:prstGeom>
+          <a:noFill/>
+          <a:ln/>
+        </p:spPr>
+        <p:txBody>
+          <a:bodyPr wrap="square" lIns="0" tIns="0" rIns="0" bIns="0" rtlCol="0" anchor="t"/>
+          <a:lstStyle/>
+          <a:p>
+            <a:pPr indent="0" marL="0">
+              <a:buNone/>
+            </a:pPr>
+            <a:r>
+              <a:rPr lang="en-US" sz="1200" dirty="0">
+                <a:solidFill>
+                  <a:srgbClr val="1F1F1F"/>
+                </a:solidFill>
+                <a:latin typeface="Calibri" pitchFamily="34" charset="0"/>
+                <a:ea typeface="Calibri" pitchFamily="34" charset="-122"/>
+                <a:cs typeface="Calibri" pitchFamily="34" charset="-120"/>
+              </a:rPr>
+              <a:t>RESULTS, BREAK-EVEN VALUES, the scenario scorecard and the decision map. Change any yellow cell and every chart follows. F9 redraws the simulation.</a:t>
+            </a:r>
+            <a:endParaRPr lang="en-US" sz="1200" dirty="0"/>
+          </a:p>
+        </p:txBody>
+      </p:sp>
+    </p:spTree>
+  </p:cSld>
+  <p:clrMapOvr>
+    <a:masterClrMapping/>
+  </p:clrMapOvr>
+</p:sld>
+</file>
+
+<file path=ppt/slides/slide19.xml><?xml version="1.0" encoding="utf-8"?>
+<p:sld xmlns:a="http://schemas.openxmlformats.org/drawingml/2006/main" xmlns:r="http://schemas.openxmlformats.org/officeDocument/2006/relationships" xmlns:p="http://schemas.openxmlformats.org/presentationml/2006/main">
+  <p:cSld name="Slide 19">
+    <p:bg>
+      <p:bgPr>
+        <a:solidFill>
+          <a:srgbClr val="FFFFFF"/>
+        </a:solidFill>
+      </p:bgPr>
+    </p:bg>
+    <p:spTree>
+      <p:nvGrpSpPr>
+        <p:cNvPr id="1" name=""/>
+        <p:cNvGrpSpPr/>
+        <p:nvPr/>
+      </p:nvGrpSpPr>
+      <p:grpSpPr>
+        <a:xfrm>
+          <a:off x="0" y="0"/>
+          <a:ext cx="0" cy="0"/>
+          <a:chOff x="0" y="0"/>
+          <a:chExt cx="0" cy="0"/>
+        </a:xfrm>
+      </p:grpSpPr>
+      <p:sp>
+        <p:nvSpPr>
+          <p:cNvPr id="2" name="Text 0"/>
+          <p:cNvSpPr txBox="1"/>
+          <p:nvPr/>
+        </p:nvSpPr>
+        <p:spPr>
+          <a:xfrm>
+            <a:off x="457200" y="320040"/>
+            <a:ext cx="8229600" cy="640080"/>
+          </a:xfrm>
+          <a:prstGeom prst="rect">
+            <a:avLst/>
+          </a:prstGeom>
+          <a:noFill/>
+          <a:ln/>
+        </p:spPr>
+        <p:txBody>
+          <a:bodyPr wrap="square" lIns="0" tIns="0" rIns="0" bIns="0" rtlCol="0" anchor="t"/>
+          <a:lstStyle/>
+          <a:p>
+            <a:pPr indent="0" marL="0">
+              <a:buNone/>
+            </a:pPr>
+            <a:r>
+              <a:rPr lang="en-US" sz="2800" b="1" dirty="0">
+                <a:solidFill>
+                  <a:srgbClr val="1F1F1F"/>
+                </a:solidFill>
+                <a:latin typeface="Cambria" pitchFamily="34" charset="0"/>
+                <a:ea typeface="Cambria" pitchFamily="34" charset="-122"/>
+                <a:cs typeface="Cambria" pitchFamily="34" charset="-120"/>
+              </a:rPr>
               <a:t>Open items</a:t>
             </a:r>
             <a:endParaRPr lang="en-US" sz="2800" dirty="0"/>
@@ -9398,7 +9798,7 @@
                 <a:ea typeface="Calibri" pitchFamily="34" charset="-122"/>
                 <a:cs typeface="Calibri" pitchFamily="34" charset="-120"/>
               </a:rPr>
-              <a:t>First open in Excel: run the six-step check, import Output.bas</a:t>
+              <a:t>First open in Excel: run the first-open check in the notes</a:t>
             </a:r>
             <a:endParaRPr lang="en-US" sz="1150" dirty="0"/>
           </a:p>
@@ -9470,155 +9870,6 @@
               <a:t>Optional later: a no-macro web version would remove the ActiveX problem entirely</a:t>
             </a:r>
             <a:endParaRPr lang="en-US" sz="1150" dirty="0"/>
-          </a:p>
-        </p:txBody>
-      </p:sp>
-    </p:spTree>
-  </p:cSld>
-  <p:clrMapOvr>
-    <a:masterClrMapping/>
-  </p:clrMapOvr>
-</p:sld>
-</file>
-
-<file path=ppt/slides/slide19.xml><?xml version="1.0" encoding="utf-8"?>
-<p:sld xmlns:a="http://schemas.openxmlformats.org/drawingml/2006/main" xmlns:r="http://schemas.openxmlformats.org/officeDocument/2006/relationships" xmlns:p="http://schemas.openxmlformats.org/presentationml/2006/main">
-  <p:cSld name="Slide 19">
-    <p:bg>
-      <p:bgPr>
-        <a:solidFill>
-          <a:srgbClr val="1D2733"/>
-        </a:solidFill>
-      </p:bgPr>
-    </p:bg>
-    <p:spTree>
-      <p:nvGrpSpPr>
-        <p:cNvPr id="1" name=""/>
-        <p:cNvGrpSpPr/>
-        <p:nvPr/>
-      </p:nvGrpSpPr>
-      <p:grpSpPr>
-        <a:xfrm>
-          <a:off x="0" y="0"/>
-          <a:ext cx="0" cy="0"/>
-          <a:chOff x="0" y="0"/>
-          <a:chExt cx="0" cy="0"/>
-        </a:xfrm>
-      </p:grpSpPr>
-      <p:sp>
-        <p:nvSpPr>
-          <p:cNvPr id="2" name="Text 0"/>
-          <p:cNvSpPr txBox="1"/>
-          <p:nvPr/>
-        </p:nvSpPr>
-        <p:spPr>
-          <a:xfrm>
-            <a:off x="548640" y="1097280"/>
-            <a:ext cx="8046720" cy="548640"/>
-          </a:xfrm>
-          <a:prstGeom prst="rect">
-            <a:avLst/>
-          </a:prstGeom>
-          <a:noFill/>
-          <a:ln/>
-        </p:spPr>
-        <p:txBody>
-          <a:bodyPr wrap="square" lIns="0" tIns="0" rIns="0" bIns="0" rtlCol="0" anchor="ctr"/>
-          <a:lstStyle/>
-          <a:p>
-            <a:pPr indent="0" marL="0">
-              <a:buNone/>
-            </a:pPr>
-            <a:r>
-              <a:rPr lang="en-US" sz="1400" i="1" dirty="0">
-                <a:solidFill>
-                  <a:srgbClr val="AEB8C4"/>
-                </a:solidFill>
-                <a:latin typeface="Calibri" pitchFamily="34" charset="0"/>
-                <a:ea typeface="Calibri" pitchFamily="34" charset="-122"/>
-                <a:cs typeface="Calibri" pitchFamily="34" charset="-120"/>
-              </a:rPr>
-              <a:t>In one line</a:t>
-            </a:r>
-            <a:endParaRPr lang="en-US" sz="1400" dirty="0"/>
-          </a:p>
-        </p:txBody>
-      </p:sp>
-      <p:sp>
-        <p:nvSpPr>
-          <p:cNvPr id="3" name="Text 1"/>
-          <p:cNvSpPr txBox="1"/>
-          <p:nvPr/>
-        </p:nvSpPr>
-        <p:spPr>
-          <a:xfrm>
-            <a:off x="548640" y="1645920"/>
-            <a:ext cx="8046720" cy="1463040"/>
-          </a:xfrm>
-          <a:prstGeom prst="rect">
-            <a:avLst/>
-          </a:prstGeom>
-          <a:noFill/>
-          <a:ln/>
-        </p:spPr>
-        <p:txBody>
-          <a:bodyPr wrap="square" lIns="0" tIns="0" rIns="0" bIns="0" rtlCol="0" anchor="t"/>
-          <a:lstStyle/>
-          <a:p>
-            <a:pPr indent="0" marL="0">
-              <a:buNone/>
-            </a:pPr>
-            <a:r>
-              <a:rPr lang="en-US" sz="2600" b="1" dirty="0">
-                <a:solidFill>
-                  <a:srgbClr val="FFFFFF"/>
-                </a:solidFill>
-                <a:latin typeface="Cambria" pitchFamily="34" charset="0"/>
-                <a:ea typeface="Cambria" pitchFamily="34" charset="-122"/>
-                <a:cs typeface="Cambria" pitchFamily="34" charset="-120"/>
-              </a:rPr>
-              <a:t>The tool now computes what it says it computes, shows why one alternative wins, and shows how many runway days that costs.</a:t>
-            </a:r>
-            <a:endParaRPr lang="en-US" sz="2600" dirty="0"/>
-          </a:p>
-        </p:txBody>
-      </p:sp>
-      <p:sp>
-        <p:nvSpPr>
-          <p:cNvPr id="4" name="Text 2"/>
-          <p:cNvSpPr txBox="1"/>
-          <p:nvPr/>
-        </p:nvSpPr>
-        <p:spPr>
-          <a:xfrm>
-            <a:off x="548640" y="4023360"/>
-            <a:ext cx="8046720" cy="548640"/>
-          </a:xfrm>
-          <a:prstGeom prst="rect">
-            <a:avLst/>
-          </a:prstGeom>
-          <a:noFill/>
-          <a:ln/>
-        </p:spPr>
-        <p:txBody>
-          <a:bodyPr wrap="square" lIns="0" tIns="0" rIns="0" bIns="0" rtlCol="0" anchor="ctr"/>
-          <a:lstStyle/>
-          <a:p>
-            <a:pPr indent="0" marL="0">
-              <a:buNone/>
-            </a:pPr>
-            <a:r>
-              <a:rPr lang="en-US" sz="1100" dirty="0">
-                <a:solidFill>
-                  <a:srgbClr val="AEB8C4"/>
-                </a:solidFill>
-                <a:latin typeface="Calibri" pitchFamily="34" charset="0"/>
-                <a:ea typeface="Calibri" pitchFamily="34" charset="-122"/>
-                <a:cs typeface="Calibri" pitchFamily="34" charset="-120"/>
-              </a:rPr>
-              <a:t>Deliverables: TDOA_LCCA_Framework_v1.2.0_ARA_09112026.xlsm  |  Output.bas  |  TDOT_LCCA_Decision_Workbook.xlsx  |  change notes</a:t>
-            </a:r>
-            <a:endParaRPr lang="en-US" sz="1100" dirty="0"/>
           </a:p>
         </p:txBody>
       </p:sp>
@@ -10228,6 +10479,155 @@
               <a:t>Full recalculation of every workbook with LibreOffice Calc before release</a:t>
             </a:r>
             <a:endParaRPr lang="en-US" sz="1150" dirty="0"/>
+          </a:p>
+        </p:txBody>
+      </p:sp>
+    </p:spTree>
+  </p:cSld>
+  <p:clrMapOvr>
+    <a:masterClrMapping/>
+  </p:clrMapOvr>
+</p:sld>
+</file>
+
+<file path=ppt/slides/slide20.xml><?xml version="1.0" encoding="utf-8"?>
+<p:sld xmlns:a="http://schemas.openxmlformats.org/drawingml/2006/main" xmlns:r="http://schemas.openxmlformats.org/officeDocument/2006/relationships" xmlns:p="http://schemas.openxmlformats.org/presentationml/2006/main">
+  <p:cSld name="Slide 20">
+    <p:bg>
+      <p:bgPr>
+        <a:solidFill>
+          <a:srgbClr val="1D2733"/>
+        </a:solidFill>
+      </p:bgPr>
+    </p:bg>
+    <p:spTree>
+      <p:nvGrpSpPr>
+        <p:cNvPr id="1" name=""/>
+        <p:cNvGrpSpPr/>
+        <p:nvPr/>
+      </p:nvGrpSpPr>
+      <p:grpSpPr>
+        <a:xfrm>
+          <a:off x="0" y="0"/>
+          <a:ext cx="0" cy="0"/>
+          <a:chOff x="0" y="0"/>
+          <a:chExt cx="0" cy="0"/>
+        </a:xfrm>
+      </p:grpSpPr>
+      <p:sp>
+        <p:nvSpPr>
+          <p:cNvPr id="2" name="Text 0"/>
+          <p:cNvSpPr txBox="1"/>
+          <p:nvPr/>
+        </p:nvSpPr>
+        <p:spPr>
+          <a:xfrm>
+            <a:off x="548640" y="1097280"/>
+            <a:ext cx="8046720" cy="548640"/>
+          </a:xfrm>
+          <a:prstGeom prst="rect">
+            <a:avLst/>
+          </a:prstGeom>
+          <a:noFill/>
+          <a:ln/>
+        </p:spPr>
+        <p:txBody>
+          <a:bodyPr wrap="square" lIns="0" tIns="0" rIns="0" bIns="0" rtlCol="0" anchor="ctr"/>
+          <a:lstStyle/>
+          <a:p>
+            <a:pPr indent="0" marL="0">
+              <a:buNone/>
+            </a:pPr>
+            <a:r>
+              <a:rPr lang="en-US" sz="1400" i="1" dirty="0">
+                <a:solidFill>
+                  <a:srgbClr val="AEB8C4"/>
+                </a:solidFill>
+                <a:latin typeface="Calibri" pitchFamily="34" charset="0"/>
+                <a:ea typeface="Calibri" pitchFamily="34" charset="-122"/>
+                <a:cs typeface="Calibri" pitchFamily="34" charset="-120"/>
+              </a:rPr>
+              <a:t>In one line</a:t>
+            </a:r>
+            <a:endParaRPr lang="en-US" sz="1400" dirty="0"/>
+          </a:p>
+        </p:txBody>
+      </p:sp>
+      <p:sp>
+        <p:nvSpPr>
+          <p:cNvPr id="3" name="Text 1"/>
+          <p:cNvSpPr txBox="1"/>
+          <p:nvPr/>
+        </p:nvSpPr>
+        <p:spPr>
+          <a:xfrm>
+            <a:off x="548640" y="1645920"/>
+            <a:ext cx="8046720" cy="1463040"/>
+          </a:xfrm>
+          <a:prstGeom prst="rect">
+            <a:avLst/>
+          </a:prstGeom>
+          <a:noFill/>
+          <a:ln/>
+        </p:spPr>
+        <p:txBody>
+          <a:bodyPr wrap="square" lIns="0" tIns="0" rIns="0" bIns="0" rtlCol="0" anchor="t"/>
+          <a:lstStyle/>
+          <a:p>
+            <a:pPr indent="0" marL="0">
+              <a:buNone/>
+            </a:pPr>
+            <a:r>
+              <a:rPr lang="en-US" sz="2600" b="1" dirty="0">
+                <a:solidFill>
+                  <a:srgbClr val="FFFFFF"/>
+                </a:solidFill>
+                <a:latin typeface="Cambria" pitchFamily="34" charset="0"/>
+                <a:ea typeface="Cambria" pitchFamily="34" charset="-122"/>
+                <a:cs typeface="Cambria" pitchFamily="34" charset="-120"/>
+              </a:rPr>
+              <a:t>The tool now computes what it says it computes, shows why one alternative wins, and shows how many runway days that costs.</a:t>
+            </a:r>
+            <a:endParaRPr lang="en-US" sz="2600" dirty="0"/>
+          </a:p>
+        </p:txBody>
+      </p:sp>
+      <p:sp>
+        <p:nvSpPr>
+          <p:cNvPr id="4" name="Text 2"/>
+          <p:cNvSpPr txBox="1"/>
+          <p:nvPr/>
+        </p:nvSpPr>
+        <p:spPr>
+          <a:xfrm>
+            <a:off x="548640" y="4023360"/>
+            <a:ext cx="8046720" cy="548640"/>
+          </a:xfrm>
+          <a:prstGeom prst="rect">
+            <a:avLst/>
+          </a:prstGeom>
+          <a:noFill/>
+          <a:ln/>
+        </p:spPr>
+        <p:txBody>
+          <a:bodyPr wrap="square" lIns="0" tIns="0" rIns="0" bIns="0" rtlCol="0" anchor="ctr"/>
+          <a:lstStyle/>
+          <a:p>
+            <a:pPr indent="0" marL="0">
+              <a:buNone/>
+            </a:pPr>
+            <a:r>
+              <a:rPr lang="en-US" sz="1100" dirty="0">
+                <a:solidFill>
+                  <a:srgbClr val="AEB8C4"/>
+                </a:solidFill>
+                <a:latin typeface="Calibri" pitchFamily="34" charset="0"/>
+                <a:ea typeface="Calibri" pitchFamily="34" charset="-122"/>
+                <a:cs typeface="Calibri" pitchFamily="34" charset="-120"/>
+              </a:rPr>
+              <a:t>Deliverables: TDOA_LCCA_Framework_v1.2.0_ARA_09112026.xlsm  |  TDOT_LCCA_Decision_Workbook.xlsx  |  Technical Change Record  |  change notes</a:t>
+            </a:r>
+            <a:endParaRPr lang="en-US" sz="1100" dirty="0"/>
           </a:p>
         </p:txBody>
       </p:sp>

--- a/tdot-lcca/TDOT_LCCA_Review_and_v1.2.0_Update.pptx
+++ b/tdot-lcca/TDOT_LCCA_Review_and_v1.2.0_Update.pptx
@@ -3843,8 +3843,8 @@
         </p:blipFill>
         <p:spPr>
           <a:xfrm>
-            <a:off x="1143000" y="1234440"/>
-            <a:ext cx="6858000" cy="3345366"/>
+            <a:off x="822960" y="1234440"/>
+            <a:ext cx="7498080" cy="3442645"/>
           </a:xfrm>
           <a:prstGeom prst="rect">
             <a:avLst/>
@@ -3859,7 +3859,7 @@
         </p:nvSpPr>
         <p:spPr>
           <a:xfrm>
-            <a:off x="457200" y="4625526"/>
+            <a:off x="457200" y="4722805"/>
             <a:ext cx="8229600" cy="411480"/>
           </a:xfrm>
           <a:prstGeom prst="rect">
@@ -3884,7 +3884,7 @@
                 <a:ea typeface="Calibri" pitchFamily="34" charset="-122"/>
                 <a:cs typeface="Calibri" pitchFamily="34" charset="-120"/>
               </a:rPr>
-              <a:t>Buttons at top left return to General Information and Instructions; a "View Summary" button sits under Alternative Setup. Chart data lives in columns W onward, marked "do not edit".</a:t>
+              <a:t>Buttons at top left return to General Information and Instructions; a matching "View Summary" button sits under Alternative Setup. Chart data lives in columns W onward, marked "do not edit".</a:t>
             </a:r>
             <a:endParaRPr lang="en-US" sz="1050" dirty="0"/>
           </a:p>

--- a/tdot-lcca/TDOT_LCCA_Review_and_v1.2.0_Update.pptx
+++ b/tdot-lcca/TDOT_LCCA_Review_and_v1.2.0_Update.pptx
@@ -7500,7 +7500,7 @@
           </p:nvPr>
         </p:nvGraphicFramePr>
         <p:xfrm>
-          <a:off x="457200" y="1188720"/>
+          <a:off x="457200" y="1097280"/>
           <a:ext cx="8229600" cy="914400"/>
         </p:xfrm>
         <a:graphic>
@@ -7508,8 +7508,8 @@
             <a:tbl>
               <a:tblPr/>
               <a:tblGrid>
-                <a:gridCol w="3291840"/>
-                <a:gridCol w="4937760"/>
+                <a:gridCol w="3108960"/>
+                <a:gridCol w="5120640"/>
               </a:tblGrid>
               <a:tr h="274320">
                 <a:tc>
@@ -7521,7 +7521,7 @@
                         <a:buNone/>
                       </a:pPr>
                       <a:r>
-                        <a:rPr lang="en-US" sz="1050" b="1" dirty="0">
+                        <a:rPr lang="en-US" sz="1000" b="1" dirty="0">
                           <a:solidFill>
                             <a:srgbClr val="1F1F1F"/>
                           </a:solidFill>
@@ -7531,7 +7531,7 @@
                         </a:rPr>
                         <a:t>Check</a:t>
                       </a:r>
-                      <a:endParaRPr lang="en-US" sz="1050" dirty="0">
+                      <a:endParaRPr lang="en-US" sz="1000" dirty="0">
                         <a:latin typeface="Calibri" charset="0"/>
                         <a:ea typeface="Calibri" charset="0"/>
                         <a:cs typeface="Calibri" charset="0"/>
@@ -7589,7 +7589,7 @@
                         <a:buNone/>
                       </a:pPr>
                       <a:r>
-                        <a:rPr lang="en-US" sz="1050" b="1" dirty="0">
+                        <a:rPr lang="en-US" sz="1000" b="1" dirty="0">
                           <a:solidFill>
                             <a:srgbClr val="1F1F1F"/>
                           </a:solidFill>
@@ -7599,7 +7599,7 @@
                         </a:rPr>
                         <a:t>Result</a:t>
                       </a:r>
-                      <a:endParaRPr lang="en-US" sz="1050" dirty="0">
+                      <a:endParaRPr lang="en-US" sz="1000" dirty="0">
                         <a:latin typeface="Calibri" charset="0"/>
                         <a:ea typeface="Calibri" charset="0"/>
                         <a:cs typeface="Calibri" charset="0"/>
@@ -7659,7 +7659,7 @@
                         <a:buNone/>
                       </a:pPr>
                       <a:r>
-                        <a:rPr lang="en-US" sz="1050" dirty="0">
+                        <a:rPr lang="en-US" sz="1000" dirty="0">
                           <a:solidFill>
                             <a:srgbClr val="1F1F1F"/>
                           </a:solidFill>
@@ -7669,7 +7669,7 @@
                         </a:rPr>
                         <a:t>Framework v1.2.0, full recalculation in LibreOffice Calc</a:t>
                       </a:r>
-                      <a:endParaRPr lang="en-US" sz="1050" dirty="0">
+                      <a:endParaRPr lang="en-US" sz="1000" dirty="0">
                         <a:latin typeface="Calibri" charset="0"/>
                         <a:ea typeface="Calibri" charset="0"/>
                         <a:cs typeface="Calibri" charset="0"/>
@@ -7727,7 +7727,7 @@
                         <a:buNone/>
                       </a:pPr>
                       <a:r>
-                        <a:rPr lang="en-US" sz="1050" dirty="0">
+                        <a:rPr lang="en-US" sz="1000" dirty="0">
                           <a:solidFill>
                             <a:srgbClr val="1F1F1F"/>
                           </a:solidFill>
@@ -7737,7 +7737,7 @@
                         </a:rPr>
                         <a:t>2,240 formulas incl. the new Summary, 0 errors (v1.1.2 shows 99 error cells under the same recalc)</a:t>
                       </a:r>
-                      <a:endParaRPr lang="en-US" sz="1050" dirty="0">
+                      <a:endParaRPr lang="en-US" sz="1000" dirty="0">
                         <a:latin typeface="Calibri" charset="0"/>
                         <a:ea typeface="Calibri" charset="0"/>
                         <a:cs typeface="Calibri" charset="0"/>
@@ -7797,7 +7797,7 @@
                         <a:buNone/>
                       </a:pPr>
                       <a:r>
-                        <a:rPr lang="en-US" sz="1050" dirty="0">
+                        <a:rPr lang="en-US" sz="1000" dirty="0">
                           <a:solidFill>
                             <a:srgbClr val="1F1F1F"/>
                           </a:solidFill>
@@ -7807,7 +7807,7 @@
                         </a:rPr>
                         <a:t>Patch applied to the populated MBT workbook</a:t>
                       </a:r>
-                      <a:endParaRPr lang="en-US" sz="1050" dirty="0">
+                      <a:endParaRPr lang="en-US" sz="1000" dirty="0">
                         <a:latin typeface="Calibri" charset="0"/>
                         <a:ea typeface="Calibri" charset="0"/>
                         <a:cs typeface="Calibri" charset="0"/>
@@ -7865,7 +7865,7 @@
                         <a:buNone/>
                       </a:pPr>
                       <a:r>
-                        <a:rPr lang="en-US" sz="1050" dirty="0">
+                        <a:rPr lang="en-US" sz="1000" dirty="0">
                           <a:solidFill>
                             <a:srgbClr val="1F1F1F"/>
                           </a:solidFill>
@@ -7875,7 +7875,7 @@
                         </a:rPr>
                         <a:t>NPW unchanged: $8,809,266 and $8,028,734; PCC blank rows now 0, not #N/A</a:t>
                       </a:r>
-                      <a:endParaRPr lang="en-US" sz="1050" dirty="0">
+                      <a:endParaRPr lang="en-US" sz="1000" dirty="0">
                         <a:latin typeface="Calibri" charset="0"/>
                         <a:ea typeface="Calibri" charset="0"/>
                         <a:cs typeface="Calibri" charset="0"/>
@@ -7935,7 +7935,7 @@
                         <a:buNone/>
                       </a:pPr>
                       <a:r>
-                        <a:rPr lang="en-US" sz="1050" dirty="0">
+                        <a:rPr lang="en-US" sz="1000" dirty="0">
                           <a:solidFill>
                             <a:srgbClr val="1F1F1F"/>
                           </a:solidFill>
@@ -7945,7 +7945,7 @@
                         </a:rPr>
                         <a:t>New year-indexed chart columns</a:t>
                       </a:r>
-                      <a:endParaRPr lang="en-US" sz="1050" dirty="0">
+                      <a:endParaRPr lang="en-US" sz="1000" dirty="0">
                         <a:latin typeface="Calibri" charset="0"/>
                         <a:ea typeface="Calibri" charset="0"/>
                         <a:cs typeface="Calibri" charset="0"/>
@@ -8003,7 +8003,7 @@
                         <a:buNone/>
                       </a:pPr>
                       <a:r>
-                        <a:rPr lang="en-US" sz="1050" dirty="0">
+                        <a:rPr lang="en-US" sz="1000" dirty="0">
                           <a:solidFill>
                             <a:srgbClr val="1F1F1F"/>
                           </a:solidFill>
@@ -8013,7 +8013,7 @@
                         </a:rPr>
                         <a:t>Direct plus lost revenue reconciles to activity totals; discounted column sums to NPW to the dollar</a:t>
                       </a:r>
-                      <a:endParaRPr lang="en-US" sz="1050" dirty="0">
+                      <a:endParaRPr lang="en-US" sz="1000" dirty="0">
                         <a:latin typeface="Calibri" charset="0"/>
                         <a:ea typeface="Calibri" charset="0"/>
                         <a:cs typeface="Calibri" charset="0"/>
@@ -8073,7 +8073,7 @@
                         <a:buNone/>
                       </a:pPr>
                       <a:r>
-                        <a:rPr lang="en-US" sz="1050" dirty="0">
+                        <a:rPr lang="en-US" sz="1000" dirty="0">
                           <a:solidFill>
                             <a:srgbClr val="1F1F1F"/>
                           </a:solidFill>
@@ -8081,9 +8081,9 @@
                           <a:ea typeface="Calibri" pitchFamily="34" charset="-122"/>
                           <a:cs typeface="Calibri" pitchFamily="34" charset="-120"/>
                         </a:rPr>
-                        <a:t>Patched chart XML</a:t>
+                        <a:t>Decision workbook, full recalculation</a:t>
                       </a:r>
-                      <a:endParaRPr lang="en-US" sz="1050" dirty="0">
+                      <a:endParaRPr lang="en-US" sz="1000" dirty="0">
                         <a:latin typeface="Calibri" charset="0"/>
                         <a:ea typeface="Calibri" charset="0"/>
                         <a:cs typeface="Calibri" charset="0"/>
@@ -8141,7 +8141,7 @@
                         <a:buNone/>
                       </a:pPr>
                       <a:r>
-                        <a:rPr lang="en-US" sz="1050" dirty="0">
+                        <a:rPr lang="en-US" sz="1000" dirty="0">
                           <a:solidFill>
                             <a:srgbClr val="1F1F1F"/>
                           </a:solidFill>
@@ -8149,9 +8149,9 @@
                           <a:ea typeface="Calibri" pitchFamily="34" charset="-122"/>
                           <a:cs typeface="Calibri" pitchFamily="34" charset="-120"/>
                         </a:rPr>
-                        <a:t>Well-formed; parsed by an independent chart reader with the intended year categories</a:t>
+                        <a:t>47,265 formulas, 0 errors</a:t>
                       </a:r>
-                      <a:endParaRPr lang="en-US" sz="1050" dirty="0">
+                      <a:endParaRPr lang="en-US" sz="1000" dirty="0">
                         <a:latin typeface="Calibri" charset="0"/>
                         <a:ea typeface="Calibri" charset="0"/>
                         <a:cs typeface="Calibri" charset="0"/>
@@ -8211,7 +8211,7 @@
                         <a:buNone/>
                       </a:pPr>
                       <a:r>
-                        <a:rPr lang="en-US" sz="1050" dirty="0">
+                        <a:rPr lang="en-US" sz="1000" dirty="0">
                           <a:solidFill>
                             <a:srgbClr val="1F1F1F"/>
                           </a:solidFill>
@@ -8219,9 +8219,9 @@
                           <a:ea typeface="Calibri" pitchFamily="34" charset="-122"/>
                           <a:cs typeface="Calibri" pitchFamily="34" charset="-120"/>
                         </a:rPr>
-                        <a:t>Decision workbook, full recalculation</a:t>
+                        <a:t>Decision workbook against an independent engine</a:t>
                       </a:r>
-                      <a:endParaRPr lang="en-US" sz="1050" dirty="0">
+                      <a:endParaRPr lang="en-US" sz="1000" dirty="0">
                         <a:latin typeface="Calibri" charset="0"/>
                         <a:ea typeface="Calibri" charset="0"/>
                         <a:cs typeface="Calibri" charset="0"/>
@@ -8279,7 +8279,7 @@
                         <a:buNone/>
                       </a:pPr>
                       <a:r>
-                        <a:rPr lang="en-US" sz="1050" dirty="0">
+                        <a:rPr lang="en-US" sz="1000" dirty="0">
                           <a:solidFill>
                             <a:srgbClr val="1F1F1F"/>
                           </a:solidFill>
@@ -8287,9 +8287,9 @@
                           <a:ea typeface="Calibri" pitchFamily="34" charset="-122"/>
                           <a:cs typeface="Calibri" pitchFamily="34" charset="-120"/>
                         </a:rPr>
-                        <a:t>47,265 formulas, 0 errors</a:t>
+                        <a:t>NPW, categories, break-evens, sensitivity, tornado, 12 scenarios and the decision map agree to the dollar</a:t>
                       </a:r>
-                      <a:endParaRPr lang="en-US" sz="1050" dirty="0">
+                      <a:endParaRPr lang="en-US" sz="1000" dirty="0">
                         <a:latin typeface="Calibri" charset="0"/>
                         <a:ea typeface="Calibri" charset="0"/>
                         <a:cs typeface="Calibri" charset="0"/>
@@ -8349,7 +8349,7 @@
                         <a:buNone/>
                       </a:pPr>
                       <a:r>
-                        <a:rPr lang="en-US" sz="1050" dirty="0">
+                        <a:rPr lang="en-US" sz="1000" dirty="0">
                           <a:solidFill>
                             <a:srgbClr val="1F1F1F"/>
                           </a:solidFill>
@@ -8357,9 +8357,9 @@
                           <a:ea typeface="Calibri" pitchFamily="34" charset="-122"/>
                           <a:cs typeface="Calibri" pitchFamily="34" charset="-120"/>
                         </a:rPr>
-                        <a:t>Decision workbook against an independent engine</a:t>
+                        <a:t>New Summary sheet on the MBT data</a:t>
                       </a:r>
-                      <a:endParaRPr lang="en-US" sz="1050" dirty="0">
+                      <a:endParaRPr lang="en-US" sz="1000" dirty="0">
                         <a:latin typeface="Calibri" charset="0"/>
                         <a:ea typeface="Calibri" charset="0"/>
                         <a:cs typeface="Calibri" charset="0"/>
@@ -8417,7 +8417,7 @@
                         <a:buNone/>
                       </a:pPr>
                       <a:r>
-                        <a:rPr lang="en-US" sz="1050" dirty="0">
+                        <a:rPr lang="en-US" sz="1000" dirty="0">
                           <a:solidFill>
                             <a:srgbClr val="1F1F1F"/>
                           </a:solidFill>
@@ -8425,9 +8425,9 @@
                           <a:ea typeface="Calibri" pitchFamily="34" charset="-122"/>
                           <a:cs typeface="Calibri" pitchFamily="34" charset="-120"/>
                         </a:rPr>
-                        <a:t>NPW, categories, break-evens, sensitivity, tornado, 12 scenarios and the decision map agree to the dollar</a:t>
+                        <a:t>Table, verdict, categories and closure days match; six charts render; template reads "No alternatives yet" with no errors</a:t>
                       </a:r>
-                      <a:endParaRPr lang="en-US" sz="1050" dirty="0">
+                      <a:endParaRPr lang="en-US" sz="1000" dirty="0">
                         <a:latin typeface="Calibri" charset="0"/>
                         <a:ea typeface="Calibri" charset="0"/>
                         <a:cs typeface="Calibri" charset="0"/>
@@ -8487,7 +8487,7 @@
                         <a:buNone/>
                       </a:pPr>
                       <a:r>
-                        <a:rPr lang="en-US" sz="1050" dirty="0">
+                        <a:rPr lang="en-US" sz="1000" dirty="0">
                           <a:solidFill>
                             <a:srgbClr val="1F1F1F"/>
                           </a:solidFill>
@@ -8495,9 +8495,9 @@
                           <a:ea typeface="Calibri" pitchFamily="34" charset="-122"/>
                           <a:cs typeface="Calibri" pitchFamily="34" charset="-120"/>
                         </a:rPr>
-                        <a:t>Charts rendered to PDF</a:t>
+                        <a:t>Scripted click-through (LibreOffice API)</a:t>
                       </a:r>
-                      <a:endParaRPr lang="en-US" sz="1050" dirty="0">
+                      <a:endParaRPr lang="en-US" sz="1000" dirty="0">
                         <a:latin typeface="Calibri" charset="0"/>
                         <a:ea typeface="Calibri" charset="0"/>
                         <a:cs typeface="Calibri" charset="0"/>
@@ -8555,7 +8555,7 @@
                         <a:buNone/>
                       </a:pPr>
                       <a:r>
-                        <a:rPr lang="en-US" sz="1050" dirty="0">
+                        <a:rPr lang="en-US" sz="1000" dirty="0">
                           <a:solidFill>
                             <a:srgbClr val="1F1F1F"/>
                           </a:solidFill>
@@ -8563,9 +8563,9 @@
                           <a:ea typeface="Calibri" pitchFamily="34" charset="-122"/>
                           <a:cs typeface="Calibri" pitchFamily="34" charset="-120"/>
                         </a:rPr>
-                        <a:t>All eight per-project charts and the simulation histogram draw correctly</a:t>
+                        <a:t>Buttons land where they should; 7% flips the verdict as flagged; 20 years drops late closures; unknown airport gives $0 lost revenue with a warning, no errors</a:t>
                       </a:r>
-                      <a:endParaRPr lang="en-US" sz="1050" dirty="0">
+                      <a:endParaRPr lang="en-US" sz="1000" dirty="0">
                         <a:latin typeface="Calibri" charset="0"/>
                         <a:ea typeface="Calibri" charset="0"/>
                         <a:cs typeface="Calibri" charset="0"/>
@@ -8625,7 +8625,7 @@
                         <a:buNone/>
                       </a:pPr>
                       <a:r>
-                        <a:rPr lang="en-US" sz="1050" dirty="0">
+                        <a:rPr lang="en-US" sz="1000" dirty="0">
                           <a:solidFill>
                             <a:srgbClr val="1F1F1F"/>
                           </a:solidFill>
@@ -8633,9 +8633,9 @@
                           <a:ea typeface="Calibri" pitchFamily="34" charset="-122"/>
                           <a:cs typeface="Calibri" pitchFamily="34" charset="-120"/>
                         </a:rPr>
-                        <a:t>New Summary sheet on the MBT data</a:t>
+                        <a:t>Not yet verified</a:t>
                       </a:r>
-                      <a:endParaRPr lang="en-US" sz="1050" dirty="0">
+                      <a:endParaRPr lang="en-US" sz="1000" dirty="0">
                         <a:latin typeface="Calibri" charset="0"/>
                         <a:ea typeface="Calibri" charset="0"/>
                         <a:cs typeface="Calibri" charset="0"/>
@@ -8693,145 +8693,7 @@
                         <a:buNone/>
                       </a:pPr>
                       <a:r>
-                        <a:rPr lang="en-US" sz="1050" dirty="0">
-                          <a:solidFill>
-                            <a:srgbClr val="1F1F1F"/>
-                          </a:solidFill>
-                          <a:latin typeface="Calibri" pitchFamily="34" charset="0"/>
-                          <a:ea typeface="Calibri" pitchFamily="34" charset="-122"/>
-                          <a:cs typeface="Calibri" pitchFamily="34" charset="-120"/>
-                        </a:rPr>
-                        <a:t>Table, verdict, categories and closure days match; six charts render; template reads "No alternatives yet" with no errors</a:t>
-                      </a:r>
-                      <a:endParaRPr lang="en-US" sz="1050" dirty="0">
-                        <a:latin typeface="Calibri" charset="0"/>
-                        <a:ea typeface="Calibri" charset="0"/>
-                        <a:cs typeface="Calibri" charset="0"/>
-                      </a:endParaRPr>
-                    </a:p>
-                  </a:txBody>
-                  <a:tcPr marL="45720" marR="45720" marT="45720" marB="45720" anchor="ctr">
-                    <a:lnL w="6350" cap="flat" cmpd="sng" algn="ctr">
-                      <a:solidFill>
-                        <a:srgbClr val="C9C9C4"/>
-                      </a:solidFill>
-                      <a:prstDash val="solid"/>
-                      <a:round/>
-                      <a:headEnd type="none" w="med" len="med"/>
-                      <a:tailEnd type="none" w="med" len="med"/>
-                    </a:lnL>
-                    <a:lnR w="6350" cap="flat" cmpd="sng" algn="ctr">
-                      <a:solidFill>
-                        <a:srgbClr val="C9C9C4"/>
-                      </a:solidFill>
-                      <a:prstDash val="solid"/>
-                      <a:round/>
-                      <a:headEnd type="none" w="med" len="med"/>
-                      <a:tailEnd type="none" w="med" len="med"/>
-                    </a:lnR>
-                    <a:lnT w="6350" cap="flat" cmpd="sng" algn="ctr">
-                      <a:solidFill>
-                        <a:srgbClr val="C9C9C4"/>
-                      </a:solidFill>
-                      <a:prstDash val="solid"/>
-                      <a:round/>
-                      <a:headEnd type="none" w="med" len="med"/>
-                      <a:tailEnd type="none" w="med" len="med"/>
-                    </a:lnT>
-                    <a:lnB w="6350" cap="flat" cmpd="sng" algn="ctr">
-                      <a:solidFill>
-                        <a:srgbClr val="C9C9C4"/>
-                      </a:solidFill>
-                      <a:prstDash val="solid"/>
-                      <a:round/>
-                      <a:headEnd type="none" w="med" len="med"/>
-                      <a:tailEnd type="none" w="med" len="med"/>
-                    </a:lnB>
-                    <a:solidFill>
-                      <a:srgbClr val="FFFFFF"/>
-                    </a:solidFill>
-                  </a:tcPr>
-                </a:tc>
-              </a:tr>
-              <a:tr h="274320">
-                <a:tc>
-                  <a:txBody>
-                    <a:bodyPr/>
-                    <a:lstStyle/>
-                    <a:p>
-                      <a:pPr indent="0" marL="0">
-                        <a:buNone/>
-                      </a:pPr>
-                      <a:r>
-                        <a:rPr lang="en-US" sz="1050" dirty="0">
-                          <a:solidFill>
-                            <a:srgbClr val="1F1F1F"/>
-                          </a:solidFill>
-                          <a:latin typeface="Calibri" pitchFamily="34" charset="0"/>
-                          <a:ea typeface="Calibri" pitchFamily="34" charset="-122"/>
-                          <a:cs typeface="Calibri" pitchFamily="34" charset="-120"/>
-                        </a:rPr>
-                        <a:t>Not yet verified</a:t>
-                      </a:r>
-                      <a:endParaRPr lang="en-US" sz="1050" dirty="0">
-                        <a:latin typeface="Calibri" charset="0"/>
-                        <a:ea typeface="Calibri" charset="0"/>
-                        <a:cs typeface="Calibri" charset="0"/>
-                      </a:endParaRPr>
-                    </a:p>
-                  </a:txBody>
-                  <a:tcPr marL="45720" marR="45720" marT="45720" marB="45720" anchor="ctr">
-                    <a:lnL w="6350" cap="flat" cmpd="sng" algn="ctr">
-                      <a:solidFill>
-                        <a:srgbClr val="C9C9C4"/>
-                      </a:solidFill>
-                      <a:prstDash val="solid"/>
-                      <a:round/>
-                      <a:headEnd type="none" w="med" len="med"/>
-                      <a:tailEnd type="none" w="med" len="med"/>
-                    </a:lnL>
-                    <a:lnR w="6350" cap="flat" cmpd="sng" algn="ctr">
-                      <a:solidFill>
-                        <a:srgbClr val="C9C9C4"/>
-                      </a:solidFill>
-                      <a:prstDash val="solid"/>
-                      <a:round/>
-                      <a:headEnd type="none" w="med" len="med"/>
-                      <a:tailEnd type="none" w="med" len="med"/>
-                    </a:lnR>
-                    <a:lnT w="6350" cap="flat" cmpd="sng" algn="ctr">
-                      <a:solidFill>
-                        <a:srgbClr val="C9C9C4"/>
-                      </a:solidFill>
-                      <a:prstDash val="solid"/>
-                      <a:round/>
-                      <a:headEnd type="none" w="med" len="med"/>
-                      <a:tailEnd type="none" w="med" len="med"/>
-                    </a:lnT>
-                    <a:lnB w="6350" cap="flat" cmpd="sng" algn="ctr">
-                      <a:solidFill>
-                        <a:srgbClr val="C9C9C4"/>
-                      </a:solidFill>
-                      <a:prstDash val="solid"/>
-                      <a:round/>
-                      <a:headEnd type="none" w="med" len="med"/>
-                      <a:tailEnd type="none" w="med" len="med"/>
-                    </a:lnB>
-                    <a:solidFill>
-                      <a:srgbClr val="FFFFFF"/>
-                    </a:solidFill>
-                  </a:tcPr>
-                </a:tc>
-                <a:tc>
-                  <a:txBody>
-                    <a:bodyPr/>
-                    <a:lstStyle/>
-                    <a:p>
-                      <a:pPr indent="0" marL="0">
-                        <a:buNone/>
-                      </a:pPr>
-                      <a:r>
-                        <a:rPr lang="en-US" sz="1050" dirty="0">
+                        <a:rPr lang="en-US" sz="1000" dirty="0">
                           <a:solidFill>
                             <a:srgbClr val="1F1F1F"/>
                           </a:solidFill>
@@ -8841,7 +8703,7 @@
                         </a:rPr>
                         <a:t>The alternative-sheet charts in Excel itself (no Excel here); a first-open check is in the notes</a:t>
                       </a:r>
-                      <a:endParaRPr lang="en-US" sz="1050" dirty="0">
+                      <a:endParaRPr lang="en-US" sz="1000" dirty="0">
                         <a:latin typeface="Calibri" charset="0"/>
                         <a:ea typeface="Calibri" charset="0"/>
                         <a:cs typeface="Calibri" charset="0"/>

--- a/tdot-lcca/TDOT_LCCA_Review_and_v1.2.0_Update.pptx
+++ b/tdot-lcca/TDOT_LCCA_Review_and_v1.2.0_Update.pptx
@@ -8563,7 +8563,7 @@
                           <a:ea typeface="Calibri" pitchFamily="34" charset="-122"/>
                           <a:cs typeface="Calibri" pitchFamily="34" charset="-120"/>
                         </a:rPr>
-                        <a:t>Buttons land where they should; 7% flips the verdict as flagged; 20 years drops late closures; unknown airport gives $0 lost revenue with a warning, no errors</a:t>
+                        <a:t>Buttons land where they should; 7% flips the verdict as flagged; 20 years drops late closures; unknown airport gives $0 lost revenue with a warning; deleting an alternative shifts the table with no #REF!; ties and four alternatives read cleanly</a:t>
                       </a:r>
                       <a:endParaRPr lang="en-US" sz="1000" dirty="0">
                         <a:latin typeface="Calibri" charset="0"/>

--- a/tdot-lcca/TDOT_LCCA_Review_and_v1.2.0_Update.pptx
+++ b/tdot-lcca/TDOT_LCCA_Review_and_v1.2.0_Update.pptx
@@ -25,9 +25,10 @@
     <p:sldId id="273" r:id="rId19"/>
     <p:sldId id="274" r:id="rId20"/>
     <p:sldId id="275" r:id="rId21"/>
+    <p:sldId id="276" r:id="rId22"/>
   </p:sldIdLst>
   <p:notesMasterIdLst>
-    <p:notesMasterId r:id="rId22"/>
+    <p:notesMasterId r:id="rId23"/>
   </p:notesMasterIdLst>
   <p:sldSz cx="9144000" cy="5143500"/>
   <p:notesSz cx="5143500" cy="9144000"/>
@@ -785,7 +786,7 @@
           <a:p>
             <a:r>
               <a:rPr lang="en-US" dirty="0"/>
-              <a:t>Everything is a formula. Change the discount rate cell and the sensitivity, tornado, map and charts all move.</a:t>
+              <a:t>Every row has a source; the research note in the repo says which figures still need the primary PDF.</a:t>
             </a:r>
             <a:endParaRPr lang="en-US" dirty="0"/>
           </a:p>
@@ -873,7 +874,7 @@
           <a:p>
             <a:r>
               <a:rPr lang="en-US" dirty="0"/>
-              <a:t>This is the chart Aeronautics asked for when they commissioned the lost-revenue update.</a:t>
+              <a:t>Everything is a formula. Change the discount rate cell and the sensitivity, tornado, map and charts all move.</a:t>
             </a:r>
             <a:endParaRPr lang="en-US" dirty="0"/>
           </a:p>
@@ -961,7 +962,7 @@
           <a:p>
             <a:r>
               <a:rPr lang="en-US" dirty="0"/>
-              <a:t>Break-even table on the sheet gives the exact tie points: PCC bids +9.9% or salvage below 2.5% of initial cost flips MBT.</a:t>
+              <a:t>This is the chart Aeronautics asked for when they commissioned the lost-revenue update.</a:t>
             </a:r>
             <a:endParaRPr lang="en-US" dirty="0"/>
           </a:p>
@@ -1049,7 +1050,7 @@
           <a:p>
             <a:r>
               <a:rPr lang="en-US" dirty="0"/>
-              <a:t>Break-even values come from the BREAK-EVEN VALUES block on the sheet, computed in closed form, no goal seek.</a:t>
+              <a:t>Break-even table on the sheet gives the exact tie points: PCC bids +9.9% or salvage below 2.5% of initial cost flips MBT.</a:t>
             </a:r>
             <a:endParaRPr lang="en-US" dirty="0"/>
           </a:p>
@@ -1137,7 +1138,7 @@
           <a:p>
             <a:r>
               <a:rPr lang="en-US" dirty="0"/>
-              <a:t>SRB break-even daily revenue is about $23,000 per day against $4,344 actual.</a:t>
+              <a:t>Break-even values come from the BREAK-EVEN VALUES block on the sheet, computed in closed form, no goal seek.</a:t>
             </a:r>
             <a:endParaRPr lang="en-US" dirty="0"/>
           </a:p>
@@ -1225,7 +1226,7 @@
           <a:p>
             <a:r>
               <a:rPr lang="en-US" dirty="0"/>
-              <a:t>The first-open check: pick an airport, set Yes, add one HMA and one PCC alternative, confirm Summary and Alt sheet columns L:N.</a:t>
+              <a:t>SRB break-even daily revenue is about $23,000 per day against $4,344 actual.</a:t>
             </a:r>
             <a:endParaRPr lang="en-US" dirty="0"/>
           </a:p>
@@ -1313,7 +1314,7 @@
           <a:p>
             <a:r>
               <a:rPr lang="en-US" dirty="0"/>
-              <a:t>Two alternatives per sheet, HMA against PCC, is how the framework is used; policy years are editable if TDOT revises the maintenance tables.</a:t>
+              <a:t>The first-open check: pick an airport, set Yes, add one HMA and one PCC alternative, confirm Summary and Alt sheet columns L:N.</a:t>
             </a:r>
             <a:endParaRPr lang="en-US" dirty="0"/>
           </a:p>
@@ -1401,7 +1402,7 @@
           <a:p>
             <a:r>
               <a:rPr lang="en-US" dirty="0"/>
-              <a:t>Keep it Excel-first; the web option is noted only because IT blocking was the reviewer's first obstacle.</a:t>
+              <a:t>Two alternatives per sheet, HMA against PCC, is how the framework is used; policy years are editable if TDOT revises the maintenance tables.</a:t>
             </a:r>
             <a:endParaRPr lang="en-US" dirty="0"/>
           </a:p>
@@ -1577,7 +1578,7 @@
           <a:p>
             <a:r>
               <a:rPr lang="en-US" dirty="0"/>
-              <a:t/>
+              <a:t>Keep it Excel-first; the web option is noted only because IT blocking was the reviewer's first obstacle.</a:t>
             </a:r>
             <a:endParaRPr lang="en-US" dirty="0"/>
           </a:p>
@@ -1601,6 +1602,94 @@
             <a:fld id="{F7021451-1387-4CA6-816F-3879F97B5CBC}" type="slidenum">
               <a:rPr lang="en-US"/>
               <a:t>20</a:t>
+            </a:fld>
+            <a:endParaRPr lang="en-US"/>
+          </a:p>
+        </p:txBody>
+      </p:sp>
+    </p:spTree>
+    <p:extLst>
+      <p:ext uri="{BB962C8B-B14F-4D97-AF65-F5344CB8AC3E}">
+        <p14:creationId xmlns:p14="http://schemas.microsoft.com/office/powerpoint/2010/main" val="1024086991"/>
+      </p:ext>
+    </p:extLst>
+  </p:cSld>
+  <p:clrMapOvr>
+    <a:masterClrMapping/>
+  </p:clrMapOvr>
+</p:notes>
+</file>
+
+<file path=ppt/notesSlides/notesSlide21.xml><?xml version="1.0" encoding="utf-8"?>
+<p:notes xmlns:a="http://schemas.openxmlformats.org/drawingml/2006/main" xmlns:r="http://schemas.openxmlformats.org/officeDocument/2006/relationships" xmlns:p="http://schemas.openxmlformats.org/presentationml/2006/main">
+  <p:cSld>
+    <p:spTree>
+      <p:nvGrpSpPr>
+        <p:cNvPr id="1" name=""/>
+        <p:cNvGrpSpPr/>
+        <p:nvPr/>
+      </p:nvGrpSpPr>
+      <p:grpSpPr>
+        <a:xfrm>
+          <a:off x="0" y="0"/>
+          <a:ext cx="0" cy="0"/>
+          <a:chOff x="0" y="0"/>
+          <a:chExt cx="0" cy="0"/>
+        </a:xfrm>
+      </p:grpSpPr>
+      <p:sp>
+        <p:nvSpPr>
+          <p:cNvPr id="2" name="Slide Image Placeholder 1"/>
+          <p:cNvSpPr>
+            <a:spLocks noGrp="1" noRot="1" noChangeAspect="1"/>
+          </p:cNvSpPr>
+          <p:nvPr>
+            <p:ph type="sldImg"/>
+          </p:nvPr>
+        </p:nvSpPr>
+        <p:spPr/>
+      </p:sp>
+      <p:sp>
+        <p:nvSpPr>
+          <p:cNvPr id="3" name="Notes Placeholder 2"/>
+          <p:cNvSpPr>
+            <a:spLocks noGrp="1"/>
+          </p:cNvSpPr>
+          <p:nvPr>
+            <p:ph type="body" idx="1"/>
+          </p:nvPr>
+        </p:nvSpPr>
+        <p:spPr/>
+        <p:txBody>
+          <a:bodyPr/>
+          <a:lstStyle/>
+          <a:p>
+            <a:r>
+              <a:rPr lang="en-US" dirty="0"/>
+              <a:t/>
+            </a:r>
+            <a:endParaRPr lang="en-US" dirty="0"/>
+          </a:p>
+        </p:txBody>
+      </p:sp>
+      <p:sp>
+        <p:nvSpPr>
+          <p:cNvPr id="4" name="Slide Number Placeholder 3"/>
+          <p:cNvSpPr>
+            <a:spLocks noGrp="1"/>
+          </p:cNvSpPr>
+          <p:nvPr>
+            <p:ph type="sldNum" sz="quarter" idx="10"/>
+          </p:nvPr>
+        </p:nvSpPr>
+        <p:spPr/>
+        <p:txBody>
+          <a:bodyPr/>
+          <a:lstStyle/>
+          <a:p>
+            <a:fld id="{F7021451-1387-4CA6-816F-3879F97B5CBC}" type="slidenum">
+              <a:rPr lang="en-US"/>
+              <a:t>21</a:t>
             </a:fld>
             <a:endParaRPr lang="en-US"/>
           </a:p>
@@ -3319,7 +3408,145 @@
                           <a:ea typeface="Calibri" pitchFamily="34" charset="-122"/>
                           <a:cs typeface="Calibri" pitchFamily="34" charset="-120"/>
                         </a:rPr>
-                        <a:t>Formula-driven, no macro: results table with PW by category, delta to lowest, closure days and runway availability; five charts (category, rate sensitivity 2 to 8%, expenditure stream, cumulative cost, closure days); navigation buttons that work with macros blocked</a:t>
+                        <a:t>Formula-driven, no macro: results table with PW by category, delta to lowest, closure days and runway availability; a RealCost-style comparison block (agency and user cost as PW and EUAC); five charts; navigation buttons that work with macros blocked</a:t>
+                      </a:r>
+                      <a:endParaRPr lang="en-US" sz="1050" dirty="0">
+                        <a:latin typeface="Calibri" charset="0"/>
+                        <a:ea typeface="Calibri" charset="0"/>
+                        <a:cs typeface="Calibri" charset="0"/>
+                      </a:endParaRPr>
+                    </a:p>
+                  </a:txBody>
+                  <a:tcPr marL="45720" marR="45720" marT="45720" marB="45720" anchor="ctr">
+                    <a:lnL w="6350" cap="flat" cmpd="sng" algn="ctr">
+                      <a:solidFill>
+                        <a:srgbClr val="C9C9C4"/>
+                      </a:solidFill>
+                      <a:prstDash val="solid"/>
+                      <a:round/>
+                      <a:headEnd type="none" w="med" len="med"/>
+                      <a:tailEnd type="none" w="med" len="med"/>
+                    </a:lnL>
+                    <a:lnR w="6350" cap="flat" cmpd="sng" algn="ctr">
+                      <a:solidFill>
+                        <a:srgbClr val="C9C9C4"/>
+                      </a:solidFill>
+                      <a:prstDash val="solid"/>
+                      <a:round/>
+                      <a:headEnd type="none" w="med" len="med"/>
+                      <a:tailEnd type="none" w="med" len="med"/>
+                    </a:lnR>
+                    <a:lnT w="6350" cap="flat" cmpd="sng" algn="ctr">
+                      <a:solidFill>
+                        <a:srgbClr val="C9C9C4"/>
+                      </a:solidFill>
+                      <a:prstDash val="solid"/>
+                      <a:round/>
+                      <a:headEnd type="none" w="med" len="med"/>
+                      <a:tailEnd type="none" w="med" len="med"/>
+                    </a:lnT>
+                    <a:lnB w="6350" cap="flat" cmpd="sng" algn="ctr">
+                      <a:solidFill>
+                        <a:srgbClr val="C9C9C4"/>
+                      </a:solidFill>
+                      <a:prstDash val="solid"/>
+                      <a:round/>
+                      <a:headEnd type="none" w="med" len="med"/>
+                      <a:tailEnd type="none" w="med" len="med"/>
+                    </a:lnB>
+                    <a:solidFill>
+                      <a:srgbClr val="FFFFFF"/>
+                    </a:solidFill>
+                  </a:tcPr>
+                </a:tc>
+              </a:tr>
+              <a:tr h="274320">
+                <a:tc>
+                  <a:txBody>
+                    <a:bodyPr/>
+                    <a:lstStyle/>
+                    <a:p>
+                      <a:pPr indent="0" marL="0">
+                        <a:buNone/>
+                      </a:pPr>
+                      <a:r>
+                        <a:rPr lang="en-US" sz="1050" dirty="0">
+                          <a:solidFill>
+                            <a:srgbClr val="1F1F1F"/>
+                          </a:solidFill>
+                          <a:latin typeface="Calibri" pitchFamily="34" charset="0"/>
+                          <a:ea typeface="Calibri" pitchFamily="34" charset="-122"/>
+                          <a:cs typeface="Calibri" pitchFamily="34" charset="-120"/>
+                        </a:rPr>
+                        <a:t>Typical Values sheet</a:t>
+                      </a:r>
+                      <a:endParaRPr lang="en-US" sz="1050" dirty="0">
+                        <a:latin typeface="Calibri" charset="0"/>
+                        <a:ea typeface="Calibri" charset="0"/>
+                        <a:cs typeface="Calibri" charset="0"/>
+                      </a:endParaRPr>
+                    </a:p>
+                  </a:txBody>
+                  <a:tcPr marL="45720" marR="45720" marT="45720" marB="45720" anchor="ctr">
+                    <a:lnL w="6350" cap="flat" cmpd="sng" algn="ctr">
+                      <a:solidFill>
+                        <a:srgbClr val="C9C9C4"/>
+                      </a:solidFill>
+                      <a:prstDash val="solid"/>
+                      <a:round/>
+                      <a:headEnd type="none" w="med" len="med"/>
+                      <a:tailEnd type="none" w="med" len="med"/>
+                    </a:lnL>
+                    <a:lnR w="6350" cap="flat" cmpd="sng" algn="ctr">
+                      <a:solidFill>
+                        <a:srgbClr val="C9C9C4"/>
+                      </a:solidFill>
+                      <a:prstDash val="solid"/>
+                      <a:round/>
+                      <a:headEnd type="none" w="med" len="med"/>
+                      <a:tailEnd type="none" w="med" len="med"/>
+                    </a:lnR>
+                    <a:lnT w="6350" cap="flat" cmpd="sng" algn="ctr">
+                      <a:solidFill>
+                        <a:srgbClr val="C9C9C4"/>
+                      </a:solidFill>
+                      <a:prstDash val="solid"/>
+                      <a:round/>
+                      <a:headEnd type="none" w="med" len="med"/>
+                      <a:tailEnd type="none" w="med" len="med"/>
+                    </a:lnT>
+                    <a:lnB w="6350" cap="flat" cmpd="sng" algn="ctr">
+                      <a:solidFill>
+                        <a:srgbClr val="C9C9C4"/>
+                      </a:solidFill>
+                      <a:prstDash val="solid"/>
+                      <a:round/>
+                      <a:headEnd type="none" w="med" len="med"/>
+                      <a:tailEnd type="none" w="med" len="med"/>
+                    </a:lnB>
+                    <a:solidFill>
+                      <a:srgbClr val="FFFFFF"/>
+                    </a:solidFill>
+                  </a:tcPr>
+                </a:tc>
+                <a:tc>
+                  <a:txBody>
+                    <a:bodyPr/>
+                    <a:lstStyle/>
+                    <a:p>
+                      <a:pPr indent="0" marL="0">
+                        <a:buNone/>
+                      </a:pPr>
+                      <a:r>
+                        <a:rPr lang="en-US" sz="1050" dirty="0">
+                          <a:solidFill>
+                            <a:srgbClr val="1F1F1F"/>
+                          </a:solidFill>
+                          <a:latin typeface="Calibri" pitchFamily="34" charset="0"/>
+                          <a:ea typeface="Calibri" pitchFamily="34" charset="-122"/>
+                          <a:cs typeface="Calibri" pitchFamily="34" charset="-120"/>
+                        </a:rPr>
+                        <a:t>New reference sheet: what TDOT manages, typical runway geometry and areas, workbook unit costs beside 2025 bids, closure production rates, FAA and OMB discount-rate rules, service lives, live daily revenue for the 17 airports; hints beside the General Information inputs</a:t>
                       </a:r>
                       <a:endParaRPr lang="en-US" sz="1050" dirty="0">
                         <a:latin typeface="Calibri" charset="0"/>
@@ -3821,7 +4048,7 @@
                 <a:ea typeface="Calibri" pitchFamily="34" charset="-122"/>
                 <a:cs typeface="Calibri" pitchFamily="34" charset="-120"/>
               </a:rPr>
-              <a:t>MBT data loaded. Table, verdict line, five charts and the original comparison chart, all live formulas.</a:t>
+              <a:t>MBT data loaded. Table, verdict line, RealCost-style comparison block, five charts, all live formulas.</a:t>
             </a:r>
             <a:endParaRPr lang="en-US" sz="1300" dirty="0"/>
           </a:p>
@@ -3843,8 +4070,8 @@
         </p:blipFill>
         <p:spPr>
           <a:xfrm>
-            <a:off x="822960" y="1234440"/>
-            <a:ext cx="7498080" cy="3442645"/>
+            <a:off x="1005840" y="1298448"/>
+            <a:ext cx="7132320" cy="3589492"/>
           </a:xfrm>
           <a:prstGeom prst="rect">
             <a:avLst/>
@@ -3859,7 +4086,7 @@
         </p:nvSpPr>
         <p:spPr>
           <a:xfrm>
-            <a:off x="457200" y="4722805"/>
+            <a:off x="457200" y="4906228"/>
             <a:ext cx="8229600" cy="411480"/>
           </a:xfrm>
           <a:prstGeom prst="rect">
@@ -3884,7 +4111,7 @@
                 <a:ea typeface="Calibri" pitchFamily="34" charset="-122"/>
                 <a:cs typeface="Calibri" pitchFamily="34" charset="-120"/>
               </a:rPr>
-              <a:t>Buttons at top left return to General Information and Instructions; a matching "View Summary" button sits under Alternative Setup. Chart data lives in columns W onward, marked "do not edit".</a:t>
+              <a:t>The comparison block under the verdict line follows the RealCost layout: agency and user cost, each as present worth and EUAC.</a:t>
             </a:r>
             <a:endParaRPr lang="en-US" sz="1050" dirty="0"/>
           </a:p>
@@ -3955,7 +4182,7 @@
                 <a:ea typeface="Cambria" pitchFamily="34" charset="-122"/>
                 <a:cs typeface="Cambria" pitchFamily="34" charset="-120"/>
               </a:rPr>
-              <a:t>The decision workbook</a:t>
+              <a:t>Typical values for the inputs</a:t>
             </a:r>
             <a:endParaRPr lang="en-US" sz="2800" dirty="0"/>
           </a:p>
@@ -3994,7 +4221,7 @@
                 <a:ea typeface="Calibri" pitchFamily="34" charset="-122"/>
                 <a:cs typeface="Calibri" pitchFamily="34" charset="-120"/>
               </a:rPr>
-              <a:t>MBT and SRB already loaded, plus a blank TEMPLATE sheet. Yellow cells drive every table and chart.</a:t>
+              <a:t>A reference sheet answering "is this number reasonable" while filling in General Information.</a:t>
             </a:r>
             <a:endParaRPr lang="en-US" sz="1300" dirty="0"/>
           </a:p>
@@ -4002,7 +4229,7 @@
       </p:sp>
       <p:pic>
         <p:nvPicPr>
-          <p:cNvPr id="4" name="Image 0" descr="/tmp/claude-0/-home-user-lcca-dashboard/444ca227-15d7-51d4-a51e-a0ae3dbe81ed/scratchpad/deck/img/MBT_kpis.png">    </p:cNvPr>
+          <p:cNvPr id="4" name="Image 0" descr="/tmp/claude-0/-home-user-lcca-dashboard/444ca227-15d7-51d4-a51e-a0ae3dbe81ed/scratchpad/deck/img/typical_values.png">    </p:cNvPr>
           <p:cNvPicPr>
             <a:picLocks noChangeAspect="1"/>
           </p:cNvPicPr>
@@ -4017,7 +4244,7 @@
         <p:spPr>
           <a:xfrm>
             <a:off x="457200" y="1371600"/>
-            <a:ext cx="8229600" cy="2072947"/>
+            <a:ext cx="8229600" cy="1737302"/>
           </a:xfrm>
           <a:prstGeom prst="rect">
             <a:avLst/>
@@ -4032,7 +4259,7 @@
         </p:nvSpPr>
         <p:spPr>
           <a:xfrm>
-            <a:off x="457200" y="3535987"/>
+            <a:off x="457200" y="3154622"/>
             <a:ext cx="8229600" cy="411480"/>
           </a:xfrm>
           <a:prstGeom prst="rect">
@@ -4057,7 +4284,7 @@
                 <a:ea typeface="Calibri" pitchFamily="34" charset="-122"/>
                 <a:cs typeface="Calibri" pitchFamily="34" charset="-120"/>
               </a:rPr>
-              <a:t>The verdict line: which alternative is lower, by how much, and two robustness flags a reviewer can read in five seconds. Shown here for MBT at TDOT settings.</a:t>
+              <a:t>Section 3: each Pay_Items default read live from the workbook, beside recent bid prices and what they mean. Six more sections cover system context, runway geometry, closure rates, discount rates and service lives.</a:t>
             </a:r>
             <a:endParaRPr lang="en-US" sz="1050" dirty="0"/>
           </a:p>
@@ -4071,8 +4298,8 @@
         </p:nvSpPr>
         <p:spPr>
           <a:xfrm>
-            <a:off x="457200" y="3931920"/>
-            <a:ext cx="8229600" cy="914400"/>
+            <a:off x="457200" y="3611822"/>
+            <a:ext cx="8229600" cy="822960"/>
           </a:xfrm>
           <a:prstGeom prst="rect">
             <a:avLst/>
@@ -4100,7 +4327,7 @@
                 <a:ea typeface="Calibri" pitchFamily="34" charset="-122"/>
                 <a:cs typeface="Calibri" pitchFamily="34" charset="-120"/>
               </a:rPr>
-              <a:t>RESULTS: present worth by category, EUAC, cost per SY, closure days, runway availability</a:t>
+              <a:t>TDOT Aeronautics manages 78 public-use airports; 69 are in the NPIAS and about 70 are in the pavement management network</a:t>
             </a:r>
             <a:endParaRPr lang="en-US" sz="1150" dirty="0"/>
           </a:p>
@@ -4121,7 +4348,7 @@
                 <a:ea typeface="Calibri" pitchFamily="34" charset="-122"/>
                 <a:cs typeface="Calibri" pitchFamily="34" charset="-120"/>
               </a:rPr>
-              <a:t>BREAK-EVEN VALUES: the daily revenue, bid level, salvage fraction and discount rate at which the two tie</a:t>
+              <a:t>Typical TN general aviation runway: 4,000 to 6,000 ft by 75 or 100 ft, which is 33,000 to 67,000 SY of mainline</a:t>
             </a:r>
             <a:endParaRPr lang="en-US" sz="1150" dirty="0"/>
           </a:p>
@@ -4142,7 +4369,7 @@
                 <a:ea typeface="Calibri" pitchFamily="34" charset="-122"/>
                 <a:cs typeface="Calibri" pitchFamily="34" charset="-120"/>
               </a:rPr>
-              <a:t>Twelve pre-run scenarios, a rate-by-salvage decision map, a tornado, and a live 1,000-draw simulation</a:t>
+              <a:t>The $130 per ton asphalt default sits below 2025 southeastern bids of $185 to $232</a:t>
             </a:r>
             <a:endParaRPr lang="en-US" sz="1150" dirty="0"/>
           </a:p>
@@ -4163,7 +4390,7 @@
                 <a:ea typeface="Calibri" pitchFamily="34" charset="-122"/>
                 <a:cs typeface="Calibri" pitchFamily="34" charset="-120"/>
               </a:rPr>
-              <a:t>A TEMPLATE sheet: copy it, paste the next project's costs and closure days, done</a:t>
+              <a:t>Discount rate: TDOT 3 percent; FAA now points to the OMB A-94 real rate, 2.0 percent for 2026, not the old 7 percent</a:t>
             </a:r>
             <a:endParaRPr lang="en-US" sz="1150" dirty="0"/>
           </a:p>
@@ -4234,15 +4461,54 @@
                 <a:ea typeface="Cambria" pitchFamily="34" charset="-122"/>
                 <a:cs typeface="Cambria" pitchFamily="34" charset="-120"/>
               </a:rPr>
-              <a:t>Where the difference comes from</a:t>
+              <a:t>The decision workbook</a:t>
             </a:r>
             <a:endParaRPr lang="en-US" sz="2800" dirty="0"/>
+          </a:p>
+        </p:txBody>
+      </p:sp>
+      <p:sp>
+        <p:nvSpPr>
+          <p:cNvPr id="3" name="Text 1"/>
+          <p:cNvSpPr txBox="1"/>
+          <p:nvPr/>
+        </p:nvSpPr>
+        <p:spPr>
+          <a:xfrm>
+            <a:off x="457200" y="914400"/>
+            <a:ext cx="8229600" cy="365760"/>
+          </a:xfrm>
+          <a:prstGeom prst="rect">
+            <a:avLst/>
+          </a:prstGeom>
+          <a:noFill/>
+          <a:ln/>
+        </p:spPr>
+        <p:txBody>
+          <a:bodyPr wrap="square" lIns="0" tIns="0" rIns="0" bIns="0" rtlCol="0" anchor="ctr"/>
+          <a:lstStyle/>
+          <a:p>
+            <a:pPr indent="0" marL="0">
+              <a:buNone/>
+            </a:pPr>
+            <a:r>
+              <a:rPr lang="en-US" sz="1300" i="1" dirty="0">
+                <a:solidFill>
+                  <a:srgbClr val="5F5F5F"/>
+                </a:solidFill>
+                <a:latin typeface="Calibri" pitchFamily="34" charset="0"/>
+                <a:ea typeface="Calibri" pitchFamily="34" charset="-122"/>
+                <a:cs typeface="Calibri" pitchFamily="34" charset="-120"/>
+              </a:rPr>
+              <a:t>MBT and SRB already loaded, plus a blank TEMPLATE sheet. Yellow cells drive every table and chart.</a:t>
+            </a:r>
+            <a:endParaRPr lang="en-US" sz="1300" dirty="0"/>
           </a:p>
         </p:txBody>
       </p:sp>
       <p:pic>
         <p:nvPicPr>
-          <p:cNvPr id="3" name="Image 0" descr="/tmp/claude-0/-home-user-lcca-dashboard/444ca227-15d7-51d4-a51e-a0ae3dbe81ed/scratchpad/deck/img/MBT_bridge.png">    </p:cNvPr>
+          <p:cNvPr id="4" name="Image 0" descr="/tmp/claude-0/-home-user-lcca-dashboard/444ca227-15d7-51d4-a51e-a0ae3dbe81ed/scratchpad/deck/img/MBT_kpis.png">    </p:cNvPr>
           <p:cNvPicPr>
             <a:picLocks noChangeAspect="1"/>
           </p:cNvPicPr>
@@ -4256,8 +4522,8 @@
         </p:blipFill>
         <p:spPr>
           <a:xfrm>
-            <a:off x="457200" y="1097280"/>
-            <a:ext cx="8229600" cy="1987826"/>
+            <a:off x="457200" y="1371600"/>
+            <a:ext cx="8229600" cy="2072947"/>
           </a:xfrm>
           <a:prstGeom prst="rect">
             <a:avLst/>
@@ -4266,13 +4532,13 @@
       </p:pic>
       <p:sp>
         <p:nvSpPr>
-          <p:cNvPr id="4" name="Text 1"/>
+          <p:cNvPr id="5" name="Text 2"/>
           <p:cNvSpPr txBox="1"/>
           <p:nvPr/>
         </p:nvSpPr>
         <p:spPr>
           <a:xfrm>
-            <a:off x="457200" y="3130826"/>
+            <a:off x="457200" y="3535987"/>
             <a:ext cx="8229600" cy="411480"/>
           </a:xfrm>
           <a:prstGeom prst="rect">
@@ -4297,46 +4563,22 @@
                 <a:ea typeface="Calibri" pitchFamily="34" charset="-122"/>
                 <a:cs typeface="Calibri" pitchFamily="34" charset="-120"/>
               </a:rPr>
-              <a:t>MBT bridge from HMA to PCC present worth. PCC costs $3.1M more to build and earns it back through $1.9M less maintenance and $1.1M less rehabilitation; salvage and lost revenue are small here.</a:t>
+              <a:t>The verdict line: which alternative is lower, by how much, and two robustness flags a reviewer can read in five seconds. Shown here for MBT at TDOT settings.</a:t>
             </a:r>
             <a:endParaRPr lang="en-US" sz="1050" dirty="0"/>
           </a:p>
         </p:txBody>
       </p:sp>
-      <p:pic>
-        <p:nvPicPr>
-          <p:cNvPr id="5" name="Image 1" descr="/tmp/claude-0/-home-user-lcca-dashboard/444ca227-15d7-51d4-a51e-a0ae3dbe81ed/scratchpad/deck/img/MBT_closures.png">    </p:cNvPr>
-          <p:cNvPicPr>
-            <a:picLocks noChangeAspect="1"/>
-          </p:cNvPicPr>
-          <p:nvPr/>
-        </p:nvPicPr>
-        <p:blipFill>
-          <a:blip r:embed="rId2"/>
-          <a:stretch>
-            <a:fillRect/>
-          </a:stretch>
-        </p:blipFill>
-        <p:spPr>
-          <a:xfrm>
-            <a:off x="457200" y="3588026"/>
-            <a:ext cx="8229600" cy="1277888"/>
-          </a:xfrm>
-          <a:prstGeom prst="rect">
-            <a:avLst/>
-          </a:prstGeom>
-        </p:spPr>
-      </p:pic>
       <p:sp>
         <p:nvSpPr>
-          <p:cNvPr id="6" name="Text 2"/>
+          <p:cNvPr id="6" name="Text 3"/>
           <p:cNvSpPr txBox="1"/>
           <p:nvPr/>
         </p:nvSpPr>
         <p:spPr>
           <a:xfrm>
-            <a:off x="457200" y="4911634"/>
-            <a:ext cx="8229600" cy="411480"/>
+            <a:off x="457200" y="3931920"/>
+            <a:ext cx="8229600" cy="914400"/>
           </a:xfrm>
           <a:prstGeom prst="rect">
             <a:avLst/>
@@ -4348,21 +4590,88 @@
           <a:bodyPr wrap="square" lIns="0" tIns="0" rIns="0" bIns="0" rtlCol="0" anchor="t"/>
           <a:lstStyle/>
           <a:p>
-            <a:pPr indent="0" marL="0">
-              <a:buNone/>
+            <a:pPr marL="342900" indent="-342900">
+              <a:spcAft>
+                <a:spcPts val="500"/>
+              </a:spcAft>
+              <a:buSzPct val="100000"/>
+              <a:buChar char="•"/>
             </a:pPr>
             <a:r>
-              <a:rPr lang="en-US" sz="1050" dirty="0">
+              <a:rPr lang="en-US" sz="1150" dirty="0">
                 <a:solidFill>
-                  <a:srgbClr val="5F5F5F"/>
+                  <a:srgbClr val="1F1F1F"/>
                 </a:solidFill>
                 <a:latin typeface="Calibri" pitchFamily="34" charset="0"/>
                 <a:ea typeface="Calibri" pitchFamily="34" charset="-122"/>
                 <a:cs typeface="Calibri" pitchFamily="34" charset="-120"/>
               </a:rPr>
-              <a:t>Closure timeline, bubble size is days closed. HMA closes the runway seven times for 57 days; PCC twice for 27 days.</a:t>
+              <a:t>RESULTS: present worth by category, EUAC, cost per SY, closure days, runway availability</a:t>
             </a:r>
-            <a:endParaRPr lang="en-US" sz="1050" dirty="0"/>
+            <a:endParaRPr lang="en-US" sz="1150" dirty="0"/>
+          </a:p>
+          <a:p>
+            <a:pPr marL="342900" indent="-342900">
+              <a:spcAft>
+                <a:spcPts val="500"/>
+              </a:spcAft>
+              <a:buSzPct val="100000"/>
+              <a:buChar char="•"/>
+            </a:pPr>
+            <a:r>
+              <a:rPr lang="en-US" sz="1150" dirty="0">
+                <a:solidFill>
+                  <a:srgbClr val="1F1F1F"/>
+                </a:solidFill>
+                <a:latin typeface="Calibri" pitchFamily="34" charset="0"/>
+                <a:ea typeface="Calibri" pitchFamily="34" charset="-122"/>
+                <a:cs typeface="Calibri" pitchFamily="34" charset="-120"/>
+              </a:rPr>
+              <a:t>BREAK-EVEN VALUES: the daily revenue, bid level, salvage fraction and discount rate at which the two tie</a:t>
+            </a:r>
+            <a:endParaRPr lang="en-US" sz="1150" dirty="0"/>
+          </a:p>
+          <a:p>
+            <a:pPr marL="342900" indent="-342900">
+              <a:spcAft>
+                <a:spcPts val="500"/>
+              </a:spcAft>
+              <a:buSzPct val="100000"/>
+              <a:buChar char="•"/>
+            </a:pPr>
+            <a:r>
+              <a:rPr lang="en-US" sz="1150" dirty="0">
+                <a:solidFill>
+                  <a:srgbClr val="1F1F1F"/>
+                </a:solidFill>
+                <a:latin typeface="Calibri" pitchFamily="34" charset="0"/>
+                <a:ea typeface="Calibri" pitchFamily="34" charset="-122"/>
+                <a:cs typeface="Calibri" pitchFamily="34" charset="-120"/>
+              </a:rPr>
+              <a:t>Twelve pre-run scenarios, a rate-by-salvage decision map, a tornado, and a live 1,000-draw simulation</a:t>
+            </a:r>
+            <a:endParaRPr lang="en-US" sz="1150" dirty="0"/>
+          </a:p>
+          <a:p>
+            <a:pPr marL="342900" indent="-342900">
+              <a:spcAft>
+                <a:spcPts val="500"/>
+              </a:spcAft>
+              <a:buSzPct val="100000"/>
+              <a:buChar char="•"/>
+            </a:pPr>
+            <a:r>
+              <a:rPr lang="en-US" sz="1150" dirty="0">
+                <a:solidFill>
+                  <a:srgbClr val="1F1F1F"/>
+                </a:solidFill>
+                <a:latin typeface="Calibri" pitchFamily="34" charset="0"/>
+                <a:ea typeface="Calibri" pitchFamily="34" charset="-122"/>
+                <a:cs typeface="Calibri" pitchFamily="34" charset="-120"/>
+              </a:rPr>
+              <a:t>A TEMPLATE sheet: copy it, paste the next project's costs and closure days, done</a:t>
+            </a:r>
+            <a:endParaRPr lang="en-US" sz="1150" dirty="0"/>
           </a:p>
         </p:txBody>
       </p:sp>
@@ -4431,54 +4740,15 @@
                 <a:ea typeface="Cambria" pitchFamily="34" charset="-122"/>
                 <a:cs typeface="Cambria" pitchFamily="34" charset="-120"/>
               </a:rPr>
-              <a:t>Will the answer hold?</a:t>
+              <a:t>Where the difference comes from</a:t>
             </a:r>
             <a:endParaRPr lang="en-US" sz="2800" dirty="0"/>
-          </a:p>
-        </p:txBody>
-      </p:sp>
-      <p:sp>
-        <p:nvSpPr>
-          <p:cNvPr id="3" name="Text 1"/>
-          <p:cNvSpPr txBox="1"/>
-          <p:nvPr/>
-        </p:nvSpPr>
-        <p:spPr>
-          <a:xfrm>
-            <a:off x="457200" y="914400"/>
-            <a:ext cx="8229600" cy="365760"/>
-          </a:xfrm>
-          <a:prstGeom prst="rect">
-            <a:avLst/>
-          </a:prstGeom>
-          <a:noFill/>
-          <a:ln/>
-        </p:spPr>
-        <p:txBody>
-          <a:bodyPr wrap="square" lIns="0" tIns="0" rIns="0" bIns="0" rtlCol="0" anchor="ctr"/>
-          <a:lstStyle/>
-          <a:p>
-            <a:pPr indent="0" marL="0">
-              <a:buNone/>
-            </a:pPr>
-            <a:r>
-              <a:rPr lang="en-US" sz="1300" i="1" dirty="0">
-                <a:solidFill>
-                  <a:srgbClr val="5F5F5F"/>
-                </a:solidFill>
-                <a:latin typeface="Calibri" pitchFamily="34" charset="0"/>
-                <a:ea typeface="Calibri" pitchFamily="34" charset="-122"/>
-                <a:cs typeface="Calibri" pitchFamily="34" charset="-120"/>
-              </a:rPr>
-              <a:t>Net present worth against discount rate. Blue is HMA, orange is PCC. TDOT 3 percent and FAA AIP 7 percent are marked.</a:t>
-            </a:r>
-            <a:endParaRPr lang="en-US" sz="1300" dirty="0"/>
           </a:p>
         </p:txBody>
       </p:sp>
       <p:pic>
         <p:nvPicPr>
-          <p:cNvPr id="4" name="Image 0" descr="/tmp/claude-0/-home-user-lcca-dashboard/444ca227-15d7-51d4-a51e-a0ae3dbe81ed/scratchpad/deck/img/MBT_sens.png">    </p:cNvPr>
+          <p:cNvPr id="3" name="Image 0" descr="/tmp/claude-0/-home-user-lcca-dashboard/444ca227-15d7-51d4-a51e-a0ae3dbe81ed/scratchpad/deck/img/MBT_bridge.png">    </p:cNvPr>
           <p:cNvPicPr>
             <a:picLocks noChangeAspect="1"/>
           </p:cNvPicPr>
@@ -4492,8 +4762,8 @@
         </p:blipFill>
         <p:spPr>
           <a:xfrm>
-            <a:off x="457200" y="1371600"/>
-            <a:ext cx="3931920" cy="1899478"/>
+            <a:off x="457200" y="1097280"/>
+            <a:ext cx="8229600" cy="1987826"/>
           </a:xfrm>
           <a:prstGeom prst="rect">
             <a:avLst/>
@@ -4502,14 +4772,14 @@
       </p:pic>
       <p:sp>
         <p:nvSpPr>
-          <p:cNvPr id="5" name="Text 2"/>
+          <p:cNvPr id="4" name="Text 1"/>
           <p:cNvSpPr txBox="1"/>
           <p:nvPr/>
         </p:nvSpPr>
         <p:spPr>
           <a:xfrm>
-            <a:off x="457200" y="3316798"/>
-            <a:ext cx="3931920" cy="411480"/>
+            <a:off x="457200" y="3130826"/>
+            <a:ext cx="8229600" cy="411480"/>
           </a:xfrm>
           <a:prstGeom prst="rect">
             <a:avLst/>
@@ -4533,7 +4803,7 @@
                 <a:ea typeface="Calibri" pitchFamily="34" charset="-122"/>
                 <a:cs typeface="Calibri" pitchFamily="34" charset="-120"/>
               </a:rPr>
-              <a:t>MBT: PCC wins below 4.5 percent, HMA above. At the FAA AIP rate the answer reverses.</a:t>
+              <a:t>MBT bridge from HMA to PCC present worth. PCC costs $3.1M more to build and earns it back through $1.9M less maintenance and $1.1M less rehabilitation; salvage and lost revenue are small here.</a:t>
             </a:r>
             <a:endParaRPr lang="en-US" sz="1050" dirty="0"/>
           </a:p>
@@ -4541,7 +4811,7 @@
       </p:sp>
       <p:pic>
         <p:nvPicPr>
-          <p:cNvPr id="6" name="Image 1" descr="/tmp/claude-0/-home-user-lcca-dashboard/444ca227-15d7-51d4-a51e-a0ae3dbe81ed/scratchpad/deck/img/SRB_sens.png">    </p:cNvPr>
+          <p:cNvPr id="5" name="Image 1" descr="/tmp/claude-0/-home-user-lcca-dashboard/444ca227-15d7-51d4-a51e-a0ae3dbe81ed/scratchpad/deck/img/MBT_closures.png">    </p:cNvPr>
           <p:cNvPicPr>
             <a:picLocks noChangeAspect="1"/>
           </p:cNvPicPr>
@@ -4555,8 +4825,8 @@
         </p:blipFill>
         <p:spPr>
           <a:xfrm>
-            <a:off x="4754880" y="1371600"/>
-            <a:ext cx="3931920" cy="1899478"/>
+            <a:off x="457200" y="3588026"/>
+            <a:ext cx="8229600" cy="1277888"/>
           </a:xfrm>
           <a:prstGeom prst="rect">
             <a:avLst/>
@@ -4565,14 +4835,14 @@
       </p:pic>
       <p:sp>
         <p:nvSpPr>
-          <p:cNvPr id="7" name="Text 3"/>
+          <p:cNvPr id="6" name="Text 2"/>
           <p:cNvSpPr txBox="1"/>
           <p:nvPr/>
         </p:nvSpPr>
         <p:spPr>
           <a:xfrm>
-            <a:off x="4754880" y="3316798"/>
-            <a:ext cx="3931920" cy="411480"/>
+            <a:off x="457200" y="4911634"/>
+            <a:ext cx="8229600" cy="411480"/>
           </a:xfrm>
           <a:prstGeom prst="rect">
             <a:avLst/>
@@ -4596,89 +4866,9 @@
                 <a:ea typeface="Calibri" pitchFamily="34" charset="-122"/>
                 <a:cs typeface="Calibri" pitchFamily="34" charset="-120"/>
               </a:rPr>
-              <a:t>SRB: HMA wins at every rate above 2.5 percent. The gap widens as the rate rises.</a:t>
+              <a:t>Closure timeline, bubble size is days closed. HMA closes the runway seven times for 57 days; PCC twice for 27 days.</a:t>
             </a:r>
             <a:endParaRPr lang="en-US" sz="1050" dirty="0"/>
-          </a:p>
-        </p:txBody>
-      </p:sp>
-      <p:sp>
-        <p:nvSpPr>
-          <p:cNvPr id="8" name="Shape 4"/>
-          <p:cNvSpPr/>
-          <p:nvPr/>
-        </p:nvSpPr>
-        <p:spPr>
-          <a:xfrm>
-            <a:off x="457200" y="3794760"/>
-            <a:ext cx="8229600" cy="777240"/>
-          </a:xfrm>
-          <a:prstGeom prst="roundRect">
-            <a:avLst>
-              <a:gd name="adj" fmla="val 7059"/>
-            </a:avLst>
-          </a:prstGeom>
-          <a:solidFill>
-            <a:srgbClr val="F3F3F1"/>
-          </a:solidFill>
-          <a:ln w="12700">
-            <a:solidFill>
-              <a:srgbClr val="F3F3F1"/>
-            </a:solidFill>
-            <a:prstDash val="solid"/>
-          </a:ln>
-        </p:spPr>
-      </p:sp>
-      <p:sp>
-        <p:nvSpPr>
-          <p:cNvPr id="9" name="Text 5"/>
-          <p:cNvSpPr txBox="1"/>
-          <p:nvPr/>
-        </p:nvSpPr>
-        <p:spPr>
-          <a:xfrm>
-            <a:off x="640080" y="3840480"/>
-            <a:ext cx="7863840" cy="685800"/>
-          </a:xfrm>
-          <a:prstGeom prst="rect">
-            <a:avLst/>
-          </a:prstGeom>
-          <a:noFill/>
-          <a:ln/>
-        </p:spPr>
-        <p:txBody>
-          <a:bodyPr wrap="square" lIns="0" tIns="0" rIns="0" bIns="0" rtlCol="0" anchor="ctr"/>
-          <a:lstStyle/>
-          <a:p>
-            <a:pPr indent="0" marL="0">
-              <a:buNone/>
-            </a:pPr>
-            <a:r>
-              <a:rPr lang="en-US" sz="1200" b="1" dirty="0">
-                <a:solidFill>
-                  <a:srgbClr val="1F1F1F"/>
-                </a:solidFill>
-                <a:latin typeface="Calibri" pitchFamily="34" charset="0"/>
-                <a:ea typeface="Calibri" pitchFamily="34" charset="-122"/>
-                <a:cs typeface="Calibri" pitchFamily="34" charset="-120"/>
-              </a:rPr>
-              <a:t>Live simulation: </a:t>
-            </a:r>
-            <a:pPr indent="0" marL="0">
-              <a:buNone/>
-            </a:pPr>
-            <a:r>
-              <a:rPr lang="en-US" sz="1200" dirty="0">
-                <a:solidFill>
-                  <a:srgbClr val="1F1F1F"/>
-                </a:solidFill>
-                <a:latin typeface="Calibri" pitchFamily="34" charset="0"/>
-                <a:ea typeface="Calibri" pitchFamily="34" charset="-122"/>
-                <a:cs typeface="Calibri" pitchFamily="34" charset="-120"/>
-              </a:rPr>
-              <a:t>1,000 joint draws on rate, bids, closures, salvage and revenue share. Probability PCC is the cheaper alternative: 52 percent at MBT, 18 percent at SRB. Press F9 in the workbook to redraw.</a:t>
-            </a:r>
-            <a:endParaRPr lang="en-US" sz="1200" dirty="0"/>
           </a:p>
         </p:txBody>
       </p:sp>
@@ -4747,6 +4937,322 @@
                 <a:ea typeface="Cambria" pitchFamily="34" charset="-122"/>
                 <a:cs typeface="Cambria" pitchFamily="34" charset="-120"/>
               </a:rPr>
+              <a:t>Will the answer hold?</a:t>
+            </a:r>
+            <a:endParaRPr lang="en-US" sz="2800" dirty="0"/>
+          </a:p>
+        </p:txBody>
+      </p:sp>
+      <p:sp>
+        <p:nvSpPr>
+          <p:cNvPr id="3" name="Text 1"/>
+          <p:cNvSpPr txBox="1"/>
+          <p:nvPr/>
+        </p:nvSpPr>
+        <p:spPr>
+          <a:xfrm>
+            <a:off x="457200" y="914400"/>
+            <a:ext cx="8229600" cy="365760"/>
+          </a:xfrm>
+          <a:prstGeom prst="rect">
+            <a:avLst/>
+          </a:prstGeom>
+          <a:noFill/>
+          <a:ln/>
+        </p:spPr>
+        <p:txBody>
+          <a:bodyPr wrap="square" lIns="0" tIns="0" rIns="0" bIns="0" rtlCol="0" anchor="ctr"/>
+          <a:lstStyle/>
+          <a:p>
+            <a:pPr indent="0" marL="0">
+              <a:buNone/>
+            </a:pPr>
+            <a:r>
+              <a:rPr lang="en-US" sz="1300" i="1" dirty="0">
+                <a:solidFill>
+                  <a:srgbClr val="5F5F5F"/>
+                </a:solidFill>
+                <a:latin typeface="Calibri" pitchFamily="34" charset="0"/>
+                <a:ea typeface="Calibri" pitchFamily="34" charset="-122"/>
+                <a:cs typeface="Calibri" pitchFamily="34" charset="-120"/>
+              </a:rPr>
+              <a:t>Net present worth against discount rate. Blue is HMA, orange is PCC. TDOT 3 percent and FAA AIP 7 percent are marked.</a:t>
+            </a:r>
+            <a:endParaRPr lang="en-US" sz="1300" dirty="0"/>
+          </a:p>
+        </p:txBody>
+      </p:sp>
+      <p:pic>
+        <p:nvPicPr>
+          <p:cNvPr id="4" name="Image 0" descr="/tmp/claude-0/-home-user-lcca-dashboard/444ca227-15d7-51d4-a51e-a0ae3dbe81ed/scratchpad/deck/img/MBT_sens.png">    </p:cNvPr>
+          <p:cNvPicPr>
+            <a:picLocks noChangeAspect="1"/>
+          </p:cNvPicPr>
+          <p:nvPr/>
+        </p:nvPicPr>
+        <p:blipFill>
+          <a:blip r:embed="rId1"/>
+          <a:stretch>
+            <a:fillRect/>
+          </a:stretch>
+        </p:blipFill>
+        <p:spPr>
+          <a:xfrm>
+            <a:off x="457200" y="1371600"/>
+            <a:ext cx="3931920" cy="1899478"/>
+          </a:xfrm>
+          <a:prstGeom prst="rect">
+            <a:avLst/>
+          </a:prstGeom>
+        </p:spPr>
+      </p:pic>
+      <p:sp>
+        <p:nvSpPr>
+          <p:cNvPr id="5" name="Text 2"/>
+          <p:cNvSpPr txBox="1"/>
+          <p:nvPr/>
+        </p:nvSpPr>
+        <p:spPr>
+          <a:xfrm>
+            <a:off x="457200" y="3316798"/>
+            <a:ext cx="3931920" cy="411480"/>
+          </a:xfrm>
+          <a:prstGeom prst="rect">
+            <a:avLst/>
+          </a:prstGeom>
+          <a:noFill/>
+          <a:ln/>
+        </p:spPr>
+        <p:txBody>
+          <a:bodyPr wrap="square" lIns="0" tIns="0" rIns="0" bIns="0" rtlCol="0" anchor="t"/>
+          <a:lstStyle/>
+          <a:p>
+            <a:pPr indent="0" marL="0">
+              <a:buNone/>
+            </a:pPr>
+            <a:r>
+              <a:rPr lang="en-US" sz="1050" dirty="0">
+                <a:solidFill>
+                  <a:srgbClr val="5F5F5F"/>
+                </a:solidFill>
+                <a:latin typeface="Calibri" pitchFamily="34" charset="0"/>
+                <a:ea typeface="Calibri" pitchFamily="34" charset="-122"/>
+                <a:cs typeface="Calibri" pitchFamily="34" charset="-120"/>
+              </a:rPr>
+              <a:t>MBT: PCC wins below 4.5 percent, HMA above. At the FAA AIP rate the answer reverses.</a:t>
+            </a:r>
+            <a:endParaRPr lang="en-US" sz="1050" dirty="0"/>
+          </a:p>
+        </p:txBody>
+      </p:sp>
+      <p:pic>
+        <p:nvPicPr>
+          <p:cNvPr id="6" name="Image 1" descr="/tmp/claude-0/-home-user-lcca-dashboard/444ca227-15d7-51d4-a51e-a0ae3dbe81ed/scratchpad/deck/img/SRB_sens.png">    </p:cNvPr>
+          <p:cNvPicPr>
+            <a:picLocks noChangeAspect="1"/>
+          </p:cNvPicPr>
+          <p:nvPr/>
+        </p:nvPicPr>
+        <p:blipFill>
+          <a:blip r:embed="rId2"/>
+          <a:stretch>
+            <a:fillRect/>
+          </a:stretch>
+        </p:blipFill>
+        <p:spPr>
+          <a:xfrm>
+            <a:off x="4754880" y="1371600"/>
+            <a:ext cx="3931920" cy="1899478"/>
+          </a:xfrm>
+          <a:prstGeom prst="rect">
+            <a:avLst/>
+          </a:prstGeom>
+        </p:spPr>
+      </p:pic>
+      <p:sp>
+        <p:nvSpPr>
+          <p:cNvPr id="7" name="Text 3"/>
+          <p:cNvSpPr txBox="1"/>
+          <p:nvPr/>
+        </p:nvSpPr>
+        <p:spPr>
+          <a:xfrm>
+            <a:off x="4754880" y="3316798"/>
+            <a:ext cx="3931920" cy="411480"/>
+          </a:xfrm>
+          <a:prstGeom prst="rect">
+            <a:avLst/>
+          </a:prstGeom>
+          <a:noFill/>
+          <a:ln/>
+        </p:spPr>
+        <p:txBody>
+          <a:bodyPr wrap="square" lIns="0" tIns="0" rIns="0" bIns="0" rtlCol="0" anchor="t"/>
+          <a:lstStyle/>
+          <a:p>
+            <a:pPr indent="0" marL="0">
+              <a:buNone/>
+            </a:pPr>
+            <a:r>
+              <a:rPr lang="en-US" sz="1050" dirty="0">
+                <a:solidFill>
+                  <a:srgbClr val="5F5F5F"/>
+                </a:solidFill>
+                <a:latin typeface="Calibri" pitchFamily="34" charset="0"/>
+                <a:ea typeface="Calibri" pitchFamily="34" charset="-122"/>
+                <a:cs typeface="Calibri" pitchFamily="34" charset="-120"/>
+              </a:rPr>
+              <a:t>SRB: HMA wins at every rate above 2.5 percent. The gap widens as the rate rises.</a:t>
+            </a:r>
+            <a:endParaRPr lang="en-US" sz="1050" dirty="0"/>
+          </a:p>
+        </p:txBody>
+      </p:sp>
+      <p:sp>
+        <p:nvSpPr>
+          <p:cNvPr id="8" name="Shape 4"/>
+          <p:cNvSpPr/>
+          <p:nvPr/>
+        </p:nvSpPr>
+        <p:spPr>
+          <a:xfrm>
+            <a:off x="457200" y="3794760"/>
+            <a:ext cx="8229600" cy="777240"/>
+          </a:xfrm>
+          <a:prstGeom prst="roundRect">
+            <a:avLst>
+              <a:gd name="adj" fmla="val 7059"/>
+            </a:avLst>
+          </a:prstGeom>
+          <a:solidFill>
+            <a:srgbClr val="F3F3F1"/>
+          </a:solidFill>
+          <a:ln w="12700">
+            <a:solidFill>
+              <a:srgbClr val="F3F3F1"/>
+            </a:solidFill>
+            <a:prstDash val="solid"/>
+          </a:ln>
+        </p:spPr>
+      </p:sp>
+      <p:sp>
+        <p:nvSpPr>
+          <p:cNvPr id="9" name="Text 5"/>
+          <p:cNvSpPr txBox="1"/>
+          <p:nvPr/>
+        </p:nvSpPr>
+        <p:spPr>
+          <a:xfrm>
+            <a:off x="640080" y="3840480"/>
+            <a:ext cx="7863840" cy="685800"/>
+          </a:xfrm>
+          <a:prstGeom prst="rect">
+            <a:avLst/>
+          </a:prstGeom>
+          <a:noFill/>
+          <a:ln/>
+        </p:spPr>
+        <p:txBody>
+          <a:bodyPr wrap="square" lIns="0" tIns="0" rIns="0" bIns="0" rtlCol="0" anchor="ctr"/>
+          <a:lstStyle/>
+          <a:p>
+            <a:pPr indent="0" marL="0">
+              <a:buNone/>
+            </a:pPr>
+            <a:r>
+              <a:rPr lang="en-US" sz="1200" b="1" dirty="0">
+                <a:solidFill>
+                  <a:srgbClr val="1F1F1F"/>
+                </a:solidFill>
+                <a:latin typeface="Calibri" pitchFamily="34" charset="0"/>
+                <a:ea typeface="Calibri" pitchFamily="34" charset="-122"/>
+                <a:cs typeface="Calibri" pitchFamily="34" charset="-120"/>
+              </a:rPr>
+              <a:t>Live simulation: </a:t>
+            </a:r>
+            <a:pPr indent="0" marL="0">
+              <a:buNone/>
+            </a:pPr>
+            <a:r>
+              <a:rPr lang="en-US" sz="1200" dirty="0">
+                <a:solidFill>
+                  <a:srgbClr val="1F1F1F"/>
+                </a:solidFill>
+                <a:latin typeface="Calibri" pitchFamily="34" charset="0"/>
+                <a:ea typeface="Calibri" pitchFamily="34" charset="-122"/>
+                <a:cs typeface="Calibri" pitchFamily="34" charset="-120"/>
+              </a:rPr>
+              <a:t>1,000 joint draws on rate, bids, closures, salvage and revenue share. Probability PCC is the cheaper alternative: 52 percent at MBT, 18 percent at SRB. Press F9 in the workbook to redraw.</a:t>
+            </a:r>
+            <a:endParaRPr lang="en-US" sz="1200" dirty="0"/>
+          </a:p>
+        </p:txBody>
+      </p:sp>
+    </p:spTree>
+  </p:cSld>
+  <p:clrMapOvr>
+    <a:masterClrMapping/>
+  </p:clrMapOvr>
+</p:sld>
+</file>
+
+<file path=ppt/slides/slide16.xml><?xml version="1.0" encoding="utf-8"?>
+<p:sld xmlns:a="http://schemas.openxmlformats.org/drawingml/2006/main" xmlns:r="http://schemas.openxmlformats.org/officeDocument/2006/relationships" xmlns:p="http://schemas.openxmlformats.org/presentationml/2006/main">
+  <p:cSld name="Slide 16">
+    <p:bg>
+      <p:bgPr>
+        <a:solidFill>
+          <a:srgbClr val="FFFFFF"/>
+        </a:solidFill>
+      </p:bgPr>
+    </p:bg>
+    <p:spTree>
+      <p:nvGrpSpPr>
+        <p:cNvPr id="1" name=""/>
+        <p:cNvGrpSpPr/>
+        <p:nvPr/>
+      </p:nvGrpSpPr>
+      <p:grpSpPr>
+        <a:xfrm>
+          <a:off x="0" y="0"/>
+          <a:ext cx="0" cy="0"/>
+          <a:chOff x="0" y="0"/>
+          <a:chExt cx="0" cy="0"/>
+        </a:xfrm>
+      </p:grpSpPr>
+      <p:sp>
+        <p:nvSpPr>
+          <p:cNvPr id="2" name="Text 0"/>
+          <p:cNvSpPr txBox="1"/>
+          <p:nvPr/>
+        </p:nvSpPr>
+        <p:spPr>
+          <a:xfrm>
+            <a:off x="457200" y="320040"/>
+            <a:ext cx="8229600" cy="640080"/>
+          </a:xfrm>
+          <a:prstGeom prst="rect">
+            <a:avLst/>
+          </a:prstGeom>
+          <a:noFill/>
+          <a:ln/>
+        </p:spPr>
+        <p:txBody>
+          <a:bodyPr wrap="square" lIns="0" tIns="0" rIns="0" bIns="0" rtlCol="0" anchor="t"/>
+          <a:lstStyle/>
+          <a:p>
+            <a:pPr indent="0" marL="0">
+              <a:buNone/>
+            </a:pPr>
+            <a:r>
+              <a:rPr lang="en-US" sz="2800" b="1" dirty="0">
+                <a:solidFill>
+                  <a:srgbClr val="1F1F1F"/>
+                </a:solidFill>
+                <a:latin typeface="Cambria" pitchFamily="34" charset="0"/>
+                <a:ea typeface="Cambria" pitchFamily="34" charset="-122"/>
+                <a:cs typeface="Cambria" pitchFamily="34" charset="-120"/>
+              </a:rPr>
               <a:t>What could flip the answer</a:t>
             </a:r>
             <a:endParaRPr lang="en-US" sz="2800" dirty="0"/>
@@ -4857,7 +5363,7 @@
       </p:sp>
       <p:graphicFrame>
         <p:nvGraphicFramePr>
-          <p:cNvPr id="16" name="Table 0"/>
+          <p:cNvPr id="17" name="Table 0"/>
           <p:cNvGraphicFramePr>
             <a:graphicFrameLocks noGrp="1"/>
           </p:cNvGraphicFramePr>
@@ -5718,9 +6224,9 @@
 </p:sld>
 </file>
 
-<file path=ppt/slides/slide16.xml><?xml version="1.0" encoding="utf-8"?>
+<file path=ppt/slides/slide17.xml><?xml version="1.0" encoding="utf-8"?>
 <p:sld xmlns:a="http://schemas.openxmlformats.org/drawingml/2006/main" xmlns:r="http://schemas.openxmlformats.org/officeDocument/2006/relationships" xmlns:p="http://schemas.openxmlformats.org/presentationml/2006/main">
-  <p:cSld name="Slide 16">
+  <p:cSld name="Slide 17">
     <p:bg>
       <p:bgPr>
         <a:solidFill>
@@ -5822,7 +6328,7 @@
       </p:sp>
       <p:graphicFrame>
         <p:nvGraphicFramePr>
-          <p:cNvPr id="17" name="Table 0"/>
+          <p:cNvPr id="18" name="Table 0"/>
           <p:cNvGraphicFramePr>
             <a:graphicFrameLocks noGrp="1"/>
           </p:cNvGraphicFramePr>
@@ -7422,9 +7928,9 @@
 </p:sld>
 </file>
 
-<file path=ppt/slides/slide17.xml><?xml version="1.0" encoding="utf-8"?>
+<file path=ppt/slides/slide18.xml><?xml version="1.0" encoding="utf-8"?>
 <p:sld xmlns:a="http://schemas.openxmlformats.org/drawingml/2006/main" xmlns:r="http://schemas.openxmlformats.org/officeDocument/2006/relationships" xmlns:p="http://schemas.openxmlformats.org/presentationml/2006/main">
-  <p:cSld name="Slide 17">
+  <p:cSld name="Slide 18">
     <p:bg>
       <p:bgPr>
         <a:solidFill>
@@ -7487,7 +7993,7 @@
       </p:sp>
       <p:graphicFrame>
         <p:nvGraphicFramePr>
-          <p:cNvPr id="18" name="Table 0"/>
+          <p:cNvPr id="19" name="Table 0"/>
           <p:cNvGraphicFramePr>
             <a:graphicFrameLocks noGrp="1"/>
           </p:cNvGraphicFramePr>
@@ -8495,6 +9001,144 @@
                           <a:ea typeface="Calibri" pitchFamily="34" charset="-122"/>
                           <a:cs typeface="Calibri" pitchFamily="34" charset="-120"/>
                         </a:rPr>
+                        <a:t>New project run end to end</a:t>
+                      </a:r>
+                      <a:endParaRPr lang="en-US" sz="1000" dirty="0">
+                        <a:latin typeface="Calibri" charset="0"/>
+                        <a:ea typeface="Calibri" charset="0"/>
+                        <a:cs typeface="Calibri" charset="0"/>
+                      </a:endParaRPr>
+                    </a:p>
+                  </a:txBody>
+                  <a:tcPr marL="45720" marR="45720" marT="45720" marB="45720" anchor="ctr">
+                    <a:lnL w="6350" cap="flat" cmpd="sng" algn="ctr">
+                      <a:solidFill>
+                        <a:srgbClr val="C9C9C4"/>
+                      </a:solidFill>
+                      <a:prstDash val="solid"/>
+                      <a:round/>
+                      <a:headEnd type="none" w="med" len="med"/>
+                      <a:tailEnd type="none" w="med" len="med"/>
+                    </a:lnL>
+                    <a:lnR w="6350" cap="flat" cmpd="sng" algn="ctr">
+                      <a:solidFill>
+                        <a:srgbClr val="C9C9C4"/>
+                      </a:solidFill>
+                      <a:prstDash val="solid"/>
+                      <a:round/>
+                      <a:headEnd type="none" w="med" len="med"/>
+                      <a:tailEnd type="none" w="med" len="med"/>
+                    </a:lnR>
+                    <a:lnT w="6350" cap="flat" cmpd="sng" algn="ctr">
+                      <a:solidFill>
+                        <a:srgbClr val="C9C9C4"/>
+                      </a:solidFill>
+                      <a:prstDash val="solid"/>
+                      <a:round/>
+                      <a:headEnd type="none" w="med" len="med"/>
+                      <a:tailEnd type="none" w="med" len="med"/>
+                    </a:lnT>
+                    <a:lnB w="6350" cap="flat" cmpd="sng" algn="ctr">
+                      <a:solidFill>
+                        <a:srgbClr val="C9C9C4"/>
+                      </a:solidFill>
+                      <a:prstDash val="solid"/>
+                      <a:round/>
+                      <a:headEnd type="none" w="med" len="med"/>
+                      <a:tailEnd type="none" w="med" len="med"/>
+                    </a:lnB>
+                    <a:solidFill>
+                      <a:srgbClr val="FFFFFF"/>
+                    </a:solidFill>
+                  </a:tcPr>
+                </a:tc>
+                <a:tc>
+                  <a:txBody>
+                    <a:bodyPr/>
+                    <a:lstStyle/>
+                    <a:p>
+                      <a:pPr indent="0" marL="0">
+                        <a:buNone/>
+                      </a:pPr>
+                      <a:r>
+                        <a:rPr lang="en-US" sz="1000" dirty="0">
+                          <a:solidFill>
+                            <a:srgbClr val="1F1F1F"/>
+                          </a:solidFill>
+                          <a:latin typeface="Calibri" pitchFamily="34" charset="0"/>
+                          <a:ea typeface="Calibri" pitchFamily="34" charset="-122"/>
+                          <a:cs typeface="Calibri" pitchFamily="34" charset="-120"/>
+                        </a:rPr>
+                        <a:t>CKV Runway 17-35 built on the blank template: framework, decision TEMPLATE and an independent engine agree to the dollar</a:t>
+                      </a:r>
+                      <a:endParaRPr lang="en-US" sz="1000" dirty="0">
+                        <a:latin typeface="Calibri" charset="0"/>
+                        <a:ea typeface="Calibri" charset="0"/>
+                        <a:cs typeface="Calibri" charset="0"/>
+                      </a:endParaRPr>
+                    </a:p>
+                  </a:txBody>
+                  <a:tcPr marL="45720" marR="45720" marT="45720" marB="45720" anchor="ctr">
+                    <a:lnL w="6350" cap="flat" cmpd="sng" algn="ctr">
+                      <a:solidFill>
+                        <a:srgbClr val="C9C9C4"/>
+                      </a:solidFill>
+                      <a:prstDash val="solid"/>
+                      <a:round/>
+                      <a:headEnd type="none" w="med" len="med"/>
+                      <a:tailEnd type="none" w="med" len="med"/>
+                    </a:lnL>
+                    <a:lnR w="6350" cap="flat" cmpd="sng" algn="ctr">
+                      <a:solidFill>
+                        <a:srgbClr val="C9C9C4"/>
+                      </a:solidFill>
+                      <a:prstDash val="solid"/>
+                      <a:round/>
+                      <a:headEnd type="none" w="med" len="med"/>
+                      <a:tailEnd type="none" w="med" len="med"/>
+                    </a:lnR>
+                    <a:lnT w="6350" cap="flat" cmpd="sng" algn="ctr">
+                      <a:solidFill>
+                        <a:srgbClr val="C9C9C4"/>
+                      </a:solidFill>
+                      <a:prstDash val="solid"/>
+                      <a:round/>
+                      <a:headEnd type="none" w="med" len="med"/>
+                      <a:tailEnd type="none" w="med" len="med"/>
+                    </a:lnT>
+                    <a:lnB w="6350" cap="flat" cmpd="sng" algn="ctr">
+                      <a:solidFill>
+                        <a:srgbClr val="C9C9C4"/>
+                      </a:solidFill>
+                      <a:prstDash val="solid"/>
+                      <a:round/>
+                      <a:headEnd type="none" w="med" len="med"/>
+                      <a:tailEnd type="none" w="med" len="med"/>
+                    </a:lnB>
+                    <a:solidFill>
+                      <a:srgbClr val="FFFFFF"/>
+                    </a:solidFill>
+                  </a:tcPr>
+                </a:tc>
+              </a:tr>
+              <a:tr h="274320">
+                <a:tc>
+                  <a:txBody>
+                    <a:bodyPr/>
+                    <a:lstStyle/>
+                    <a:p>
+                      <a:pPr indent="0" marL="0">
+                        <a:buNone/>
+                      </a:pPr>
+                      <a:r>
+                        <a:rPr lang="en-US" sz="1000" dirty="0">
+                          <a:solidFill>
+                            <a:srgbClr val="1F1F1F"/>
+                          </a:solidFill>
+                          <a:latin typeface="Calibri" pitchFamily="34" charset="0"/>
+                          <a:ea typeface="Calibri" pitchFamily="34" charset="-122"/>
+                          <a:cs typeface="Calibri" pitchFamily="34" charset="-120"/>
+                        </a:rPr>
                         <a:t>Scripted click-through (LibreOffice API)</a:t>
                       </a:r>
                       <a:endParaRPr lang="en-US" sz="1000" dirty="0">
@@ -8757,542 +9401,6 @@
           </a:graphicData>
         </a:graphic>
       </p:graphicFrame>
-    </p:spTree>
-  </p:cSld>
-  <p:clrMapOvr>
-    <a:masterClrMapping/>
-  </p:clrMapOvr>
-</p:sld>
-</file>
-
-<file path=ppt/slides/slide18.xml><?xml version="1.0" encoding="utf-8"?>
-<p:sld xmlns:a="http://schemas.openxmlformats.org/drawingml/2006/main" xmlns:r="http://schemas.openxmlformats.org/officeDocument/2006/relationships" xmlns:p="http://schemas.openxmlformats.org/presentationml/2006/main">
-  <p:cSld name="Slide 18">
-    <p:bg>
-      <p:bgPr>
-        <a:solidFill>
-          <a:srgbClr val="FFFFFF"/>
-        </a:solidFill>
-      </p:bgPr>
-    </p:bg>
-    <p:spTree>
-      <p:nvGrpSpPr>
-        <p:cNvPr id="1" name=""/>
-        <p:cNvGrpSpPr/>
-        <p:nvPr/>
-      </p:nvGrpSpPr>
-      <p:grpSpPr>
-        <a:xfrm>
-          <a:off x="0" y="0"/>
-          <a:ext cx="0" cy="0"/>
-          <a:chOff x="0" y="0"/>
-          <a:chExt cx="0" cy="0"/>
-        </a:xfrm>
-      </p:grpSpPr>
-      <p:sp>
-        <p:nvSpPr>
-          <p:cNvPr id="2" name="Text 0"/>
-          <p:cNvSpPr txBox="1"/>
-          <p:nvPr/>
-        </p:nvSpPr>
-        <p:spPr>
-          <a:xfrm>
-            <a:off x="457200" y="320040"/>
-            <a:ext cx="8229600" cy="640080"/>
-          </a:xfrm>
-          <a:prstGeom prst="rect">
-            <a:avLst/>
-          </a:prstGeom>
-          <a:noFill/>
-          <a:ln/>
-        </p:spPr>
-        <p:txBody>
-          <a:bodyPr wrap="square" lIns="0" tIns="0" rIns="0" bIns="0" rtlCol="0" anchor="t"/>
-          <a:lstStyle/>
-          <a:p>
-            <a:pPr indent="0" marL="0">
-              <a:buNone/>
-            </a:pPr>
-            <a:r>
-              <a:rPr lang="en-US" sz="2800" b="1" dirty="0">
-                <a:solidFill>
-                  <a:srgbClr val="1F1F1F"/>
-                </a:solidFill>
-                <a:latin typeface="Cambria" pitchFamily="34" charset="0"/>
-                <a:ea typeface="Cambria" pitchFamily="34" charset="-122"/>
-                <a:cs typeface="Cambria" pitchFamily="34" charset="-120"/>
-              </a:rPr>
-              <a:t>How TDOT uses it</a:t>
-            </a:r>
-            <a:endParaRPr lang="en-US" sz="2800" dirty="0"/>
-          </a:p>
-        </p:txBody>
-      </p:sp>
-      <p:sp>
-        <p:nvSpPr>
-          <p:cNvPr id="3" name="Text 1"/>
-          <p:cNvSpPr txBox="1"/>
-          <p:nvPr/>
-        </p:nvSpPr>
-        <p:spPr>
-          <a:xfrm>
-            <a:off x="457200" y="914400"/>
-            <a:ext cx="8229600" cy="365760"/>
-          </a:xfrm>
-          <a:prstGeom prst="rect">
-            <a:avLst/>
-          </a:prstGeom>
-          <a:noFill/>
-          <a:ln/>
-        </p:spPr>
-        <p:txBody>
-          <a:bodyPr wrap="square" lIns="0" tIns="0" rIns="0" bIns="0" rtlCol="0" anchor="ctr"/>
-          <a:lstStyle/>
-          <a:p>
-            <a:pPr indent="0" marL="0">
-              <a:buNone/>
-            </a:pPr>
-            <a:r>
-              <a:rPr lang="en-US" sz="1300" i="1" dirty="0">
-                <a:solidFill>
-                  <a:srgbClr val="5F5F5F"/>
-                </a:solidFill>
-                <a:latin typeface="Calibri" pitchFamily="34" charset="0"/>
-                <a:ea typeface="Calibri" pitchFamily="34" charset="-122"/>
-                <a:cs typeface="Calibri" pitchFamily="34" charset="-120"/>
-              </a:rPr>
-              <a:t>Excel only. No add-ins. The decision workbook has no macros at all.</a:t>
-            </a:r>
-            <a:endParaRPr lang="en-US" sz="1300" dirty="0"/>
-          </a:p>
-        </p:txBody>
-      </p:sp>
-      <p:sp>
-        <p:nvSpPr>
-          <p:cNvPr id="4" name="Shape 2"/>
-          <p:cNvSpPr/>
-          <p:nvPr/>
-        </p:nvSpPr>
-        <p:spPr>
-          <a:xfrm>
-            <a:off x="457200" y="1463040"/>
-            <a:ext cx="502920" cy="502920"/>
-          </a:xfrm>
-          <a:prstGeom prst="ellipse">
-            <a:avLst/>
-          </a:prstGeom>
-          <a:solidFill>
-            <a:srgbClr val="1D2733"/>
-          </a:solidFill>
-          <a:ln w="12700">
-            <a:solidFill>
-              <a:srgbClr val="1D2733"/>
-            </a:solidFill>
-            <a:prstDash val="solid"/>
-          </a:ln>
-        </p:spPr>
-      </p:sp>
-      <p:sp>
-        <p:nvSpPr>
-          <p:cNvPr id="5" name="Text 3"/>
-          <p:cNvSpPr txBox="1"/>
-          <p:nvPr/>
-        </p:nvSpPr>
-        <p:spPr>
-          <a:xfrm>
-            <a:off x="457200" y="1463040"/>
-            <a:ext cx="502920" cy="502920"/>
-          </a:xfrm>
-          <a:prstGeom prst="rect">
-            <a:avLst/>
-          </a:prstGeom>
-          <a:noFill/>
-          <a:ln/>
-        </p:spPr>
-        <p:txBody>
-          <a:bodyPr wrap="square" lIns="0" tIns="0" rIns="0" bIns="0" rtlCol="0" anchor="ctr"/>
-          <a:lstStyle/>
-          <a:p>
-            <a:pPr algn="ctr" indent="0" marL="0">
-              <a:buNone/>
-            </a:pPr>
-            <a:r>
-              <a:rPr lang="en-US" sz="1800" b="1" dirty="0">
-                <a:solidFill>
-                  <a:srgbClr val="FFFFFF"/>
-                </a:solidFill>
-                <a:latin typeface="Cambria" pitchFamily="34" charset="0"/>
-                <a:ea typeface="Cambria" pitchFamily="34" charset="-122"/>
-                <a:cs typeface="Cambria" pitchFamily="34" charset="-120"/>
-              </a:rPr>
-              <a:t>1</a:t>
-            </a:r>
-            <a:endParaRPr lang="en-US" sz="1800" dirty="0"/>
-          </a:p>
-        </p:txBody>
-      </p:sp>
-      <p:sp>
-        <p:nvSpPr>
-          <p:cNvPr id="6" name="Text 4"/>
-          <p:cNvSpPr txBox="1"/>
-          <p:nvPr/>
-        </p:nvSpPr>
-        <p:spPr>
-          <a:xfrm>
-            <a:off x="457200" y="2103120"/>
-            <a:ext cx="2560320" cy="457200"/>
-          </a:xfrm>
-          <a:prstGeom prst="rect">
-            <a:avLst/>
-          </a:prstGeom>
-          <a:noFill/>
-          <a:ln/>
-        </p:spPr>
-        <p:txBody>
-          <a:bodyPr wrap="square" lIns="0" tIns="0" rIns="0" bIns="0" rtlCol="0" anchor="ctr"/>
-          <a:lstStyle/>
-          <a:p>
-            <a:pPr indent="0" marL="0">
-              <a:buNone/>
-            </a:pPr>
-            <a:r>
-              <a:rPr lang="en-US" sz="1500" b="1" dirty="0">
-                <a:solidFill>
-                  <a:srgbClr val="1F1F1F"/>
-                </a:solidFill>
-                <a:latin typeface="Cambria" pitchFamily="34" charset="0"/>
-                <a:ea typeface="Cambria" pitchFamily="34" charset="-122"/>
-                <a:cs typeface="Cambria" pitchFamily="34" charset="-120"/>
-              </a:rPr>
-              <a:t>Run the framework as before</a:t>
-            </a:r>
-            <a:endParaRPr lang="en-US" sz="1500" dirty="0"/>
-          </a:p>
-        </p:txBody>
-      </p:sp>
-      <p:sp>
-        <p:nvSpPr>
-          <p:cNvPr id="7" name="Text 5"/>
-          <p:cNvSpPr txBox="1"/>
-          <p:nvPr/>
-        </p:nvSpPr>
-        <p:spPr>
-          <a:xfrm>
-            <a:off x="457200" y="2606040"/>
-            <a:ext cx="2560320" cy="1645920"/>
-          </a:xfrm>
-          <a:prstGeom prst="rect">
-            <a:avLst/>
-          </a:prstGeom>
-          <a:noFill/>
-          <a:ln/>
-        </p:spPr>
-        <p:txBody>
-          <a:bodyPr wrap="square" lIns="0" tIns="0" rIns="0" bIns="0" rtlCol="0" anchor="t"/>
-          <a:lstStyle/>
-          <a:p>
-            <a:pPr indent="0" marL="0">
-              <a:buNone/>
-            </a:pPr>
-            <a:r>
-              <a:rPr lang="en-US" sz="1200" dirty="0">
-                <a:solidFill>
-                  <a:srgbClr val="1F1F1F"/>
-                </a:solidFill>
-                <a:latin typeface="Calibri" pitchFamily="34" charset="0"/>
-                <a:ea typeface="Calibri" pitchFamily="34" charset="-122"/>
-                <a:cs typeface="Calibri" pitchFamily="34" charset="-120"/>
-              </a:rPr>
-              <a:t>Open v1.2.0, enable content, fill General Information, build alternatives with Alternative Setup. Click View Summary: categories, closures, the 7 percent flag and five charts, no import needed.</a:t>
-            </a:r>
-            <a:endParaRPr lang="en-US" sz="1200" dirty="0"/>
-          </a:p>
-        </p:txBody>
-      </p:sp>
-      <p:sp>
-        <p:nvSpPr>
-          <p:cNvPr id="8" name="Shape 6"/>
-          <p:cNvSpPr/>
-          <p:nvPr/>
-        </p:nvSpPr>
-        <p:spPr>
-          <a:xfrm>
-            <a:off x="3246120" y="1463040"/>
-            <a:ext cx="502920" cy="502920"/>
-          </a:xfrm>
-          <a:prstGeom prst="ellipse">
-            <a:avLst/>
-          </a:prstGeom>
-          <a:solidFill>
-            <a:srgbClr val="1D2733"/>
-          </a:solidFill>
-          <a:ln w="12700">
-            <a:solidFill>
-              <a:srgbClr val="1D2733"/>
-            </a:solidFill>
-            <a:prstDash val="solid"/>
-          </a:ln>
-        </p:spPr>
-      </p:sp>
-      <p:sp>
-        <p:nvSpPr>
-          <p:cNvPr id="9" name="Text 7"/>
-          <p:cNvSpPr txBox="1"/>
-          <p:nvPr/>
-        </p:nvSpPr>
-        <p:spPr>
-          <a:xfrm>
-            <a:off x="3246120" y="1463040"/>
-            <a:ext cx="502920" cy="502920"/>
-          </a:xfrm>
-          <a:prstGeom prst="rect">
-            <a:avLst/>
-          </a:prstGeom>
-          <a:noFill/>
-          <a:ln/>
-        </p:spPr>
-        <p:txBody>
-          <a:bodyPr wrap="square" lIns="0" tIns="0" rIns="0" bIns="0" rtlCol="0" anchor="ctr"/>
-          <a:lstStyle/>
-          <a:p>
-            <a:pPr algn="ctr" indent="0" marL="0">
-              <a:buNone/>
-            </a:pPr>
-            <a:r>
-              <a:rPr lang="en-US" sz="1800" b="1" dirty="0">
-                <a:solidFill>
-                  <a:srgbClr val="FFFFFF"/>
-                </a:solidFill>
-                <a:latin typeface="Cambria" pitchFamily="34" charset="0"/>
-                <a:ea typeface="Cambria" pitchFamily="34" charset="-122"/>
-                <a:cs typeface="Cambria" pitchFamily="34" charset="-120"/>
-              </a:rPr>
-              <a:t>2</a:t>
-            </a:r>
-            <a:endParaRPr lang="en-US" sz="1800" dirty="0"/>
-          </a:p>
-        </p:txBody>
-      </p:sp>
-      <p:sp>
-        <p:nvSpPr>
-          <p:cNvPr id="10" name="Text 8"/>
-          <p:cNvSpPr txBox="1"/>
-          <p:nvPr/>
-        </p:nvSpPr>
-        <p:spPr>
-          <a:xfrm>
-            <a:off x="3246120" y="2103120"/>
-            <a:ext cx="2560320" cy="457200"/>
-          </a:xfrm>
-          <a:prstGeom prst="rect">
-            <a:avLst/>
-          </a:prstGeom>
-          <a:noFill/>
-          <a:ln/>
-        </p:spPr>
-        <p:txBody>
-          <a:bodyPr wrap="square" lIns="0" tIns="0" rIns="0" bIns="0" rtlCol="0" anchor="ctr"/>
-          <a:lstStyle/>
-          <a:p>
-            <a:pPr indent="0" marL="0">
-              <a:buNone/>
-            </a:pPr>
-            <a:r>
-              <a:rPr lang="en-US" sz="1500" b="1" dirty="0">
-                <a:solidFill>
-                  <a:srgbClr val="1F1F1F"/>
-                </a:solidFill>
-                <a:latin typeface="Cambria" pitchFamily="34" charset="0"/>
-                <a:ea typeface="Cambria" pitchFamily="34" charset="-122"/>
-                <a:cs typeface="Cambria" pitchFamily="34" charset="-120"/>
-              </a:rPr>
-              <a:t>Copy the TEMPLATE sheet</a:t>
-            </a:r>
-            <a:endParaRPr lang="en-US" sz="1500" dirty="0"/>
-          </a:p>
-        </p:txBody>
-      </p:sp>
-      <p:sp>
-        <p:nvSpPr>
-          <p:cNvPr id="11" name="Text 9"/>
-          <p:cNvSpPr txBox="1"/>
-          <p:nvPr/>
-        </p:nvSpPr>
-        <p:spPr>
-          <a:xfrm>
-            <a:off x="3246120" y="2606040"/>
-            <a:ext cx="2560320" cy="1645920"/>
-          </a:xfrm>
-          <a:prstGeom prst="rect">
-            <a:avLst/>
-          </a:prstGeom>
-          <a:noFill/>
-          <a:ln/>
-        </p:spPr>
-        <p:txBody>
-          <a:bodyPr wrap="square" lIns="0" tIns="0" rIns="0" bIns="0" rtlCol="0" anchor="t"/>
-          <a:lstStyle/>
-          <a:p>
-            <a:pPr indent="0" marL="0">
-              <a:buNone/>
-            </a:pPr>
-            <a:r>
-              <a:rPr lang="en-US" sz="1200" dirty="0">
-                <a:solidFill>
-                  <a:srgbClr val="1F1F1F"/>
-                </a:solidFill>
-                <a:latin typeface="Calibri" pitchFamily="34" charset="0"/>
-                <a:ea typeface="Calibri" pitchFamily="34" charset="-122"/>
-                <a:cs typeface="Calibri" pitchFamily="34" charset="-120"/>
-              </a:rPr>
-              <a:t>In the decision workbook, right-click TEMPLATE, Move or Copy, rename. Paste the base costs and closure days from each Alt sheet into the yellow cells.</a:t>
-            </a:r>
-            <a:endParaRPr lang="en-US" sz="1200" dirty="0"/>
-          </a:p>
-        </p:txBody>
-      </p:sp>
-      <p:sp>
-        <p:nvSpPr>
-          <p:cNvPr id="12" name="Shape 10"/>
-          <p:cNvSpPr/>
-          <p:nvPr/>
-        </p:nvSpPr>
-        <p:spPr>
-          <a:xfrm>
-            <a:off x="6035040" y="1463040"/>
-            <a:ext cx="502920" cy="502920"/>
-          </a:xfrm>
-          <a:prstGeom prst="ellipse">
-            <a:avLst/>
-          </a:prstGeom>
-          <a:solidFill>
-            <a:srgbClr val="1D2733"/>
-          </a:solidFill>
-          <a:ln w="12700">
-            <a:solidFill>
-              <a:srgbClr val="1D2733"/>
-            </a:solidFill>
-            <a:prstDash val="solid"/>
-          </a:ln>
-        </p:spPr>
-      </p:sp>
-      <p:sp>
-        <p:nvSpPr>
-          <p:cNvPr id="13" name="Text 11"/>
-          <p:cNvSpPr txBox="1"/>
-          <p:nvPr/>
-        </p:nvSpPr>
-        <p:spPr>
-          <a:xfrm>
-            <a:off x="6035040" y="1463040"/>
-            <a:ext cx="502920" cy="502920"/>
-          </a:xfrm>
-          <a:prstGeom prst="rect">
-            <a:avLst/>
-          </a:prstGeom>
-          <a:noFill/>
-          <a:ln/>
-        </p:spPr>
-        <p:txBody>
-          <a:bodyPr wrap="square" lIns="0" tIns="0" rIns="0" bIns="0" rtlCol="0" anchor="ctr"/>
-          <a:lstStyle/>
-          <a:p>
-            <a:pPr algn="ctr" indent="0" marL="0">
-              <a:buNone/>
-            </a:pPr>
-            <a:r>
-              <a:rPr lang="en-US" sz="1800" b="1" dirty="0">
-                <a:solidFill>
-                  <a:srgbClr val="FFFFFF"/>
-                </a:solidFill>
-                <a:latin typeface="Cambria" pitchFamily="34" charset="0"/>
-                <a:ea typeface="Cambria" pitchFamily="34" charset="-122"/>
-                <a:cs typeface="Cambria" pitchFamily="34" charset="-120"/>
-              </a:rPr>
-              <a:t>3</a:t>
-            </a:r>
-            <a:endParaRPr lang="en-US" sz="1800" dirty="0"/>
-          </a:p>
-        </p:txBody>
-      </p:sp>
-      <p:sp>
-        <p:nvSpPr>
-          <p:cNvPr id="14" name="Text 12"/>
-          <p:cNvSpPr txBox="1"/>
-          <p:nvPr/>
-        </p:nvSpPr>
-        <p:spPr>
-          <a:xfrm>
-            <a:off x="6035040" y="2103120"/>
-            <a:ext cx="2560320" cy="457200"/>
-          </a:xfrm>
-          <a:prstGeom prst="rect">
-            <a:avLst/>
-          </a:prstGeom>
-          <a:noFill/>
-          <a:ln/>
-        </p:spPr>
-        <p:txBody>
-          <a:bodyPr wrap="square" lIns="0" tIns="0" rIns="0" bIns="0" rtlCol="0" anchor="ctr"/>
-          <a:lstStyle/>
-          <a:p>
-            <a:pPr indent="0" marL="0">
-              <a:buNone/>
-            </a:pPr>
-            <a:r>
-              <a:rPr lang="en-US" sz="1500" b="1" dirty="0">
-                <a:solidFill>
-                  <a:srgbClr val="1F1F1F"/>
-                </a:solidFill>
-                <a:latin typeface="Cambria" pitchFamily="34" charset="0"/>
-                <a:ea typeface="Cambria" pitchFamily="34" charset="-122"/>
-                <a:cs typeface="Cambria" pitchFamily="34" charset="-120"/>
-              </a:rPr>
-              <a:t>Read the decision blocks</a:t>
-            </a:r>
-            <a:endParaRPr lang="en-US" sz="1500" dirty="0"/>
-          </a:p>
-        </p:txBody>
-      </p:sp>
-      <p:sp>
-        <p:nvSpPr>
-          <p:cNvPr id="15" name="Text 13"/>
-          <p:cNvSpPr txBox="1"/>
-          <p:nvPr/>
-        </p:nvSpPr>
-        <p:spPr>
-          <a:xfrm>
-            <a:off x="6035040" y="2606040"/>
-            <a:ext cx="2560320" cy="1645920"/>
-          </a:xfrm>
-          <a:prstGeom prst="rect">
-            <a:avLst/>
-          </a:prstGeom>
-          <a:noFill/>
-          <a:ln/>
-        </p:spPr>
-        <p:txBody>
-          <a:bodyPr wrap="square" lIns="0" tIns="0" rIns="0" bIns="0" rtlCol="0" anchor="t"/>
-          <a:lstStyle/>
-          <a:p>
-            <a:pPr indent="0" marL="0">
-              <a:buNone/>
-            </a:pPr>
-            <a:r>
-              <a:rPr lang="en-US" sz="1200" dirty="0">
-                <a:solidFill>
-                  <a:srgbClr val="1F1F1F"/>
-                </a:solidFill>
-                <a:latin typeface="Calibri" pitchFamily="34" charset="0"/>
-                <a:ea typeface="Calibri" pitchFamily="34" charset="-122"/>
-                <a:cs typeface="Calibri" pitchFamily="34" charset="-120"/>
-              </a:rPr>
-              <a:t>RESULTS, BREAK-EVEN VALUES, the scenario scorecard and the decision map. Change any yellow cell and every chart follows. F9 redraws the simulation.</a:t>
-            </a:r>
-            <a:endParaRPr lang="en-US" sz="1200" dirty="0"/>
-          </a:p>
-        </p:txBody>
-      </p:sp>
     </p:spTree>
   </p:cSld>
   <p:clrMapOvr>
@@ -9358,7 +9466,7 @@
                 <a:ea typeface="Cambria" pitchFamily="34" charset="-122"/>
                 <a:cs typeface="Cambria" pitchFamily="34" charset="-120"/>
               </a:rPr>
-              <a:t>Open items</a:t>
+              <a:t>How TDOT uses it</a:t>
             </a:r>
             <a:endParaRPr lang="en-US" sz="2800" dirty="0"/>
           </a:p>
@@ -9366,26 +9474,63 @@
       </p:sp>
       <p:sp>
         <p:nvSpPr>
-          <p:cNvPr id="3" name="Shape 1"/>
+          <p:cNvPr id="3" name="Text 1"/>
+          <p:cNvSpPr txBox="1"/>
+          <p:nvPr/>
+        </p:nvSpPr>
+        <p:spPr>
+          <a:xfrm>
+            <a:off x="457200" y="914400"/>
+            <a:ext cx="8229600" cy="365760"/>
+          </a:xfrm>
+          <a:prstGeom prst="rect">
+            <a:avLst/>
+          </a:prstGeom>
+          <a:noFill/>
+          <a:ln/>
+        </p:spPr>
+        <p:txBody>
+          <a:bodyPr wrap="square" lIns="0" tIns="0" rIns="0" bIns="0" rtlCol="0" anchor="ctr"/>
+          <a:lstStyle/>
+          <a:p>
+            <a:pPr indent="0" marL="0">
+              <a:buNone/>
+            </a:pPr>
+            <a:r>
+              <a:rPr lang="en-US" sz="1300" i="1" dirty="0">
+                <a:solidFill>
+                  <a:srgbClr val="5F5F5F"/>
+                </a:solidFill>
+                <a:latin typeface="Calibri" pitchFamily="34" charset="0"/>
+                <a:ea typeface="Calibri" pitchFamily="34" charset="-122"/>
+                <a:cs typeface="Calibri" pitchFamily="34" charset="-120"/>
+              </a:rPr>
+              <a:t>Excel only. No add-ins. The decision workbook has no macros at all.</a:t>
+            </a:r>
+            <a:endParaRPr lang="en-US" sz="1300" dirty="0"/>
+          </a:p>
+        </p:txBody>
+      </p:sp>
+      <p:sp>
+        <p:nvSpPr>
+          <p:cNvPr id="4" name="Shape 2"/>
           <p:cNvSpPr/>
           <p:nvPr/>
         </p:nvSpPr>
         <p:spPr>
           <a:xfrm>
-            <a:off x="457200" y="1280160"/>
-            <a:ext cx="4023360" cy="3291840"/>
+            <a:off x="457200" y="1463040"/>
+            <a:ext cx="502920" cy="502920"/>
           </a:xfrm>
-          <a:prstGeom prst="roundRect">
-            <a:avLst>
-              <a:gd name="adj" fmla="val 2222"/>
-            </a:avLst>
+          <a:prstGeom prst="ellipse">
+            <a:avLst/>
           </a:prstGeom>
           <a:solidFill>
-            <a:srgbClr val="F3F3F1"/>
+            <a:srgbClr val="1D2733"/>
           </a:solidFill>
           <a:ln w="12700">
             <a:solidFill>
-              <a:srgbClr val="F3F3F1"/>
+              <a:srgbClr val="1D2733"/>
             </a:solidFill>
             <a:prstDash val="solid"/>
           </a:ln>
@@ -9393,14 +9538,53 @@
       </p:sp>
       <p:sp>
         <p:nvSpPr>
-          <p:cNvPr id="4" name="Text 2"/>
+          <p:cNvPr id="5" name="Text 3"/>
           <p:cNvSpPr txBox="1"/>
           <p:nvPr/>
         </p:nvSpPr>
         <p:spPr>
           <a:xfrm>
-            <a:off x="621792" y="1389888"/>
-            <a:ext cx="3694176" cy="365760"/>
+            <a:off x="457200" y="1463040"/>
+            <a:ext cx="502920" cy="502920"/>
+          </a:xfrm>
+          <a:prstGeom prst="rect">
+            <a:avLst/>
+          </a:prstGeom>
+          <a:noFill/>
+          <a:ln/>
+        </p:spPr>
+        <p:txBody>
+          <a:bodyPr wrap="square" lIns="0" tIns="0" rIns="0" bIns="0" rtlCol="0" anchor="ctr"/>
+          <a:lstStyle/>
+          <a:p>
+            <a:pPr algn="ctr" indent="0" marL="0">
+              <a:buNone/>
+            </a:pPr>
+            <a:r>
+              <a:rPr lang="en-US" sz="1800" b="1" dirty="0">
+                <a:solidFill>
+                  <a:srgbClr val="FFFFFF"/>
+                </a:solidFill>
+                <a:latin typeface="Cambria" pitchFamily="34" charset="0"/>
+                <a:ea typeface="Cambria" pitchFamily="34" charset="-122"/>
+                <a:cs typeface="Cambria" pitchFamily="34" charset="-120"/>
+              </a:rPr>
+              <a:t>1</a:t>
+            </a:r>
+            <a:endParaRPr lang="en-US" sz="1800" dirty="0"/>
+          </a:p>
+        </p:txBody>
+      </p:sp>
+      <p:sp>
+        <p:nvSpPr>
+          <p:cNvPr id="6" name="Text 4"/>
+          <p:cNvSpPr txBox="1"/>
+          <p:nvPr/>
+        </p:nvSpPr>
+        <p:spPr>
+          <a:xfrm>
+            <a:off x="457200" y="2103120"/>
+            <a:ext cx="2560320" cy="457200"/>
           </a:xfrm>
           <a:prstGeom prst="rect">
             <a:avLst/>
@@ -9424,7 +9608,7 @@
                 <a:ea typeface="Cambria" pitchFamily="34" charset="-122"/>
                 <a:cs typeface="Cambria" pitchFamily="34" charset="-120"/>
               </a:rPr>
-              <a:t>Decisions for Aeronautics</a:t>
+              <a:t>Run the framework as before</a:t>
             </a:r>
             <a:endParaRPr lang="en-US" sz="1500" dirty="0"/>
           </a:p>
@@ -9432,14 +9616,14 @@
       </p:sp>
       <p:sp>
         <p:nvSpPr>
-          <p:cNvPr id="5" name="Text 3"/>
+          <p:cNvPr id="7" name="Text 5"/>
           <p:cNvSpPr txBox="1"/>
           <p:nvPr/>
         </p:nvSpPr>
         <p:spPr>
           <a:xfrm>
-            <a:off x="621792" y="1783080"/>
-            <a:ext cx="3694176" cy="2697480"/>
+            <a:off x="457200" y="2606040"/>
+            <a:ext cx="2560320" cy="1645920"/>
           </a:xfrm>
           <a:prstGeom prst="rect">
             <a:avLst/>
@@ -9455,7 +9639,7 @@
               <a:buNone/>
             </a:pPr>
             <a:r>
-              <a:rPr lang="en-US" sz="1150" dirty="0">
+              <a:rPr lang="en-US" sz="1200" dirty="0">
                 <a:solidFill>
                   <a:srgbClr val="1F1F1F"/>
                 </a:solidFill>
@@ -9463,126 +9647,32 @@
                 <a:ea typeface="Calibri" pitchFamily="34" charset="-122"/>
                 <a:cs typeface="Calibri" pitchFamily="34" charset="-120"/>
               </a:rPr>
-              <a:t>Salvage policy: keep 25% of initial for PCC and 12.5% of one overlay for HMA, or move both to a remaining-life basis</a:t>
+              <a:t>Open v1.2.0, enable content, fill General Information, build alternatives with Alternative Setup. Click View Summary: categories, closures, the 7 percent flag and five charts, no import needed.</a:t>
             </a:r>
-            <a:endParaRPr lang="en-US" sz="1150" dirty="0"/>
-          </a:p>
-          <a:p>
-            <a:pPr indent="0" marL="0">
-              <a:buNone/>
-            </a:pPr>
-            <a:endParaRPr lang="en-US" sz="1150" dirty="0"/>
-          </a:p>
-          <a:p>
-            <a:pPr indent="0" marL="0">
-              <a:buNone/>
-            </a:pPr>
-            <a:r>
-              <a:rPr lang="en-US" sz="1150" dirty="0">
-                <a:solidFill>
-                  <a:srgbClr val="1F1F1F"/>
-                </a:solidFill>
-                <a:latin typeface="Calibri" pitchFamily="34" charset="0"/>
-                <a:ea typeface="Calibri" pitchFamily="34" charset="-122"/>
-                <a:cs typeface="Calibri" pitchFamily="34" charset="-120"/>
-              </a:rPr>
-              <a:t>Lost revenue basis: gross receipts or a per-category share lost during closure</a:t>
-            </a:r>
-            <a:endParaRPr lang="en-US" sz="1150" dirty="0"/>
-          </a:p>
-          <a:p>
-            <a:pPr indent="0" marL="0">
-              <a:buNone/>
-            </a:pPr>
-            <a:endParaRPr lang="en-US" sz="1150" dirty="0"/>
-          </a:p>
-          <a:p>
-            <a:pPr indent="0" marL="0">
-              <a:buNone/>
-            </a:pPr>
-            <a:r>
-              <a:rPr lang="en-US" sz="1150" dirty="0">
-                <a:solidFill>
-                  <a:srgbClr val="1F1F1F"/>
-                </a:solidFill>
-                <a:latin typeface="Calibri" pitchFamily="34" charset="0"/>
-                <a:ea typeface="Calibri" pitchFamily="34" charset="-122"/>
-                <a:cs typeface="Calibri" pitchFamily="34" charset="-120"/>
-              </a:rPr>
-              <a:t>FAA AIP projects: enforce 7% and 20 years, or show both</a:t>
-            </a:r>
-            <a:endParaRPr lang="en-US" sz="1150" dirty="0"/>
-          </a:p>
-          <a:p>
-            <a:pPr indent="0" marL="0">
-              <a:buNone/>
-            </a:pPr>
-            <a:endParaRPr lang="en-US" sz="1150" dirty="0"/>
-          </a:p>
-          <a:p>
-            <a:pPr indent="0" marL="0">
-              <a:buNone/>
-            </a:pPr>
-            <a:r>
-              <a:rPr lang="en-US" sz="1150" dirty="0">
-                <a:solidFill>
-                  <a:srgbClr val="1F1F1F"/>
-                </a:solidFill>
-                <a:latin typeface="Calibri" pitchFamily="34" charset="0"/>
-                <a:ea typeface="Calibri" pitchFamily="34" charset="-122"/>
-                <a:cs typeface="Calibri" pitchFamily="34" charset="-120"/>
-              </a:rPr>
-              <a:t>RevenueData: confirm MBT vs MQY, fix XNX and M54, add the other 62 airports or state the rule</a:t>
-            </a:r>
-            <a:endParaRPr lang="en-US" sz="1150" dirty="0"/>
-          </a:p>
-          <a:p>
-            <a:pPr indent="0" marL="0">
-              <a:buNone/>
-            </a:pPr>
-            <a:endParaRPr lang="en-US" sz="1150" dirty="0"/>
-          </a:p>
-          <a:p>
-            <a:pPr indent="0" marL="0">
-              <a:buNone/>
-            </a:pPr>
-            <a:r>
-              <a:rPr lang="en-US" sz="1150" dirty="0">
-                <a:solidFill>
-                  <a:srgbClr val="1F1F1F"/>
-                </a:solidFill>
-                <a:latin typeface="Calibri" pitchFamily="34" charset="0"/>
-                <a:ea typeface="Calibri" pitchFamily="34" charset="-122"/>
-                <a:cs typeface="Calibri" pitchFamily="34" charset="-120"/>
-              </a:rPr>
-              <a:t>Overview text: adopt the NS rewrite</a:t>
-            </a:r>
-            <a:endParaRPr lang="en-US" sz="1150" dirty="0"/>
+            <a:endParaRPr lang="en-US" sz="1200" dirty="0"/>
           </a:p>
         </p:txBody>
       </p:sp>
       <p:sp>
         <p:nvSpPr>
-          <p:cNvPr id="6" name="Shape 4"/>
+          <p:cNvPr id="8" name="Shape 6"/>
           <p:cNvSpPr/>
           <p:nvPr/>
         </p:nvSpPr>
         <p:spPr>
           <a:xfrm>
-            <a:off x="4663440" y="1280160"/>
-            <a:ext cx="4023360" cy="3291840"/>
+            <a:off x="3246120" y="1463040"/>
+            <a:ext cx="502920" cy="502920"/>
           </a:xfrm>
-          <a:prstGeom prst="roundRect">
-            <a:avLst>
-              <a:gd name="adj" fmla="val 2222"/>
-            </a:avLst>
+          <a:prstGeom prst="ellipse">
+            <a:avLst/>
           </a:prstGeom>
           <a:solidFill>
-            <a:srgbClr val="F3F3F1"/>
+            <a:srgbClr val="1D2733"/>
           </a:solidFill>
           <a:ln w="12700">
             <a:solidFill>
-              <a:srgbClr val="F3F3F1"/>
+              <a:srgbClr val="1D2733"/>
             </a:solidFill>
             <a:prstDash val="solid"/>
           </a:ln>
@@ -9590,14 +9680,53 @@
       </p:sp>
       <p:sp>
         <p:nvSpPr>
-          <p:cNvPr id="7" name="Text 5"/>
+          <p:cNvPr id="9" name="Text 7"/>
           <p:cNvSpPr txBox="1"/>
           <p:nvPr/>
         </p:nvSpPr>
         <p:spPr>
           <a:xfrm>
-            <a:off x="4828032" y="1389888"/>
-            <a:ext cx="3694176" cy="365760"/>
+            <a:off x="3246120" y="1463040"/>
+            <a:ext cx="502920" cy="502920"/>
+          </a:xfrm>
+          <a:prstGeom prst="rect">
+            <a:avLst/>
+          </a:prstGeom>
+          <a:noFill/>
+          <a:ln/>
+        </p:spPr>
+        <p:txBody>
+          <a:bodyPr wrap="square" lIns="0" tIns="0" rIns="0" bIns="0" rtlCol="0" anchor="ctr"/>
+          <a:lstStyle/>
+          <a:p>
+            <a:pPr algn="ctr" indent="0" marL="0">
+              <a:buNone/>
+            </a:pPr>
+            <a:r>
+              <a:rPr lang="en-US" sz="1800" b="1" dirty="0">
+                <a:solidFill>
+                  <a:srgbClr val="FFFFFF"/>
+                </a:solidFill>
+                <a:latin typeface="Cambria" pitchFamily="34" charset="0"/>
+                <a:ea typeface="Cambria" pitchFamily="34" charset="-122"/>
+                <a:cs typeface="Cambria" pitchFamily="34" charset="-120"/>
+              </a:rPr>
+              <a:t>2</a:t>
+            </a:r>
+            <a:endParaRPr lang="en-US" sz="1800" dirty="0"/>
+          </a:p>
+        </p:txBody>
+      </p:sp>
+      <p:sp>
+        <p:nvSpPr>
+          <p:cNvPr id="10" name="Text 8"/>
+          <p:cNvSpPr txBox="1"/>
+          <p:nvPr/>
+        </p:nvSpPr>
+        <p:spPr>
+          <a:xfrm>
+            <a:off x="3246120" y="2103120"/>
+            <a:ext cx="2560320" cy="457200"/>
           </a:xfrm>
           <a:prstGeom prst="rect">
             <a:avLst/>
@@ -9621,7 +9750,7 @@
                 <a:ea typeface="Cambria" pitchFamily="34" charset="-122"/>
                 <a:cs typeface="Cambria" pitchFamily="34" charset="-120"/>
               </a:rPr>
-              <a:t>Next steps</a:t>
+              <a:t>Copy the TEMPLATE sheet</a:t>
             </a:r>
             <a:endParaRPr lang="en-US" sz="1500" dirty="0"/>
           </a:p>
@@ -9629,14 +9758,14 @@
       </p:sp>
       <p:sp>
         <p:nvSpPr>
-          <p:cNvPr id="8" name="Text 6"/>
+          <p:cNvPr id="11" name="Text 9"/>
           <p:cNvSpPr txBox="1"/>
           <p:nvPr/>
         </p:nvSpPr>
         <p:spPr>
           <a:xfrm>
-            <a:off x="4828032" y="1783080"/>
-            <a:ext cx="3694176" cy="2697480"/>
+            <a:off x="3246120" y="2606040"/>
+            <a:ext cx="2560320" cy="1645920"/>
           </a:xfrm>
           <a:prstGeom prst="rect">
             <a:avLst/>
@@ -9652,7 +9781,7 @@
               <a:buNone/>
             </a:pPr>
             <a:r>
-              <a:rPr lang="en-US" sz="1150" dirty="0">
+              <a:rPr lang="en-US" sz="1200" dirty="0">
                 <a:solidFill>
                   <a:srgbClr val="1F1F1F"/>
                 </a:solidFill>
@@ -9660,22 +9789,141 @@
                 <a:ea typeface="Calibri" pitchFamily="34" charset="-122"/>
                 <a:cs typeface="Calibri" pitchFamily="34" charset="-120"/>
               </a:rPr>
-              <a:t>First open in Excel: run the first-open check in the notes</a:t>
+              <a:t>In the decision workbook, right-click TEMPLATE, Move or Copy, rename. Paste the base costs and closure days from each Alt sheet into the yellow cells.</a:t>
             </a:r>
-            <a:endParaRPr lang="en-US" sz="1150" dirty="0"/>
-          </a:p>
-          <a:p>
-            <a:pPr indent="0" marL="0">
+            <a:endParaRPr lang="en-US" sz="1200" dirty="0"/>
+          </a:p>
+        </p:txBody>
+      </p:sp>
+      <p:sp>
+        <p:nvSpPr>
+          <p:cNvPr id="12" name="Shape 10"/>
+          <p:cNvSpPr/>
+          <p:nvPr/>
+        </p:nvSpPr>
+        <p:spPr>
+          <a:xfrm>
+            <a:off x="6035040" y="1463040"/>
+            <a:ext cx="502920" cy="502920"/>
+          </a:xfrm>
+          <a:prstGeom prst="ellipse">
+            <a:avLst/>
+          </a:prstGeom>
+          <a:solidFill>
+            <a:srgbClr val="1D2733"/>
+          </a:solidFill>
+          <a:ln w="12700">
+            <a:solidFill>
+              <a:srgbClr val="1D2733"/>
+            </a:solidFill>
+            <a:prstDash val="solid"/>
+          </a:ln>
+        </p:spPr>
+      </p:sp>
+      <p:sp>
+        <p:nvSpPr>
+          <p:cNvPr id="13" name="Text 11"/>
+          <p:cNvSpPr txBox="1"/>
+          <p:nvPr/>
+        </p:nvSpPr>
+        <p:spPr>
+          <a:xfrm>
+            <a:off x="6035040" y="1463040"/>
+            <a:ext cx="502920" cy="502920"/>
+          </a:xfrm>
+          <a:prstGeom prst="rect">
+            <a:avLst/>
+          </a:prstGeom>
+          <a:noFill/>
+          <a:ln/>
+        </p:spPr>
+        <p:txBody>
+          <a:bodyPr wrap="square" lIns="0" tIns="0" rIns="0" bIns="0" rtlCol="0" anchor="ctr"/>
+          <a:lstStyle/>
+          <a:p>
+            <a:pPr algn="ctr" indent="0" marL="0">
               <a:buNone/>
             </a:pPr>
-            <a:endParaRPr lang="en-US" sz="1150" dirty="0"/>
-          </a:p>
+            <a:r>
+              <a:rPr lang="en-US" sz="1800" b="1" dirty="0">
+                <a:solidFill>
+                  <a:srgbClr val="FFFFFF"/>
+                </a:solidFill>
+                <a:latin typeface="Cambria" pitchFamily="34" charset="0"/>
+                <a:ea typeface="Cambria" pitchFamily="34" charset="-122"/>
+                <a:cs typeface="Cambria" pitchFamily="34" charset="-120"/>
+              </a:rPr>
+              <a:t>3</a:t>
+            </a:r>
+            <a:endParaRPr lang="en-US" sz="1800" dirty="0"/>
+          </a:p>
+        </p:txBody>
+      </p:sp>
+      <p:sp>
+        <p:nvSpPr>
+          <p:cNvPr id="14" name="Text 12"/>
+          <p:cNvSpPr txBox="1"/>
+          <p:nvPr/>
+        </p:nvSpPr>
+        <p:spPr>
+          <a:xfrm>
+            <a:off x="6035040" y="2103120"/>
+            <a:ext cx="2560320" cy="457200"/>
+          </a:xfrm>
+          <a:prstGeom prst="rect">
+            <a:avLst/>
+          </a:prstGeom>
+          <a:noFill/>
+          <a:ln/>
+        </p:spPr>
+        <p:txBody>
+          <a:bodyPr wrap="square" lIns="0" tIns="0" rIns="0" bIns="0" rtlCol="0" anchor="ctr"/>
+          <a:lstStyle/>
           <a:p>
             <a:pPr indent="0" marL="0">
               <a:buNone/>
             </a:pPr>
             <a:r>
-              <a:rPr lang="en-US" sz="1150" dirty="0">
+              <a:rPr lang="en-US" sz="1500" b="1" dirty="0">
+                <a:solidFill>
+                  <a:srgbClr val="1F1F1F"/>
+                </a:solidFill>
+                <a:latin typeface="Cambria" pitchFamily="34" charset="0"/>
+                <a:ea typeface="Cambria" pitchFamily="34" charset="-122"/>
+                <a:cs typeface="Cambria" pitchFamily="34" charset="-120"/>
+              </a:rPr>
+              <a:t>Read the decision blocks</a:t>
+            </a:r>
+            <a:endParaRPr lang="en-US" sz="1500" dirty="0"/>
+          </a:p>
+        </p:txBody>
+      </p:sp>
+      <p:sp>
+        <p:nvSpPr>
+          <p:cNvPr id="15" name="Text 13"/>
+          <p:cNvSpPr txBox="1"/>
+          <p:nvPr/>
+        </p:nvSpPr>
+        <p:spPr>
+          <a:xfrm>
+            <a:off x="6035040" y="2606040"/>
+            <a:ext cx="2560320" cy="1645920"/>
+          </a:xfrm>
+          <a:prstGeom prst="rect">
+            <a:avLst/>
+          </a:prstGeom>
+          <a:noFill/>
+          <a:ln/>
+        </p:spPr>
+        <p:txBody>
+          <a:bodyPr wrap="square" lIns="0" tIns="0" rIns="0" bIns="0" rtlCol="0" anchor="t"/>
+          <a:lstStyle/>
+          <a:p>
+            <a:pPr indent="0" marL="0">
+              <a:buNone/>
+            </a:pPr>
+            <a:r>
+              <a:rPr lang="en-US" sz="1200" dirty="0">
                 <a:solidFill>
                   <a:srgbClr val="1F1F1F"/>
                 </a:solidFill>
@@ -9683,55 +9931,9 @@
                 <a:ea typeface="Calibri" pitchFamily="34" charset="-122"/>
                 <a:cs typeface="Calibri" pitchFamily="34" charset="-120"/>
               </a:rPr>
-              <a:t>Send v1.2.0 and the decision workbook to NS for a second pass</a:t>
+              <a:t>RESULTS, BREAK-EVEN VALUES, the scenario scorecard and the decision map. Change any yellow cell and every chart follows. F9 redraws the simulation.</a:t>
             </a:r>
-            <a:endParaRPr lang="en-US" sz="1150" dirty="0"/>
-          </a:p>
-          <a:p>
-            <a:pPr indent="0" marL="0">
-              <a:buNone/>
-            </a:pPr>
-            <a:endParaRPr lang="en-US" sz="1150" dirty="0"/>
-          </a:p>
-          <a:p>
-            <a:pPr indent="0" marL="0">
-              <a:buNone/>
-            </a:pPr>
-            <a:r>
-              <a:rPr lang="en-US" sz="1150" dirty="0">
-                <a:solidFill>
-                  <a:srgbClr val="1F1F1F"/>
-                </a:solidFill>
-                <a:latin typeface="Calibri" pitchFamily="34" charset="0"/>
-                <a:ea typeface="Calibri" pitchFamily="34" charset="-122"/>
-                <a:cs typeface="Calibri" pitchFamily="34" charset="-120"/>
-              </a:rPr>
-              <a:t>PCC rehabilitation template is still "Coming soon" if TDOT wants rehab alternatives</a:t>
-            </a:r>
-            <a:endParaRPr lang="en-US" sz="1150" dirty="0"/>
-          </a:p>
-          <a:p>
-            <a:pPr indent="0" marL="0">
-              <a:buNone/>
-            </a:pPr>
-            <a:endParaRPr lang="en-US" sz="1150" dirty="0"/>
-          </a:p>
-          <a:p>
-            <a:pPr indent="0" marL="0">
-              <a:buNone/>
-            </a:pPr>
-            <a:r>
-              <a:rPr lang="en-US" sz="1150" dirty="0">
-                <a:solidFill>
-                  <a:srgbClr val="1F1F1F"/>
-                </a:solidFill>
-                <a:latin typeface="Calibri" pitchFamily="34" charset="0"/>
-                <a:ea typeface="Calibri" pitchFamily="34" charset="-122"/>
-                <a:cs typeface="Calibri" pitchFamily="34" charset="-120"/>
-              </a:rPr>
-              <a:t>Optional later: a no-macro web version would remove the ActiveX problem entirely</a:t>
-            </a:r>
-            <a:endParaRPr lang="en-US" sz="1150" dirty="0"/>
+            <a:endParaRPr lang="en-US" sz="1200" dirty="0"/>
           </a:p>
         </p:txBody>
       </p:sp>
@@ -10358,6 +10560,448 @@
     <p:bg>
       <p:bgPr>
         <a:solidFill>
+          <a:srgbClr val="FFFFFF"/>
+        </a:solidFill>
+      </p:bgPr>
+    </p:bg>
+    <p:spTree>
+      <p:nvGrpSpPr>
+        <p:cNvPr id="1" name=""/>
+        <p:cNvGrpSpPr/>
+        <p:nvPr/>
+      </p:nvGrpSpPr>
+      <p:grpSpPr>
+        <a:xfrm>
+          <a:off x="0" y="0"/>
+          <a:ext cx="0" cy="0"/>
+          <a:chOff x="0" y="0"/>
+          <a:chExt cx="0" cy="0"/>
+        </a:xfrm>
+      </p:grpSpPr>
+      <p:sp>
+        <p:nvSpPr>
+          <p:cNvPr id="2" name="Text 0"/>
+          <p:cNvSpPr txBox="1"/>
+          <p:nvPr/>
+        </p:nvSpPr>
+        <p:spPr>
+          <a:xfrm>
+            <a:off x="457200" y="320040"/>
+            <a:ext cx="8229600" cy="640080"/>
+          </a:xfrm>
+          <a:prstGeom prst="rect">
+            <a:avLst/>
+          </a:prstGeom>
+          <a:noFill/>
+          <a:ln/>
+        </p:spPr>
+        <p:txBody>
+          <a:bodyPr wrap="square" lIns="0" tIns="0" rIns="0" bIns="0" rtlCol="0" anchor="t"/>
+          <a:lstStyle/>
+          <a:p>
+            <a:pPr indent="0" marL="0">
+              <a:buNone/>
+            </a:pPr>
+            <a:r>
+              <a:rPr lang="en-US" sz="2800" b="1" dirty="0">
+                <a:solidFill>
+                  <a:srgbClr val="1F1F1F"/>
+                </a:solidFill>
+                <a:latin typeface="Cambria" pitchFamily="34" charset="0"/>
+                <a:ea typeface="Cambria" pitchFamily="34" charset="-122"/>
+                <a:cs typeface="Cambria" pitchFamily="34" charset="-120"/>
+              </a:rPr>
+              <a:t>Open items</a:t>
+            </a:r>
+            <a:endParaRPr lang="en-US" sz="2800" dirty="0"/>
+          </a:p>
+        </p:txBody>
+      </p:sp>
+      <p:sp>
+        <p:nvSpPr>
+          <p:cNvPr id="3" name="Shape 1"/>
+          <p:cNvSpPr/>
+          <p:nvPr/>
+        </p:nvSpPr>
+        <p:spPr>
+          <a:xfrm>
+            <a:off x="457200" y="1280160"/>
+            <a:ext cx="4023360" cy="3291840"/>
+          </a:xfrm>
+          <a:prstGeom prst="roundRect">
+            <a:avLst>
+              <a:gd name="adj" fmla="val 2222"/>
+            </a:avLst>
+          </a:prstGeom>
+          <a:solidFill>
+            <a:srgbClr val="F3F3F1"/>
+          </a:solidFill>
+          <a:ln w="12700">
+            <a:solidFill>
+              <a:srgbClr val="F3F3F1"/>
+            </a:solidFill>
+            <a:prstDash val="solid"/>
+          </a:ln>
+        </p:spPr>
+      </p:sp>
+      <p:sp>
+        <p:nvSpPr>
+          <p:cNvPr id="4" name="Text 2"/>
+          <p:cNvSpPr txBox="1"/>
+          <p:nvPr/>
+        </p:nvSpPr>
+        <p:spPr>
+          <a:xfrm>
+            <a:off x="621792" y="1389888"/>
+            <a:ext cx="3694176" cy="365760"/>
+          </a:xfrm>
+          <a:prstGeom prst="rect">
+            <a:avLst/>
+          </a:prstGeom>
+          <a:noFill/>
+          <a:ln/>
+        </p:spPr>
+        <p:txBody>
+          <a:bodyPr wrap="square" lIns="0" tIns="0" rIns="0" bIns="0" rtlCol="0" anchor="ctr"/>
+          <a:lstStyle/>
+          <a:p>
+            <a:pPr indent="0" marL="0">
+              <a:buNone/>
+            </a:pPr>
+            <a:r>
+              <a:rPr lang="en-US" sz="1500" b="1" dirty="0">
+                <a:solidFill>
+                  <a:srgbClr val="1F1F1F"/>
+                </a:solidFill>
+                <a:latin typeface="Cambria" pitchFamily="34" charset="0"/>
+                <a:ea typeface="Cambria" pitchFamily="34" charset="-122"/>
+                <a:cs typeface="Cambria" pitchFamily="34" charset="-120"/>
+              </a:rPr>
+              <a:t>Decisions for Aeronautics</a:t>
+            </a:r>
+            <a:endParaRPr lang="en-US" sz="1500" dirty="0"/>
+          </a:p>
+        </p:txBody>
+      </p:sp>
+      <p:sp>
+        <p:nvSpPr>
+          <p:cNvPr id="5" name="Text 3"/>
+          <p:cNvSpPr txBox="1"/>
+          <p:nvPr/>
+        </p:nvSpPr>
+        <p:spPr>
+          <a:xfrm>
+            <a:off x="621792" y="1783080"/>
+            <a:ext cx="3694176" cy="2697480"/>
+          </a:xfrm>
+          <a:prstGeom prst="rect">
+            <a:avLst/>
+          </a:prstGeom>
+          <a:noFill/>
+          <a:ln/>
+        </p:spPr>
+        <p:txBody>
+          <a:bodyPr wrap="square" lIns="0" tIns="0" rIns="0" bIns="0" rtlCol="0" anchor="t"/>
+          <a:lstStyle/>
+          <a:p>
+            <a:pPr indent="0" marL="0">
+              <a:buNone/>
+            </a:pPr>
+            <a:r>
+              <a:rPr lang="en-US" sz="1150" dirty="0">
+                <a:solidFill>
+                  <a:srgbClr val="1F1F1F"/>
+                </a:solidFill>
+                <a:latin typeface="Calibri" pitchFamily="34" charset="0"/>
+                <a:ea typeface="Calibri" pitchFamily="34" charset="-122"/>
+                <a:cs typeface="Calibri" pitchFamily="34" charset="-120"/>
+              </a:rPr>
+              <a:t>Salvage policy: keep 25% of initial for PCC and 12.5% of one overlay for HMA, or move both to a remaining-life basis</a:t>
+            </a:r>
+            <a:endParaRPr lang="en-US" sz="1150" dirty="0"/>
+          </a:p>
+          <a:p>
+            <a:pPr indent="0" marL="0">
+              <a:buNone/>
+            </a:pPr>
+            <a:endParaRPr lang="en-US" sz="1150" dirty="0"/>
+          </a:p>
+          <a:p>
+            <a:pPr indent="0" marL="0">
+              <a:buNone/>
+            </a:pPr>
+            <a:r>
+              <a:rPr lang="en-US" sz="1150" dirty="0">
+                <a:solidFill>
+                  <a:srgbClr val="1F1F1F"/>
+                </a:solidFill>
+                <a:latin typeface="Calibri" pitchFamily="34" charset="0"/>
+                <a:ea typeface="Calibri" pitchFamily="34" charset="-122"/>
+                <a:cs typeface="Calibri" pitchFamily="34" charset="-120"/>
+              </a:rPr>
+              <a:t>Lost revenue basis: gross receipts or a per-category share lost during closure</a:t>
+            </a:r>
+            <a:endParaRPr lang="en-US" sz="1150" dirty="0"/>
+          </a:p>
+          <a:p>
+            <a:pPr indent="0" marL="0">
+              <a:buNone/>
+            </a:pPr>
+            <a:endParaRPr lang="en-US" sz="1150" dirty="0"/>
+          </a:p>
+          <a:p>
+            <a:pPr indent="0" marL="0">
+              <a:buNone/>
+            </a:pPr>
+            <a:r>
+              <a:rPr lang="en-US" sz="1150" dirty="0">
+                <a:solidFill>
+                  <a:srgbClr val="1F1F1F"/>
+                </a:solidFill>
+                <a:latin typeface="Calibri" pitchFamily="34" charset="0"/>
+                <a:ea typeface="Calibri" pitchFamily="34" charset="-122"/>
+                <a:cs typeface="Calibri" pitchFamily="34" charset="-120"/>
+              </a:rPr>
+              <a:t>FAA AIP projects: enforce 7% and 20 years, or show both</a:t>
+            </a:r>
+            <a:endParaRPr lang="en-US" sz="1150" dirty="0"/>
+          </a:p>
+          <a:p>
+            <a:pPr indent="0" marL="0">
+              <a:buNone/>
+            </a:pPr>
+            <a:endParaRPr lang="en-US" sz="1150" dirty="0"/>
+          </a:p>
+          <a:p>
+            <a:pPr indent="0" marL="0">
+              <a:buNone/>
+            </a:pPr>
+            <a:r>
+              <a:rPr lang="en-US" sz="1150" dirty="0">
+                <a:solidFill>
+                  <a:srgbClr val="1F1F1F"/>
+                </a:solidFill>
+                <a:latin typeface="Calibri" pitchFamily="34" charset="0"/>
+                <a:ea typeface="Calibri" pitchFamily="34" charset="-122"/>
+                <a:cs typeface="Calibri" pitchFamily="34" charset="-120"/>
+              </a:rPr>
+              <a:t>RevenueData: confirm MBT vs MQY, fix XNX and M54, add the other 62 airports or state the rule</a:t>
+            </a:r>
+            <a:endParaRPr lang="en-US" sz="1150" dirty="0"/>
+          </a:p>
+          <a:p>
+            <a:pPr indent="0" marL="0">
+              <a:buNone/>
+            </a:pPr>
+            <a:endParaRPr lang="en-US" sz="1150" dirty="0"/>
+          </a:p>
+          <a:p>
+            <a:pPr indent="0" marL="0">
+              <a:buNone/>
+            </a:pPr>
+            <a:r>
+              <a:rPr lang="en-US" sz="1150" dirty="0">
+                <a:solidFill>
+                  <a:srgbClr val="1F1F1F"/>
+                </a:solidFill>
+                <a:latin typeface="Calibri" pitchFamily="34" charset="0"/>
+                <a:ea typeface="Calibri" pitchFamily="34" charset="-122"/>
+                <a:cs typeface="Calibri" pitchFamily="34" charset="-120"/>
+              </a:rPr>
+              <a:t>Overview text: adopt the NS rewrite</a:t>
+            </a:r>
+            <a:endParaRPr lang="en-US" sz="1150" dirty="0"/>
+          </a:p>
+        </p:txBody>
+      </p:sp>
+      <p:sp>
+        <p:nvSpPr>
+          <p:cNvPr id="6" name="Shape 4"/>
+          <p:cNvSpPr/>
+          <p:nvPr/>
+        </p:nvSpPr>
+        <p:spPr>
+          <a:xfrm>
+            <a:off x="4663440" y="1280160"/>
+            <a:ext cx="4023360" cy="3291840"/>
+          </a:xfrm>
+          <a:prstGeom prst="roundRect">
+            <a:avLst>
+              <a:gd name="adj" fmla="val 2222"/>
+            </a:avLst>
+          </a:prstGeom>
+          <a:solidFill>
+            <a:srgbClr val="F3F3F1"/>
+          </a:solidFill>
+          <a:ln w="12700">
+            <a:solidFill>
+              <a:srgbClr val="F3F3F1"/>
+            </a:solidFill>
+            <a:prstDash val="solid"/>
+          </a:ln>
+        </p:spPr>
+      </p:sp>
+      <p:sp>
+        <p:nvSpPr>
+          <p:cNvPr id="7" name="Text 5"/>
+          <p:cNvSpPr txBox="1"/>
+          <p:nvPr/>
+        </p:nvSpPr>
+        <p:spPr>
+          <a:xfrm>
+            <a:off x="4828032" y="1389888"/>
+            <a:ext cx="3694176" cy="365760"/>
+          </a:xfrm>
+          <a:prstGeom prst="rect">
+            <a:avLst/>
+          </a:prstGeom>
+          <a:noFill/>
+          <a:ln/>
+        </p:spPr>
+        <p:txBody>
+          <a:bodyPr wrap="square" lIns="0" tIns="0" rIns="0" bIns="0" rtlCol="0" anchor="ctr"/>
+          <a:lstStyle/>
+          <a:p>
+            <a:pPr indent="0" marL="0">
+              <a:buNone/>
+            </a:pPr>
+            <a:r>
+              <a:rPr lang="en-US" sz="1500" b="1" dirty="0">
+                <a:solidFill>
+                  <a:srgbClr val="1F1F1F"/>
+                </a:solidFill>
+                <a:latin typeface="Cambria" pitchFamily="34" charset="0"/>
+                <a:ea typeface="Cambria" pitchFamily="34" charset="-122"/>
+                <a:cs typeface="Cambria" pitchFamily="34" charset="-120"/>
+              </a:rPr>
+              <a:t>Next steps</a:t>
+            </a:r>
+            <a:endParaRPr lang="en-US" sz="1500" dirty="0"/>
+          </a:p>
+        </p:txBody>
+      </p:sp>
+      <p:sp>
+        <p:nvSpPr>
+          <p:cNvPr id="8" name="Text 6"/>
+          <p:cNvSpPr txBox="1"/>
+          <p:nvPr/>
+        </p:nvSpPr>
+        <p:spPr>
+          <a:xfrm>
+            <a:off x="4828032" y="1783080"/>
+            <a:ext cx="3694176" cy="2697480"/>
+          </a:xfrm>
+          <a:prstGeom prst="rect">
+            <a:avLst/>
+          </a:prstGeom>
+          <a:noFill/>
+          <a:ln/>
+        </p:spPr>
+        <p:txBody>
+          <a:bodyPr wrap="square" lIns="0" tIns="0" rIns="0" bIns="0" rtlCol="0" anchor="t"/>
+          <a:lstStyle/>
+          <a:p>
+            <a:pPr indent="0" marL="0">
+              <a:buNone/>
+            </a:pPr>
+            <a:r>
+              <a:rPr lang="en-US" sz="1150" dirty="0">
+                <a:solidFill>
+                  <a:srgbClr val="1F1F1F"/>
+                </a:solidFill>
+                <a:latin typeface="Calibri" pitchFamily="34" charset="0"/>
+                <a:ea typeface="Calibri" pitchFamily="34" charset="-122"/>
+                <a:cs typeface="Calibri" pitchFamily="34" charset="-120"/>
+              </a:rPr>
+              <a:t>First open in Excel: run the first-open check in the notes</a:t>
+            </a:r>
+            <a:endParaRPr lang="en-US" sz="1150" dirty="0"/>
+          </a:p>
+          <a:p>
+            <a:pPr indent="0" marL="0">
+              <a:buNone/>
+            </a:pPr>
+            <a:endParaRPr lang="en-US" sz="1150" dirty="0"/>
+          </a:p>
+          <a:p>
+            <a:pPr indent="0" marL="0">
+              <a:buNone/>
+            </a:pPr>
+            <a:r>
+              <a:rPr lang="en-US" sz="1150" dirty="0">
+                <a:solidFill>
+                  <a:srgbClr val="1F1F1F"/>
+                </a:solidFill>
+                <a:latin typeface="Calibri" pitchFamily="34" charset="0"/>
+                <a:ea typeface="Calibri" pitchFamily="34" charset="-122"/>
+                <a:cs typeface="Calibri" pitchFamily="34" charset="-120"/>
+              </a:rPr>
+              <a:t>Send v1.2.0 and the decision workbook to NS for a second pass</a:t>
+            </a:r>
+            <a:endParaRPr lang="en-US" sz="1150" dirty="0"/>
+          </a:p>
+          <a:p>
+            <a:pPr indent="0" marL="0">
+              <a:buNone/>
+            </a:pPr>
+            <a:endParaRPr lang="en-US" sz="1150" dirty="0"/>
+          </a:p>
+          <a:p>
+            <a:pPr indent="0" marL="0">
+              <a:buNone/>
+            </a:pPr>
+            <a:r>
+              <a:rPr lang="en-US" sz="1150" dirty="0">
+                <a:solidFill>
+                  <a:srgbClr val="1F1F1F"/>
+                </a:solidFill>
+                <a:latin typeface="Calibri" pitchFamily="34" charset="0"/>
+                <a:ea typeface="Calibri" pitchFamily="34" charset="-122"/>
+                <a:cs typeface="Calibri" pitchFamily="34" charset="-120"/>
+              </a:rPr>
+              <a:t>PCC rehabilitation template is still "Coming soon" if TDOT wants rehab alternatives</a:t>
+            </a:r>
+            <a:endParaRPr lang="en-US" sz="1150" dirty="0"/>
+          </a:p>
+          <a:p>
+            <a:pPr indent="0" marL="0">
+              <a:buNone/>
+            </a:pPr>
+            <a:endParaRPr lang="en-US" sz="1150" dirty="0"/>
+          </a:p>
+          <a:p>
+            <a:pPr indent="0" marL="0">
+              <a:buNone/>
+            </a:pPr>
+            <a:r>
+              <a:rPr lang="en-US" sz="1150" dirty="0">
+                <a:solidFill>
+                  <a:srgbClr val="1F1F1F"/>
+                </a:solidFill>
+                <a:latin typeface="Calibri" pitchFamily="34" charset="0"/>
+                <a:ea typeface="Calibri" pitchFamily="34" charset="-122"/>
+                <a:cs typeface="Calibri" pitchFamily="34" charset="-120"/>
+              </a:rPr>
+              <a:t>Optional later: a no-macro web version would remove the ActiveX problem entirely</a:t>
+            </a:r>
+            <a:endParaRPr lang="en-US" sz="1150" dirty="0"/>
+          </a:p>
+        </p:txBody>
+      </p:sp>
+    </p:spTree>
+  </p:cSld>
+  <p:clrMapOvr>
+    <a:masterClrMapping/>
+  </p:clrMapOvr>
+</p:sld>
+</file>
+
+<file path=ppt/slides/slide21.xml><?xml version="1.0" encoding="utf-8"?>
+<p:sld xmlns:a="http://schemas.openxmlformats.org/drawingml/2006/main" xmlns:r="http://schemas.openxmlformats.org/officeDocument/2006/relationships" xmlns:p="http://schemas.openxmlformats.org/presentationml/2006/main">
+  <p:cSld name="Slide 21">
+    <p:bg>
+      <p:bgPr>
+        <a:solidFill>
           <a:srgbClr val="1D2733"/>
         </a:solidFill>
       </p:bgPr>
@@ -10808,7 +11452,7 @@
                 <a:ea typeface="Calibri" pitchFamily="34" charset="-122"/>
                 <a:cs typeface="Calibri" pitchFamily="34" charset="-120"/>
               </a:rPr>
-              <a:t>FAA AIP handbook requires 7 percent and a 20-year life; the tool defaults to 3 percent and 30 years</a:t>
+              <a:t>FAA rate rule changed in 2022 (OMB A-94 real rate, 2.0% for 2026, not the old 7%); the tool defaults to 3 percent and 30 years</a:t>
             </a:r>
             <a:endParaRPr lang="en-US" sz="1200" dirty="0"/>
           </a:p>
@@ -13592,7 +14236,7 @@
                 <a:ea typeface="Cambria" pitchFamily="34" charset="-122"/>
                 <a:cs typeface="Cambria" pitchFamily="34" charset="-120"/>
               </a:rPr>
-              <a:t>7% and 20 years</a:t>
+              <a:t>Which FAA rate?</a:t>
             </a:r>
             <a:endParaRPr lang="en-US" sz="2200" dirty="0"/>
           </a:p>
@@ -13631,7 +14275,7 @@
                 <a:ea typeface="Calibri" pitchFamily="34" charset="-122"/>
                 <a:cs typeface="Calibri" pitchFamily="34" charset="-120"/>
               </a:rPr>
-              <a:t>FAA AIP Handbook Appendix U for AIP-funded projects. TDOT default is 3% over 30 years. MBT changes winner at 4.5%.</a:t>
+              <a:t>PGL 22-01 (2022) replaced the fixed 7% with the OMB A-94 real rate, 2.0% for 2026. TDOT uses 3% over 30 years. MBT changes winner at 4.5%, so the rule decides the answer.</a:t>
             </a:r>
             <a:endParaRPr lang="en-US" sz="1050" dirty="0"/>
           </a:p>

--- a/tdot-lcca/TDOT_LCCA_Review_and_v1.2.0_Update.pptx
+++ b/tdot-lcca/TDOT_LCCA_Review_and_v1.2.0_Update.pptx
@@ -26,9 +26,10 @@
     <p:sldId id="274" r:id="rId20"/>
     <p:sldId id="275" r:id="rId21"/>
     <p:sldId id="276" r:id="rId22"/>
+    <p:sldId id="277" r:id="rId23"/>
   </p:sldIdLst>
   <p:notesMasterIdLst>
-    <p:notesMasterId r:id="rId23"/>
+    <p:notesMasterId r:id="rId24"/>
   </p:notesMasterIdLst>
   <p:sldSz cx="9144000" cy="5143500"/>
   <p:notesSz cx="5143500" cy="9144000"/>
@@ -786,7 +787,7 @@
           <a:p>
             <a:r>
               <a:rPr lang="en-US" dirty="0"/>
-              <a:t>Every row has a source; the research note in the repo says which figures still need the primary PDF.</a:t>
+              <a:t/>
             </a:r>
             <a:endParaRPr lang="en-US" dirty="0"/>
           </a:p>
@@ -874,7 +875,7 @@
           <a:p>
             <a:r>
               <a:rPr lang="en-US" dirty="0"/>
-              <a:t>Everything is a formula. Change the discount rate cell and the sensitivity, tornado, map and charts all move.</a:t>
+              <a:t>Every row has a source; the research note in the repo says which figures still need the primary PDF.</a:t>
             </a:r>
             <a:endParaRPr lang="en-US" dirty="0"/>
           </a:p>
@@ -962,7 +963,7 @@
           <a:p>
             <a:r>
               <a:rPr lang="en-US" dirty="0"/>
-              <a:t>This is the chart Aeronautics asked for when they commissioned the lost-revenue update.</a:t>
+              <a:t>Everything is a formula. Change the discount rate cell and the sensitivity, tornado, map and charts all move.</a:t>
             </a:r>
             <a:endParaRPr lang="en-US" dirty="0"/>
           </a:p>
@@ -1050,7 +1051,7 @@
           <a:p>
             <a:r>
               <a:rPr lang="en-US" dirty="0"/>
-              <a:t>Break-even table on the sheet gives the exact tie points: PCC bids +9.9% or salvage below 2.5% of initial cost flips MBT.</a:t>
+              <a:t>This is the chart Aeronautics asked for when they commissioned the lost-revenue update.</a:t>
             </a:r>
             <a:endParaRPr lang="en-US" dirty="0"/>
           </a:p>
@@ -1138,7 +1139,7 @@
           <a:p>
             <a:r>
               <a:rPr lang="en-US" dirty="0"/>
-              <a:t>Break-even values come from the BREAK-EVEN VALUES block on the sheet, computed in closed form, no goal seek.</a:t>
+              <a:t>Break-even table on the sheet gives the exact tie points: PCC bids +9.9% or salvage below 2.5% of initial cost flips MBT.</a:t>
             </a:r>
             <a:endParaRPr lang="en-US" dirty="0"/>
           </a:p>
@@ -1226,7 +1227,7 @@
           <a:p>
             <a:r>
               <a:rPr lang="en-US" dirty="0"/>
-              <a:t>SRB break-even daily revenue is about $23,000 per day against $4,344 actual.</a:t>
+              <a:t>Break-even values come from the BREAK-EVEN VALUES block on the sheet, computed in closed form, no goal seek.</a:t>
             </a:r>
             <a:endParaRPr lang="en-US" dirty="0"/>
           </a:p>
@@ -1314,7 +1315,7 @@
           <a:p>
             <a:r>
               <a:rPr lang="en-US" dirty="0"/>
-              <a:t>The first-open check: pick an airport, set Yes, add one HMA and one PCC alternative, confirm Summary and Alt sheet columns L:N.</a:t>
+              <a:t>SRB break-even daily revenue is about $23,000 per day against $4,344 actual.</a:t>
             </a:r>
             <a:endParaRPr lang="en-US" dirty="0"/>
           </a:p>
@@ -1402,7 +1403,7 @@
           <a:p>
             <a:r>
               <a:rPr lang="en-US" dirty="0"/>
-              <a:t>Two alternatives per sheet, HMA against PCC, is how the framework is used; policy years are editable if TDOT revises the maintenance tables.</a:t>
+              <a:t>The first-open check: pick an airport, set Yes, add one HMA and one PCC alternative, confirm Summary and Alt sheet columns L:N.</a:t>
             </a:r>
             <a:endParaRPr lang="en-US" dirty="0"/>
           </a:p>
@@ -1578,7 +1579,7 @@
           <a:p>
             <a:r>
               <a:rPr lang="en-US" dirty="0"/>
-              <a:t>Keep it Excel-first; the web option is noted only because IT blocking was the reviewer's first obstacle.</a:t>
+              <a:t>Two alternatives per sheet, HMA against PCC, is how the framework is used; policy years are editable if TDOT revises the maintenance tables.</a:t>
             </a:r>
             <a:endParaRPr lang="en-US" dirty="0"/>
           </a:p>
@@ -1666,7 +1667,7 @@
           <a:p>
             <a:r>
               <a:rPr lang="en-US" dirty="0"/>
-              <a:t/>
+              <a:t>Keep it Excel-first; the web option is noted only because IT blocking was the reviewer's first obstacle.</a:t>
             </a:r>
             <a:endParaRPr lang="en-US" dirty="0"/>
           </a:p>
@@ -1690,6 +1691,94 @@
             <a:fld id="{F7021451-1387-4CA6-816F-3879F97B5CBC}" type="slidenum">
               <a:rPr lang="en-US"/>
               <a:t>21</a:t>
+            </a:fld>
+            <a:endParaRPr lang="en-US"/>
+          </a:p>
+        </p:txBody>
+      </p:sp>
+    </p:spTree>
+    <p:extLst>
+      <p:ext uri="{BB962C8B-B14F-4D97-AF65-F5344CB8AC3E}">
+        <p14:creationId xmlns:p14="http://schemas.microsoft.com/office/powerpoint/2010/main" val="1024086991"/>
+      </p:ext>
+    </p:extLst>
+  </p:cSld>
+  <p:clrMapOvr>
+    <a:masterClrMapping/>
+  </p:clrMapOvr>
+</p:notes>
+</file>
+
+<file path=ppt/notesSlides/notesSlide22.xml><?xml version="1.0" encoding="utf-8"?>
+<p:notes xmlns:a="http://schemas.openxmlformats.org/drawingml/2006/main" xmlns:r="http://schemas.openxmlformats.org/officeDocument/2006/relationships" xmlns:p="http://schemas.openxmlformats.org/presentationml/2006/main">
+  <p:cSld>
+    <p:spTree>
+      <p:nvGrpSpPr>
+        <p:cNvPr id="1" name=""/>
+        <p:cNvGrpSpPr/>
+        <p:nvPr/>
+      </p:nvGrpSpPr>
+      <p:grpSpPr>
+        <a:xfrm>
+          <a:off x="0" y="0"/>
+          <a:ext cx="0" cy="0"/>
+          <a:chOff x="0" y="0"/>
+          <a:chExt cx="0" cy="0"/>
+        </a:xfrm>
+      </p:grpSpPr>
+      <p:sp>
+        <p:nvSpPr>
+          <p:cNvPr id="2" name="Slide Image Placeholder 1"/>
+          <p:cNvSpPr>
+            <a:spLocks noGrp="1" noRot="1" noChangeAspect="1"/>
+          </p:cNvSpPr>
+          <p:nvPr>
+            <p:ph type="sldImg"/>
+          </p:nvPr>
+        </p:nvSpPr>
+        <p:spPr/>
+      </p:sp>
+      <p:sp>
+        <p:nvSpPr>
+          <p:cNvPr id="3" name="Notes Placeholder 2"/>
+          <p:cNvSpPr>
+            <a:spLocks noGrp="1"/>
+          </p:cNvSpPr>
+          <p:nvPr>
+            <p:ph type="body" idx="1"/>
+          </p:nvPr>
+        </p:nvSpPr>
+        <p:spPr/>
+        <p:txBody>
+          <a:bodyPr/>
+          <a:lstStyle/>
+          <a:p>
+            <a:r>
+              <a:rPr lang="en-US" dirty="0"/>
+              <a:t/>
+            </a:r>
+            <a:endParaRPr lang="en-US" dirty="0"/>
+          </a:p>
+        </p:txBody>
+      </p:sp>
+      <p:sp>
+        <p:nvSpPr>
+          <p:cNvPr id="4" name="Slide Number Placeholder 3"/>
+          <p:cNvSpPr>
+            <a:spLocks noGrp="1"/>
+          </p:cNvSpPr>
+          <p:nvPr>
+            <p:ph type="sldNum" sz="quarter" idx="10"/>
+          </p:nvPr>
+        </p:nvSpPr>
+        <p:spPr/>
+        <p:txBody>
+          <a:bodyPr/>
+          <a:lstStyle/>
+          <a:p>
+            <a:fld id="{F7021451-1387-4CA6-816F-3879F97B5CBC}" type="slidenum">
+              <a:rPr lang="en-US"/>
+              <a:t>22</a:t>
             </a:fld>
             <a:endParaRPr lang="en-US"/>
           </a:p>
@@ -3478,6 +3567,144 @@
                           <a:ea typeface="Calibri" pitchFamily="34" charset="-122"/>
                           <a:cs typeface="Calibri" pitchFamily="34" charset="-120"/>
                         </a:rPr>
+                        <a:t>Look and first-run UX</a:t>
+                      </a:r>
+                      <a:endParaRPr lang="en-US" sz="1050" dirty="0">
+                        <a:latin typeface="Calibri" charset="0"/>
+                        <a:ea typeface="Calibri" charset="0"/>
+                        <a:cs typeface="Calibri" charset="0"/>
+                      </a:endParaRPr>
+                    </a:p>
+                  </a:txBody>
+                  <a:tcPr marL="45720" marR="45720" marT="45720" marB="45720" anchor="ctr">
+                    <a:lnL w="6350" cap="flat" cmpd="sng" algn="ctr">
+                      <a:solidFill>
+                        <a:srgbClr val="C9C9C4"/>
+                      </a:solidFill>
+                      <a:prstDash val="solid"/>
+                      <a:round/>
+                      <a:headEnd type="none" w="med" len="med"/>
+                      <a:tailEnd type="none" w="med" len="med"/>
+                    </a:lnL>
+                    <a:lnR w="6350" cap="flat" cmpd="sng" algn="ctr">
+                      <a:solidFill>
+                        <a:srgbClr val="C9C9C4"/>
+                      </a:solidFill>
+                      <a:prstDash val="solid"/>
+                      <a:round/>
+                      <a:headEnd type="none" w="med" len="med"/>
+                      <a:tailEnd type="none" w="med" len="med"/>
+                    </a:lnR>
+                    <a:lnT w="6350" cap="flat" cmpd="sng" algn="ctr">
+                      <a:solidFill>
+                        <a:srgbClr val="C9C9C4"/>
+                      </a:solidFill>
+                      <a:prstDash val="solid"/>
+                      <a:round/>
+                      <a:headEnd type="none" w="med" len="med"/>
+                      <a:tailEnd type="none" w="med" len="med"/>
+                    </a:lnT>
+                    <a:lnB w="6350" cap="flat" cmpd="sng" algn="ctr">
+                      <a:solidFill>
+                        <a:srgbClr val="C9C9C4"/>
+                      </a:solidFill>
+                      <a:prstDash val="solid"/>
+                      <a:round/>
+                      <a:headEnd type="none" w="med" len="med"/>
+                      <a:tailEnd type="none" w="med" len="med"/>
+                    </a:lnB>
+                    <a:solidFill>
+                      <a:srgbClr val="FFFFFF"/>
+                    </a:solidFill>
+                  </a:tcPr>
+                </a:tc>
+                <a:tc>
+                  <a:txBody>
+                    <a:bodyPr/>
+                    <a:lstStyle/>
+                    <a:p>
+                      <a:pPr indent="0" marL="0">
+                        <a:buNone/>
+                      </a:pPr>
+                      <a:r>
+                        <a:rPr lang="en-US" sz="1050" dirty="0">
+                          <a:solidFill>
+                            <a:srgbClr val="1F1F1F"/>
+                          </a:solidFill>
+                          <a:latin typeface="Calibri" pitchFamily="34" charset="0"/>
+                          <a:ea typeface="Calibri" pitchFamily="34" charset="-122"/>
+                          <a:cs typeface="Calibri" pitchFamily="34" charset="-120"/>
+                        </a:rPr>
+                        <a:t>How-to card and a live "still needed" status line on General Information; navigation row on every alternative sheet; lowest-cost row highlighted on the Summary; tab colours; General Information prints on one page</a:t>
+                      </a:r>
+                      <a:endParaRPr lang="en-US" sz="1050" dirty="0">
+                        <a:latin typeface="Calibri" charset="0"/>
+                        <a:ea typeface="Calibri" charset="0"/>
+                        <a:cs typeface="Calibri" charset="0"/>
+                      </a:endParaRPr>
+                    </a:p>
+                  </a:txBody>
+                  <a:tcPr marL="45720" marR="45720" marT="45720" marB="45720" anchor="ctr">
+                    <a:lnL w="6350" cap="flat" cmpd="sng" algn="ctr">
+                      <a:solidFill>
+                        <a:srgbClr val="C9C9C4"/>
+                      </a:solidFill>
+                      <a:prstDash val="solid"/>
+                      <a:round/>
+                      <a:headEnd type="none" w="med" len="med"/>
+                      <a:tailEnd type="none" w="med" len="med"/>
+                    </a:lnL>
+                    <a:lnR w="6350" cap="flat" cmpd="sng" algn="ctr">
+                      <a:solidFill>
+                        <a:srgbClr val="C9C9C4"/>
+                      </a:solidFill>
+                      <a:prstDash val="solid"/>
+                      <a:round/>
+                      <a:headEnd type="none" w="med" len="med"/>
+                      <a:tailEnd type="none" w="med" len="med"/>
+                    </a:lnR>
+                    <a:lnT w="6350" cap="flat" cmpd="sng" algn="ctr">
+                      <a:solidFill>
+                        <a:srgbClr val="C9C9C4"/>
+                      </a:solidFill>
+                      <a:prstDash val="solid"/>
+                      <a:round/>
+                      <a:headEnd type="none" w="med" len="med"/>
+                      <a:tailEnd type="none" w="med" len="med"/>
+                    </a:lnT>
+                    <a:lnB w="6350" cap="flat" cmpd="sng" algn="ctr">
+                      <a:solidFill>
+                        <a:srgbClr val="C9C9C4"/>
+                      </a:solidFill>
+                      <a:prstDash val="solid"/>
+                      <a:round/>
+                      <a:headEnd type="none" w="med" len="med"/>
+                      <a:tailEnd type="none" w="med" len="med"/>
+                    </a:lnB>
+                    <a:solidFill>
+                      <a:srgbClr val="FFFFFF"/>
+                    </a:solidFill>
+                  </a:tcPr>
+                </a:tc>
+              </a:tr>
+              <a:tr h="274320">
+                <a:tc>
+                  <a:txBody>
+                    <a:bodyPr/>
+                    <a:lstStyle/>
+                    <a:p>
+                      <a:pPr indent="0" marL="0">
+                        <a:buNone/>
+                      </a:pPr>
+                      <a:r>
+                        <a:rPr lang="en-US" sz="1050" dirty="0">
+                          <a:solidFill>
+                            <a:srgbClr val="1F1F1F"/>
+                          </a:solidFill>
+                          <a:latin typeface="Calibri" pitchFamily="34" charset="0"/>
+                          <a:ea typeface="Calibri" pitchFamily="34" charset="-122"/>
+                          <a:cs typeface="Calibri" pitchFamily="34" charset="-120"/>
+                        </a:rPr>
                         <a:t>Typical Values sheet</a:t>
                       </a:r>
                       <a:endParaRPr lang="en-US" sz="1050" dirty="0">
@@ -4009,7 +4236,7 @@
                 <a:ea typeface="Cambria" pitchFamily="34" charset="-122"/>
                 <a:cs typeface="Cambria" pitchFamily="34" charset="-120"/>
               </a:rPr>
-              <a:t>The new Summary sheet</a:t>
+              <a:t>The page users start on</a:t>
             </a:r>
             <a:endParaRPr lang="en-US" sz="2800" dirty="0"/>
           </a:p>
@@ -4048,7 +4275,7 @@
                 <a:ea typeface="Calibri" pitchFamily="34" charset="-122"/>
                 <a:cs typeface="Calibri" pitchFamily="34" charset="-120"/>
               </a:rPr>
-              <a:t>MBT data loaded. Table, verdict line, RealCost-style comparison block, five charts, all live formulas.</a:t>
+              <a:t>Same form, same grey cells. What is new is the guidance around them.</a:t>
             </a:r>
             <a:endParaRPr lang="en-US" sz="1300" dirty="0"/>
           </a:p>
@@ -4056,7 +4283,7 @@
       </p:sp>
       <p:pic>
         <p:nvPicPr>
-          <p:cNvPr id="4" name="Image 0" descr="/tmp/claude-0/-home-user-lcca-dashboard/444ca227-15d7-51d4-a51e-a0ae3dbe81ed/scratchpad/deck/img/summary_sheet.png">    </p:cNvPr>
+          <p:cNvPr id="4" name="Image 0" descr="/tmp/claude-0/-home-user-lcca-dashboard/444ca227-15d7-51d4-a51e-a0ae3dbe81ed/scratchpad/deck/img/general_information.png">    </p:cNvPr>
           <p:cNvPicPr>
             <a:picLocks noChangeAspect="1"/>
           </p:cNvPicPr>
@@ -4070,8 +4297,8 @@
         </p:blipFill>
         <p:spPr>
           <a:xfrm>
-            <a:off x="1005840" y="1298448"/>
-            <a:ext cx="7132320" cy="3589492"/>
+            <a:off x="2377440" y="1234440"/>
+            <a:ext cx="4389120" cy="3137327"/>
           </a:xfrm>
           <a:prstGeom prst="rect">
             <a:avLst/>
@@ -4086,7 +4313,7 @@
         </p:nvSpPr>
         <p:spPr>
           <a:xfrm>
-            <a:off x="457200" y="4906228"/>
+            <a:off x="457200" y="4417487"/>
             <a:ext cx="8229600" cy="411480"/>
           </a:xfrm>
           <a:prstGeom prst="rect">
@@ -4111,7 +4338,7 @@
                 <a:ea typeface="Calibri" pitchFamily="34" charset="-122"/>
                 <a:cs typeface="Calibri" pitchFamily="34" charset="-120"/>
               </a:rPr>
-              <a:t>The comparison block under the verdict line follows the RealCost layout: agency and user cost, each as present worth and EUAC.</a:t>
+              <a:t>A how-to card beside the logo, a status line that names whatever input is still empty and turns green when the form is complete, banded section headings, and buttons to the Summary and the Typical Values sheet.</a:t>
             </a:r>
             <a:endParaRPr lang="en-US" sz="1050" dirty="0"/>
           </a:p>
@@ -4182,7 +4409,7 @@
                 <a:ea typeface="Cambria" pitchFamily="34" charset="-122"/>
                 <a:cs typeface="Cambria" pitchFamily="34" charset="-120"/>
               </a:rPr>
-              <a:t>Typical values for the inputs</a:t>
+              <a:t>The new Summary sheet</a:t>
             </a:r>
             <a:endParaRPr lang="en-US" sz="2800" dirty="0"/>
           </a:p>
@@ -4221,7 +4448,7 @@
                 <a:ea typeface="Calibri" pitchFamily="34" charset="-122"/>
                 <a:cs typeface="Calibri" pitchFamily="34" charset="-120"/>
               </a:rPr>
-              <a:t>A reference sheet answering "is this number reasonable" while filling in General Information.</a:t>
+              <a:t>MBT data loaded. Table, verdict line, RealCost-style comparison block, five charts, all live formulas.</a:t>
             </a:r>
             <a:endParaRPr lang="en-US" sz="1300" dirty="0"/>
           </a:p>
@@ -4229,7 +4456,7 @@
       </p:sp>
       <p:pic>
         <p:nvPicPr>
-          <p:cNvPr id="4" name="Image 0" descr="/tmp/claude-0/-home-user-lcca-dashboard/444ca227-15d7-51d4-a51e-a0ae3dbe81ed/scratchpad/deck/img/typical_values.png">    </p:cNvPr>
+          <p:cNvPr id="4" name="Image 0" descr="/tmp/claude-0/-home-user-lcca-dashboard/444ca227-15d7-51d4-a51e-a0ae3dbe81ed/scratchpad/deck/img/summary_sheet.png">    </p:cNvPr>
           <p:cNvPicPr>
             <a:picLocks noChangeAspect="1"/>
           </p:cNvPicPr>
@@ -4243,8 +4470,8 @@
         </p:blipFill>
         <p:spPr>
           <a:xfrm>
-            <a:off x="457200" y="1371600"/>
-            <a:ext cx="8229600" cy="1737302"/>
+            <a:off x="1005840" y="1298448"/>
+            <a:ext cx="7132320" cy="3589492"/>
           </a:xfrm>
           <a:prstGeom prst="rect">
             <a:avLst/>
@@ -4259,7 +4486,7 @@
         </p:nvSpPr>
         <p:spPr>
           <a:xfrm>
-            <a:off x="457200" y="3154622"/>
+            <a:off x="457200" y="4906228"/>
             <a:ext cx="8229600" cy="411480"/>
           </a:xfrm>
           <a:prstGeom prst="rect">
@@ -4284,115 +4511,9 @@
                 <a:ea typeface="Calibri" pitchFamily="34" charset="-122"/>
                 <a:cs typeface="Calibri" pitchFamily="34" charset="-120"/>
               </a:rPr>
-              <a:t>Section 3: each Pay_Items default read live from the workbook, beside recent bid prices and what they mean. Six more sections cover system context, runway geometry, closure rates, discount rates and service lives.</a:t>
+              <a:t>The comparison block under the verdict line follows the RealCost layout: agency and user cost, each as present worth and EUAC.</a:t>
             </a:r>
             <a:endParaRPr lang="en-US" sz="1050" dirty="0"/>
-          </a:p>
-        </p:txBody>
-      </p:sp>
-      <p:sp>
-        <p:nvSpPr>
-          <p:cNvPr id="6" name="Text 3"/>
-          <p:cNvSpPr txBox="1"/>
-          <p:nvPr/>
-        </p:nvSpPr>
-        <p:spPr>
-          <a:xfrm>
-            <a:off x="457200" y="3611822"/>
-            <a:ext cx="8229600" cy="822960"/>
-          </a:xfrm>
-          <a:prstGeom prst="rect">
-            <a:avLst/>
-          </a:prstGeom>
-          <a:noFill/>
-          <a:ln/>
-        </p:spPr>
-        <p:txBody>
-          <a:bodyPr wrap="square" lIns="0" tIns="0" rIns="0" bIns="0" rtlCol="0" anchor="t"/>
-          <a:lstStyle/>
-          <a:p>
-            <a:pPr marL="342900" indent="-342900">
-              <a:spcAft>
-                <a:spcPts val="500"/>
-              </a:spcAft>
-              <a:buSzPct val="100000"/>
-              <a:buChar char="•"/>
-            </a:pPr>
-            <a:r>
-              <a:rPr lang="en-US" sz="1150" dirty="0">
-                <a:solidFill>
-                  <a:srgbClr val="1F1F1F"/>
-                </a:solidFill>
-                <a:latin typeface="Calibri" pitchFamily="34" charset="0"/>
-                <a:ea typeface="Calibri" pitchFamily="34" charset="-122"/>
-                <a:cs typeface="Calibri" pitchFamily="34" charset="-120"/>
-              </a:rPr>
-              <a:t>TDOT Aeronautics manages 78 public-use airports; 69 are in the NPIAS and about 70 are in the pavement management network</a:t>
-            </a:r>
-            <a:endParaRPr lang="en-US" sz="1150" dirty="0"/>
-          </a:p>
-          <a:p>
-            <a:pPr marL="342900" indent="-342900">
-              <a:spcAft>
-                <a:spcPts val="500"/>
-              </a:spcAft>
-              <a:buSzPct val="100000"/>
-              <a:buChar char="•"/>
-            </a:pPr>
-            <a:r>
-              <a:rPr lang="en-US" sz="1150" dirty="0">
-                <a:solidFill>
-                  <a:srgbClr val="1F1F1F"/>
-                </a:solidFill>
-                <a:latin typeface="Calibri" pitchFamily="34" charset="0"/>
-                <a:ea typeface="Calibri" pitchFamily="34" charset="-122"/>
-                <a:cs typeface="Calibri" pitchFamily="34" charset="-120"/>
-              </a:rPr>
-              <a:t>Typical TN general aviation runway: 4,000 to 6,000 ft by 75 or 100 ft, which is 33,000 to 67,000 SY of mainline</a:t>
-            </a:r>
-            <a:endParaRPr lang="en-US" sz="1150" dirty="0"/>
-          </a:p>
-          <a:p>
-            <a:pPr marL="342900" indent="-342900">
-              <a:spcAft>
-                <a:spcPts val="500"/>
-              </a:spcAft>
-              <a:buSzPct val="100000"/>
-              <a:buChar char="•"/>
-            </a:pPr>
-            <a:r>
-              <a:rPr lang="en-US" sz="1150" dirty="0">
-                <a:solidFill>
-                  <a:srgbClr val="1F1F1F"/>
-                </a:solidFill>
-                <a:latin typeface="Calibri" pitchFamily="34" charset="0"/>
-                <a:ea typeface="Calibri" pitchFamily="34" charset="-122"/>
-                <a:cs typeface="Calibri" pitchFamily="34" charset="-120"/>
-              </a:rPr>
-              <a:t>The $130 per ton asphalt default sits below 2025 southeastern bids of $185 to $232</a:t>
-            </a:r>
-            <a:endParaRPr lang="en-US" sz="1150" dirty="0"/>
-          </a:p>
-          <a:p>
-            <a:pPr marL="342900" indent="-342900">
-              <a:spcAft>
-                <a:spcPts val="500"/>
-              </a:spcAft>
-              <a:buSzPct val="100000"/>
-              <a:buChar char="•"/>
-            </a:pPr>
-            <a:r>
-              <a:rPr lang="en-US" sz="1150" dirty="0">
-                <a:solidFill>
-                  <a:srgbClr val="1F1F1F"/>
-                </a:solidFill>
-                <a:latin typeface="Calibri" pitchFamily="34" charset="0"/>
-                <a:ea typeface="Calibri" pitchFamily="34" charset="-122"/>
-                <a:cs typeface="Calibri" pitchFamily="34" charset="-120"/>
-              </a:rPr>
-              <a:t>Discount rate: TDOT 3 percent; FAA now points to the OMB A-94 real rate, 2.0 percent for 2026, not the old 7 percent</a:t>
-            </a:r>
-            <a:endParaRPr lang="en-US" sz="1150" dirty="0"/>
           </a:p>
         </p:txBody>
       </p:sp>
@@ -4461,7 +4582,7 @@
                 <a:ea typeface="Cambria" pitchFamily="34" charset="-122"/>
                 <a:cs typeface="Cambria" pitchFamily="34" charset="-120"/>
               </a:rPr>
-              <a:t>The decision workbook</a:t>
+              <a:t>Typical values for the inputs</a:t>
             </a:r>
             <a:endParaRPr lang="en-US" sz="2800" dirty="0"/>
           </a:p>
@@ -4500,7 +4621,7 @@
                 <a:ea typeface="Calibri" pitchFamily="34" charset="-122"/>
                 <a:cs typeface="Calibri" pitchFamily="34" charset="-120"/>
               </a:rPr>
-              <a:t>MBT and SRB already loaded, plus a blank TEMPLATE sheet. Yellow cells drive every table and chart.</a:t>
+              <a:t>A reference sheet answering "is this number reasonable" while filling in General Information.</a:t>
             </a:r>
             <a:endParaRPr lang="en-US" sz="1300" dirty="0"/>
           </a:p>
@@ -4508,7 +4629,7 @@
       </p:sp>
       <p:pic>
         <p:nvPicPr>
-          <p:cNvPr id="4" name="Image 0" descr="/tmp/claude-0/-home-user-lcca-dashboard/444ca227-15d7-51d4-a51e-a0ae3dbe81ed/scratchpad/deck/img/MBT_kpis.png">    </p:cNvPr>
+          <p:cNvPr id="4" name="Image 0" descr="/tmp/claude-0/-home-user-lcca-dashboard/444ca227-15d7-51d4-a51e-a0ae3dbe81ed/scratchpad/deck/img/typical_values.png">    </p:cNvPr>
           <p:cNvPicPr>
             <a:picLocks noChangeAspect="1"/>
           </p:cNvPicPr>
@@ -4523,7 +4644,7 @@
         <p:spPr>
           <a:xfrm>
             <a:off x="457200" y="1371600"/>
-            <a:ext cx="8229600" cy="2072947"/>
+            <a:ext cx="8229600" cy="1737302"/>
           </a:xfrm>
           <a:prstGeom prst="rect">
             <a:avLst/>
@@ -4538,7 +4659,7 @@
         </p:nvSpPr>
         <p:spPr>
           <a:xfrm>
-            <a:off x="457200" y="3535987"/>
+            <a:off x="457200" y="3154622"/>
             <a:ext cx="8229600" cy="411480"/>
           </a:xfrm>
           <a:prstGeom prst="rect">
@@ -4563,7 +4684,7 @@
                 <a:ea typeface="Calibri" pitchFamily="34" charset="-122"/>
                 <a:cs typeface="Calibri" pitchFamily="34" charset="-120"/>
               </a:rPr>
-              <a:t>The verdict line: which alternative is lower, by how much, and two robustness flags a reviewer can read in five seconds. Shown here for MBT at TDOT settings.</a:t>
+              <a:t>Section 3: each Pay_Items default read live from the workbook, beside recent bid prices and what they mean. Six more sections cover system context, runway geometry, closure rates, discount rates and service lives.</a:t>
             </a:r>
             <a:endParaRPr lang="en-US" sz="1050" dirty="0"/>
           </a:p>
@@ -4577,8 +4698,8 @@
         </p:nvSpPr>
         <p:spPr>
           <a:xfrm>
-            <a:off x="457200" y="3931920"/>
-            <a:ext cx="8229600" cy="914400"/>
+            <a:off x="457200" y="3611822"/>
+            <a:ext cx="8229600" cy="822960"/>
           </a:xfrm>
           <a:prstGeom prst="rect">
             <a:avLst/>
@@ -4606,7 +4727,7 @@
                 <a:ea typeface="Calibri" pitchFamily="34" charset="-122"/>
                 <a:cs typeface="Calibri" pitchFamily="34" charset="-120"/>
               </a:rPr>
-              <a:t>RESULTS: present worth by category, EUAC, cost per SY, closure days, runway availability</a:t>
+              <a:t>TDOT Aeronautics manages 78 public-use airports; 69 are in the NPIAS and about 70 are in the pavement management network</a:t>
             </a:r>
             <a:endParaRPr lang="en-US" sz="1150" dirty="0"/>
           </a:p>
@@ -4627,7 +4748,7 @@
                 <a:ea typeface="Calibri" pitchFamily="34" charset="-122"/>
                 <a:cs typeface="Calibri" pitchFamily="34" charset="-120"/>
               </a:rPr>
-              <a:t>BREAK-EVEN VALUES: the daily revenue, bid level, salvage fraction and discount rate at which the two tie</a:t>
+              <a:t>Typical TN general aviation runway: 4,000 to 6,000 ft by 75 or 100 ft, which is 33,000 to 67,000 SY of mainline</a:t>
             </a:r>
             <a:endParaRPr lang="en-US" sz="1150" dirty="0"/>
           </a:p>
@@ -4648,7 +4769,7 @@
                 <a:ea typeface="Calibri" pitchFamily="34" charset="-122"/>
                 <a:cs typeface="Calibri" pitchFamily="34" charset="-120"/>
               </a:rPr>
-              <a:t>Twelve pre-run scenarios, a rate-by-salvage decision map, a tornado, and a live 1,000-draw simulation</a:t>
+              <a:t>The $130 per ton asphalt default sits below 2025 southeastern bids of $185 to $232</a:t>
             </a:r>
             <a:endParaRPr lang="en-US" sz="1150" dirty="0"/>
           </a:p>
@@ -4669,7 +4790,7 @@
                 <a:ea typeface="Calibri" pitchFamily="34" charset="-122"/>
                 <a:cs typeface="Calibri" pitchFamily="34" charset="-120"/>
               </a:rPr>
-              <a:t>A TEMPLATE sheet: copy it, paste the next project's costs and closure days, done</a:t>
+              <a:t>Discount rate: TDOT 3 percent; FAA now points to the OMB A-94 real rate, 2.0 percent for 2026, not the old 7 percent</a:t>
             </a:r>
             <a:endParaRPr lang="en-US" sz="1150" dirty="0"/>
           </a:p>
@@ -4740,15 +4861,54 @@
                 <a:ea typeface="Cambria" pitchFamily="34" charset="-122"/>
                 <a:cs typeface="Cambria" pitchFamily="34" charset="-120"/>
               </a:rPr>
-              <a:t>Where the difference comes from</a:t>
+              <a:t>The decision workbook</a:t>
             </a:r>
             <a:endParaRPr lang="en-US" sz="2800" dirty="0"/>
+          </a:p>
+        </p:txBody>
+      </p:sp>
+      <p:sp>
+        <p:nvSpPr>
+          <p:cNvPr id="3" name="Text 1"/>
+          <p:cNvSpPr txBox="1"/>
+          <p:nvPr/>
+        </p:nvSpPr>
+        <p:spPr>
+          <a:xfrm>
+            <a:off x="457200" y="914400"/>
+            <a:ext cx="8229600" cy="365760"/>
+          </a:xfrm>
+          <a:prstGeom prst="rect">
+            <a:avLst/>
+          </a:prstGeom>
+          <a:noFill/>
+          <a:ln/>
+        </p:spPr>
+        <p:txBody>
+          <a:bodyPr wrap="square" lIns="0" tIns="0" rIns="0" bIns="0" rtlCol="0" anchor="ctr"/>
+          <a:lstStyle/>
+          <a:p>
+            <a:pPr indent="0" marL="0">
+              <a:buNone/>
+            </a:pPr>
+            <a:r>
+              <a:rPr lang="en-US" sz="1300" i="1" dirty="0">
+                <a:solidFill>
+                  <a:srgbClr val="5F5F5F"/>
+                </a:solidFill>
+                <a:latin typeface="Calibri" pitchFamily="34" charset="0"/>
+                <a:ea typeface="Calibri" pitchFamily="34" charset="-122"/>
+                <a:cs typeface="Calibri" pitchFamily="34" charset="-120"/>
+              </a:rPr>
+              <a:t>MBT and SRB already loaded, plus a blank TEMPLATE sheet. Yellow cells drive every table and chart.</a:t>
+            </a:r>
+            <a:endParaRPr lang="en-US" sz="1300" dirty="0"/>
           </a:p>
         </p:txBody>
       </p:sp>
       <p:pic>
         <p:nvPicPr>
-          <p:cNvPr id="3" name="Image 0" descr="/tmp/claude-0/-home-user-lcca-dashboard/444ca227-15d7-51d4-a51e-a0ae3dbe81ed/scratchpad/deck/img/MBT_bridge.png">    </p:cNvPr>
+          <p:cNvPr id="4" name="Image 0" descr="/tmp/claude-0/-home-user-lcca-dashboard/444ca227-15d7-51d4-a51e-a0ae3dbe81ed/scratchpad/deck/img/MBT_kpis.png">    </p:cNvPr>
           <p:cNvPicPr>
             <a:picLocks noChangeAspect="1"/>
           </p:cNvPicPr>
@@ -4762,8 +4922,8 @@
         </p:blipFill>
         <p:spPr>
           <a:xfrm>
-            <a:off x="457200" y="1097280"/>
-            <a:ext cx="8229600" cy="1987826"/>
+            <a:off x="457200" y="1371600"/>
+            <a:ext cx="8229600" cy="2072947"/>
           </a:xfrm>
           <a:prstGeom prst="rect">
             <a:avLst/>
@@ -4772,13 +4932,13 @@
       </p:pic>
       <p:sp>
         <p:nvSpPr>
-          <p:cNvPr id="4" name="Text 1"/>
+          <p:cNvPr id="5" name="Text 2"/>
           <p:cNvSpPr txBox="1"/>
           <p:nvPr/>
         </p:nvSpPr>
         <p:spPr>
           <a:xfrm>
-            <a:off x="457200" y="3130826"/>
+            <a:off x="457200" y="3535987"/>
             <a:ext cx="8229600" cy="411480"/>
           </a:xfrm>
           <a:prstGeom prst="rect">
@@ -4803,46 +4963,22 @@
                 <a:ea typeface="Calibri" pitchFamily="34" charset="-122"/>
                 <a:cs typeface="Calibri" pitchFamily="34" charset="-120"/>
               </a:rPr>
-              <a:t>MBT bridge from HMA to PCC present worth. PCC costs $3.1M more to build and earns it back through $1.9M less maintenance and $1.1M less rehabilitation; salvage and lost revenue are small here.</a:t>
+              <a:t>The verdict line: which alternative is lower, by how much, and two robustness flags a reviewer can read in five seconds. Shown here for MBT at TDOT settings.</a:t>
             </a:r>
             <a:endParaRPr lang="en-US" sz="1050" dirty="0"/>
           </a:p>
         </p:txBody>
       </p:sp>
-      <p:pic>
-        <p:nvPicPr>
-          <p:cNvPr id="5" name="Image 1" descr="/tmp/claude-0/-home-user-lcca-dashboard/444ca227-15d7-51d4-a51e-a0ae3dbe81ed/scratchpad/deck/img/MBT_closures.png">    </p:cNvPr>
-          <p:cNvPicPr>
-            <a:picLocks noChangeAspect="1"/>
-          </p:cNvPicPr>
-          <p:nvPr/>
-        </p:nvPicPr>
-        <p:blipFill>
-          <a:blip r:embed="rId2"/>
-          <a:stretch>
-            <a:fillRect/>
-          </a:stretch>
-        </p:blipFill>
-        <p:spPr>
-          <a:xfrm>
-            <a:off x="457200" y="3588026"/>
-            <a:ext cx="8229600" cy="1277888"/>
-          </a:xfrm>
-          <a:prstGeom prst="rect">
-            <a:avLst/>
-          </a:prstGeom>
-        </p:spPr>
-      </p:pic>
       <p:sp>
         <p:nvSpPr>
-          <p:cNvPr id="6" name="Text 2"/>
+          <p:cNvPr id="6" name="Text 3"/>
           <p:cNvSpPr txBox="1"/>
           <p:nvPr/>
         </p:nvSpPr>
         <p:spPr>
           <a:xfrm>
-            <a:off x="457200" y="4911634"/>
-            <a:ext cx="8229600" cy="411480"/>
+            <a:off x="457200" y="3931920"/>
+            <a:ext cx="8229600" cy="914400"/>
           </a:xfrm>
           <a:prstGeom prst="rect">
             <a:avLst/>
@@ -4854,21 +4990,88 @@
           <a:bodyPr wrap="square" lIns="0" tIns="0" rIns="0" bIns="0" rtlCol="0" anchor="t"/>
           <a:lstStyle/>
           <a:p>
-            <a:pPr indent="0" marL="0">
-              <a:buNone/>
+            <a:pPr marL="342900" indent="-342900">
+              <a:spcAft>
+                <a:spcPts val="500"/>
+              </a:spcAft>
+              <a:buSzPct val="100000"/>
+              <a:buChar char="•"/>
             </a:pPr>
             <a:r>
-              <a:rPr lang="en-US" sz="1050" dirty="0">
+              <a:rPr lang="en-US" sz="1150" dirty="0">
                 <a:solidFill>
-                  <a:srgbClr val="5F5F5F"/>
+                  <a:srgbClr val="1F1F1F"/>
                 </a:solidFill>
                 <a:latin typeface="Calibri" pitchFamily="34" charset="0"/>
                 <a:ea typeface="Calibri" pitchFamily="34" charset="-122"/>
                 <a:cs typeface="Calibri" pitchFamily="34" charset="-120"/>
               </a:rPr>
-              <a:t>Closure timeline, bubble size is days closed. HMA closes the runway seven times for 57 days; PCC twice for 27 days.</a:t>
+              <a:t>RESULTS: present worth by category, EUAC, cost per SY, closure days, runway availability</a:t>
             </a:r>
-            <a:endParaRPr lang="en-US" sz="1050" dirty="0"/>
+            <a:endParaRPr lang="en-US" sz="1150" dirty="0"/>
+          </a:p>
+          <a:p>
+            <a:pPr marL="342900" indent="-342900">
+              <a:spcAft>
+                <a:spcPts val="500"/>
+              </a:spcAft>
+              <a:buSzPct val="100000"/>
+              <a:buChar char="•"/>
+            </a:pPr>
+            <a:r>
+              <a:rPr lang="en-US" sz="1150" dirty="0">
+                <a:solidFill>
+                  <a:srgbClr val="1F1F1F"/>
+                </a:solidFill>
+                <a:latin typeface="Calibri" pitchFamily="34" charset="0"/>
+                <a:ea typeface="Calibri" pitchFamily="34" charset="-122"/>
+                <a:cs typeface="Calibri" pitchFamily="34" charset="-120"/>
+              </a:rPr>
+              <a:t>BREAK-EVEN VALUES: the daily revenue, bid level, salvage fraction and discount rate at which the two tie</a:t>
+            </a:r>
+            <a:endParaRPr lang="en-US" sz="1150" dirty="0"/>
+          </a:p>
+          <a:p>
+            <a:pPr marL="342900" indent="-342900">
+              <a:spcAft>
+                <a:spcPts val="500"/>
+              </a:spcAft>
+              <a:buSzPct val="100000"/>
+              <a:buChar char="•"/>
+            </a:pPr>
+            <a:r>
+              <a:rPr lang="en-US" sz="1150" dirty="0">
+                <a:solidFill>
+                  <a:srgbClr val="1F1F1F"/>
+                </a:solidFill>
+                <a:latin typeface="Calibri" pitchFamily="34" charset="0"/>
+                <a:ea typeface="Calibri" pitchFamily="34" charset="-122"/>
+                <a:cs typeface="Calibri" pitchFamily="34" charset="-120"/>
+              </a:rPr>
+              <a:t>Twelve pre-run scenarios, a rate-by-salvage decision map, a tornado, and a live 1,000-draw simulation</a:t>
+            </a:r>
+            <a:endParaRPr lang="en-US" sz="1150" dirty="0"/>
+          </a:p>
+          <a:p>
+            <a:pPr marL="342900" indent="-342900">
+              <a:spcAft>
+                <a:spcPts val="500"/>
+              </a:spcAft>
+              <a:buSzPct val="100000"/>
+              <a:buChar char="•"/>
+            </a:pPr>
+            <a:r>
+              <a:rPr lang="en-US" sz="1150" dirty="0">
+                <a:solidFill>
+                  <a:srgbClr val="1F1F1F"/>
+                </a:solidFill>
+                <a:latin typeface="Calibri" pitchFamily="34" charset="0"/>
+                <a:ea typeface="Calibri" pitchFamily="34" charset="-122"/>
+                <a:cs typeface="Calibri" pitchFamily="34" charset="-120"/>
+              </a:rPr>
+              <a:t>A TEMPLATE sheet: copy it, paste the next project's costs and closure days, done</a:t>
+            </a:r>
+            <a:endParaRPr lang="en-US" sz="1150" dirty="0"/>
           </a:p>
         </p:txBody>
       </p:sp>
@@ -4937,54 +5140,15 @@
                 <a:ea typeface="Cambria" pitchFamily="34" charset="-122"/>
                 <a:cs typeface="Cambria" pitchFamily="34" charset="-120"/>
               </a:rPr>
-              <a:t>Will the answer hold?</a:t>
+              <a:t>Where the difference comes from</a:t>
             </a:r>
             <a:endParaRPr lang="en-US" sz="2800" dirty="0"/>
-          </a:p>
-        </p:txBody>
-      </p:sp>
-      <p:sp>
-        <p:nvSpPr>
-          <p:cNvPr id="3" name="Text 1"/>
-          <p:cNvSpPr txBox="1"/>
-          <p:nvPr/>
-        </p:nvSpPr>
-        <p:spPr>
-          <a:xfrm>
-            <a:off x="457200" y="914400"/>
-            <a:ext cx="8229600" cy="365760"/>
-          </a:xfrm>
-          <a:prstGeom prst="rect">
-            <a:avLst/>
-          </a:prstGeom>
-          <a:noFill/>
-          <a:ln/>
-        </p:spPr>
-        <p:txBody>
-          <a:bodyPr wrap="square" lIns="0" tIns="0" rIns="0" bIns="0" rtlCol="0" anchor="ctr"/>
-          <a:lstStyle/>
-          <a:p>
-            <a:pPr indent="0" marL="0">
-              <a:buNone/>
-            </a:pPr>
-            <a:r>
-              <a:rPr lang="en-US" sz="1300" i="1" dirty="0">
-                <a:solidFill>
-                  <a:srgbClr val="5F5F5F"/>
-                </a:solidFill>
-                <a:latin typeface="Calibri" pitchFamily="34" charset="0"/>
-                <a:ea typeface="Calibri" pitchFamily="34" charset="-122"/>
-                <a:cs typeface="Calibri" pitchFamily="34" charset="-120"/>
-              </a:rPr>
-              <a:t>Net present worth against discount rate. Blue is HMA, orange is PCC. TDOT 3 percent and FAA AIP 7 percent are marked.</a:t>
-            </a:r>
-            <a:endParaRPr lang="en-US" sz="1300" dirty="0"/>
           </a:p>
         </p:txBody>
       </p:sp>
       <p:pic>
         <p:nvPicPr>
-          <p:cNvPr id="4" name="Image 0" descr="/tmp/claude-0/-home-user-lcca-dashboard/444ca227-15d7-51d4-a51e-a0ae3dbe81ed/scratchpad/deck/img/MBT_sens.png">    </p:cNvPr>
+          <p:cNvPr id="3" name="Image 0" descr="/tmp/claude-0/-home-user-lcca-dashboard/444ca227-15d7-51d4-a51e-a0ae3dbe81ed/scratchpad/deck/img/MBT_bridge.png">    </p:cNvPr>
           <p:cNvPicPr>
             <a:picLocks noChangeAspect="1"/>
           </p:cNvPicPr>
@@ -4998,8 +5162,8 @@
         </p:blipFill>
         <p:spPr>
           <a:xfrm>
-            <a:off x="457200" y="1371600"/>
-            <a:ext cx="3931920" cy="1899478"/>
+            <a:off x="457200" y="1097280"/>
+            <a:ext cx="8229600" cy="1987826"/>
           </a:xfrm>
           <a:prstGeom prst="rect">
             <a:avLst/>
@@ -5008,14 +5172,14 @@
       </p:pic>
       <p:sp>
         <p:nvSpPr>
-          <p:cNvPr id="5" name="Text 2"/>
+          <p:cNvPr id="4" name="Text 1"/>
           <p:cNvSpPr txBox="1"/>
           <p:nvPr/>
         </p:nvSpPr>
         <p:spPr>
           <a:xfrm>
-            <a:off x="457200" y="3316798"/>
-            <a:ext cx="3931920" cy="411480"/>
+            <a:off x="457200" y="3130826"/>
+            <a:ext cx="8229600" cy="411480"/>
           </a:xfrm>
           <a:prstGeom prst="rect">
             <a:avLst/>
@@ -5039,7 +5203,7 @@
                 <a:ea typeface="Calibri" pitchFamily="34" charset="-122"/>
                 <a:cs typeface="Calibri" pitchFamily="34" charset="-120"/>
               </a:rPr>
-              <a:t>MBT: PCC wins below 4.5 percent, HMA above. At the FAA AIP rate the answer reverses.</a:t>
+              <a:t>MBT bridge from HMA to PCC present worth. PCC costs $3.1M more to build and earns it back through $1.9M less maintenance and $1.1M less rehabilitation; salvage and lost revenue are small here.</a:t>
             </a:r>
             <a:endParaRPr lang="en-US" sz="1050" dirty="0"/>
           </a:p>
@@ -5047,7 +5211,7 @@
       </p:sp>
       <p:pic>
         <p:nvPicPr>
-          <p:cNvPr id="6" name="Image 1" descr="/tmp/claude-0/-home-user-lcca-dashboard/444ca227-15d7-51d4-a51e-a0ae3dbe81ed/scratchpad/deck/img/SRB_sens.png">    </p:cNvPr>
+          <p:cNvPr id="5" name="Image 1" descr="/tmp/claude-0/-home-user-lcca-dashboard/444ca227-15d7-51d4-a51e-a0ae3dbe81ed/scratchpad/deck/img/MBT_closures.png">    </p:cNvPr>
           <p:cNvPicPr>
             <a:picLocks noChangeAspect="1"/>
           </p:cNvPicPr>
@@ -5061,8 +5225,8 @@
         </p:blipFill>
         <p:spPr>
           <a:xfrm>
-            <a:off x="4754880" y="1371600"/>
-            <a:ext cx="3931920" cy="1899478"/>
+            <a:off x="457200" y="3588026"/>
+            <a:ext cx="8229600" cy="1277888"/>
           </a:xfrm>
           <a:prstGeom prst="rect">
             <a:avLst/>
@@ -5071,14 +5235,14 @@
       </p:pic>
       <p:sp>
         <p:nvSpPr>
-          <p:cNvPr id="7" name="Text 3"/>
+          <p:cNvPr id="6" name="Text 2"/>
           <p:cNvSpPr txBox="1"/>
           <p:nvPr/>
         </p:nvSpPr>
         <p:spPr>
           <a:xfrm>
-            <a:off x="4754880" y="3316798"/>
-            <a:ext cx="3931920" cy="411480"/>
+            <a:off x="457200" y="4911634"/>
+            <a:ext cx="8229600" cy="411480"/>
           </a:xfrm>
           <a:prstGeom prst="rect">
             <a:avLst/>
@@ -5102,89 +5266,9 @@
                 <a:ea typeface="Calibri" pitchFamily="34" charset="-122"/>
                 <a:cs typeface="Calibri" pitchFamily="34" charset="-120"/>
               </a:rPr>
-              <a:t>SRB: HMA wins at every rate above 2.5 percent. The gap widens as the rate rises.</a:t>
+              <a:t>Closure timeline, bubble size is days closed. HMA closes the runway seven times for 57 days; PCC twice for 27 days.</a:t>
             </a:r>
             <a:endParaRPr lang="en-US" sz="1050" dirty="0"/>
-          </a:p>
-        </p:txBody>
-      </p:sp>
-      <p:sp>
-        <p:nvSpPr>
-          <p:cNvPr id="8" name="Shape 4"/>
-          <p:cNvSpPr/>
-          <p:nvPr/>
-        </p:nvSpPr>
-        <p:spPr>
-          <a:xfrm>
-            <a:off x="457200" y="3794760"/>
-            <a:ext cx="8229600" cy="777240"/>
-          </a:xfrm>
-          <a:prstGeom prst="roundRect">
-            <a:avLst>
-              <a:gd name="adj" fmla="val 7059"/>
-            </a:avLst>
-          </a:prstGeom>
-          <a:solidFill>
-            <a:srgbClr val="F3F3F1"/>
-          </a:solidFill>
-          <a:ln w="12700">
-            <a:solidFill>
-              <a:srgbClr val="F3F3F1"/>
-            </a:solidFill>
-            <a:prstDash val="solid"/>
-          </a:ln>
-        </p:spPr>
-      </p:sp>
-      <p:sp>
-        <p:nvSpPr>
-          <p:cNvPr id="9" name="Text 5"/>
-          <p:cNvSpPr txBox="1"/>
-          <p:nvPr/>
-        </p:nvSpPr>
-        <p:spPr>
-          <a:xfrm>
-            <a:off x="640080" y="3840480"/>
-            <a:ext cx="7863840" cy="685800"/>
-          </a:xfrm>
-          <a:prstGeom prst="rect">
-            <a:avLst/>
-          </a:prstGeom>
-          <a:noFill/>
-          <a:ln/>
-        </p:spPr>
-        <p:txBody>
-          <a:bodyPr wrap="square" lIns="0" tIns="0" rIns="0" bIns="0" rtlCol="0" anchor="ctr"/>
-          <a:lstStyle/>
-          <a:p>
-            <a:pPr indent="0" marL="0">
-              <a:buNone/>
-            </a:pPr>
-            <a:r>
-              <a:rPr lang="en-US" sz="1200" b="1" dirty="0">
-                <a:solidFill>
-                  <a:srgbClr val="1F1F1F"/>
-                </a:solidFill>
-                <a:latin typeface="Calibri" pitchFamily="34" charset="0"/>
-                <a:ea typeface="Calibri" pitchFamily="34" charset="-122"/>
-                <a:cs typeface="Calibri" pitchFamily="34" charset="-120"/>
-              </a:rPr>
-              <a:t>Live simulation: </a:t>
-            </a:r>
-            <a:pPr indent="0" marL="0">
-              <a:buNone/>
-            </a:pPr>
-            <a:r>
-              <a:rPr lang="en-US" sz="1200" dirty="0">
-                <a:solidFill>
-                  <a:srgbClr val="1F1F1F"/>
-                </a:solidFill>
-                <a:latin typeface="Calibri" pitchFamily="34" charset="0"/>
-                <a:ea typeface="Calibri" pitchFamily="34" charset="-122"/>
-                <a:cs typeface="Calibri" pitchFamily="34" charset="-120"/>
-              </a:rPr>
-              <a:t>1,000 joint draws on rate, bids, closures, salvage and revenue share. Probability PCC is the cheaper alternative: 52 percent at MBT, 18 percent at SRB. Press F9 in the workbook to redraw.</a:t>
-            </a:r>
-            <a:endParaRPr lang="en-US" sz="1200" dirty="0"/>
           </a:p>
         </p:txBody>
       </p:sp>
@@ -5253,6 +5337,322 @@
                 <a:ea typeface="Cambria" pitchFamily="34" charset="-122"/>
                 <a:cs typeface="Cambria" pitchFamily="34" charset="-120"/>
               </a:rPr>
+              <a:t>Will the answer hold?</a:t>
+            </a:r>
+            <a:endParaRPr lang="en-US" sz="2800" dirty="0"/>
+          </a:p>
+        </p:txBody>
+      </p:sp>
+      <p:sp>
+        <p:nvSpPr>
+          <p:cNvPr id="3" name="Text 1"/>
+          <p:cNvSpPr txBox="1"/>
+          <p:nvPr/>
+        </p:nvSpPr>
+        <p:spPr>
+          <a:xfrm>
+            <a:off x="457200" y="914400"/>
+            <a:ext cx="8229600" cy="365760"/>
+          </a:xfrm>
+          <a:prstGeom prst="rect">
+            <a:avLst/>
+          </a:prstGeom>
+          <a:noFill/>
+          <a:ln/>
+        </p:spPr>
+        <p:txBody>
+          <a:bodyPr wrap="square" lIns="0" tIns="0" rIns="0" bIns="0" rtlCol="0" anchor="ctr"/>
+          <a:lstStyle/>
+          <a:p>
+            <a:pPr indent="0" marL="0">
+              <a:buNone/>
+            </a:pPr>
+            <a:r>
+              <a:rPr lang="en-US" sz="1300" i="1" dirty="0">
+                <a:solidFill>
+                  <a:srgbClr val="5F5F5F"/>
+                </a:solidFill>
+                <a:latin typeface="Calibri" pitchFamily="34" charset="0"/>
+                <a:ea typeface="Calibri" pitchFamily="34" charset="-122"/>
+                <a:cs typeface="Calibri" pitchFamily="34" charset="-120"/>
+              </a:rPr>
+              <a:t>Net present worth against discount rate. Blue is HMA, orange is PCC. TDOT 3 percent and FAA AIP 7 percent are marked.</a:t>
+            </a:r>
+            <a:endParaRPr lang="en-US" sz="1300" dirty="0"/>
+          </a:p>
+        </p:txBody>
+      </p:sp>
+      <p:pic>
+        <p:nvPicPr>
+          <p:cNvPr id="4" name="Image 0" descr="/tmp/claude-0/-home-user-lcca-dashboard/444ca227-15d7-51d4-a51e-a0ae3dbe81ed/scratchpad/deck/img/MBT_sens.png">    </p:cNvPr>
+          <p:cNvPicPr>
+            <a:picLocks noChangeAspect="1"/>
+          </p:cNvPicPr>
+          <p:nvPr/>
+        </p:nvPicPr>
+        <p:blipFill>
+          <a:blip r:embed="rId1"/>
+          <a:stretch>
+            <a:fillRect/>
+          </a:stretch>
+        </p:blipFill>
+        <p:spPr>
+          <a:xfrm>
+            <a:off x="457200" y="1371600"/>
+            <a:ext cx="3931920" cy="1899478"/>
+          </a:xfrm>
+          <a:prstGeom prst="rect">
+            <a:avLst/>
+          </a:prstGeom>
+        </p:spPr>
+      </p:pic>
+      <p:sp>
+        <p:nvSpPr>
+          <p:cNvPr id="5" name="Text 2"/>
+          <p:cNvSpPr txBox="1"/>
+          <p:nvPr/>
+        </p:nvSpPr>
+        <p:spPr>
+          <a:xfrm>
+            <a:off x="457200" y="3316798"/>
+            <a:ext cx="3931920" cy="411480"/>
+          </a:xfrm>
+          <a:prstGeom prst="rect">
+            <a:avLst/>
+          </a:prstGeom>
+          <a:noFill/>
+          <a:ln/>
+        </p:spPr>
+        <p:txBody>
+          <a:bodyPr wrap="square" lIns="0" tIns="0" rIns="0" bIns="0" rtlCol="0" anchor="t"/>
+          <a:lstStyle/>
+          <a:p>
+            <a:pPr indent="0" marL="0">
+              <a:buNone/>
+            </a:pPr>
+            <a:r>
+              <a:rPr lang="en-US" sz="1050" dirty="0">
+                <a:solidFill>
+                  <a:srgbClr val="5F5F5F"/>
+                </a:solidFill>
+                <a:latin typeface="Calibri" pitchFamily="34" charset="0"/>
+                <a:ea typeface="Calibri" pitchFamily="34" charset="-122"/>
+                <a:cs typeface="Calibri" pitchFamily="34" charset="-120"/>
+              </a:rPr>
+              <a:t>MBT: PCC wins below 4.5 percent, HMA above. At the FAA AIP rate the answer reverses.</a:t>
+            </a:r>
+            <a:endParaRPr lang="en-US" sz="1050" dirty="0"/>
+          </a:p>
+        </p:txBody>
+      </p:sp>
+      <p:pic>
+        <p:nvPicPr>
+          <p:cNvPr id="6" name="Image 1" descr="/tmp/claude-0/-home-user-lcca-dashboard/444ca227-15d7-51d4-a51e-a0ae3dbe81ed/scratchpad/deck/img/SRB_sens.png">    </p:cNvPr>
+          <p:cNvPicPr>
+            <a:picLocks noChangeAspect="1"/>
+          </p:cNvPicPr>
+          <p:nvPr/>
+        </p:nvPicPr>
+        <p:blipFill>
+          <a:blip r:embed="rId2"/>
+          <a:stretch>
+            <a:fillRect/>
+          </a:stretch>
+        </p:blipFill>
+        <p:spPr>
+          <a:xfrm>
+            <a:off x="4754880" y="1371600"/>
+            <a:ext cx="3931920" cy="1899478"/>
+          </a:xfrm>
+          <a:prstGeom prst="rect">
+            <a:avLst/>
+          </a:prstGeom>
+        </p:spPr>
+      </p:pic>
+      <p:sp>
+        <p:nvSpPr>
+          <p:cNvPr id="7" name="Text 3"/>
+          <p:cNvSpPr txBox="1"/>
+          <p:nvPr/>
+        </p:nvSpPr>
+        <p:spPr>
+          <a:xfrm>
+            <a:off x="4754880" y="3316798"/>
+            <a:ext cx="3931920" cy="411480"/>
+          </a:xfrm>
+          <a:prstGeom prst="rect">
+            <a:avLst/>
+          </a:prstGeom>
+          <a:noFill/>
+          <a:ln/>
+        </p:spPr>
+        <p:txBody>
+          <a:bodyPr wrap="square" lIns="0" tIns="0" rIns="0" bIns="0" rtlCol="0" anchor="t"/>
+          <a:lstStyle/>
+          <a:p>
+            <a:pPr indent="0" marL="0">
+              <a:buNone/>
+            </a:pPr>
+            <a:r>
+              <a:rPr lang="en-US" sz="1050" dirty="0">
+                <a:solidFill>
+                  <a:srgbClr val="5F5F5F"/>
+                </a:solidFill>
+                <a:latin typeface="Calibri" pitchFamily="34" charset="0"/>
+                <a:ea typeface="Calibri" pitchFamily="34" charset="-122"/>
+                <a:cs typeface="Calibri" pitchFamily="34" charset="-120"/>
+              </a:rPr>
+              <a:t>SRB: HMA wins at every rate above 2.5 percent. The gap widens as the rate rises.</a:t>
+            </a:r>
+            <a:endParaRPr lang="en-US" sz="1050" dirty="0"/>
+          </a:p>
+        </p:txBody>
+      </p:sp>
+      <p:sp>
+        <p:nvSpPr>
+          <p:cNvPr id="8" name="Shape 4"/>
+          <p:cNvSpPr/>
+          <p:nvPr/>
+        </p:nvSpPr>
+        <p:spPr>
+          <a:xfrm>
+            <a:off x="457200" y="3794760"/>
+            <a:ext cx="8229600" cy="777240"/>
+          </a:xfrm>
+          <a:prstGeom prst="roundRect">
+            <a:avLst>
+              <a:gd name="adj" fmla="val 7059"/>
+            </a:avLst>
+          </a:prstGeom>
+          <a:solidFill>
+            <a:srgbClr val="F3F3F1"/>
+          </a:solidFill>
+          <a:ln w="12700">
+            <a:solidFill>
+              <a:srgbClr val="F3F3F1"/>
+            </a:solidFill>
+            <a:prstDash val="solid"/>
+          </a:ln>
+        </p:spPr>
+      </p:sp>
+      <p:sp>
+        <p:nvSpPr>
+          <p:cNvPr id="9" name="Text 5"/>
+          <p:cNvSpPr txBox="1"/>
+          <p:nvPr/>
+        </p:nvSpPr>
+        <p:spPr>
+          <a:xfrm>
+            <a:off x="640080" y="3840480"/>
+            <a:ext cx="7863840" cy="685800"/>
+          </a:xfrm>
+          <a:prstGeom prst="rect">
+            <a:avLst/>
+          </a:prstGeom>
+          <a:noFill/>
+          <a:ln/>
+        </p:spPr>
+        <p:txBody>
+          <a:bodyPr wrap="square" lIns="0" tIns="0" rIns="0" bIns="0" rtlCol="0" anchor="ctr"/>
+          <a:lstStyle/>
+          <a:p>
+            <a:pPr indent="0" marL="0">
+              <a:buNone/>
+            </a:pPr>
+            <a:r>
+              <a:rPr lang="en-US" sz="1200" b="1" dirty="0">
+                <a:solidFill>
+                  <a:srgbClr val="1F1F1F"/>
+                </a:solidFill>
+                <a:latin typeface="Calibri" pitchFamily="34" charset="0"/>
+                <a:ea typeface="Calibri" pitchFamily="34" charset="-122"/>
+                <a:cs typeface="Calibri" pitchFamily="34" charset="-120"/>
+              </a:rPr>
+              <a:t>Live simulation: </a:t>
+            </a:r>
+            <a:pPr indent="0" marL="0">
+              <a:buNone/>
+            </a:pPr>
+            <a:r>
+              <a:rPr lang="en-US" sz="1200" dirty="0">
+                <a:solidFill>
+                  <a:srgbClr val="1F1F1F"/>
+                </a:solidFill>
+                <a:latin typeface="Calibri" pitchFamily="34" charset="0"/>
+                <a:ea typeface="Calibri" pitchFamily="34" charset="-122"/>
+                <a:cs typeface="Calibri" pitchFamily="34" charset="-120"/>
+              </a:rPr>
+              <a:t>1,000 joint draws on rate, bids, closures, salvage and revenue share. Probability PCC is the cheaper alternative: 52 percent at MBT, 18 percent at SRB. Press F9 in the workbook to redraw.</a:t>
+            </a:r>
+            <a:endParaRPr lang="en-US" sz="1200" dirty="0"/>
+          </a:p>
+        </p:txBody>
+      </p:sp>
+    </p:spTree>
+  </p:cSld>
+  <p:clrMapOvr>
+    <a:masterClrMapping/>
+  </p:clrMapOvr>
+</p:sld>
+</file>
+
+<file path=ppt/slides/slide17.xml><?xml version="1.0" encoding="utf-8"?>
+<p:sld xmlns:a="http://schemas.openxmlformats.org/drawingml/2006/main" xmlns:r="http://schemas.openxmlformats.org/officeDocument/2006/relationships" xmlns:p="http://schemas.openxmlformats.org/presentationml/2006/main">
+  <p:cSld name="Slide 17">
+    <p:bg>
+      <p:bgPr>
+        <a:solidFill>
+          <a:srgbClr val="FFFFFF"/>
+        </a:solidFill>
+      </p:bgPr>
+    </p:bg>
+    <p:spTree>
+      <p:nvGrpSpPr>
+        <p:cNvPr id="1" name=""/>
+        <p:cNvGrpSpPr/>
+        <p:nvPr/>
+      </p:nvGrpSpPr>
+      <p:grpSpPr>
+        <a:xfrm>
+          <a:off x="0" y="0"/>
+          <a:ext cx="0" cy="0"/>
+          <a:chOff x="0" y="0"/>
+          <a:chExt cx="0" cy="0"/>
+        </a:xfrm>
+      </p:grpSpPr>
+      <p:sp>
+        <p:nvSpPr>
+          <p:cNvPr id="2" name="Text 0"/>
+          <p:cNvSpPr txBox="1"/>
+          <p:nvPr/>
+        </p:nvSpPr>
+        <p:spPr>
+          <a:xfrm>
+            <a:off x="457200" y="320040"/>
+            <a:ext cx="8229600" cy="640080"/>
+          </a:xfrm>
+          <a:prstGeom prst="rect">
+            <a:avLst/>
+          </a:prstGeom>
+          <a:noFill/>
+          <a:ln/>
+        </p:spPr>
+        <p:txBody>
+          <a:bodyPr wrap="square" lIns="0" tIns="0" rIns="0" bIns="0" rtlCol="0" anchor="t"/>
+          <a:lstStyle/>
+          <a:p>
+            <a:pPr indent="0" marL="0">
+              <a:buNone/>
+            </a:pPr>
+            <a:r>
+              <a:rPr lang="en-US" sz="2800" b="1" dirty="0">
+                <a:solidFill>
+                  <a:srgbClr val="1F1F1F"/>
+                </a:solidFill>
+                <a:latin typeface="Cambria" pitchFamily="34" charset="0"/>
+                <a:ea typeface="Cambria" pitchFamily="34" charset="-122"/>
+                <a:cs typeface="Cambria" pitchFamily="34" charset="-120"/>
+              </a:rPr>
               <a:t>What could flip the answer</a:t>
             </a:r>
             <a:endParaRPr lang="en-US" sz="2800" dirty="0"/>
@@ -5363,7 +5763,7 @@
       </p:sp>
       <p:graphicFrame>
         <p:nvGraphicFramePr>
-          <p:cNvPr id="17" name="Table 0"/>
+          <p:cNvPr id="18" name="Table 0"/>
           <p:cNvGraphicFramePr>
             <a:graphicFrameLocks noGrp="1"/>
           </p:cNvGraphicFramePr>
@@ -6224,9 +6624,9 @@
 </p:sld>
 </file>
 
-<file path=ppt/slides/slide17.xml><?xml version="1.0" encoding="utf-8"?>
+<file path=ppt/slides/slide18.xml><?xml version="1.0" encoding="utf-8"?>
 <p:sld xmlns:a="http://schemas.openxmlformats.org/drawingml/2006/main" xmlns:r="http://schemas.openxmlformats.org/officeDocument/2006/relationships" xmlns:p="http://schemas.openxmlformats.org/presentationml/2006/main">
-  <p:cSld name="Slide 17">
+  <p:cSld name="Slide 18">
     <p:bg>
       <p:bgPr>
         <a:solidFill>
@@ -6328,7 +6728,7 @@
       </p:sp>
       <p:graphicFrame>
         <p:nvGraphicFramePr>
-          <p:cNvPr id="18" name="Table 0"/>
+          <p:cNvPr id="19" name="Table 0"/>
           <p:cNvGraphicFramePr>
             <a:graphicFrameLocks noGrp="1"/>
           </p:cNvGraphicFramePr>
@@ -7928,9 +8328,9 @@
 </p:sld>
 </file>
 
-<file path=ppt/slides/slide18.xml><?xml version="1.0" encoding="utf-8"?>
+<file path=ppt/slides/slide19.xml><?xml version="1.0" encoding="utf-8"?>
 <p:sld xmlns:a="http://schemas.openxmlformats.org/drawingml/2006/main" xmlns:r="http://schemas.openxmlformats.org/officeDocument/2006/relationships" xmlns:p="http://schemas.openxmlformats.org/presentationml/2006/main">
-  <p:cSld name="Slide 18">
+  <p:cSld name="Slide 19">
     <p:bg>
       <p:bgPr>
         <a:solidFill>
@@ -7993,7 +8393,7 @@
       </p:sp>
       <p:graphicFrame>
         <p:nvGraphicFramePr>
-          <p:cNvPr id="19" name="Table 0"/>
+          <p:cNvPr id="20" name="Table 0"/>
           <p:cNvGraphicFramePr>
             <a:graphicFrameLocks noGrp="1"/>
           </p:cNvGraphicFramePr>
@@ -9401,542 +9801,6 @@
           </a:graphicData>
         </a:graphic>
       </p:graphicFrame>
-    </p:spTree>
-  </p:cSld>
-  <p:clrMapOvr>
-    <a:masterClrMapping/>
-  </p:clrMapOvr>
-</p:sld>
-</file>
-
-<file path=ppt/slides/slide19.xml><?xml version="1.0" encoding="utf-8"?>
-<p:sld xmlns:a="http://schemas.openxmlformats.org/drawingml/2006/main" xmlns:r="http://schemas.openxmlformats.org/officeDocument/2006/relationships" xmlns:p="http://schemas.openxmlformats.org/presentationml/2006/main">
-  <p:cSld name="Slide 19">
-    <p:bg>
-      <p:bgPr>
-        <a:solidFill>
-          <a:srgbClr val="FFFFFF"/>
-        </a:solidFill>
-      </p:bgPr>
-    </p:bg>
-    <p:spTree>
-      <p:nvGrpSpPr>
-        <p:cNvPr id="1" name=""/>
-        <p:cNvGrpSpPr/>
-        <p:nvPr/>
-      </p:nvGrpSpPr>
-      <p:grpSpPr>
-        <a:xfrm>
-          <a:off x="0" y="0"/>
-          <a:ext cx="0" cy="0"/>
-          <a:chOff x="0" y="0"/>
-          <a:chExt cx="0" cy="0"/>
-        </a:xfrm>
-      </p:grpSpPr>
-      <p:sp>
-        <p:nvSpPr>
-          <p:cNvPr id="2" name="Text 0"/>
-          <p:cNvSpPr txBox="1"/>
-          <p:nvPr/>
-        </p:nvSpPr>
-        <p:spPr>
-          <a:xfrm>
-            <a:off x="457200" y="320040"/>
-            <a:ext cx="8229600" cy="640080"/>
-          </a:xfrm>
-          <a:prstGeom prst="rect">
-            <a:avLst/>
-          </a:prstGeom>
-          <a:noFill/>
-          <a:ln/>
-        </p:spPr>
-        <p:txBody>
-          <a:bodyPr wrap="square" lIns="0" tIns="0" rIns="0" bIns="0" rtlCol="0" anchor="t"/>
-          <a:lstStyle/>
-          <a:p>
-            <a:pPr indent="0" marL="0">
-              <a:buNone/>
-            </a:pPr>
-            <a:r>
-              <a:rPr lang="en-US" sz="2800" b="1" dirty="0">
-                <a:solidFill>
-                  <a:srgbClr val="1F1F1F"/>
-                </a:solidFill>
-                <a:latin typeface="Cambria" pitchFamily="34" charset="0"/>
-                <a:ea typeface="Cambria" pitchFamily="34" charset="-122"/>
-                <a:cs typeface="Cambria" pitchFamily="34" charset="-120"/>
-              </a:rPr>
-              <a:t>How TDOT uses it</a:t>
-            </a:r>
-            <a:endParaRPr lang="en-US" sz="2800" dirty="0"/>
-          </a:p>
-        </p:txBody>
-      </p:sp>
-      <p:sp>
-        <p:nvSpPr>
-          <p:cNvPr id="3" name="Text 1"/>
-          <p:cNvSpPr txBox="1"/>
-          <p:nvPr/>
-        </p:nvSpPr>
-        <p:spPr>
-          <a:xfrm>
-            <a:off x="457200" y="914400"/>
-            <a:ext cx="8229600" cy="365760"/>
-          </a:xfrm>
-          <a:prstGeom prst="rect">
-            <a:avLst/>
-          </a:prstGeom>
-          <a:noFill/>
-          <a:ln/>
-        </p:spPr>
-        <p:txBody>
-          <a:bodyPr wrap="square" lIns="0" tIns="0" rIns="0" bIns="0" rtlCol="0" anchor="ctr"/>
-          <a:lstStyle/>
-          <a:p>
-            <a:pPr indent="0" marL="0">
-              <a:buNone/>
-            </a:pPr>
-            <a:r>
-              <a:rPr lang="en-US" sz="1300" i="1" dirty="0">
-                <a:solidFill>
-                  <a:srgbClr val="5F5F5F"/>
-                </a:solidFill>
-                <a:latin typeface="Calibri" pitchFamily="34" charset="0"/>
-                <a:ea typeface="Calibri" pitchFamily="34" charset="-122"/>
-                <a:cs typeface="Calibri" pitchFamily="34" charset="-120"/>
-              </a:rPr>
-              <a:t>Excel only. No add-ins. The decision workbook has no macros at all.</a:t>
-            </a:r>
-            <a:endParaRPr lang="en-US" sz="1300" dirty="0"/>
-          </a:p>
-        </p:txBody>
-      </p:sp>
-      <p:sp>
-        <p:nvSpPr>
-          <p:cNvPr id="4" name="Shape 2"/>
-          <p:cNvSpPr/>
-          <p:nvPr/>
-        </p:nvSpPr>
-        <p:spPr>
-          <a:xfrm>
-            <a:off x="457200" y="1463040"/>
-            <a:ext cx="502920" cy="502920"/>
-          </a:xfrm>
-          <a:prstGeom prst="ellipse">
-            <a:avLst/>
-          </a:prstGeom>
-          <a:solidFill>
-            <a:srgbClr val="1D2733"/>
-          </a:solidFill>
-          <a:ln w="12700">
-            <a:solidFill>
-              <a:srgbClr val="1D2733"/>
-            </a:solidFill>
-            <a:prstDash val="solid"/>
-          </a:ln>
-        </p:spPr>
-      </p:sp>
-      <p:sp>
-        <p:nvSpPr>
-          <p:cNvPr id="5" name="Text 3"/>
-          <p:cNvSpPr txBox="1"/>
-          <p:nvPr/>
-        </p:nvSpPr>
-        <p:spPr>
-          <a:xfrm>
-            <a:off x="457200" y="1463040"/>
-            <a:ext cx="502920" cy="502920"/>
-          </a:xfrm>
-          <a:prstGeom prst="rect">
-            <a:avLst/>
-          </a:prstGeom>
-          <a:noFill/>
-          <a:ln/>
-        </p:spPr>
-        <p:txBody>
-          <a:bodyPr wrap="square" lIns="0" tIns="0" rIns="0" bIns="0" rtlCol="0" anchor="ctr"/>
-          <a:lstStyle/>
-          <a:p>
-            <a:pPr algn="ctr" indent="0" marL="0">
-              <a:buNone/>
-            </a:pPr>
-            <a:r>
-              <a:rPr lang="en-US" sz="1800" b="1" dirty="0">
-                <a:solidFill>
-                  <a:srgbClr val="FFFFFF"/>
-                </a:solidFill>
-                <a:latin typeface="Cambria" pitchFamily="34" charset="0"/>
-                <a:ea typeface="Cambria" pitchFamily="34" charset="-122"/>
-                <a:cs typeface="Cambria" pitchFamily="34" charset="-120"/>
-              </a:rPr>
-              <a:t>1</a:t>
-            </a:r>
-            <a:endParaRPr lang="en-US" sz="1800" dirty="0"/>
-          </a:p>
-        </p:txBody>
-      </p:sp>
-      <p:sp>
-        <p:nvSpPr>
-          <p:cNvPr id="6" name="Text 4"/>
-          <p:cNvSpPr txBox="1"/>
-          <p:nvPr/>
-        </p:nvSpPr>
-        <p:spPr>
-          <a:xfrm>
-            <a:off x="457200" y="2103120"/>
-            <a:ext cx="2560320" cy="457200"/>
-          </a:xfrm>
-          <a:prstGeom prst="rect">
-            <a:avLst/>
-          </a:prstGeom>
-          <a:noFill/>
-          <a:ln/>
-        </p:spPr>
-        <p:txBody>
-          <a:bodyPr wrap="square" lIns="0" tIns="0" rIns="0" bIns="0" rtlCol="0" anchor="ctr"/>
-          <a:lstStyle/>
-          <a:p>
-            <a:pPr indent="0" marL="0">
-              <a:buNone/>
-            </a:pPr>
-            <a:r>
-              <a:rPr lang="en-US" sz="1500" b="1" dirty="0">
-                <a:solidFill>
-                  <a:srgbClr val="1F1F1F"/>
-                </a:solidFill>
-                <a:latin typeface="Cambria" pitchFamily="34" charset="0"/>
-                <a:ea typeface="Cambria" pitchFamily="34" charset="-122"/>
-                <a:cs typeface="Cambria" pitchFamily="34" charset="-120"/>
-              </a:rPr>
-              <a:t>Run the framework as before</a:t>
-            </a:r>
-            <a:endParaRPr lang="en-US" sz="1500" dirty="0"/>
-          </a:p>
-        </p:txBody>
-      </p:sp>
-      <p:sp>
-        <p:nvSpPr>
-          <p:cNvPr id="7" name="Text 5"/>
-          <p:cNvSpPr txBox="1"/>
-          <p:nvPr/>
-        </p:nvSpPr>
-        <p:spPr>
-          <a:xfrm>
-            <a:off x="457200" y="2606040"/>
-            <a:ext cx="2560320" cy="1645920"/>
-          </a:xfrm>
-          <a:prstGeom prst="rect">
-            <a:avLst/>
-          </a:prstGeom>
-          <a:noFill/>
-          <a:ln/>
-        </p:spPr>
-        <p:txBody>
-          <a:bodyPr wrap="square" lIns="0" tIns="0" rIns="0" bIns="0" rtlCol="0" anchor="t"/>
-          <a:lstStyle/>
-          <a:p>
-            <a:pPr indent="0" marL="0">
-              <a:buNone/>
-            </a:pPr>
-            <a:r>
-              <a:rPr lang="en-US" sz="1200" dirty="0">
-                <a:solidFill>
-                  <a:srgbClr val="1F1F1F"/>
-                </a:solidFill>
-                <a:latin typeface="Calibri" pitchFamily="34" charset="0"/>
-                <a:ea typeface="Calibri" pitchFamily="34" charset="-122"/>
-                <a:cs typeface="Calibri" pitchFamily="34" charset="-120"/>
-              </a:rPr>
-              <a:t>Open v1.2.0, enable content, fill General Information, build alternatives with Alternative Setup. Click View Summary: categories, closures, the 7 percent flag and five charts, no import needed.</a:t>
-            </a:r>
-            <a:endParaRPr lang="en-US" sz="1200" dirty="0"/>
-          </a:p>
-        </p:txBody>
-      </p:sp>
-      <p:sp>
-        <p:nvSpPr>
-          <p:cNvPr id="8" name="Shape 6"/>
-          <p:cNvSpPr/>
-          <p:nvPr/>
-        </p:nvSpPr>
-        <p:spPr>
-          <a:xfrm>
-            <a:off x="3246120" y="1463040"/>
-            <a:ext cx="502920" cy="502920"/>
-          </a:xfrm>
-          <a:prstGeom prst="ellipse">
-            <a:avLst/>
-          </a:prstGeom>
-          <a:solidFill>
-            <a:srgbClr val="1D2733"/>
-          </a:solidFill>
-          <a:ln w="12700">
-            <a:solidFill>
-              <a:srgbClr val="1D2733"/>
-            </a:solidFill>
-            <a:prstDash val="solid"/>
-          </a:ln>
-        </p:spPr>
-      </p:sp>
-      <p:sp>
-        <p:nvSpPr>
-          <p:cNvPr id="9" name="Text 7"/>
-          <p:cNvSpPr txBox="1"/>
-          <p:nvPr/>
-        </p:nvSpPr>
-        <p:spPr>
-          <a:xfrm>
-            <a:off x="3246120" y="1463040"/>
-            <a:ext cx="502920" cy="502920"/>
-          </a:xfrm>
-          <a:prstGeom prst="rect">
-            <a:avLst/>
-          </a:prstGeom>
-          <a:noFill/>
-          <a:ln/>
-        </p:spPr>
-        <p:txBody>
-          <a:bodyPr wrap="square" lIns="0" tIns="0" rIns="0" bIns="0" rtlCol="0" anchor="ctr"/>
-          <a:lstStyle/>
-          <a:p>
-            <a:pPr algn="ctr" indent="0" marL="0">
-              <a:buNone/>
-            </a:pPr>
-            <a:r>
-              <a:rPr lang="en-US" sz="1800" b="1" dirty="0">
-                <a:solidFill>
-                  <a:srgbClr val="FFFFFF"/>
-                </a:solidFill>
-                <a:latin typeface="Cambria" pitchFamily="34" charset="0"/>
-                <a:ea typeface="Cambria" pitchFamily="34" charset="-122"/>
-                <a:cs typeface="Cambria" pitchFamily="34" charset="-120"/>
-              </a:rPr>
-              <a:t>2</a:t>
-            </a:r>
-            <a:endParaRPr lang="en-US" sz="1800" dirty="0"/>
-          </a:p>
-        </p:txBody>
-      </p:sp>
-      <p:sp>
-        <p:nvSpPr>
-          <p:cNvPr id="10" name="Text 8"/>
-          <p:cNvSpPr txBox="1"/>
-          <p:nvPr/>
-        </p:nvSpPr>
-        <p:spPr>
-          <a:xfrm>
-            <a:off x="3246120" y="2103120"/>
-            <a:ext cx="2560320" cy="457200"/>
-          </a:xfrm>
-          <a:prstGeom prst="rect">
-            <a:avLst/>
-          </a:prstGeom>
-          <a:noFill/>
-          <a:ln/>
-        </p:spPr>
-        <p:txBody>
-          <a:bodyPr wrap="square" lIns="0" tIns="0" rIns="0" bIns="0" rtlCol="0" anchor="ctr"/>
-          <a:lstStyle/>
-          <a:p>
-            <a:pPr indent="0" marL="0">
-              <a:buNone/>
-            </a:pPr>
-            <a:r>
-              <a:rPr lang="en-US" sz="1500" b="1" dirty="0">
-                <a:solidFill>
-                  <a:srgbClr val="1F1F1F"/>
-                </a:solidFill>
-                <a:latin typeface="Cambria" pitchFamily="34" charset="0"/>
-                <a:ea typeface="Cambria" pitchFamily="34" charset="-122"/>
-                <a:cs typeface="Cambria" pitchFamily="34" charset="-120"/>
-              </a:rPr>
-              <a:t>Copy the TEMPLATE sheet</a:t>
-            </a:r>
-            <a:endParaRPr lang="en-US" sz="1500" dirty="0"/>
-          </a:p>
-        </p:txBody>
-      </p:sp>
-      <p:sp>
-        <p:nvSpPr>
-          <p:cNvPr id="11" name="Text 9"/>
-          <p:cNvSpPr txBox="1"/>
-          <p:nvPr/>
-        </p:nvSpPr>
-        <p:spPr>
-          <a:xfrm>
-            <a:off x="3246120" y="2606040"/>
-            <a:ext cx="2560320" cy="1645920"/>
-          </a:xfrm>
-          <a:prstGeom prst="rect">
-            <a:avLst/>
-          </a:prstGeom>
-          <a:noFill/>
-          <a:ln/>
-        </p:spPr>
-        <p:txBody>
-          <a:bodyPr wrap="square" lIns="0" tIns="0" rIns="0" bIns="0" rtlCol="0" anchor="t"/>
-          <a:lstStyle/>
-          <a:p>
-            <a:pPr indent="0" marL="0">
-              <a:buNone/>
-            </a:pPr>
-            <a:r>
-              <a:rPr lang="en-US" sz="1200" dirty="0">
-                <a:solidFill>
-                  <a:srgbClr val="1F1F1F"/>
-                </a:solidFill>
-                <a:latin typeface="Calibri" pitchFamily="34" charset="0"/>
-                <a:ea typeface="Calibri" pitchFamily="34" charset="-122"/>
-                <a:cs typeface="Calibri" pitchFamily="34" charset="-120"/>
-              </a:rPr>
-              <a:t>In the decision workbook, right-click TEMPLATE, Move or Copy, rename. Paste the base costs and closure days from each Alt sheet into the yellow cells.</a:t>
-            </a:r>
-            <a:endParaRPr lang="en-US" sz="1200" dirty="0"/>
-          </a:p>
-        </p:txBody>
-      </p:sp>
-      <p:sp>
-        <p:nvSpPr>
-          <p:cNvPr id="12" name="Shape 10"/>
-          <p:cNvSpPr/>
-          <p:nvPr/>
-        </p:nvSpPr>
-        <p:spPr>
-          <a:xfrm>
-            <a:off x="6035040" y="1463040"/>
-            <a:ext cx="502920" cy="502920"/>
-          </a:xfrm>
-          <a:prstGeom prst="ellipse">
-            <a:avLst/>
-          </a:prstGeom>
-          <a:solidFill>
-            <a:srgbClr val="1D2733"/>
-          </a:solidFill>
-          <a:ln w="12700">
-            <a:solidFill>
-              <a:srgbClr val="1D2733"/>
-            </a:solidFill>
-            <a:prstDash val="solid"/>
-          </a:ln>
-        </p:spPr>
-      </p:sp>
-      <p:sp>
-        <p:nvSpPr>
-          <p:cNvPr id="13" name="Text 11"/>
-          <p:cNvSpPr txBox="1"/>
-          <p:nvPr/>
-        </p:nvSpPr>
-        <p:spPr>
-          <a:xfrm>
-            <a:off x="6035040" y="1463040"/>
-            <a:ext cx="502920" cy="502920"/>
-          </a:xfrm>
-          <a:prstGeom prst="rect">
-            <a:avLst/>
-          </a:prstGeom>
-          <a:noFill/>
-          <a:ln/>
-        </p:spPr>
-        <p:txBody>
-          <a:bodyPr wrap="square" lIns="0" tIns="0" rIns="0" bIns="0" rtlCol="0" anchor="ctr"/>
-          <a:lstStyle/>
-          <a:p>
-            <a:pPr algn="ctr" indent="0" marL="0">
-              <a:buNone/>
-            </a:pPr>
-            <a:r>
-              <a:rPr lang="en-US" sz="1800" b="1" dirty="0">
-                <a:solidFill>
-                  <a:srgbClr val="FFFFFF"/>
-                </a:solidFill>
-                <a:latin typeface="Cambria" pitchFamily="34" charset="0"/>
-                <a:ea typeface="Cambria" pitchFamily="34" charset="-122"/>
-                <a:cs typeface="Cambria" pitchFamily="34" charset="-120"/>
-              </a:rPr>
-              <a:t>3</a:t>
-            </a:r>
-            <a:endParaRPr lang="en-US" sz="1800" dirty="0"/>
-          </a:p>
-        </p:txBody>
-      </p:sp>
-      <p:sp>
-        <p:nvSpPr>
-          <p:cNvPr id="14" name="Text 12"/>
-          <p:cNvSpPr txBox="1"/>
-          <p:nvPr/>
-        </p:nvSpPr>
-        <p:spPr>
-          <a:xfrm>
-            <a:off x="6035040" y="2103120"/>
-            <a:ext cx="2560320" cy="457200"/>
-          </a:xfrm>
-          <a:prstGeom prst="rect">
-            <a:avLst/>
-          </a:prstGeom>
-          <a:noFill/>
-          <a:ln/>
-        </p:spPr>
-        <p:txBody>
-          <a:bodyPr wrap="square" lIns="0" tIns="0" rIns="0" bIns="0" rtlCol="0" anchor="ctr"/>
-          <a:lstStyle/>
-          <a:p>
-            <a:pPr indent="0" marL="0">
-              <a:buNone/>
-            </a:pPr>
-            <a:r>
-              <a:rPr lang="en-US" sz="1500" b="1" dirty="0">
-                <a:solidFill>
-                  <a:srgbClr val="1F1F1F"/>
-                </a:solidFill>
-                <a:latin typeface="Cambria" pitchFamily="34" charset="0"/>
-                <a:ea typeface="Cambria" pitchFamily="34" charset="-122"/>
-                <a:cs typeface="Cambria" pitchFamily="34" charset="-120"/>
-              </a:rPr>
-              <a:t>Read the decision blocks</a:t>
-            </a:r>
-            <a:endParaRPr lang="en-US" sz="1500" dirty="0"/>
-          </a:p>
-        </p:txBody>
-      </p:sp>
-      <p:sp>
-        <p:nvSpPr>
-          <p:cNvPr id="15" name="Text 13"/>
-          <p:cNvSpPr txBox="1"/>
-          <p:nvPr/>
-        </p:nvSpPr>
-        <p:spPr>
-          <a:xfrm>
-            <a:off x="6035040" y="2606040"/>
-            <a:ext cx="2560320" cy="1645920"/>
-          </a:xfrm>
-          <a:prstGeom prst="rect">
-            <a:avLst/>
-          </a:prstGeom>
-          <a:noFill/>
-          <a:ln/>
-        </p:spPr>
-        <p:txBody>
-          <a:bodyPr wrap="square" lIns="0" tIns="0" rIns="0" bIns="0" rtlCol="0" anchor="t"/>
-          <a:lstStyle/>
-          <a:p>
-            <a:pPr indent="0" marL="0">
-              <a:buNone/>
-            </a:pPr>
-            <a:r>
-              <a:rPr lang="en-US" sz="1200" dirty="0">
-                <a:solidFill>
-                  <a:srgbClr val="1F1F1F"/>
-                </a:solidFill>
-                <a:latin typeface="Calibri" pitchFamily="34" charset="0"/>
-                <a:ea typeface="Calibri" pitchFamily="34" charset="-122"/>
-                <a:cs typeface="Calibri" pitchFamily="34" charset="-120"/>
-              </a:rPr>
-              <a:t>RESULTS, BREAK-EVEN VALUES, the scenario scorecard and the decision map. Change any yellow cell and every chart follows. F9 redraws the simulation.</a:t>
-            </a:r>
-            <a:endParaRPr lang="en-US" sz="1200" dirty="0"/>
-          </a:p>
-        </p:txBody>
-      </p:sp>
     </p:spTree>
   </p:cSld>
   <p:clrMapOvr>
@@ -10611,6 +10475,542 @@
                 <a:ea typeface="Cambria" pitchFamily="34" charset="-122"/>
                 <a:cs typeface="Cambria" pitchFamily="34" charset="-120"/>
               </a:rPr>
+              <a:t>How TDOT uses it</a:t>
+            </a:r>
+            <a:endParaRPr lang="en-US" sz="2800" dirty="0"/>
+          </a:p>
+        </p:txBody>
+      </p:sp>
+      <p:sp>
+        <p:nvSpPr>
+          <p:cNvPr id="3" name="Text 1"/>
+          <p:cNvSpPr txBox="1"/>
+          <p:nvPr/>
+        </p:nvSpPr>
+        <p:spPr>
+          <a:xfrm>
+            <a:off x="457200" y="914400"/>
+            <a:ext cx="8229600" cy="365760"/>
+          </a:xfrm>
+          <a:prstGeom prst="rect">
+            <a:avLst/>
+          </a:prstGeom>
+          <a:noFill/>
+          <a:ln/>
+        </p:spPr>
+        <p:txBody>
+          <a:bodyPr wrap="square" lIns="0" tIns="0" rIns="0" bIns="0" rtlCol="0" anchor="ctr"/>
+          <a:lstStyle/>
+          <a:p>
+            <a:pPr indent="0" marL="0">
+              <a:buNone/>
+            </a:pPr>
+            <a:r>
+              <a:rPr lang="en-US" sz="1300" i="1" dirty="0">
+                <a:solidFill>
+                  <a:srgbClr val="5F5F5F"/>
+                </a:solidFill>
+                <a:latin typeface="Calibri" pitchFamily="34" charset="0"/>
+                <a:ea typeface="Calibri" pitchFamily="34" charset="-122"/>
+                <a:cs typeface="Calibri" pitchFamily="34" charset="-120"/>
+              </a:rPr>
+              <a:t>Excel only. No add-ins. The decision workbook has no macros at all.</a:t>
+            </a:r>
+            <a:endParaRPr lang="en-US" sz="1300" dirty="0"/>
+          </a:p>
+        </p:txBody>
+      </p:sp>
+      <p:sp>
+        <p:nvSpPr>
+          <p:cNvPr id="4" name="Shape 2"/>
+          <p:cNvSpPr/>
+          <p:nvPr/>
+        </p:nvSpPr>
+        <p:spPr>
+          <a:xfrm>
+            <a:off x="457200" y="1463040"/>
+            <a:ext cx="502920" cy="502920"/>
+          </a:xfrm>
+          <a:prstGeom prst="ellipse">
+            <a:avLst/>
+          </a:prstGeom>
+          <a:solidFill>
+            <a:srgbClr val="1D2733"/>
+          </a:solidFill>
+          <a:ln w="12700">
+            <a:solidFill>
+              <a:srgbClr val="1D2733"/>
+            </a:solidFill>
+            <a:prstDash val="solid"/>
+          </a:ln>
+        </p:spPr>
+      </p:sp>
+      <p:sp>
+        <p:nvSpPr>
+          <p:cNvPr id="5" name="Text 3"/>
+          <p:cNvSpPr txBox="1"/>
+          <p:nvPr/>
+        </p:nvSpPr>
+        <p:spPr>
+          <a:xfrm>
+            <a:off x="457200" y="1463040"/>
+            <a:ext cx="502920" cy="502920"/>
+          </a:xfrm>
+          <a:prstGeom prst="rect">
+            <a:avLst/>
+          </a:prstGeom>
+          <a:noFill/>
+          <a:ln/>
+        </p:spPr>
+        <p:txBody>
+          <a:bodyPr wrap="square" lIns="0" tIns="0" rIns="0" bIns="0" rtlCol="0" anchor="ctr"/>
+          <a:lstStyle/>
+          <a:p>
+            <a:pPr algn="ctr" indent="0" marL="0">
+              <a:buNone/>
+            </a:pPr>
+            <a:r>
+              <a:rPr lang="en-US" sz="1800" b="1" dirty="0">
+                <a:solidFill>
+                  <a:srgbClr val="FFFFFF"/>
+                </a:solidFill>
+                <a:latin typeface="Cambria" pitchFamily="34" charset="0"/>
+                <a:ea typeface="Cambria" pitchFamily="34" charset="-122"/>
+                <a:cs typeface="Cambria" pitchFamily="34" charset="-120"/>
+              </a:rPr>
+              <a:t>1</a:t>
+            </a:r>
+            <a:endParaRPr lang="en-US" sz="1800" dirty="0"/>
+          </a:p>
+        </p:txBody>
+      </p:sp>
+      <p:sp>
+        <p:nvSpPr>
+          <p:cNvPr id="6" name="Text 4"/>
+          <p:cNvSpPr txBox="1"/>
+          <p:nvPr/>
+        </p:nvSpPr>
+        <p:spPr>
+          <a:xfrm>
+            <a:off x="457200" y="2103120"/>
+            <a:ext cx="2560320" cy="457200"/>
+          </a:xfrm>
+          <a:prstGeom prst="rect">
+            <a:avLst/>
+          </a:prstGeom>
+          <a:noFill/>
+          <a:ln/>
+        </p:spPr>
+        <p:txBody>
+          <a:bodyPr wrap="square" lIns="0" tIns="0" rIns="0" bIns="0" rtlCol="0" anchor="ctr"/>
+          <a:lstStyle/>
+          <a:p>
+            <a:pPr indent="0" marL="0">
+              <a:buNone/>
+            </a:pPr>
+            <a:r>
+              <a:rPr lang="en-US" sz="1500" b="1" dirty="0">
+                <a:solidFill>
+                  <a:srgbClr val="1F1F1F"/>
+                </a:solidFill>
+                <a:latin typeface="Cambria" pitchFamily="34" charset="0"/>
+                <a:ea typeface="Cambria" pitchFamily="34" charset="-122"/>
+                <a:cs typeface="Cambria" pitchFamily="34" charset="-120"/>
+              </a:rPr>
+              <a:t>Run the framework as before</a:t>
+            </a:r>
+            <a:endParaRPr lang="en-US" sz="1500" dirty="0"/>
+          </a:p>
+        </p:txBody>
+      </p:sp>
+      <p:sp>
+        <p:nvSpPr>
+          <p:cNvPr id="7" name="Text 5"/>
+          <p:cNvSpPr txBox="1"/>
+          <p:nvPr/>
+        </p:nvSpPr>
+        <p:spPr>
+          <a:xfrm>
+            <a:off x="457200" y="2606040"/>
+            <a:ext cx="2560320" cy="1645920"/>
+          </a:xfrm>
+          <a:prstGeom prst="rect">
+            <a:avLst/>
+          </a:prstGeom>
+          <a:noFill/>
+          <a:ln/>
+        </p:spPr>
+        <p:txBody>
+          <a:bodyPr wrap="square" lIns="0" tIns="0" rIns="0" bIns="0" rtlCol="0" anchor="t"/>
+          <a:lstStyle/>
+          <a:p>
+            <a:pPr indent="0" marL="0">
+              <a:buNone/>
+            </a:pPr>
+            <a:r>
+              <a:rPr lang="en-US" sz="1200" dirty="0">
+                <a:solidFill>
+                  <a:srgbClr val="1F1F1F"/>
+                </a:solidFill>
+                <a:latin typeface="Calibri" pitchFamily="34" charset="0"/>
+                <a:ea typeface="Calibri" pitchFamily="34" charset="-122"/>
+                <a:cs typeface="Calibri" pitchFamily="34" charset="-120"/>
+              </a:rPr>
+              <a:t>Open v1.2.0, enable content, fill General Information, build alternatives with Alternative Setup. Click View Summary: categories, closures, the 7 percent flag and five charts, no import needed.</a:t>
+            </a:r>
+            <a:endParaRPr lang="en-US" sz="1200" dirty="0"/>
+          </a:p>
+        </p:txBody>
+      </p:sp>
+      <p:sp>
+        <p:nvSpPr>
+          <p:cNvPr id="8" name="Shape 6"/>
+          <p:cNvSpPr/>
+          <p:nvPr/>
+        </p:nvSpPr>
+        <p:spPr>
+          <a:xfrm>
+            <a:off x="3246120" y="1463040"/>
+            <a:ext cx="502920" cy="502920"/>
+          </a:xfrm>
+          <a:prstGeom prst="ellipse">
+            <a:avLst/>
+          </a:prstGeom>
+          <a:solidFill>
+            <a:srgbClr val="1D2733"/>
+          </a:solidFill>
+          <a:ln w="12700">
+            <a:solidFill>
+              <a:srgbClr val="1D2733"/>
+            </a:solidFill>
+            <a:prstDash val="solid"/>
+          </a:ln>
+        </p:spPr>
+      </p:sp>
+      <p:sp>
+        <p:nvSpPr>
+          <p:cNvPr id="9" name="Text 7"/>
+          <p:cNvSpPr txBox="1"/>
+          <p:nvPr/>
+        </p:nvSpPr>
+        <p:spPr>
+          <a:xfrm>
+            <a:off x="3246120" y="1463040"/>
+            <a:ext cx="502920" cy="502920"/>
+          </a:xfrm>
+          <a:prstGeom prst="rect">
+            <a:avLst/>
+          </a:prstGeom>
+          <a:noFill/>
+          <a:ln/>
+        </p:spPr>
+        <p:txBody>
+          <a:bodyPr wrap="square" lIns="0" tIns="0" rIns="0" bIns="0" rtlCol="0" anchor="ctr"/>
+          <a:lstStyle/>
+          <a:p>
+            <a:pPr algn="ctr" indent="0" marL="0">
+              <a:buNone/>
+            </a:pPr>
+            <a:r>
+              <a:rPr lang="en-US" sz="1800" b="1" dirty="0">
+                <a:solidFill>
+                  <a:srgbClr val="FFFFFF"/>
+                </a:solidFill>
+                <a:latin typeface="Cambria" pitchFamily="34" charset="0"/>
+                <a:ea typeface="Cambria" pitchFamily="34" charset="-122"/>
+                <a:cs typeface="Cambria" pitchFamily="34" charset="-120"/>
+              </a:rPr>
+              <a:t>2</a:t>
+            </a:r>
+            <a:endParaRPr lang="en-US" sz="1800" dirty="0"/>
+          </a:p>
+        </p:txBody>
+      </p:sp>
+      <p:sp>
+        <p:nvSpPr>
+          <p:cNvPr id="10" name="Text 8"/>
+          <p:cNvSpPr txBox="1"/>
+          <p:nvPr/>
+        </p:nvSpPr>
+        <p:spPr>
+          <a:xfrm>
+            <a:off x="3246120" y="2103120"/>
+            <a:ext cx="2560320" cy="457200"/>
+          </a:xfrm>
+          <a:prstGeom prst="rect">
+            <a:avLst/>
+          </a:prstGeom>
+          <a:noFill/>
+          <a:ln/>
+        </p:spPr>
+        <p:txBody>
+          <a:bodyPr wrap="square" lIns="0" tIns="0" rIns="0" bIns="0" rtlCol="0" anchor="ctr"/>
+          <a:lstStyle/>
+          <a:p>
+            <a:pPr indent="0" marL="0">
+              <a:buNone/>
+            </a:pPr>
+            <a:r>
+              <a:rPr lang="en-US" sz="1500" b="1" dirty="0">
+                <a:solidFill>
+                  <a:srgbClr val="1F1F1F"/>
+                </a:solidFill>
+                <a:latin typeface="Cambria" pitchFamily="34" charset="0"/>
+                <a:ea typeface="Cambria" pitchFamily="34" charset="-122"/>
+                <a:cs typeface="Cambria" pitchFamily="34" charset="-120"/>
+              </a:rPr>
+              <a:t>Copy the TEMPLATE sheet</a:t>
+            </a:r>
+            <a:endParaRPr lang="en-US" sz="1500" dirty="0"/>
+          </a:p>
+        </p:txBody>
+      </p:sp>
+      <p:sp>
+        <p:nvSpPr>
+          <p:cNvPr id="11" name="Text 9"/>
+          <p:cNvSpPr txBox="1"/>
+          <p:nvPr/>
+        </p:nvSpPr>
+        <p:spPr>
+          <a:xfrm>
+            <a:off x="3246120" y="2606040"/>
+            <a:ext cx="2560320" cy="1645920"/>
+          </a:xfrm>
+          <a:prstGeom prst="rect">
+            <a:avLst/>
+          </a:prstGeom>
+          <a:noFill/>
+          <a:ln/>
+        </p:spPr>
+        <p:txBody>
+          <a:bodyPr wrap="square" lIns="0" tIns="0" rIns="0" bIns="0" rtlCol="0" anchor="t"/>
+          <a:lstStyle/>
+          <a:p>
+            <a:pPr indent="0" marL="0">
+              <a:buNone/>
+            </a:pPr>
+            <a:r>
+              <a:rPr lang="en-US" sz="1200" dirty="0">
+                <a:solidFill>
+                  <a:srgbClr val="1F1F1F"/>
+                </a:solidFill>
+                <a:latin typeface="Calibri" pitchFamily="34" charset="0"/>
+                <a:ea typeface="Calibri" pitchFamily="34" charset="-122"/>
+                <a:cs typeface="Calibri" pitchFamily="34" charset="-120"/>
+              </a:rPr>
+              <a:t>In the decision workbook, right-click TEMPLATE, Move or Copy, rename. Paste the base costs and closure days from each Alt sheet into the yellow cells.</a:t>
+            </a:r>
+            <a:endParaRPr lang="en-US" sz="1200" dirty="0"/>
+          </a:p>
+        </p:txBody>
+      </p:sp>
+      <p:sp>
+        <p:nvSpPr>
+          <p:cNvPr id="12" name="Shape 10"/>
+          <p:cNvSpPr/>
+          <p:nvPr/>
+        </p:nvSpPr>
+        <p:spPr>
+          <a:xfrm>
+            <a:off x="6035040" y="1463040"/>
+            <a:ext cx="502920" cy="502920"/>
+          </a:xfrm>
+          <a:prstGeom prst="ellipse">
+            <a:avLst/>
+          </a:prstGeom>
+          <a:solidFill>
+            <a:srgbClr val="1D2733"/>
+          </a:solidFill>
+          <a:ln w="12700">
+            <a:solidFill>
+              <a:srgbClr val="1D2733"/>
+            </a:solidFill>
+            <a:prstDash val="solid"/>
+          </a:ln>
+        </p:spPr>
+      </p:sp>
+      <p:sp>
+        <p:nvSpPr>
+          <p:cNvPr id="13" name="Text 11"/>
+          <p:cNvSpPr txBox="1"/>
+          <p:nvPr/>
+        </p:nvSpPr>
+        <p:spPr>
+          <a:xfrm>
+            <a:off x="6035040" y="1463040"/>
+            <a:ext cx="502920" cy="502920"/>
+          </a:xfrm>
+          <a:prstGeom prst="rect">
+            <a:avLst/>
+          </a:prstGeom>
+          <a:noFill/>
+          <a:ln/>
+        </p:spPr>
+        <p:txBody>
+          <a:bodyPr wrap="square" lIns="0" tIns="0" rIns="0" bIns="0" rtlCol="0" anchor="ctr"/>
+          <a:lstStyle/>
+          <a:p>
+            <a:pPr algn="ctr" indent="0" marL="0">
+              <a:buNone/>
+            </a:pPr>
+            <a:r>
+              <a:rPr lang="en-US" sz="1800" b="1" dirty="0">
+                <a:solidFill>
+                  <a:srgbClr val="FFFFFF"/>
+                </a:solidFill>
+                <a:latin typeface="Cambria" pitchFamily="34" charset="0"/>
+                <a:ea typeface="Cambria" pitchFamily="34" charset="-122"/>
+                <a:cs typeface="Cambria" pitchFamily="34" charset="-120"/>
+              </a:rPr>
+              <a:t>3</a:t>
+            </a:r>
+            <a:endParaRPr lang="en-US" sz="1800" dirty="0"/>
+          </a:p>
+        </p:txBody>
+      </p:sp>
+      <p:sp>
+        <p:nvSpPr>
+          <p:cNvPr id="14" name="Text 12"/>
+          <p:cNvSpPr txBox="1"/>
+          <p:nvPr/>
+        </p:nvSpPr>
+        <p:spPr>
+          <a:xfrm>
+            <a:off x="6035040" y="2103120"/>
+            <a:ext cx="2560320" cy="457200"/>
+          </a:xfrm>
+          <a:prstGeom prst="rect">
+            <a:avLst/>
+          </a:prstGeom>
+          <a:noFill/>
+          <a:ln/>
+        </p:spPr>
+        <p:txBody>
+          <a:bodyPr wrap="square" lIns="0" tIns="0" rIns="0" bIns="0" rtlCol="0" anchor="ctr"/>
+          <a:lstStyle/>
+          <a:p>
+            <a:pPr indent="0" marL="0">
+              <a:buNone/>
+            </a:pPr>
+            <a:r>
+              <a:rPr lang="en-US" sz="1500" b="1" dirty="0">
+                <a:solidFill>
+                  <a:srgbClr val="1F1F1F"/>
+                </a:solidFill>
+                <a:latin typeface="Cambria" pitchFamily="34" charset="0"/>
+                <a:ea typeface="Cambria" pitchFamily="34" charset="-122"/>
+                <a:cs typeface="Cambria" pitchFamily="34" charset="-120"/>
+              </a:rPr>
+              <a:t>Read the decision blocks</a:t>
+            </a:r>
+            <a:endParaRPr lang="en-US" sz="1500" dirty="0"/>
+          </a:p>
+        </p:txBody>
+      </p:sp>
+      <p:sp>
+        <p:nvSpPr>
+          <p:cNvPr id="15" name="Text 13"/>
+          <p:cNvSpPr txBox="1"/>
+          <p:nvPr/>
+        </p:nvSpPr>
+        <p:spPr>
+          <a:xfrm>
+            <a:off x="6035040" y="2606040"/>
+            <a:ext cx="2560320" cy="1645920"/>
+          </a:xfrm>
+          <a:prstGeom prst="rect">
+            <a:avLst/>
+          </a:prstGeom>
+          <a:noFill/>
+          <a:ln/>
+        </p:spPr>
+        <p:txBody>
+          <a:bodyPr wrap="square" lIns="0" tIns="0" rIns="0" bIns="0" rtlCol="0" anchor="t"/>
+          <a:lstStyle/>
+          <a:p>
+            <a:pPr indent="0" marL="0">
+              <a:buNone/>
+            </a:pPr>
+            <a:r>
+              <a:rPr lang="en-US" sz="1200" dirty="0">
+                <a:solidFill>
+                  <a:srgbClr val="1F1F1F"/>
+                </a:solidFill>
+                <a:latin typeface="Calibri" pitchFamily="34" charset="0"/>
+                <a:ea typeface="Calibri" pitchFamily="34" charset="-122"/>
+                <a:cs typeface="Calibri" pitchFamily="34" charset="-120"/>
+              </a:rPr>
+              <a:t>RESULTS, BREAK-EVEN VALUES, the scenario scorecard and the decision map. Change any yellow cell and every chart follows. F9 redraws the simulation.</a:t>
+            </a:r>
+            <a:endParaRPr lang="en-US" sz="1200" dirty="0"/>
+          </a:p>
+        </p:txBody>
+      </p:sp>
+    </p:spTree>
+  </p:cSld>
+  <p:clrMapOvr>
+    <a:masterClrMapping/>
+  </p:clrMapOvr>
+</p:sld>
+</file>
+
+<file path=ppt/slides/slide21.xml><?xml version="1.0" encoding="utf-8"?>
+<p:sld xmlns:a="http://schemas.openxmlformats.org/drawingml/2006/main" xmlns:r="http://schemas.openxmlformats.org/officeDocument/2006/relationships" xmlns:p="http://schemas.openxmlformats.org/presentationml/2006/main">
+  <p:cSld name="Slide 21">
+    <p:bg>
+      <p:bgPr>
+        <a:solidFill>
+          <a:srgbClr val="FFFFFF"/>
+        </a:solidFill>
+      </p:bgPr>
+    </p:bg>
+    <p:spTree>
+      <p:nvGrpSpPr>
+        <p:cNvPr id="1" name=""/>
+        <p:cNvGrpSpPr/>
+        <p:nvPr/>
+      </p:nvGrpSpPr>
+      <p:grpSpPr>
+        <a:xfrm>
+          <a:off x="0" y="0"/>
+          <a:ext cx="0" cy="0"/>
+          <a:chOff x="0" y="0"/>
+          <a:chExt cx="0" cy="0"/>
+        </a:xfrm>
+      </p:grpSpPr>
+      <p:sp>
+        <p:nvSpPr>
+          <p:cNvPr id="2" name="Text 0"/>
+          <p:cNvSpPr txBox="1"/>
+          <p:nvPr/>
+        </p:nvSpPr>
+        <p:spPr>
+          <a:xfrm>
+            <a:off x="457200" y="320040"/>
+            <a:ext cx="8229600" cy="640080"/>
+          </a:xfrm>
+          <a:prstGeom prst="rect">
+            <a:avLst/>
+          </a:prstGeom>
+          <a:noFill/>
+          <a:ln/>
+        </p:spPr>
+        <p:txBody>
+          <a:bodyPr wrap="square" lIns="0" tIns="0" rIns="0" bIns="0" rtlCol="0" anchor="t"/>
+          <a:lstStyle/>
+          <a:p>
+            <a:pPr indent="0" marL="0">
+              <a:buNone/>
+            </a:pPr>
+            <a:r>
+              <a:rPr lang="en-US" sz="2800" b="1" dirty="0">
+                <a:solidFill>
+                  <a:srgbClr val="1F1F1F"/>
+                </a:solidFill>
+                <a:latin typeface="Cambria" pitchFamily="34" charset="0"/>
+                <a:ea typeface="Cambria" pitchFamily="34" charset="-122"/>
+                <a:cs typeface="Cambria" pitchFamily="34" charset="-120"/>
+              </a:rPr>
               <a:t>Open items</a:t>
             </a:r>
             <a:endParaRPr lang="en-US" sz="2800" dirty="0"/>
@@ -10996,9 +11396,9 @@
 </p:sld>
 </file>
 
-<file path=ppt/slides/slide21.xml><?xml version="1.0" encoding="utf-8"?>
+<file path=ppt/slides/slide22.xml><?xml version="1.0" encoding="utf-8"?>
 <p:sld xmlns:a="http://schemas.openxmlformats.org/drawingml/2006/main" xmlns:r="http://schemas.openxmlformats.org/officeDocument/2006/relationships" xmlns:p="http://schemas.openxmlformats.org/presentationml/2006/main">
-  <p:cSld name="Slide 21">
+  <p:cSld name="Slide 22">
     <p:bg>
       <p:bgPr>
         <a:solidFill>

--- a/tdot-lcca/TDOT_LCCA_Review_and_v1.2.0_Update.pptx
+++ b/tdot-lcca/TDOT_LCCA_Review_and_v1.2.0_Update.pptx
@@ -3567,6 +3567,144 @@
                           <a:ea typeface="Calibri" pitchFamily="34" charset="-122"/>
                           <a:cs typeface="Calibri" pitchFamily="34" charset="-120"/>
                         </a:rPr>
+                        <a:t>Pavement section</a:t>
+                      </a:r>
+                      <a:endParaRPr lang="en-US" sz="1050" dirty="0">
+                        <a:latin typeface="Calibri" charset="0"/>
+                        <a:ea typeface="Calibri" charset="0"/>
+                        <a:cs typeface="Calibri" charset="0"/>
+                      </a:endParaRPr>
+                    </a:p>
+                  </a:txBody>
+                  <a:tcPr marL="45720" marR="45720" marT="45720" marB="45720" anchor="ctr">
+                    <a:lnL w="6350" cap="flat" cmpd="sng" algn="ctr">
+                      <a:solidFill>
+                        <a:srgbClr val="C9C9C4"/>
+                      </a:solidFill>
+                      <a:prstDash val="solid"/>
+                      <a:round/>
+                      <a:headEnd type="none" w="med" len="med"/>
+                      <a:tailEnd type="none" w="med" len="med"/>
+                    </a:lnL>
+                    <a:lnR w="6350" cap="flat" cmpd="sng" algn="ctr">
+                      <a:solidFill>
+                        <a:srgbClr val="C9C9C4"/>
+                      </a:solidFill>
+                      <a:prstDash val="solid"/>
+                      <a:round/>
+                      <a:headEnd type="none" w="med" len="med"/>
+                      <a:tailEnd type="none" w="med" len="med"/>
+                    </a:lnR>
+                    <a:lnT w="6350" cap="flat" cmpd="sng" algn="ctr">
+                      <a:solidFill>
+                        <a:srgbClr val="C9C9C4"/>
+                      </a:solidFill>
+                      <a:prstDash val="solid"/>
+                      <a:round/>
+                      <a:headEnd type="none" w="med" len="med"/>
+                      <a:tailEnd type="none" w="med" len="med"/>
+                    </a:lnT>
+                    <a:lnB w="6350" cap="flat" cmpd="sng" algn="ctr">
+                      <a:solidFill>
+                        <a:srgbClr val="C9C9C4"/>
+                      </a:solidFill>
+                      <a:prstDash val="solid"/>
+                      <a:round/>
+                      <a:headEnd type="none" w="med" len="med"/>
+                      <a:tailEnd type="none" w="med" len="med"/>
+                    </a:lnB>
+                    <a:solidFill>
+                      <a:srgbClr val="FFFFFF"/>
+                    </a:solidFill>
+                  </a:tcPr>
+                </a:tc>
+                <a:tc>
+                  <a:txBody>
+                    <a:bodyPr/>
+                    <a:lstStyle/>
+                    <a:p>
+                      <a:pPr indent="0" marL="0">
+                        <a:buNone/>
+                      </a:pPr>
+                      <a:r>
+                        <a:rPr lang="en-US" sz="1050" dirty="0">
+                          <a:solidFill>
+                            <a:srgbClr val="1F1F1F"/>
+                          </a:solidFill>
+                          <a:latin typeface="Calibri" pitchFamily="34" charset="0"/>
+                          <a:ea typeface="Calibri" pitchFamily="34" charset="-122"/>
+                          <a:cs typeface="Calibri" pitchFamily="34" charset="-120"/>
+                        </a:rPr>
+                        <a:t>New on the Summary: each layer's thickness read back from the quantities, the section as a string for the description, a cross-check against the excavation quantity, and two stacked charts (mainline, and mainline plus shoulder when entered)</a:t>
+                      </a:r>
+                      <a:endParaRPr lang="en-US" sz="1050" dirty="0">
+                        <a:latin typeface="Calibri" charset="0"/>
+                        <a:ea typeface="Calibri" charset="0"/>
+                        <a:cs typeface="Calibri" charset="0"/>
+                      </a:endParaRPr>
+                    </a:p>
+                  </a:txBody>
+                  <a:tcPr marL="45720" marR="45720" marT="45720" marB="45720" anchor="ctr">
+                    <a:lnL w="6350" cap="flat" cmpd="sng" algn="ctr">
+                      <a:solidFill>
+                        <a:srgbClr val="C9C9C4"/>
+                      </a:solidFill>
+                      <a:prstDash val="solid"/>
+                      <a:round/>
+                      <a:headEnd type="none" w="med" len="med"/>
+                      <a:tailEnd type="none" w="med" len="med"/>
+                    </a:lnL>
+                    <a:lnR w="6350" cap="flat" cmpd="sng" algn="ctr">
+                      <a:solidFill>
+                        <a:srgbClr val="C9C9C4"/>
+                      </a:solidFill>
+                      <a:prstDash val="solid"/>
+                      <a:round/>
+                      <a:headEnd type="none" w="med" len="med"/>
+                      <a:tailEnd type="none" w="med" len="med"/>
+                    </a:lnR>
+                    <a:lnT w="6350" cap="flat" cmpd="sng" algn="ctr">
+                      <a:solidFill>
+                        <a:srgbClr val="C9C9C4"/>
+                      </a:solidFill>
+                      <a:prstDash val="solid"/>
+                      <a:round/>
+                      <a:headEnd type="none" w="med" len="med"/>
+                      <a:tailEnd type="none" w="med" len="med"/>
+                    </a:lnT>
+                    <a:lnB w="6350" cap="flat" cmpd="sng" algn="ctr">
+                      <a:solidFill>
+                        <a:srgbClr val="C9C9C4"/>
+                      </a:solidFill>
+                      <a:prstDash val="solid"/>
+                      <a:round/>
+                      <a:headEnd type="none" w="med" len="med"/>
+                      <a:tailEnd type="none" w="med" len="med"/>
+                    </a:lnB>
+                    <a:solidFill>
+                      <a:srgbClr val="FFFFFF"/>
+                    </a:solidFill>
+                  </a:tcPr>
+                </a:tc>
+              </a:tr>
+              <a:tr h="274320">
+                <a:tc>
+                  <a:txBody>
+                    <a:bodyPr/>
+                    <a:lstStyle/>
+                    <a:p>
+                      <a:pPr indent="0" marL="0">
+                        <a:buNone/>
+                      </a:pPr>
+                      <a:r>
+                        <a:rPr lang="en-US" sz="1050" dirty="0">
+                          <a:solidFill>
+                            <a:srgbClr val="1F1F1F"/>
+                          </a:solidFill>
+                          <a:latin typeface="Calibri" pitchFamily="34" charset="0"/>
+                          <a:ea typeface="Calibri" pitchFamily="34" charset="-122"/>
+                          <a:cs typeface="Calibri" pitchFamily="34" charset="-120"/>
+                        </a:rPr>
                         <a:t>Look and first-run UX</a:t>
                       </a:r>
                       <a:endParaRPr lang="en-US" sz="1050" dirty="0">

--- a/tdot-lcca/TDOT_LCCA_Review_and_v1.2.0_Update.pptx
+++ b/tdot-lcca/TDOT_LCCA_Review_and_v1.2.0_Update.pptx
@@ -4049,7 +4049,7 @@
                           <a:ea typeface="Calibri" pitchFamily="34" charset="-122"/>
                           <a:cs typeface="Calibri" pitchFamily="34" charset="-120"/>
                         </a:rPr>
-                        <a:t>Personal names removed from cell notes; two dead links to files on a C: drive removed; full recalculation on open</a:t>
+                        <a:t>Personal names removed from cell notes and document properties; dead links, cached printer settings, Power Query stub and SharePoint path removed; sources on Typical Values as plain text; full recalculation on open</a:t>
                       </a:r>
                       <a:endParaRPr lang="en-US" sz="1050" dirty="0">
                         <a:latin typeface="Calibri" charset="0"/>
@@ -9608,6 +9608,144 @@
                           <a:cs typeface="Calibri" pitchFamily="34" charset="-120"/>
                         </a:rPr>
                         <a:t>CKV Runway 17-35 built on the blank template: framework, decision TEMPLATE and an independent engine agree to the dollar</a:t>
+                      </a:r>
+                      <a:endParaRPr lang="en-US" sz="1000" dirty="0">
+                        <a:latin typeface="Calibri" charset="0"/>
+                        <a:ea typeface="Calibri" charset="0"/>
+                        <a:cs typeface="Calibri" charset="0"/>
+                      </a:endParaRPr>
+                    </a:p>
+                  </a:txBody>
+                  <a:tcPr marL="45720" marR="45720" marT="45720" marB="45720" anchor="ctr">
+                    <a:lnL w="6350" cap="flat" cmpd="sng" algn="ctr">
+                      <a:solidFill>
+                        <a:srgbClr val="C9C9C4"/>
+                      </a:solidFill>
+                      <a:prstDash val="solid"/>
+                      <a:round/>
+                      <a:headEnd type="none" w="med" len="med"/>
+                      <a:tailEnd type="none" w="med" len="med"/>
+                    </a:lnL>
+                    <a:lnR w="6350" cap="flat" cmpd="sng" algn="ctr">
+                      <a:solidFill>
+                        <a:srgbClr val="C9C9C4"/>
+                      </a:solidFill>
+                      <a:prstDash val="solid"/>
+                      <a:round/>
+                      <a:headEnd type="none" w="med" len="med"/>
+                      <a:tailEnd type="none" w="med" len="med"/>
+                    </a:lnR>
+                    <a:lnT w="6350" cap="flat" cmpd="sng" algn="ctr">
+                      <a:solidFill>
+                        <a:srgbClr val="C9C9C4"/>
+                      </a:solidFill>
+                      <a:prstDash val="solid"/>
+                      <a:round/>
+                      <a:headEnd type="none" w="med" len="med"/>
+                      <a:tailEnd type="none" w="med" len="med"/>
+                    </a:lnT>
+                    <a:lnB w="6350" cap="flat" cmpd="sng" algn="ctr">
+                      <a:solidFill>
+                        <a:srgbClr val="C9C9C4"/>
+                      </a:solidFill>
+                      <a:prstDash val="solid"/>
+                      <a:round/>
+                      <a:headEnd type="none" w="med" len="med"/>
+                      <a:tailEnd type="none" w="med" len="med"/>
+                    </a:lnB>
+                    <a:solidFill>
+                      <a:srgbClr val="FFFFFF"/>
+                    </a:solidFill>
+                  </a:tcPr>
+                </a:tc>
+              </a:tr>
+              <a:tr h="274320">
+                <a:tc>
+                  <a:txBody>
+                    <a:bodyPr/>
+                    <a:lstStyle/>
+                    <a:p>
+                      <a:pPr indent="0" marL="0">
+                        <a:buNone/>
+                      </a:pPr>
+                      <a:r>
+                        <a:rPr lang="en-US" sz="1000" dirty="0">
+                          <a:solidFill>
+                            <a:srgbClr val="1F1F1F"/>
+                          </a:solidFill>
+                          <a:latin typeface="Calibri" pitchFamily="34" charset="0"/>
+                          <a:ea typeface="Calibri" pitchFamily="34" charset="-122"/>
+                          <a:cs typeface="Calibri" pitchFamily="34" charset="-120"/>
+                        </a:rPr>
+                        <a:t>Two worked examples</a:t>
+                      </a:r>
+                      <a:endParaRPr lang="en-US" sz="1000" dirty="0">
+                        <a:latin typeface="Calibri" charset="0"/>
+                        <a:ea typeface="Calibri" charset="0"/>
+                        <a:cs typeface="Calibri" charset="0"/>
+                      </a:endParaRPr>
+                    </a:p>
+                  </a:txBody>
+                  <a:tcPr marL="45720" marR="45720" marT="45720" marB="45720" anchor="ctr">
+                    <a:lnL w="6350" cap="flat" cmpd="sng" algn="ctr">
+                      <a:solidFill>
+                        <a:srgbClr val="C9C9C4"/>
+                      </a:solidFill>
+                      <a:prstDash val="solid"/>
+                      <a:round/>
+                      <a:headEnd type="none" w="med" len="med"/>
+                      <a:tailEnd type="none" w="med" len="med"/>
+                    </a:lnL>
+                    <a:lnR w="6350" cap="flat" cmpd="sng" algn="ctr">
+                      <a:solidFill>
+                        <a:srgbClr val="C9C9C4"/>
+                      </a:solidFill>
+                      <a:prstDash val="solid"/>
+                      <a:round/>
+                      <a:headEnd type="none" w="med" len="med"/>
+                      <a:tailEnd type="none" w="med" len="med"/>
+                    </a:lnR>
+                    <a:lnT w="6350" cap="flat" cmpd="sng" algn="ctr">
+                      <a:solidFill>
+                        <a:srgbClr val="C9C9C4"/>
+                      </a:solidFill>
+                      <a:prstDash val="solid"/>
+                      <a:round/>
+                      <a:headEnd type="none" w="med" len="med"/>
+                      <a:tailEnd type="none" w="med" len="med"/>
+                    </a:lnT>
+                    <a:lnB w="6350" cap="flat" cmpd="sng" algn="ctr">
+                      <a:solidFill>
+                        <a:srgbClr val="C9C9C4"/>
+                      </a:solidFill>
+                      <a:prstDash val="solid"/>
+                      <a:round/>
+                      <a:headEnd type="none" w="med" len="med"/>
+                      <a:tailEnd type="none" w="med" len="med"/>
+                    </a:lnB>
+                    <a:solidFill>
+                      <a:srgbClr val="FFFFFF"/>
+                    </a:solidFill>
+                  </a:tcPr>
+                </a:tc>
+                <a:tc>
+                  <a:txBody>
+                    <a:bodyPr/>
+                    <a:lstStyle/>
+                    <a:p>
+                      <a:pPr indent="0" marL="0">
+                        <a:buNone/>
+                      </a:pPr>
+                      <a:r>
+                        <a:rPr lang="en-US" sz="1000" dirty="0">
+                          <a:solidFill>
+                            <a:srgbClr val="1F1F1F"/>
+                          </a:solidFill>
+                          <a:latin typeface="Calibri" pitchFamily="34" charset="0"/>
+                          <a:ea typeface="Calibri" pitchFamily="34" charset="-122"/>
+                          <a:cs typeface="Calibri" pitchFamily="34" charset="-120"/>
+                        </a:rPr>
+                        <a:t>GKT Runway 10-28 (three alternatives, no shoulders) and MKL Runway 2-20 (four alternatives, 25 ft shoulders): 99 independent checks pass; section read-back returns the designed sections</a:t>
                       </a:r>
                       <a:endParaRPr lang="en-US" sz="1000" dirty="0">
                         <a:latin typeface="Calibri" charset="0"/>

--- a/tdot-lcca/TDOT_LCCA_Review_and_v1.2.0_Update.pptx
+++ b/tdot-lcca/TDOT_LCCA_Review_and_v1.2.0_Update.pptx
@@ -9745,7 +9745,7 @@
                           <a:ea typeface="Calibri" pitchFamily="34" charset="-122"/>
                           <a:cs typeface="Calibri" pitchFamily="34" charset="-120"/>
                         </a:rPr>
-                        <a:t>GKT Runway 10-28 (three alternatives, no shoulders) and MKL Runway 2-20 (four alternatives, 25 ft shoulders): 99 independent checks pass; section read-back returns the designed sections</a:t>
+                        <a:t>GKT Runway 10-28 (three alternatives, no shoulders) and MKL Runway 2-20 (four alternatives, 25 ft shoulders): 104 independent checks pass; section read-back returns the designed sections</a:t>
                       </a:r>
                       <a:endParaRPr lang="en-US" sz="1000" dirty="0">
                         <a:latin typeface="Calibri" charset="0"/>

--- a/tdot-lcca/TDOT_LCCA_Review_and_v1.2.0_Update.pptx
+++ b/tdot-lcca/TDOT_LCCA_Review_and_v1.2.0_Update.pptx
@@ -3843,6 +3843,144 @@
                           <a:ea typeface="Calibri" pitchFamily="34" charset="-122"/>
                           <a:cs typeface="Calibri" pitchFamily="34" charset="-120"/>
                         </a:rPr>
+                        <a:t>Method sheet</a:t>
+                      </a:r>
+                      <a:endParaRPr lang="en-US" sz="1050" dirty="0">
+                        <a:latin typeface="Calibri" charset="0"/>
+                        <a:ea typeface="Calibri" charset="0"/>
+                        <a:cs typeface="Calibri" charset="0"/>
+                      </a:endParaRPr>
+                    </a:p>
+                  </a:txBody>
+                  <a:tcPr marL="45720" marR="45720" marT="45720" marB="45720" anchor="ctr">
+                    <a:lnL w="6350" cap="flat" cmpd="sng" algn="ctr">
+                      <a:solidFill>
+                        <a:srgbClr val="C9C9C4"/>
+                      </a:solidFill>
+                      <a:prstDash val="solid"/>
+                      <a:round/>
+                      <a:headEnd type="none" w="med" len="med"/>
+                      <a:tailEnd type="none" w="med" len="med"/>
+                    </a:lnL>
+                    <a:lnR w="6350" cap="flat" cmpd="sng" algn="ctr">
+                      <a:solidFill>
+                        <a:srgbClr val="C9C9C4"/>
+                      </a:solidFill>
+                      <a:prstDash val="solid"/>
+                      <a:round/>
+                      <a:headEnd type="none" w="med" len="med"/>
+                      <a:tailEnd type="none" w="med" len="med"/>
+                    </a:lnR>
+                    <a:lnT w="6350" cap="flat" cmpd="sng" algn="ctr">
+                      <a:solidFill>
+                        <a:srgbClr val="C9C9C4"/>
+                      </a:solidFill>
+                      <a:prstDash val="solid"/>
+                      <a:round/>
+                      <a:headEnd type="none" w="med" len="med"/>
+                      <a:tailEnd type="none" w="med" len="med"/>
+                    </a:lnT>
+                    <a:lnB w="6350" cap="flat" cmpd="sng" algn="ctr">
+                      <a:solidFill>
+                        <a:srgbClr val="C9C9C4"/>
+                      </a:solidFill>
+                      <a:prstDash val="solid"/>
+                      <a:round/>
+                      <a:headEnd type="none" w="med" len="med"/>
+                      <a:tailEnd type="none" w="med" len="med"/>
+                    </a:lnB>
+                    <a:solidFill>
+                      <a:srgbClr val="FFFFFF"/>
+                    </a:solidFill>
+                  </a:tcPr>
+                </a:tc>
+                <a:tc>
+                  <a:txBody>
+                    <a:bodyPr/>
+                    <a:lstStyle/>
+                    <a:p>
+                      <a:pPr indent="0" marL="0">
+                        <a:buNone/>
+                      </a:pPr>
+                      <a:r>
+                        <a:rPr lang="en-US" sz="1050" dirty="0">
+                          <a:solidFill>
+                            <a:srgbClr val="1F1F1F"/>
+                          </a:solidFill>
+                          <a:latin typeface="Calibri" pitchFamily="34" charset="0"/>
+                          <a:ea typeface="Calibri" pitchFamily="34" charset="-122"/>
+                          <a:cs typeface="Calibri" pitchFamily="34" charset="-120"/>
+                        </a:rPr>
+                        <a:t>New reference sheet: every calculation once, with the formula, the rule in plain English and its source; a live block reading the current rate, period and capital recovery factor; and the assumptions a reviewer will ask about</a:t>
+                      </a:r>
+                      <a:endParaRPr lang="en-US" sz="1050" dirty="0">
+                        <a:latin typeface="Calibri" charset="0"/>
+                        <a:ea typeface="Calibri" charset="0"/>
+                        <a:cs typeface="Calibri" charset="0"/>
+                      </a:endParaRPr>
+                    </a:p>
+                  </a:txBody>
+                  <a:tcPr marL="45720" marR="45720" marT="45720" marB="45720" anchor="ctr">
+                    <a:lnL w="6350" cap="flat" cmpd="sng" algn="ctr">
+                      <a:solidFill>
+                        <a:srgbClr val="C9C9C4"/>
+                      </a:solidFill>
+                      <a:prstDash val="solid"/>
+                      <a:round/>
+                      <a:headEnd type="none" w="med" len="med"/>
+                      <a:tailEnd type="none" w="med" len="med"/>
+                    </a:lnL>
+                    <a:lnR w="6350" cap="flat" cmpd="sng" algn="ctr">
+                      <a:solidFill>
+                        <a:srgbClr val="C9C9C4"/>
+                      </a:solidFill>
+                      <a:prstDash val="solid"/>
+                      <a:round/>
+                      <a:headEnd type="none" w="med" len="med"/>
+                      <a:tailEnd type="none" w="med" len="med"/>
+                    </a:lnR>
+                    <a:lnT w="6350" cap="flat" cmpd="sng" algn="ctr">
+                      <a:solidFill>
+                        <a:srgbClr val="C9C9C4"/>
+                      </a:solidFill>
+                      <a:prstDash val="solid"/>
+                      <a:round/>
+                      <a:headEnd type="none" w="med" len="med"/>
+                      <a:tailEnd type="none" w="med" len="med"/>
+                    </a:lnT>
+                    <a:lnB w="6350" cap="flat" cmpd="sng" algn="ctr">
+                      <a:solidFill>
+                        <a:srgbClr val="C9C9C4"/>
+                      </a:solidFill>
+                      <a:prstDash val="solid"/>
+                      <a:round/>
+                      <a:headEnd type="none" w="med" len="med"/>
+                      <a:tailEnd type="none" w="med" len="med"/>
+                    </a:lnB>
+                    <a:solidFill>
+                      <a:srgbClr val="FFFFFF"/>
+                    </a:solidFill>
+                  </a:tcPr>
+                </a:tc>
+              </a:tr>
+              <a:tr h="274320">
+                <a:tc>
+                  <a:txBody>
+                    <a:bodyPr/>
+                    <a:lstStyle/>
+                    <a:p>
+                      <a:pPr indent="0" marL="0">
+                        <a:buNone/>
+                      </a:pPr>
+                      <a:r>
+                        <a:rPr lang="en-US" sz="1050" dirty="0">
+                          <a:solidFill>
+                            <a:srgbClr val="1F1F1F"/>
+                          </a:solidFill>
+                          <a:latin typeface="Calibri" pitchFamily="34" charset="0"/>
+                          <a:ea typeface="Calibri" pitchFamily="34" charset="-122"/>
+                          <a:cs typeface="Calibri" pitchFamily="34" charset="-120"/>
+                        </a:rPr>
                         <a:t>Typical Values sheet</a:t>
                       </a:r>
                       <a:endParaRPr lang="en-US" sz="1050" dirty="0">

--- a/tdot-lcca/TDOT_LCCA_Review_and_v1.2.0_Update.pptx
+++ b/tdot-lcca/TDOT_LCCA_Review_and_v1.2.0_Update.pptx
@@ -3429,6 +3429,144 @@
                           <a:ea typeface="Calibri" pitchFamily="34" charset="-122"/>
                           <a:cs typeface="Calibri" pitchFamily="34" charset="-120"/>
                         </a:rPr>
+                        <a:t>Chart axes</a:t>
+                      </a:r>
+                      <a:endParaRPr lang="en-US" sz="1050" dirty="0">
+                        <a:latin typeface="Calibri" charset="0"/>
+                        <a:ea typeface="Calibri" charset="0"/>
+                        <a:cs typeface="Calibri" charset="0"/>
+                      </a:endParaRPr>
+                    </a:p>
+                  </a:txBody>
+                  <a:tcPr marL="45720" marR="45720" marT="45720" marB="45720" anchor="ctr">
+                    <a:lnL w="6350" cap="flat" cmpd="sng" algn="ctr">
+                      <a:solidFill>
+                        <a:srgbClr val="C9C9C4"/>
+                      </a:solidFill>
+                      <a:prstDash val="solid"/>
+                      <a:round/>
+                      <a:headEnd type="none" w="med" len="med"/>
+                      <a:tailEnd type="none" w="med" len="med"/>
+                    </a:lnL>
+                    <a:lnR w="6350" cap="flat" cmpd="sng" algn="ctr">
+                      <a:solidFill>
+                        <a:srgbClr val="C9C9C4"/>
+                      </a:solidFill>
+                      <a:prstDash val="solid"/>
+                      <a:round/>
+                      <a:headEnd type="none" w="med" len="med"/>
+                      <a:tailEnd type="none" w="med" len="med"/>
+                    </a:lnR>
+                    <a:lnT w="6350" cap="flat" cmpd="sng" algn="ctr">
+                      <a:solidFill>
+                        <a:srgbClr val="C9C9C4"/>
+                      </a:solidFill>
+                      <a:prstDash val="solid"/>
+                      <a:round/>
+                      <a:headEnd type="none" w="med" len="med"/>
+                      <a:tailEnd type="none" w="med" len="med"/>
+                    </a:lnT>
+                    <a:lnB w="6350" cap="flat" cmpd="sng" algn="ctr">
+                      <a:solidFill>
+                        <a:srgbClr val="C9C9C4"/>
+                      </a:solidFill>
+                      <a:prstDash val="solid"/>
+                      <a:round/>
+                      <a:headEnd type="none" w="med" len="med"/>
+                      <a:tailEnd type="none" w="med" len="med"/>
+                    </a:lnB>
+                    <a:solidFill>
+                      <a:srgbClr val="FFFFFF"/>
+                    </a:solidFill>
+                  </a:tcPr>
+                </a:tc>
+                <a:tc>
+                  <a:txBody>
+                    <a:bodyPr/>
+                    <a:lstStyle/>
+                    <a:p>
+                      <a:pPr indent="0" marL="0">
+                        <a:buNone/>
+                      </a:pPr>
+                      <a:r>
+                        <a:rPr lang="en-US" sz="1050" dirty="0">
+                          <a:solidFill>
+                            <a:srgbClr val="1F1F1F"/>
+                          </a:solidFill>
+                          <a:latin typeface="Calibri" pitchFamily="34" charset="0"/>
+                          <a:ea typeface="Calibri" pitchFamily="34" charset="-122"/>
+                          <a:cs typeface="Calibri" pitchFamily="34" charset="-120"/>
+                        </a:rPr>
+                        <a:t>Every chart in both workbooks now names its x and y axis</a:t>
+                      </a:r>
+                      <a:endParaRPr lang="en-US" sz="1050" dirty="0">
+                        <a:latin typeface="Calibri" charset="0"/>
+                        <a:ea typeface="Calibri" charset="0"/>
+                        <a:cs typeface="Calibri" charset="0"/>
+                      </a:endParaRPr>
+                    </a:p>
+                  </a:txBody>
+                  <a:tcPr marL="45720" marR="45720" marT="45720" marB="45720" anchor="ctr">
+                    <a:lnL w="6350" cap="flat" cmpd="sng" algn="ctr">
+                      <a:solidFill>
+                        <a:srgbClr val="C9C9C4"/>
+                      </a:solidFill>
+                      <a:prstDash val="solid"/>
+                      <a:round/>
+                      <a:headEnd type="none" w="med" len="med"/>
+                      <a:tailEnd type="none" w="med" len="med"/>
+                    </a:lnL>
+                    <a:lnR w="6350" cap="flat" cmpd="sng" algn="ctr">
+                      <a:solidFill>
+                        <a:srgbClr val="C9C9C4"/>
+                      </a:solidFill>
+                      <a:prstDash val="solid"/>
+                      <a:round/>
+                      <a:headEnd type="none" w="med" len="med"/>
+                      <a:tailEnd type="none" w="med" len="med"/>
+                    </a:lnR>
+                    <a:lnT w="6350" cap="flat" cmpd="sng" algn="ctr">
+                      <a:solidFill>
+                        <a:srgbClr val="C9C9C4"/>
+                      </a:solidFill>
+                      <a:prstDash val="solid"/>
+                      <a:round/>
+                      <a:headEnd type="none" w="med" len="med"/>
+                      <a:tailEnd type="none" w="med" len="med"/>
+                    </a:lnT>
+                    <a:lnB w="6350" cap="flat" cmpd="sng" algn="ctr">
+                      <a:solidFill>
+                        <a:srgbClr val="C9C9C4"/>
+                      </a:solidFill>
+                      <a:prstDash val="solid"/>
+                      <a:round/>
+                      <a:headEnd type="none" w="med" len="med"/>
+                      <a:tailEnd type="none" w="med" len="med"/>
+                    </a:lnB>
+                    <a:solidFill>
+                      <a:srgbClr val="FFFFFF"/>
+                    </a:solidFill>
+                  </a:tcPr>
+                </a:tc>
+              </a:tr>
+              <a:tr h="274320">
+                <a:tc>
+                  <a:txBody>
+                    <a:bodyPr/>
+                    <a:lstStyle/>
+                    <a:p>
+                      <a:pPr indent="0" marL="0">
+                        <a:buNone/>
+                      </a:pPr>
+                      <a:r>
+                        <a:rPr lang="en-US" sz="1050" dirty="0">
+                          <a:solidFill>
+                            <a:srgbClr val="1F1F1F"/>
+                          </a:solidFill>
+                          <a:latin typeface="Calibri" pitchFamily="34" charset="0"/>
+                          <a:ea typeface="Calibri" pitchFamily="34" charset="-122"/>
+                          <a:cs typeface="Calibri" pitchFamily="34" charset="-120"/>
+                        </a:rPr>
                         <a:t>Summary sheet</a:t>
                       </a:r>
                       <a:endParaRPr lang="en-US" sz="1050" dirty="0">

--- a/tdot-lcca/TDOT_LCCA_Review_and_v1.2.0_Update.pptx
+++ b/tdot-lcca/TDOT_LCCA_Review_and_v1.2.0_Update.pptx
@@ -3497,7 +3497,145 @@
                           <a:ea typeface="Calibri" pitchFamily="34" charset="-122"/>
                           <a:cs typeface="Calibri" pitchFamily="34" charset="-120"/>
                         </a:rPr>
-                        <a:t>Every chart in both workbooks now names its x and y axis</a:t>
+                        <a:t>Every chart in both workbooks now names its x and y axis; legends moved beside the plots so they no longer collide with the category labels</a:t>
+                      </a:r>
+                      <a:endParaRPr lang="en-US" sz="1050" dirty="0">
+                        <a:latin typeface="Calibri" charset="0"/>
+                        <a:ea typeface="Calibri" charset="0"/>
+                        <a:cs typeface="Calibri" charset="0"/>
+                      </a:endParaRPr>
+                    </a:p>
+                  </a:txBody>
+                  <a:tcPr marL="45720" marR="45720" marT="45720" marB="45720" anchor="ctr">
+                    <a:lnL w="6350" cap="flat" cmpd="sng" algn="ctr">
+                      <a:solidFill>
+                        <a:srgbClr val="C9C9C4"/>
+                      </a:solidFill>
+                      <a:prstDash val="solid"/>
+                      <a:round/>
+                      <a:headEnd type="none" w="med" len="med"/>
+                      <a:tailEnd type="none" w="med" len="med"/>
+                    </a:lnL>
+                    <a:lnR w="6350" cap="flat" cmpd="sng" algn="ctr">
+                      <a:solidFill>
+                        <a:srgbClr val="C9C9C4"/>
+                      </a:solidFill>
+                      <a:prstDash val="solid"/>
+                      <a:round/>
+                      <a:headEnd type="none" w="med" len="med"/>
+                      <a:tailEnd type="none" w="med" len="med"/>
+                    </a:lnR>
+                    <a:lnT w="6350" cap="flat" cmpd="sng" algn="ctr">
+                      <a:solidFill>
+                        <a:srgbClr val="C9C9C4"/>
+                      </a:solidFill>
+                      <a:prstDash val="solid"/>
+                      <a:round/>
+                      <a:headEnd type="none" w="med" len="med"/>
+                      <a:tailEnd type="none" w="med" len="med"/>
+                    </a:lnT>
+                    <a:lnB w="6350" cap="flat" cmpd="sng" algn="ctr">
+                      <a:solidFill>
+                        <a:srgbClr val="C9C9C4"/>
+                      </a:solidFill>
+                      <a:prstDash val="solid"/>
+                      <a:round/>
+                      <a:headEnd type="none" w="med" len="med"/>
+                      <a:tailEnd type="none" w="med" len="med"/>
+                    </a:lnB>
+                    <a:solidFill>
+                      <a:srgbClr val="FFFFFF"/>
+                    </a:solidFill>
+                  </a:tcPr>
+                </a:tc>
+              </a:tr>
+              <a:tr h="274320">
+                <a:tc>
+                  <a:txBody>
+                    <a:bodyPr/>
+                    <a:lstStyle/>
+                    <a:p>
+                      <a:pPr indent="0" marL="0">
+                        <a:buNone/>
+                      </a:pPr>
+                      <a:r>
+                        <a:rPr lang="en-US" sz="1050" dirty="0">
+                          <a:solidFill>
+                            <a:srgbClr val="1F1F1F"/>
+                          </a:solidFill>
+                          <a:latin typeface="Calibri" pitchFamily="34" charset="0"/>
+                          <a:ea typeface="Calibri" pitchFamily="34" charset="-122"/>
+                          <a:cs typeface="Calibri" pitchFamily="34" charset="-120"/>
+                        </a:rPr>
+                        <a:t>Summary layout</a:t>
+                      </a:r>
+                      <a:endParaRPr lang="en-US" sz="1050" dirty="0">
+                        <a:latin typeface="Calibri" charset="0"/>
+                        <a:ea typeface="Calibri" charset="0"/>
+                        <a:cs typeface="Calibri" charset="0"/>
+                      </a:endParaRPr>
+                    </a:p>
+                  </a:txBody>
+                  <a:tcPr marL="45720" marR="45720" marT="45720" marB="45720" anchor="ctr">
+                    <a:lnL w="6350" cap="flat" cmpd="sng" algn="ctr">
+                      <a:solidFill>
+                        <a:srgbClr val="C9C9C4"/>
+                      </a:solidFill>
+                      <a:prstDash val="solid"/>
+                      <a:round/>
+                      <a:headEnd type="none" w="med" len="med"/>
+                      <a:tailEnd type="none" w="med" len="med"/>
+                    </a:lnL>
+                    <a:lnR w="6350" cap="flat" cmpd="sng" algn="ctr">
+                      <a:solidFill>
+                        <a:srgbClr val="C9C9C4"/>
+                      </a:solidFill>
+                      <a:prstDash val="solid"/>
+                      <a:round/>
+                      <a:headEnd type="none" w="med" len="med"/>
+                      <a:tailEnd type="none" w="med" len="med"/>
+                    </a:lnR>
+                    <a:lnT w="6350" cap="flat" cmpd="sng" algn="ctr">
+                      <a:solidFill>
+                        <a:srgbClr val="C9C9C4"/>
+                      </a:solidFill>
+                      <a:prstDash val="solid"/>
+                      <a:round/>
+                      <a:headEnd type="none" w="med" len="med"/>
+                      <a:tailEnd type="none" w="med" len="med"/>
+                    </a:lnT>
+                    <a:lnB w="6350" cap="flat" cmpd="sng" algn="ctr">
+                      <a:solidFill>
+                        <a:srgbClr val="C9C9C4"/>
+                      </a:solidFill>
+                      <a:prstDash val="solid"/>
+                      <a:round/>
+                      <a:headEnd type="none" w="med" len="med"/>
+                      <a:tailEnd type="none" w="med" len="med"/>
+                    </a:lnB>
+                    <a:solidFill>
+                      <a:srgbClr val="FFFFFF"/>
+                    </a:solidFill>
+                  </a:tcPr>
+                </a:tc>
+                <a:tc>
+                  <a:txBody>
+                    <a:bodyPr/>
+                    <a:lstStyle/>
+                    <a:p>
+                      <a:pPr indent="0" marL="0">
+                        <a:buNone/>
+                      </a:pPr>
+                      <a:r>
+                        <a:rPr lang="en-US" sz="1050" dirty="0">
+                          <a:solidFill>
+                            <a:srgbClr val="1F1F1F"/>
+                          </a:solidFill>
+                          <a:latin typeface="Calibri" pitchFamily="34" charset="0"/>
+                          <a:ea typeface="Calibri" pitchFamily="34" charset="-122"/>
+                          <a:cs typeface="Calibri" pitchFamily="34" charset="-120"/>
+                        </a:rPr>
+                        <a:t>The duplicate table in columns A to F is hidden (the form still writes it), so the results table and the charts start at the left edge</a:t>
                       </a:r>
                       <a:endParaRPr lang="en-US" sz="1050" dirty="0">
                         <a:latin typeface="Calibri" charset="0"/>

--- a/tdot-lcca/TDOT_LCCA_Review_and_v1.2.0_Update.pptx
+++ b/tdot-lcca/TDOT_LCCA_Review_and_v1.2.0_Update.pptx
@@ -3429,6 +3429,282 @@
                           <a:ea typeface="Calibri" pitchFamily="34" charset="-122"/>
                           <a:cs typeface="Calibri" pitchFamily="34" charset="-120"/>
                         </a:rPr>
+                        <a:t>Project identity and map</a:t>
+                      </a:r>
+                      <a:endParaRPr lang="en-US" sz="1050" dirty="0">
+                        <a:latin typeface="Calibri" charset="0"/>
+                        <a:ea typeface="Calibri" charset="0"/>
+                        <a:cs typeface="Calibri" charset="0"/>
+                      </a:endParaRPr>
+                    </a:p>
+                  </a:txBody>
+                  <a:tcPr marL="45720" marR="45720" marT="45720" marB="45720" anchor="ctr">
+                    <a:lnL w="6350" cap="flat" cmpd="sng" algn="ctr">
+                      <a:solidFill>
+                        <a:srgbClr val="C9C9C4"/>
+                      </a:solidFill>
+                      <a:prstDash val="solid"/>
+                      <a:round/>
+                      <a:headEnd type="none" w="med" len="med"/>
+                      <a:tailEnd type="none" w="med" len="med"/>
+                    </a:lnL>
+                    <a:lnR w="6350" cap="flat" cmpd="sng" algn="ctr">
+                      <a:solidFill>
+                        <a:srgbClr val="C9C9C4"/>
+                      </a:solidFill>
+                      <a:prstDash val="solid"/>
+                      <a:round/>
+                      <a:headEnd type="none" w="med" len="med"/>
+                      <a:tailEnd type="none" w="med" len="med"/>
+                    </a:lnR>
+                    <a:lnT w="6350" cap="flat" cmpd="sng" algn="ctr">
+                      <a:solidFill>
+                        <a:srgbClr val="C9C9C4"/>
+                      </a:solidFill>
+                      <a:prstDash val="solid"/>
+                      <a:round/>
+                      <a:headEnd type="none" w="med" len="med"/>
+                      <a:tailEnd type="none" w="med" len="med"/>
+                    </a:lnT>
+                    <a:lnB w="6350" cap="flat" cmpd="sng" algn="ctr">
+                      <a:solidFill>
+                        <a:srgbClr val="C9C9C4"/>
+                      </a:solidFill>
+                      <a:prstDash val="solid"/>
+                      <a:round/>
+                      <a:headEnd type="none" w="med" len="med"/>
+                      <a:tailEnd type="none" w="med" len="med"/>
+                    </a:lnB>
+                    <a:solidFill>
+                      <a:srgbClr val="FFFFFF"/>
+                    </a:solidFill>
+                  </a:tcPr>
+                </a:tc>
+                <a:tc>
+                  <a:txBody>
+                    <a:bodyPr/>
+                    <a:lstStyle/>
+                    <a:p>
+                      <a:pPr indent="0" marL="0">
+                        <a:buNone/>
+                      </a:pPr>
+                      <a:r>
+                        <a:rPr lang="en-US" sz="1050" dirty="0">
+                          <a:solidFill>
+                            <a:srgbClr val="1F1F1F"/>
+                          </a:solidFill>
+                          <a:latin typeface="Calibri" pitchFamily="34" charset="0"/>
+                          <a:ea typeface="Calibri" pitchFamily="34" charset="-122"/>
+                          <a:cs typeface="Calibri" pitchFamily="34" charset="-120"/>
+                        </a:rPr>
+                        <a:t>The Summary names the project and shows where it is: a locator map of Tennessee drawn from embedded coordinates, no internet, no add-in</a:t>
+                      </a:r>
+                      <a:endParaRPr lang="en-US" sz="1050" dirty="0">
+                        <a:latin typeface="Calibri" charset="0"/>
+                        <a:ea typeface="Calibri" charset="0"/>
+                        <a:cs typeface="Calibri" charset="0"/>
+                      </a:endParaRPr>
+                    </a:p>
+                  </a:txBody>
+                  <a:tcPr marL="45720" marR="45720" marT="45720" marB="45720" anchor="ctr">
+                    <a:lnL w="6350" cap="flat" cmpd="sng" algn="ctr">
+                      <a:solidFill>
+                        <a:srgbClr val="C9C9C4"/>
+                      </a:solidFill>
+                      <a:prstDash val="solid"/>
+                      <a:round/>
+                      <a:headEnd type="none" w="med" len="med"/>
+                      <a:tailEnd type="none" w="med" len="med"/>
+                    </a:lnL>
+                    <a:lnR w="6350" cap="flat" cmpd="sng" algn="ctr">
+                      <a:solidFill>
+                        <a:srgbClr val="C9C9C4"/>
+                      </a:solidFill>
+                      <a:prstDash val="solid"/>
+                      <a:round/>
+                      <a:headEnd type="none" w="med" len="med"/>
+                      <a:tailEnd type="none" w="med" len="med"/>
+                    </a:lnR>
+                    <a:lnT w="6350" cap="flat" cmpd="sng" algn="ctr">
+                      <a:solidFill>
+                        <a:srgbClr val="C9C9C4"/>
+                      </a:solidFill>
+                      <a:prstDash val="solid"/>
+                      <a:round/>
+                      <a:headEnd type="none" w="med" len="med"/>
+                      <a:tailEnd type="none" w="med" len="med"/>
+                    </a:lnT>
+                    <a:lnB w="6350" cap="flat" cmpd="sng" algn="ctr">
+                      <a:solidFill>
+                        <a:srgbClr val="C9C9C4"/>
+                      </a:solidFill>
+                      <a:prstDash val="solid"/>
+                      <a:round/>
+                      <a:headEnd type="none" w="med" len="med"/>
+                      <a:tailEnd type="none" w="med" len="med"/>
+                    </a:lnB>
+                    <a:solidFill>
+                      <a:srgbClr val="FFFFFF"/>
+                    </a:solidFill>
+                  </a:tcPr>
+                </a:tc>
+              </a:tr>
+              <a:tr h="274320">
+                <a:tc>
+                  <a:txBody>
+                    <a:bodyPr/>
+                    <a:lstStyle/>
+                    <a:p>
+                      <a:pPr indent="0" marL="0">
+                        <a:buNone/>
+                      </a:pPr>
+                      <a:r>
+                        <a:rPr lang="en-US" sz="1050" dirty="0">
+                          <a:solidFill>
+                            <a:srgbClr val="1F1F1F"/>
+                          </a:solidFill>
+                          <a:latin typeface="Calibri" pitchFamily="34" charset="0"/>
+                          <a:ea typeface="Calibri" pitchFamily="34" charset="-122"/>
+                          <a:cs typeface="Calibri" pitchFamily="34" charset="-120"/>
+                        </a:rPr>
+                        <a:t>Google Earth export</a:t>
+                      </a:r>
+                      <a:endParaRPr lang="en-US" sz="1050" dirty="0">
+                        <a:latin typeface="Calibri" charset="0"/>
+                        <a:ea typeface="Calibri" charset="0"/>
+                        <a:cs typeface="Calibri" charset="0"/>
+                      </a:endParaRPr>
+                    </a:p>
+                  </a:txBody>
+                  <a:tcPr marL="45720" marR="45720" marT="45720" marB="45720" anchor="ctr">
+                    <a:lnL w="6350" cap="flat" cmpd="sng" algn="ctr">
+                      <a:solidFill>
+                        <a:srgbClr val="C9C9C4"/>
+                      </a:solidFill>
+                      <a:prstDash val="solid"/>
+                      <a:round/>
+                      <a:headEnd type="none" w="med" len="med"/>
+                      <a:tailEnd type="none" w="med" len="med"/>
+                    </a:lnL>
+                    <a:lnR w="6350" cap="flat" cmpd="sng" algn="ctr">
+                      <a:solidFill>
+                        <a:srgbClr val="C9C9C4"/>
+                      </a:solidFill>
+                      <a:prstDash val="solid"/>
+                      <a:round/>
+                      <a:headEnd type="none" w="med" len="med"/>
+                      <a:tailEnd type="none" w="med" len="med"/>
+                    </a:lnR>
+                    <a:lnT w="6350" cap="flat" cmpd="sng" algn="ctr">
+                      <a:solidFill>
+                        <a:srgbClr val="C9C9C4"/>
+                      </a:solidFill>
+                      <a:prstDash val="solid"/>
+                      <a:round/>
+                      <a:headEnd type="none" w="med" len="med"/>
+                      <a:tailEnd type="none" w="med" len="med"/>
+                    </a:lnT>
+                    <a:lnB w="6350" cap="flat" cmpd="sng" algn="ctr">
+                      <a:solidFill>
+                        <a:srgbClr val="C9C9C4"/>
+                      </a:solidFill>
+                      <a:prstDash val="solid"/>
+                      <a:round/>
+                      <a:headEnd type="none" w="med" len="med"/>
+                      <a:tailEnd type="none" w="med" len="med"/>
+                    </a:lnB>
+                    <a:solidFill>
+                      <a:srgbClr val="FFFFFF"/>
+                    </a:solidFill>
+                  </a:tcPr>
+                </a:tc>
+                <a:tc>
+                  <a:txBody>
+                    <a:bodyPr/>
+                    <a:lstStyle/>
+                    <a:p>
+                      <a:pPr indent="0" marL="0">
+                        <a:buNone/>
+                      </a:pPr>
+                      <a:r>
+                        <a:rPr lang="en-US" sz="1050" dirty="0">
+                          <a:solidFill>
+                            <a:srgbClr val="1F1F1F"/>
+                          </a:solidFill>
+                          <a:latin typeface="Calibri" pitchFamily="34" charset="0"/>
+                          <a:ea typeface="Calibri" pitchFamily="34" charset="-122"/>
+                          <a:cs typeface="Calibri" pitchFamily="34" charset="-120"/>
+                        </a:rPr>
+                        <a:t>A VBA module writes a KML: the result in the airport bubble, a runway footprint and a present-worth bar per alternative, and every event stamped with its year for the time slider</a:t>
+                      </a:r>
+                      <a:endParaRPr lang="en-US" sz="1050" dirty="0">
+                        <a:latin typeface="Calibri" charset="0"/>
+                        <a:ea typeface="Calibri" charset="0"/>
+                        <a:cs typeface="Calibri" charset="0"/>
+                      </a:endParaRPr>
+                    </a:p>
+                  </a:txBody>
+                  <a:tcPr marL="45720" marR="45720" marT="45720" marB="45720" anchor="ctr">
+                    <a:lnL w="6350" cap="flat" cmpd="sng" algn="ctr">
+                      <a:solidFill>
+                        <a:srgbClr val="C9C9C4"/>
+                      </a:solidFill>
+                      <a:prstDash val="solid"/>
+                      <a:round/>
+                      <a:headEnd type="none" w="med" len="med"/>
+                      <a:tailEnd type="none" w="med" len="med"/>
+                    </a:lnL>
+                    <a:lnR w="6350" cap="flat" cmpd="sng" algn="ctr">
+                      <a:solidFill>
+                        <a:srgbClr val="C9C9C4"/>
+                      </a:solidFill>
+                      <a:prstDash val="solid"/>
+                      <a:round/>
+                      <a:headEnd type="none" w="med" len="med"/>
+                      <a:tailEnd type="none" w="med" len="med"/>
+                    </a:lnR>
+                    <a:lnT w="6350" cap="flat" cmpd="sng" algn="ctr">
+                      <a:solidFill>
+                        <a:srgbClr val="C9C9C4"/>
+                      </a:solidFill>
+                      <a:prstDash val="solid"/>
+                      <a:round/>
+                      <a:headEnd type="none" w="med" len="med"/>
+                      <a:tailEnd type="none" w="med" len="med"/>
+                    </a:lnT>
+                    <a:lnB w="6350" cap="flat" cmpd="sng" algn="ctr">
+                      <a:solidFill>
+                        <a:srgbClr val="C9C9C4"/>
+                      </a:solidFill>
+                      <a:prstDash val="solid"/>
+                      <a:round/>
+                      <a:headEnd type="none" w="med" len="med"/>
+                      <a:tailEnd type="none" w="med" len="med"/>
+                    </a:lnB>
+                    <a:solidFill>
+                      <a:srgbClr val="FFFFFF"/>
+                    </a:solidFill>
+                  </a:tcPr>
+                </a:tc>
+              </a:tr>
+              <a:tr h="274320">
+                <a:tc>
+                  <a:txBody>
+                    <a:bodyPr/>
+                    <a:lstStyle/>
+                    <a:p>
+                      <a:pPr indent="0" marL="0">
+                        <a:buNone/>
+                      </a:pPr>
+                      <a:r>
+                        <a:rPr lang="en-US" sz="1050" dirty="0">
+                          <a:solidFill>
+                            <a:srgbClr val="1F1F1F"/>
+                          </a:solidFill>
+                          <a:latin typeface="Calibri" pitchFamily="34" charset="0"/>
+                          <a:ea typeface="Calibri" pitchFamily="34" charset="-122"/>
+                          <a:cs typeface="Calibri" pitchFamily="34" charset="-120"/>
+                        </a:rPr>
                         <a:t>Chart axes</a:t>
                       </a:r>
                       <a:endParaRPr lang="en-US" sz="1050" dirty="0">

--- a/tdot-lcca/TDOT_LCCA_Review_and_v1.2.0_Update.pptx
+++ b/tdot-lcca/TDOT_LCCA_Review_and_v1.2.0_Update.pptx
@@ -4325,7 +4325,7 @@
                           <a:ea typeface="Calibri" pitchFamily="34" charset="-122"/>
                           <a:cs typeface="Calibri" pitchFamily="34" charset="-120"/>
                         </a:rPr>
-                        <a:t>How-to card and a live "still needed" status line on General Information; navigation row on every alternative sheet; lowest-cost row highlighted on the Summary; tab colours; General Information prints on one page</a:t>
+                        <a:t>How-to card and a live "still needed" status line on General Information; navigation row on every alternative sheet; lowest-cost row highlighted on the Summary; tab colors; General Information prints on one page</a:t>
                       </a:r>
                       <a:endParaRPr lang="en-US" sz="1050" dirty="0">
                         <a:latin typeface="Calibri" charset="0"/>

--- a/tdot-lcca/TDOT_LCCA_Review_and_v1.2.0_Update.pptx
+++ b/tdot-lcca/TDOT_LCCA_Review_and_v1.2.0_Update.pptx
@@ -4257,6 +4257,420 @@
                           <a:ea typeface="Calibri" pitchFamily="34" charset="-122"/>
                           <a:cs typeface="Calibri" pitchFamily="34" charset="-120"/>
                         </a:rPr>
+                        <a:t>Summary as a dashboard</a:t>
+                      </a:r>
+                      <a:endParaRPr lang="en-US" sz="1050" dirty="0">
+                        <a:latin typeface="Calibri" charset="0"/>
+                        <a:ea typeface="Calibri" charset="0"/>
+                        <a:cs typeface="Calibri" charset="0"/>
+                      </a:endParaRPr>
+                    </a:p>
+                  </a:txBody>
+                  <a:tcPr marL="45720" marR="45720" marT="45720" marB="45720" anchor="ctr">
+                    <a:lnL w="6350" cap="flat" cmpd="sng" algn="ctr">
+                      <a:solidFill>
+                        <a:srgbClr val="C9C9C4"/>
+                      </a:solidFill>
+                      <a:prstDash val="solid"/>
+                      <a:round/>
+                      <a:headEnd type="none" w="med" len="med"/>
+                      <a:tailEnd type="none" w="med" len="med"/>
+                    </a:lnL>
+                    <a:lnR w="6350" cap="flat" cmpd="sng" algn="ctr">
+                      <a:solidFill>
+                        <a:srgbClr val="C9C9C4"/>
+                      </a:solidFill>
+                      <a:prstDash val="solid"/>
+                      <a:round/>
+                      <a:headEnd type="none" w="med" len="med"/>
+                      <a:tailEnd type="none" w="med" len="med"/>
+                    </a:lnR>
+                    <a:lnT w="6350" cap="flat" cmpd="sng" algn="ctr">
+                      <a:solidFill>
+                        <a:srgbClr val="C9C9C4"/>
+                      </a:solidFill>
+                      <a:prstDash val="solid"/>
+                      <a:round/>
+                      <a:headEnd type="none" w="med" len="med"/>
+                      <a:tailEnd type="none" w="med" len="med"/>
+                    </a:lnT>
+                    <a:lnB w="6350" cap="flat" cmpd="sng" algn="ctr">
+                      <a:solidFill>
+                        <a:srgbClr val="C9C9C4"/>
+                      </a:solidFill>
+                      <a:prstDash val="solid"/>
+                      <a:round/>
+                      <a:headEnd type="none" w="med" len="med"/>
+                      <a:tailEnd type="none" w="med" len="med"/>
+                    </a:lnB>
+                    <a:solidFill>
+                      <a:srgbClr val="FFFFFF"/>
+                    </a:solidFill>
+                  </a:tcPr>
+                </a:tc>
+                <a:tc>
+                  <a:txBody>
+                    <a:bodyPr/>
+                    <a:lstStyle/>
+                    <a:p>
+                      <a:pPr indent="0" marL="0">
+                        <a:buNone/>
+                      </a:pPr>
+                      <a:r>
+                        <a:rPr lang="en-US" sz="1050" dirty="0">
+                          <a:solidFill>
+                            <a:srgbClr val="1F1F1F"/>
+                          </a:solidFill>
+                          <a:latin typeface="Calibri" pitchFamily="34" charset="0"/>
+                          <a:ea typeface="Calibri" pitchFamily="34" charset="-122"/>
+                          <a:cs typeface="Calibri" pitchFamily="34" charset="-120"/>
+                        </a:rPr>
+                        <a:t>Six tiles above the results: lowest present worth and the section it buys, margin to the next alternative (amber under five percent), equivalent annual cost, initial construction, unit cost per S.Y., and whether the winner holds at every rate tested. Data bars in the present-worth column; a new chart 8 puts all four unit costs against the published Tennessee range</a:t>
+                      </a:r>
+                      <a:endParaRPr lang="en-US" sz="1050" dirty="0">
+                        <a:latin typeface="Calibri" charset="0"/>
+                        <a:ea typeface="Calibri" charset="0"/>
+                        <a:cs typeface="Calibri" charset="0"/>
+                      </a:endParaRPr>
+                    </a:p>
+                  </a:txBody>
+                  <a:tcPr marL="45720" marR="45720" marT="45720" marB="45720" anchor="ctr">
+                    <a:lnL w="6350" cap="flat" cmpd="sng" algn="ctr">
+                      <a:solidFill>
+                        <a:srgbClr val="C9C9C4"/>
+                      </a:solidFill>
+                      <a:prstDash val="solid"/>
+                      <a:round/>
+                      <a:headEnd type="none" w="med" len="med"/>
+                      <a:tailEnd type="none" w="med" len="med"/>
+                    </a:lnL>
+                    <a:lnR w="6350" cap="flat" cmpd="sng" algn="ctr">
+                      <a:solidFill>
+                        <a:srgbClr val="C9C9C4"/>
+                      </a:solidFill>
+                      <a:prstDash val="solid"/>
+                      <a:round/>
+                      <a:headEnd type="none" w="med" len="med"/>
+                      <a:tailEnd type="none" w="med" len="med"/>
+                    </a:lnR>
+                    <a:lnT w="6350" cap="flat" cmpd="sng" algn="ctr">
+                      <a:solidFill>
+                        <a:srgbClr val="C9C9C4"/>
+                      </a:solidFill>
+                      <a:prstDash val="solid"/>
+                      <a:round/>
+                      <a:headEnd type="none" w="med" len="med"/>
+                      <a:tailEnd type="none" w="med" len="med"/>
+                    </a:lnT>
+                    <a:lnB w="6350" cap="flat" cmpd="sng" algn="ctr">
+                      <a:solidFill>
+                        <a:srgbClr val="C9C9C4"/>
+                      </a:solidFill>
+                      <a:prstDash val="solid"/>
+                      <a:round/>
+                      <a:headEnd type="none" w="med" len="med"/>
+                      <a:tailEnd type="none" w="med" len="med"/>
+                    </a:lnB>
+                    <a:solidFill>
+                      <a:srgbClr val="FFFFFF"/>
+                    </a:solidFill>
+                  </a:tcPr>
+                </a:tc>
+              </a:tr>
+              <a:tr h="274320">
+                <a:tc>
+                  <a:txBody>
+                    <a:bodyPr/>
+                    <a:lstStyle/>
+                    <a:p>
+                      <a:pPr indent="0" marL="0">
+                        <a:buNone/>
+                      </a:pPr>
+                      <a:r>
+                        <a:rPr lang="en-US" sz="1050" dirty="0">
+                          <a:solidFill>
+                            <a:srgbClr val="1F1F1F"/>
+                          </a:solidFill>
+                          <a:latin typeface="Calibri" pitchFamily="34" charset="0"/>
+                          <a:ea typeface="Calibri" pitchFamily="34" charset="-122"/>
+                          <a:cs typeface="Calibri" pitchFamily="34" charset="-120"/>
+                        </a:rPr>
+                        <a:t>Setup flow</a:t>
+                      </a:r>
+                      <a:endParaRPr lang="en-US" sz="1050" dirty="0">
+                        <a:latin typeface="Calibri" charset="0"/>
+                        <a:ea typeface="Calibri" charset="0"/>
+                        <a:cs typeface="Calibri" charset="0"/>
+                      </a:endParaRPr>
+                    </a:p>
+                  </a:txBody>
+                  <a:tcPr marL="45720" marR="45720" marT="45720" marB="45720" anchor="ctr">
+                    <a:lnL w="6350" cap="flat" cmpd="sng" algn="ctr">
+                      <a:solidFill>
+                        <a:srgbClr val="C9C9C4"/>
+                      </a:solidFill>
+                      <a:prstDash val="solid"/>
+                      <a:round/>
+                      <a:headEnd type="none" w="med" len="med"/>
+                      <a:tailEnd type="none" w="med" len="med"/>
+                    </a:lnL>
+                    <a:lnR w="6350" cap="flat" cmpd="sng" algn="ctr">
+                      <a:solidFill>
+                        <a:srgbClr val="C9C9C4"/>
+                      </a:solidFill>
+                      <a:prstDash val="solid"/>
+                      <a:round/>
+                      <a:headEnd type="none" w="med" len="med"/>
+                      <a:tailEnd type="none" w="med" len="med"/>
+                    </a:lnR>
+                    <a:lnT w="6350" cap="flat" cmpd="sng" algn="ctr">
+                      <a:solidFill>
+                        <a:srgbClr val="C9C9C4"/>
+                      </a:solidFill>
+                      <a:prstDash val="solid"/>
+                      <a:round/>
+                      <a:headEnd type="none" w="med" len="med"/>
+                      <a:tailEnd type="none" w="med" len="med"/>
+                    </a:lnT>
+                    <a:lnB w="6350" cap="flat" cmpd="sng" algn="ctr">
+                      <a:solidFill>
+                        <a:srgbClr val="C9C9C4"/>
+                      </a:solidFill>
+                      <a:prstDash val="solid"/>
+                      <a:round/>
+                      <a:headEnd type="none" w="med" len="med"/>
+                      <a:tailEnd type="none" w="med" len="med"/>
+                    </a:lnB>
+                    <a:solidFill>
+                      <a:srgbClr val="FFFFFF"/>
+                    </a:solidFill>
+                  </a:tcPr>
+                </a:tc>
+                <a:tc>
+                  <a:txBody>
+                    <a:bodyPr/>
+                    <a:lstStyle/>
+                    <a:p>
+                      <a:pPr indent="0" marL="0">
+                        <a:buNone/>
+                      </a:pPr>
+                      <a:r>
+                        <a:rPr lang="en-US" sz="1050" dirty="0">
+                          <a:solidFill>
+                            <a:srgbClr val="1F1F1F"/>
+                          </a:solidFill>
+                          <a:latin typeface="Calibri" pitchFamily="34" charset="0"/>
+                          <a:ea typeface="Calibri" pitchFamily="34" charset="-122"/>
+                          <a:cs typeface="Calibri" pitchFamily="34" charset="-120"/>
+                        </a:rPr>
+                        <a:t>The card on General Information lists five steps and names the sheet for each; every sheet in the sequence says which step it is; Pay_Items and Maintenance Policies gained the navigation row and their own buttons</a:t>
+                      </a:r>
+                      <a:endParaRPr lang="en-US" sz="1050" dirty="0">
+                        <a:latin typeface="Calibri" charset="0"/>
+                        <a:ea typeface="Calibri" charset="0"/>
+                        <a:cs typeface="Calibri" charset="0"/>
+                      </a:endParaRPr>
+                    </a:p>
+                  </a:txBody>
+                  <a:tcPr marL="45720" marR="45720" marT="45720" marB="45720" anchor="ctr">
+                    <a:lnL w="6350" cap="flat" cmpd="sng" algn="ctr">
+                      <a:solidFill>
+                        <a:srgbClr val="C9C9C4"/>
+                      </a:solidFill>
+                      <a:prstDash val="solid"/>
+                      <a:round/>
+                      <a:headEnd type="none" w="med" len="med"/>
+                      <a:tailEnd type="none" w="med" len="med"/>
+                    </a:lnL>
+                    <a:lnR w="6350" cap="flat" cmpd="sng" algn="ctr">
+                      <a:solidFill>
+                        <a:srgbClr val="C9C9C4"/>
+                      </a:solidFill>
+                      <a:prstDash val="solid"/>
+                      <a:round/>
+                      <a:headEnd type="none" w="med" len="med"/>
+                      <a:tailEnd type="none" w="med" len="med"/>
+                    </a:lnR>
+                    <a:lnT w="6350" cap="flat" cmpd="sng" algn="ctr">
+                      <a:solidFill>
+                        <a:srgbClr val="C9C9C4"/>
+                      </a:solidFill>
+                      <a:prstDash val="solid"/>
+                      <a:round/>
+                      <a:headEnd type="none" w="med" len="med"/>
+                      <a:tailEnd type="none" w="med" len="med"/>
+                    </a:lnT>
+                    <a:lnB w="6350" cap="flat" cmpd="sng" algn="ctr">
+                      <a:solidFill>
+                        <a:srgbClr val="C9C9C4"/>
+                      </a:solidFill>
+                      <a:prstDash val="solid"/>
+                      <a:round/>
+                      <a:headEnd type="none" w="med" len="med"/>
+                      <a:tailEnd type="none" w="med" len="med"/>
+                    </a:lnB>
+                    <a:solidFill>
+                      <a:srgbClr val="FFFFFF"/>
+                    </a:solidFill>
+                  </a:tcPr>
+                </a:tc>
+              </a:tr>
+              <a:tr h="274320">
+                <a:tc>
+                  <a:txBody>
+                    <a:bodyPr/>
+                    <a:lstStyle/>
+                    <a:p>
+                      <a:pPr indent="0" marL="0">
+                        <a:buNone/>
+                      </a:pPr>
+                      <a:r>
+                        <a:rPr lang="en-US" sz="1050" dirty="0">
+                          <a:solidFill>
+                            <a:srgbClr val="1F1F1F"/>
+                          </a:solidFill>
+                          <a:latin typeface="Calibri" pitchFamily="34" charset="0"/>
+                          <a:ea typeface="Calibri" pitchFamily="34" charset="-122"/>
+                          <a:cs typeface="Calibri" pitchFamily="34" charset="-120"/>
+                        </a:rPr>
+                        <a:t>Pay_Items and Maintenance Policies</a:t>
+                      </a:r>
+                      <a:endParaRPr lang="en-US" sz="1050" dirty="0">
+                        <a:latin typeface="Calibri" charset="0"/>
+                        <a:ea typeface="Calibri" charset="0"/>
+                        <a:cs typeface="Calibri" charset="0"/>
+                      </a:endParaRPr>
+                    </a:p>
+                  </a:txBody>
+                  <a:tcPr marL="45720" marR="45720" marT="45720" marB="45720" anchor="ctr">
+                    <a:lnL w="6350" cap="flat" cmpd="sng" algn="ctr">
+                      <a:solidFill>
+                        <a:srgbClr val="C9C9C4"/>
+                      </a:solidFill>
+                      <a:prstDash val="solid"/>
+                      <a:round/>
+                      <a:headEnd type="none" w="med" len="med"/>
+                      <a:tailEnd type="none" w="med" len="med"/>
+                    </a:lnL>
+                    <a:lnR w="6350" cap="flat" cmpd="sng" algn="ctr">
+                      <a:solidFill>
+                        <a:srgbClr val="C9C9C4"/>
+                      </a:solidFill>
+                      <a:prstDash val="solid"/>
+                      <a:round/>
+                      <a:headEnd type="none" w="med" len="med"/>
+                      <a:tailEnd type="none" w="med" len="med"/>
+                    </a:lnR>
+                    <a:lnT w="6350" cap="flat" cmpd="sng" algn="ctr">
+                      <a:solidFill>
+                        <a:srgbClr val="C9C9C4"/>
+                      </a:solidFill>
+                      <a:prstDash val="solid"/>
+                      <a:round/>
+                      <a:headEnd type="none" w="med" len="med"/>
+                      <a:tailEnd type="none" w="med" len="med"/>
+                    </a:lnT>
+                    <a:lnB w="6350" cap="flat" cmpd="sng" algn="ctr">
+                      <a:solidFill>
+                        <a:srgbClr val="C9C9C4"/>
+                      </a:solidFill>
+                      <a:prstDash val="solid"/>
+                      <a:round/>
+                      <a:headEnd type="none" w="med" len="med"/>
+                      <a:tailEnd type="none" w="med" len="med"/>
+                    </a:lnB>
+                    <a:solidFill>
+                      <a:srgbClr val="FFFFFF"/>
+                    </a:solidFill>
+                  </a:tcPr>
+                </a:tc>
+                <a:tc>
+                  <a:txBody>
+                    <a:bodyPr/>
+                    <a:lstStyle/>
+                    <a:p>
+                      <a:pPr indent="0" marL="0">
+                        <a:buNone/>
+                      </a:pPr>
+                      <a:r>
+                        <a:rPr lang="en-US" sz="1050" dirty="0">
+                          <a:solidFill>
+                            <a:srgbClr val="1F1F1F"/>
+                          </a:solidFill>
+                          <a:latin typeface="Calibri" pitchFamily="34" charset="0"/>
+                          <a:ea typeface="Calibri" pitchFamily="34" charset="-122"/>
+                          <a:cs typeface="Calibri" pitchFamily="34" charset="-120"/>
+                        </a:rPr>
+                        <a:t>The two sheets that had never been designed: frozen and repeating headers, the Unit Cost column marked as the input, part headings banded, and notes saying the division columns are empty and 29 of 56 items carry no cost. Maintenance Policies says which table drives which alternative and what Rate means</a:t>
+                      </a:r>
+                      <a:endParaRPr lang="en-US" sz="1050" dirty="0">
+                        <a:latin typeface="Calibri" charset="0"/>
+                        <a:ea typeface="Calibri" charset="0"/>
+                        <a:cs typeface="Calibri" charset="0"/>
+                      </a:endParaRPr>
+                    </a:p>
+                  </a:txBody>
+                  <a:tcPr marL="45720" marR="45720" marT="45720" marB="45720" anchor="ctr">
+                    <a:lnL w="6350" cap="flat" cmpd="sng" algn="ctr">
+                      <a:solidFill>
+                        <a:srgbClr val="C9C9C4"/>
+                      </a:solidFill>
+                      <a:prstDash val="solid"/>
+                      <a:round/>
+                      <a:headEnd type="none" w="med" len="med"/>
+                      <a:tailEnd type="none" w="med" len="med"/>
+                    </a:lnL>
+                    <a:lnR w="6350" cap="flat" cmpd="sng" algn="ctr">
+                      <a:solidFill>
+                        <a:srgbClr val="C9C9C4"/>
+                      </a:solidFill>
+                      <a:prstDash val="solid"/>
+                      <a:round/>
+                      <a:headEnd type="none" w="med" len="med"/>
+                      <a:tailEnd type="none" w="med" len="med"/>
+                    </a:lnR>
+                    <a:lnT w="6350" cap="flat" cmpd="sng" algn="ctr">
+                      <a:solidFill>
+                        <a:srgbClr val="C9C9C4"/>
+                      </a:solidFill>
+                      <a:prstDash val="solid"/>
+                      <a:round/>
+                      <a:headEnd type="none" w="med" len="med"/>
+                      <a:tailEnd type="none" w="med" len="med"/>
+                    </a:lnT>
+                    <a:lnB w="6350" cap="flat" cmpd="sng" algn="ctr">
+                      <a:solidFill>
+                        <a:srgbClr val="C9C9C4"/>
+                      </a:solidFill>
+                      <a:prstDash val="solid"/>
+                      <a:round/>
+                      <a:headEnd type="none" w="med" len="med"/>
+                      <a:tailEnd type="none" w="med" len="med"/>
+                    </a:lnB>
+                    <a:solidFill>
+                      <a:srgbClr val="FFFFFF"/>
+                    </a:solidFill>
+                  </a:tcPr>
+                </a:tc>
+              </a:tr>
+              <a:tr h="274320">
+                <a:tc>
+                  <a:txBody>
+                    <a:bodyPr/>
+                    <a:lstStyle/>
+                    <a:p>
+                      <a:pPr indent="0" marL="0">
+                        <a:buNone/>
+                      </a:pPr>
+                      <a:r>
+                        <a:rPr lang="en-US" sz="1050" dirty="0">
+                          <a:solidFill>
+                            <a:srgbClr val="1F1F1F"/>
+                          </a:solidFill>
+                          <a:latin typeface="Calibri" pitchFamily="34" charset="0"/>
+                          <a:ea typeface="Calibri" pitchFamily="34" charset="-122"/>
+                          <a:cs typeface="Calibri" pitchFamily="34" charset="-120"/>
+                        </a:rPr>
                         <a:t>Look and first-run UX</a:t>
                       </a:r>
                       <a:endParaRPr lang="en-US" sz="1050" dirty="0">

--- a/tdot-lcca/TDOT_LCCA_Review_and_v1.2.0_Update.pptx
+++ b/tdot-lcca/TDOT_LCCA_Review_and_v1.2.0_Update.pptx
@@ -4533,6 +4533,144 @@
                           <a:ea typeface="Calibri" pitchFamily="34" charset="-122"/>
                           <a:cs typeface="Calibri" pitchFamily="34" charset="-120"/>
                         </a:rPr>
+                        <a:t>TDOT mark</a:t>
+                      </a:r>
+                      <a:endParaRPr lang="en-US" sz="1050" dirty="0">
+                        <a:latin typeface="Calibri" charset="0"/>
+                        <a:ea typeface="Calibri" charset="0"/>
+                        <a:cs typeface="Calibri" charset="0"/>
+                      </a:endParaRPr>
+                    </a:p>
+                  </a:txBody>
+                  <a:tcPr marL="45720" marR="45720" marT="45720" marB="45720" anchor="ctr">
+                    <a:lnL w="6350" cap="flat" cmpd="sng" algn="ctr">
+                      <a:solidFill>
+                        <a:srgbClr val="C9C9C4"/>
+                      </a:solidFill>
+                      <a:prstDash val="solid"/>
+                      <a:round/>
+                      <a:headEnd type="none" w="med" len="med"/>
+                      <a:tailEnd type="none" w="med" len="med"/>
+                    </a:lnL>
+                    <a:lnR w="6350" cap="flat" cmpd="sng" algn="ctr">
+                      <a:solidFill>
+                        <a:srgbClr val="C9C9C4"/>
+                      </a:solidFill>
+                      <a:prstDash val="solid"/>
+                      <a:round/>
+                      <a:headEnd type="none" w="med" len="med"/>
+                      <a:tailEnd type="none" w="med" len="med"/>
+                    </a:lnR>
+                    <a:lnT w="6350" cap="flat" cmpd="sng" algn="ctr">
+                      <a:solidFill>
+                        <a:srgbClr val="C9C9C4"/>
+                      </a:solidFill>
+                      <a:prstDash val="solid"/>
+                      <a:round/>
+                      <a:headEnd type="none" w="med" len="med"/>
+                      <a:tailEnd type="none" w="med" len="med"/>
+                    </a:lnT>
+                    <a:lnB w="6350" cap="flat" cmpd="sng" algn="ctr">
+                      <a:solidFill>
+                        <a:srgbClr val="C9C9C4"/>
+                      </a:solidFill>
+                      <a:prstDash val="solid"/>
+                      <a:round/>
+                      <a:headEnd type="none" w="med" len="med"/>
+                      <a:tailEnd type="none" w="med" len="med"/>
+                    </a:lnB>
+                    <a:solidFill>
+                      <a:srgbClr val="FFFFFF"/>
+                    </a:solidFill>
+                  </a:tcPr>
+                </a:tc>
+                <a:tc>
+                  <a:txBody>
+                    <a:bodyPr/>
+                    <a:lstStyle/>
+                    <a:p>
+                      <a:pPr indent="0" marL="0">
+                        <a:buNone/>
+                      </a:pPr>
+                      <a:r>
+                        <a:rPr lang="en-US" sz="1050" dirty="0">
+                          <a:solidFill>
+                            <a:srgbClr val="1F1F1F"/>
+                          </a:solidFill>
+                          <a:latin typeface="Calibri" pitchFamily="34" charset="0"/>
+                          <a:ea typeface="Calibri" pitchFamily="34" charset="-122"/>
+                          <a:cs typeface="Calibri" pitchFamily="34" charset="-120"/>
+                        </a:rPr>
+                        <a:t>Row 1 is a 40pt band on all thirteen sheets a user can reach, with the mark at the right at the artwork aspect. The four placements that existed were each drawn 8 to 11 percent too tall. Row 1 is now a print title, so the mark prints on every page; the worked example also went from 41 printed pages to 30 once the alternative worksheets stopped printing their chart-data columns</a:t>
+                      </a:r>
+                      <a:endParaRPr lang="en-US" sz="1050" dirty="0">
+                        <a:latin typeface="Calibri" charset="0"/>
+                        <a:ea typeface="Calibri" charset="0"/>
+                        <a:cs typeface="Calibri" charset="0"/>
+                      </a:endParaRPr>
+                    </a:p>
+                  </a:txBody>
+                  <a:tcPr marL="45720" marR="45720" marT="45720" marB="45720" anchor="ctr">
+                    <a:lnL w="6350" cap="flat" cmpd="sng" algn="ctr">
+                      <a:solidFill>
+                        <a:srgbClr val="C9C9C4"/>
+                      </a:solidFill>
+                      <a:prstDash val="solid"/>
+                      <a:round/>
+                      <a:headEnd type="none" w="med" len="med"/>
+                      <a:tailEnd type="none" w="med" len="med"/>
+                    </a:lnL>
+                    <a:lnR w="6350" cap="flat" cmpd="sng" algn="ctr">
+                      <a:solidFill>
+                        <a:srgbClr val="C9C9C4"/>
+                      </a:solidFill>
+                      <a:prstDash val="solid"/>
+                      <a:round/>
+                      <a:headEnd type="none" w="med" len="med"/>
+                      <a:tailEnd type="none" w="med" len="med"/>
+                    </a:lnR>
+                    <a:lnT w="6350" cap="flat" cmpd="sng" algn="ctr">
+                      <a:solidFill>
+                        <a:srgbClr val="C9C9C4"/>
+                      </a:solidFill>
+                      <a:prstDash val="solid"/>
+                      <a:round/>
+                      <a:headEnd type="none" w="med" len="med"/>
+                      <a:tailEnd type="none" w="med" len="med"/>
+                    </a:lnT>
+                    <a:lnB w="6350" cap="flat" cmpd="sng" algn="ctr">
+                      <a:solidFill>
+                        <a:srgbClr val="C9C9C4"/>
+                      </a:solidFill>
+                      <a:prstDash val="solid"/>
+                      <a:round/>
+                      <a:headEnd type="none" w="med" len="med"/>
+                      <a:tailEnd type="none" w="med" len="med"/>
+                    </a:lnB>
+                    <a:solidFill>
+                      <a:srgbClr val="FFFFFF"/>
+                    </a:solidFill>
+                  </a:tcPr>
+                </a:tc>
+              </a:tr>
+              <a:tr h="274320">
+                <a:tc>
+                  <a:txBody>
+                    <a:bodyPr/>
+                    <a:lstStyle/>
+                    <a:p>
+                      <a:pPr indent="0" marL="0">
+                        <a:buNone/>
+                      </a:pPr>
+                      <a:r>
+                        <a:rPr lang="en-US" sz="1050" dirty="0">
+                          <a:solidFill>
+                            <a:srgbClr val="1F1F1F"/>
+                          </a:solidFill>
+                          <a:latin typeface="Calibri" pitchFamily="34" charset="0"/>
+                          <a:ea typeface="Calibri" pitchFamily="34" charset="-122"/>
+                          <a:cs typeface="Calibri" pitchFamily="34" charset="-120"/>
+                        </a:rPr>
                         <a:t>Pay_Items and Maintenance Policies</a:t>
                       </a:r>
                       <a:endParaRPr lang="en-US" sz="1050" dirty="0">

--- a/tdot-lcca/TDOT_LCCA_Review_and_v1.2.0_Update.pptx
+++ b/tdot-lcca/TDOT_LCCA_Review_and_v1.2.0_Update.pptx
@@ -4809,6 +4809,282 @@
                           <a:ea typeface="Calibri" pitchFamily="34" charset="-122"/>
                           <a:cs typeface="Calibri" pitchFamily="34" charset="-120"/>
                         </a:rPr>
+                        <a:t>Pay item picker</a:t>
+                      </a:r>
+                      <a:endParaRPr lang="en-US" sz="1050" dirty="0">
+                        <a:latin typeface="Calibri" charset="0"/>
+                        <a:ea typeface="Calibri" charset="0"/>
+                        <a:cs typeface="Calibri" charset="0"/>
+                      </a:endParaRPr>
+                    </a:p>
+                  </a:txBody>
+                  <a:tcPr marL="45720" marR="45720" marT="45720" marB="45720" anchor="ctr">
+                    <a:lnL w="6350" cap="flat" cmpd="sng" algn="ctr">
+                      <a:solidFill>
+                        <a:srgbClr val="C9C9C4"/>
+                      </a:solidFill>
+                      <a:prstDash val="solid"/>
+                      <a:round/>
+                      <a:headEnd type="none" w="med" len="med"/>
+                      <a:tailEnd type="none" w="med" len="med"/>
+                    </a:lnL>
+                    <a:lnR w="6350" cap="flat" cmpd="sng" algn="ctr">
+                      <a:solidFill>
+                        <a:srgbClr val="C9C9C4"/>
+                      </a:solidFill>
+                      <a:prstDash val="solid"/>
+                      <a:round/>
+                      <a:headEnd type="none" w="med" len="med"/>
+                      <a:tailEnd type="none" w="med" len="med"/>
+                    </a:lnR>
+                    <a:lnT w="6350" cap="flat" cmpd="sng" algn="ctr">
+                      <a:solidFill>
+                        <a:srgbClr val="C9C9C4"/>
+                      </a:solidFill>
+                      <a:prstDash val="solid"/>
+                      <a:round/>
+                      <a:headEnd type="none" w="med" len="med"/>
+                      <a:tailEnd type="none" w="med" len="med"/>
+                    </a:lnT>
+                    <a:lnB w="6350" cap="flat" cmpd="sng" algn="ctr">
+                      <a:solidFill>
+                        <a:srgbClr val="C9C9C4"/>
+                      </a:solidFill>
+                      <a:prstDash val="solid"/>
+                      <a:round/>
+                      <a:headEnd type="none" w="med" len="med"/>
+                      <a:tailEnd type="none" w="med" len="med"/>
+                    </a:lnB>
+                    <a:solidFill>
+                      <a:srgbClr val="FFFFFF"/>
+                    </a:solidFill>
+                  </a:tcPr>
+                </a:tc>
+                <a:tc>
+                  <a:txBody>
+                    <a:bodyPr/>
+                    <a:lstStyle/>
+                    <a:p>
+                      <a:pPr indent="0" marL="0">
+                        <a:buNone/>
+                      </a:pPr>
+                      <a:r>
+                        <a:rPr lang="en-US" sz="1050" dirty="0">
+                          <a:solidFill>
+                            <a:srgbClr val="1F1F1F"/>
+                          </a:solidFill>
+                          <a:latin typeface="Calibri" pitchFamily="34" charset="0"/>
+                          <a:ea typeface="Calibri" pitchFamily="34" charset="-122"/>
+                          <a:cs typeface="Calibri" pitchFamily="34" charset="-120"/>
+                        </a:rPr>
+                        <a:t>The drop-down split its width evenly between the item number and the description, so most descriptions read as fragments. All 105 combo boxes now carry an explicit 9 inch list width and the picker column is wider, so the number and the whole description both read</a:t>
+                      </a:r>
+                      <a:endParaRPr lang="en-US" sz="1050" dirty="0">
+                        <a:latin typeface="Calibri" charset="0"/>
+                        <a:ea typeface="Calibri" charset="0"/>
+                        <a:cs typeface="Calibri" charset="0"/>
+                      </a:endParaRPr>
+                    </a:p>
+                  </a:txBody>
+                  <a:tcPr marL="45720" marR="45720" marT="45720" marB="45720" anchor="ctr">
+                    <a:lnL w="6350" cap="flat" cmpd="sng" algn="ctr">
+                      <a:solidFill>
+                        <a:srgbClr val="C9C9C4"/>
+                      </a:solidFill>
+                      <a:prstDash val="solid"/>
+                      <a:round/>
+                      <a:headEnd type="none" w="med" len="med"/>
+                      <a:tailEnd type="none" w="med" len="med"/>
+                    </a:lnL>
+                    <a:lnR w="6350" cap="flat" cmpd="sng" algn="ctr">
+                      <a:solidFill>
+                        <a:srgbClr val="C9C9C4"/>
+                      </a:solidFill>
+                      <a:prstDash val="solid"/>
+                      <a:round/>
+                      <a:headEnd type="none" w="med" len="med"/>
+                      <a:tailEnd type="none" w="med" len="med"/>
+                    </a:lnR>
+                    <a:lnT w="6350" cap="flat" cmpd="sng" algn="ctr">
+                      <a:solidFill>
+                        <a:srgbClr val="C9C9C4"/>
+                      </a:solidFill>
+                      <a:prstDash val="solid"/>
+                      <a:round/>
+                      <a:headEnd type="none" w="med" len="med"/>
+                      <a:tailEnd type="none" w="med" len="med"/>
+                    </a:lnT>
+                    <a:lnB w="6350" cap="flat" cmpd="sng" algn="ctr">
+                      <a:solidFill>
+                        <a:srgbClr val="C9C9C4"/>
+                      </a:solidFill>
+                      <a:prstDash val="solid"/>
+                      <a:round/>
+                      <a:headEnd type="none" w="med" len="med"/>
+                      <a:tailEnd type="none" w="med" len="med"/>
+                    </a:lnB>
+                    <a:solidFill>
+                      <a:srgbClr val="FFFFFF"/>
+                    </a:solidFill>
+                  </a:tcPr>
+                </a:tc>
+              </a:tr>
+              <a:tr h="274320">
+                <a:tc>
+                  <a:txBody>
+                    <a:bodyPr/>
+                    <a:lstStyle/>
+                    <a:p>
+                      <a:pPr indent="0" marL="0">
+                        <a:buNone/>
+                      </a:pPr>
+                      <a:r>
+                        <a:rPr lang="en-US" sz="1050" dirty="0">
+                          <a:solidFill>
+                            <a:srgbClr val="1F1F1F"/>
+                          </a:solidFill>
+                          <a:latin typeface="Calibri" pitchFamily="34" charset="0"/>
+                          <a:ea typeface="Calibri" pitchFamily="34" charset="-122"/>
+                          <a:cs typeface="Calibri" pitchFamily="34" charset="-120"/>
+                        </a:rPr>
+                        <a:t>Priced by division</a:t>
+                      </a:r>
+                      <a:endParaRPr lang="en-US" sz="1050" dirty="0">
+                        <a:latin typeface="Calibri" charset="0"/>
+                        <a:ea typeface="Calibri" charset="0"/>
+                        <a:cs typeface="Calibri" charset="0"/>
+                      </a:endParaRPr>
+                    </a:p>
+                  </a:txBody>
+                  <a:tcPr marL="45720" marR="45720" marT="45720" marB="45720" anchor="ctr">
+                    <a:lnL w="6350" cap="flat" cmpd="sng" algn="ctr">
+                      <a:solidFill>
+                        <a:srgbClr val="C9C9C4"/>
+                      </a:solidFill>
+                      <a:prstDash val="solid"/>
+                      <a:round/>
+                      <a:headEnd type="none" w="med" len="med"/>
+                      <a:tailEnd type="none" w="med" len="med"/>
+                    </a:lnL>
+                    <a:lnR w="6350" cap="flat" cmpd="sng" algn="ctr">
+                      <a:solidFill>
+                        <a:srgbClr val="C9C9C4"/>
+                      </a:solidFill>
+                      <a:prstDash val="solid"/>
+                      <a:round/>
+                      <a:headEnd type="none" w="med" len="med"/>
+                      <a:tailEnd type="none" w="med" len="med"/>
+                    </a:lnR>
+                    <a:lnT w="6350" cap="flat" cmpd="sng" algn="ctr">
+                      <a:solidFill>
+                        <a:srgbClr val="C9C9C4"/>
+                      </a:solidFill>
+                      <a:prstDash val="solid"/>
+                      <a:round/>
+                      <a:headEnd type="none" w="med" len="med"/>
+                      <a:tailEnd type="none" w="med" len="med"/>
+                    </a:lnT>
+                    <a:lnB w="6350" cap="flat" cmpd="sng" algn="ctr">
+                      <a:solidFill>
+                        <a:srgbClr val="C9C9C4"/>
+                      </a:solidFill>
+                      <a:prstDash val="solid"/>
+                      <a:round/>
+                      <a:headEnd type="none" w="med" len="med"/>
+                      <a:tailEnd type="none" w="med" len="med"/>
+                    </a:lnB>
+                    <a:solidFill>
+                      <a:srgbClr val="FFFFFF"/>
+                    </a:solidFill>
+                  </a:tcPr>
+                </a:tc>
+                <a:tc>
+                  <a:txBody>
+                    <a:bodyPr/>
+                    <a:lstStyle/>
+                    <a:p>
+                      <a:pPr indent="0" marL="0">
+                        <a:buNone/>
+                      </a:pPr>
+                      <a:r>
+                        <a:rPr lang="en-US" sz="1050" dirty="0">
+                          <a:solidFill>
+                            <a:srgbClr val="1F1F1F"/>
+                          </a:solidFill>
+                          <a:latin typeface="Calibri" pitchFamily="34" charset="0"/>
+                          <a:ea typeface="Calibri" pitchFamily="34" charset="-122"/>
+                          <a:cs typeface="Calibri" pitchFamily="34" charset="-120"/>
+                        </a:rPr>
+                        <a:t>The Middle, West and East columns on Pay_Items had never been read. Every alternative worksheet now picks one in C11, defaulting to Regular, and prices from it; a blank regional cell falls back to the statewide unit cost, so the columns can be filled item by item</a:t>
+                      </a:r>
+                      <a:endParaRPr lang="en-US" sz="1050" dirty="0">
+                        <a:latin typeface="Calibri" charset="0"/>
+                        <a:ea typeface="Calibri" charset="0"/>
+                        <a:cs typeface="Calibri" charset="0"/>
+                      </a:endParaRPr>
+                    </a:p>
+                  </a:txBody>
+                  <a:tcPr marL="45720" marR="45720" marT="45720" marB="45720" anchor="ctr">
+                    <a:lnL w="6350" cap="flat" cmpd="sng" algn="ctr">
+                      <a:solidFill>
+                        <a:srgbClr val="C9C9C4"/>
+                      </a:solidFill>
+                      <a:prstDash val="solid"/>
+                      <a:round/>
+                      <a:headEnd type="none" w="med" len="med"/>
+                      <a:tailEnd type="none" w="med" len="med"/>
+                    </a:lnL>
+                    <a:lnR w="6350" cap="flat" cmpd="sng" algn="ctr">
+                      <a:solidFill>
+                        <a:srgbClr val="C9C9C4"/>
+                      </a:solidFill>
+                      <a:prstDash val="solid"/>
+                      <a:round/>
+                      <a:headEnd type="none" w="med" len="med"/>
+                      <a:tailEnd type="none" w="med" len="med"/>
+                    </a:lnR>
+                    <a:lnT w="6350" cap="flat" cmpd="sng" algn="ctr">
+                      <a:solidFill>
+                        <a:srgbClr val="C9C9C4"/>
+                      </a:solidFill>
+                      <a:prstDash val="solid"/>
+                      <a:round/>
+                      <a:headEnd type="none" w="med" len="med"/>
+                      <a:tailEnd type="none" w="med" len="med"/>
+                    </a:lnT>
+                    <a:lnB w="6350" cap="flat" cmpd="sng" algn="ctr">
+                      <a:solidFill>
+                        <a:srgbClr val="C9C9C4"/>
+                      </a:solidFill>
+                      <a:prstDash val="solid"/>
+                      <a:round/>
+                      <a:headEnd type="none" w="med" len="med"/>
+                      <a:tailEnd type="none" w="med" len="med"/>
+                    </a:lnB>
+                    <a:solidFill>
+                      <a:srgbClr val="FFFFFF"/>
+                    </a:solidFill>
+                  </a:tcPr>
+                </a:tc>
+              </a:tr>
+              <a:tr h="274320">
+                <a:tc>
+                  <a:txBody>
+                    <a:bodyPr/>
+                    <a:lstStyle/>
+                    <a:p>
+                      <a:pPr indent="0" marL="0">
+                        <a:buNone/>
+                      </a:pPr>
+                      <a:r>
+                        <a:rPr lang="en-US" sz="1050" dirty="0">
+                          <a:solidFill>
+                            <a:srgbClr val="1F1F1F"/>
+                          </a:solidFill>
+                          <a:latin typeface="Calibri" pitchFamily="34" charset="0"/>
+                          <a:ea typeface="Calibri" pitchFamily="34" charset="-122"/>
+                          <a:cs typeface="Calibri" pitchFamily="34" charset="-120"/>
+                        </a:rPr>
                         <a:t>Look and first-run UX</a:t>
                       </a:r>
                       <a:endParaRPr lang="en-US" sz="1050" dirty="0">
@@ -12634,7 +12910,7 @@
                 <a:ea typeface="Calibri" pitchFamily="34" charset="-122"/>
                 <a:cs typeface="Calibri" pitchFamily="34" charset="-120"/>
               </a:rPr>
-              <a:t>Salvage policy: keep 25% of initial for PCC and 12.5% of one overlay for HMA, or move both to a remaining-life basis</a:t>
+              <a:t>Salvage policy: the remaining-life method is AAPTP/FAA but the two fractions are ours, and HMA's does not check out (Table 1 overlays at year 20, which leaves 6 of 16 years at year 30, or 37.5%, not 12.5%)</a:t>
             </a:r>
             <a:endParaRPr lang="en-US" sz="1150" dirty="0"/>
           </a:p>

--- a/tdot-lcca/TDOT_LCCA_Review_and_v1.2.0_Update.pptx
+++ b/tdot-lcca/TDOT_LCCA_Review_and_v1.2.0_Update.pptx
@@ -4947,6 +4947,144 @@
                           <a:ea typeface="Calibri" pitchFamily="34" charset="-122"/>
                           <a:cs typeface="Calibri" pitchFamily="34" charset="-120"/>
                         </a:rPr>
+                        <a:t>Salvage</a:t>
+                      </a:r>
+                      <a:endParaRPr lang="en-US" sz="1050" dirty="0">
+                        <a:latin typeface="Calibri" charset="0"/>
+                        <a:ea typeface="Calibri" charset="0"/>
+                        <a:cs typeface="Calibri" charset="0"/>
+                      </a:endParaRPr>
+                    </a:p>
+                  </a:txBody>
+                  <a:tcPr marL="45720" marR="45720" marT="45720" marB="45720" anchor="ctr">
+                    <a:lnL w="6350" cap="flat" cmpd="sng" algn="ctr">
+                      <a:solidFill>
+                        <a:srgbClr val="C9C9C4"/>
+                      </a:solidFill>
+                      <a:prstDash val="solid"/>
+                      <a:round/>
+                      <a:headEnd type="none" w="med" len="med"/>
+                      <a:tailEnd type="none" w="med" len="med"/>
+                    </a:lnL>
+                    <a:lnR w="6350" cap="flat" cmpd="sng" algn="ctr">
+                      <a:solidFill>
+                        <a:srgbClr val="C9C9C4"/>
+                      </a:solidFill>
+                      <a:prstDash val="solid"/>
+                      <a:round/>
+                      <a:headEnd type="none" w="med" len="med"/>
+                      <a:tailEnd type="none" w="med" len="med"/>
+                    </a:lnR>
+                    <a:lnT w="6350" cap="flat" cmpd="sng" algn="ctr">
+                      <a:solidFill>
+                        <a:srgbClr val="C9C9C4"/>
+                      </a:solidFill>
+                      <a:prstDash val="solid"/>
+                      <a:round/>
+                      <a:headEnd type="none" w="med" len="med"/>
+                      <a:tailEnd type="none" w="med" len="med"/>
+                    </a:lnT>
+                    <a:lnB w="6350" cap="flat" cmpd="sng" algn="ctr">
+                      <a:solidFill>
+                        <a:srgbClr val="C9C9C4"/>
+                      </a:solidFill>
+                      <a:prstDash val="solid"/>
+                      <a:round/>
+                      <a:headEnd type="none" w="med" len="med"/>
+                      <a:tailEnd type="none" w="med" len="med"/>
+                    </a:lnB>
+                    <a:solidFill>
+                      <a:srgbClr val="FFFFFF"/>
+                    </a:solidFill>
+                  </a:tcPr>
+                </a:tc>
+                <a:tc>
+                  <a:txBody>
+                    <a:bodyPr/>
+                    <a:lstStyle/>
+                    <a:p>
+                      <a:pPr indent="0" marL="0">
+                        <a:buNone/>
+                      </a:pPr>
+                      <a:r>
+                        <a:rPr lang="en-US" sz="1050" dirty="0">
+                          <a:solidFill>
+                            <a:srgbClr val="1F1F1F"/>
+                          </a:solidFill>
+                          <a:latin typeface="Calibri" pitchFamily="34" charset="0"/>
+                          <a:ea typeface="Calibri" pitchFamily="34" charset="-122"/>
+                          <a:cs typeface="Calibri" pitchFamily="34" charset="-120"/>
+                        </a:rPr>
+                        <a:t>The asphalt salvage fraction was a fixed 12.5 percent against a table that places the overlay at year 20, where the arithmetic is 37.5 percent; the concrete 25 percent was right at a 30-year period and no other. Both are now computed from remaining life, with the expected life shown in its own column. Murfreesboro asphalt moves from $8,809,266 to $8,572,110, concrete unchanged, margin $780,532 to $543,376</a:t>
+                      </a:r>
+                      <a:endParaRPr lang="en-US" sz="1050" dirty="0">
+                        <a:latin typeface="Calibri" charset="0"/>
+                        <a:ea typeface="Calibri" charset="0"/>
+                        <a:cs typeface="Calibri" charset="0"/>
+                      </a:endParaRPr>
+                    </a:p>
+                  </a:txBody>
+                  <a:tcPr marL="45720" marR="45720" marT="45720" marB="45720" anchor="ctr">
+                    <a:lnL w="6350" cap="flat" cmpd="sng" algn="ctr">
+                      <a:solidFill>
+                        <a:srgbClr val="C9C9C4"/>
+                      </a:solidFill>
+                      <a:prstDash val="solid"/>
+                      <a:round/>
+                      <a:headEnd type="none" w="med" len="med"/>
+                      <a:tailEnd type="none" w="med" len="med"/>
+                    </a:lnL>
+                    <a:lnR w="6350" cap="flat" cmpd="sng" algn="ctr">
+                      <a:solidFill>
+                        <a:srgbClr val="C9C9C4"/>
+                      </a:solidFill>
+                      <a:prstDash val="solid"/>
+                      <a:round/>
+                      <a:headEnd type="none" w="med" len="med"/>
+                      <a:tailEnd type="none" w="med" len="med"/>
+                    </a:lnR>
+                    <a:lnT w="6350" cap="flat" cmpd="sng" algn="ctr">
+                      <a:solidFill>
+                        <a:srgbClr val="C9C9C4"/>
+                      </a:solidFill>
+                      <a:prstDash val="solid"/>
+                      <a:round/>
+                      <a:headEnd type="none" w="med" len="med"/>
+                      <a:tailEnd type="none" w="med" len="med"/>
+                    </a:lnT>
+                    <a:lnB w="6350" cap="flat" cmpd="sng" algn="ctr">
+                      <a:solidFill>
+                        <a:srgbClr val="C9C9C4"/>
+                      </a:solidFill>
+                      <a:prstDash val="solid"/>
+                      <a:round/>
+                      <a:headEnd type="none" w="med" len="med"/>
+                      <a:tailEnd type="none" w="med" len="med"/>
+                    </a:lnB>
+                    <a:solidFill>
+                      <a:srgbClr val="FFFFFF"/>
+                    </a:solidFill>
+                  </a:tcPr>
+                </a:tc>
+              </a:tr>
+              <a:tr h="274320">
+                <a:tc>
+                  <a:txBody>
+                    <a:bodyPr/>
+                    <a:lstStyle/>
+                    <a:p>
+                      <a:pPr indent="0" marL="0">
+                        <a:buNone/>
+                      </a:pPr>
+                      <a:r>
+                        <a:rPr lang="en-US" sz="1050" dirty="0">
+                          <a:solidFill>
+                            <a:srgbClr val="1F1F1F"/>
+                          </a:solidFill>
+                          <a:latin typeface="Calibri" pitchFamily="34" charset="0"/>
+                          <a:ea typeface="Calibri" pitchFamily="34" charset="-122"/>
+                          <a:cs typeface="Calibri" pitchFamily="34" charset="-120"/>
+                        </a:rPr>
                         <a:t>Priced by division</a:t>
                       </a:r>
                       <a:endParaRPr lang="en-US" sz="1050" dirty="0">
@@ -12910,7 +13048,7 @@
                 <a:ea typeface="Calibri" pitchFamily="34" charset="-122"/>
                 <a:cs typeface="Calibri" pitchFamily="34" charset="-120"/>
               </a:rPr>
-              <a:t>Salvage policy: the remaining-life method is AAPTP/FAA but the two fractions are ours, and HMA's does not check out (Table 1 overlays at year 20, which leaves 6 of 16 years at year 30, or 37.5%, not 12.5%)</a:t>
+              <a:t>Salvage basis: the fractions are now computed from remaining life, so what is left to decide is whether concrete should keep salvaging a share of its whole initial construction while asphalt salvages a share of one overlay</a:t>
             </a:r>
             <a:endParaRPr lang="en-US" sz="1150" dirty="0"/>
           </a:p>
